--- a/docs/pptx/auc3/jx-auc3-linsubhr-ratio-hosp2.pptx
+++ b/docs/pptx/auc3/jx-auc3-linsubhr-ratio-hosp2.pptx
@@ -2271,7 +2271,7 @@
           </p:nvSpPr>
           <p:spPr>
             <a:xfrm>
-              <a:off x="817517" y="5114368"/>
+              <a:off x="817517" y="5142518"/>
               <a:ext cx="7799693" cy="0"/>
             </a:xfrm>
             <a:custGeom>
@@ -2314,7 +2314,7 @@
           </p:nvSpPr>
           <p:spPr>
             <a:xfrm>
-              <a:off x="817517" y="4244691"/>
+              <a:off x="817517" y="4313054"/>
               <a:ext cx="7799693" cy="0"/>
             </a:xfrm>
             <a:custGeom>
@@ -2357,7 +2357,7 @@
           </p:nvSpPr>
           <p:spPr>
             <a:xfrm>
-              <a:off x="817517" y="3375014"/>
+              <a:off x="817517" y="3483591"/>
               <a:ext cx="7799693" cy="0"/>
             </a:xfrm>
             <a:custGeom>
@@ -2400,7 +2400,7 @@
           </p:nvSpPr>
           <p:spPr>
             <a:xfrm>
-              <a:off x="817517" y="2505337"/>
+              <a:off x="817517" y="2654127"/>
               <a:ext cx="7799693" cy="0"/>
             </a:xfrm>
             <a:custGeom>
@@ -2443,15 +2443,15 @@
           </p:nvSpPr>
           <p:spPr>
             <a:xfrm>
-              <a:off x="1615213" y="1896563"/>
-              <a:ext cx="0" cy="3826579"/>
+              <a:off x="1615213" y="2073503"/>
+              <a:ext cx="0" cy="3649639"/>
             </a:xfrm>
             <a:custGeom>
               <a:avLst/>
               <a:pathLst>
-                <a:path w="0" h="3826579">
+                <a:path w="0" h="3649639">
                   <a:moveTo>
-                    <a:pt x="0" y="3826579"/>
+                    <a:pt x="0" y="3649639"/>
                   </a:moveTo>
                   <a:lnTo>
                     <a:pt x="0" y="0"/>
@@ -2486,15 +2486,15 @@
           </p:nvSpPr>
           <p:spPr>
             <a:xfrm>
-              <a:off x="3387871" y="1896563"/>
-              <a:ext cx="0" cy="3826579"/>
+              <a:off x="3387871" y="2073503"/>
+              <a:ext cx="0" cy="3649639"/>
             </a:xfrm>
             <a:custGeom>
               <a:avLst/>
               <a:pathLst>
-                <a:path w="0" h="3826579">
+                <a:path w="0" h="3649639">
                   <a:moveTo>
-                    <a:pt x="0" y="3826579"/>
+                    <a:pt x="0" y="3649639"/>
                   </a:moveTo>
                   <a:lnTo>
                     <a:pt x="0" y="0"/>
@@ -2529,15 +2529,15 @@
           </p:nvSpPr>
           <p:spPr>
             <a:xfrm>
-              <a:off x="5160528" y="1896563"/>
-              <a:ext cx="0" cy="3826579"/>
+              <a:off x="5160528" y="2073503"/>
+              <a:ext cx="0" cy="3649639"/>
             </a:xfrm>
             <a:custGeom>
               <a:avLst/>
               <a:pathLst>
-                <a:path w="0" h="3826579">
+                <a:path w="0" h="3649639">
                   <a:moveTo>
-                    <a:pt x="0" y="3826579"/>
+                    <a:pt x="0" y="3649639"/>
                   </a:moveTo>
                   <a:lnTo>
                     <a:pt x="0" y="0"/>
@@ -2572,15 +2572,15 @@
           </p:nvSpPr>
           <p:spPr>
             <a:xfrm>
-              <a:off x="6933186" y="1896563"/>
-              <a:ext cx="0" cy="3826579"/>
+              <a:off x="6933186" y="2073503"/>
+              <a:ext cx="0" cy="3649639"/>
             </a:xfrm>
             <a:custGeom>
               <a:avLst/>
               <a:pathLst>
-                <a:path w="0" h="3826579">
+                <a:path w="0" h="3649639">
                   <a:moveTo>
-                    <a:pt x="0" y="3826579"/>
+                    <a:pt x="0" y="3649639"/>
                   </a:moveTo>
                   <a:lnTo>
                     <a:pt x="0" y="0"/>
@@ -2615,7 +2615,7 @@
           </p:nvSpPr>
           <p:spPr>
             <a:xfrm>
-              <a:off x="817517" y="5549207"/>
+              <a:off x="817517" y="5557249"/>
               <a:ext cx="7799693" cy="0"/>
             </a:xfrm>
             <a:custGeom>
@@ -2658,7 +2658,7 @@
           </p:nvSpPr>
           <p:spPr>
             <a:xfrm>
-              <a:off x="817517" y="4679530"/>
+              <a:off x="817517" y="4727786"/>
               <a:ext cx="7799693" cy="0"/>
             </a:xfrm>
             <a:custGeom>
@@ -2701,7 +2701,7 @@
           </p:nvSpPr>
           <p:spPr>
             <a:xfrm>
-              <a:off x="817517" y="3809853"/>
+              <a:off x="817517" y="3898322"/>
               <a:ext cx="7799693" cy="0"/>
             </a:xfrm>
             <a:custGeom>
@@ -2744,7 +2744,7 @@
           </p:nvSpPr>
           <p:spPr>
             <a:xfrm>
-              <a:off x="817517" y="2940175"/>
+              <a:off x="817517" y="3068859"/>
               <a:ext cx="7799693" cy="0"/>
             </a:xfrm>
             <a:custGeom>
@@ -2787,7 +2787,7 @@
           </p:nvSpPr>
           <p:spPr>
             <a:xfrm>
-              <a:off x="817517" y="2070498"/>
+              <a:off x="817517" y="2239395"/>
               <a:ext cx="7799693" cy="0"/>
             </a:xfrm>
             <a:custGeom>
@@ -2830,15 +2830,15 @@
           </p:nvSpPr>
           <p:spPr>
             <a:xfrm>
-              <a:off x="2501542" y="1896563"/>
-              <a:ext cx="0" cy="3826579"/>
+              <a:off x="2501542" y="2073503"/>
+              <a:ext cx="0" cy="3649639"/>
             </a:xfrm>
             <a:custGeom>
               <a:avLst/>
               <a:pathLst>
-                <a:path w="0" h="3826579">
+                <a:path w="0" h="3649639">
                   <a:moveTo>
-                    <a:pt x="0" y="3826579"/>
+                    <a:pt x="0" y="3649639"/>
                   </a:moveTo>
                   <a:lnTo>
                     <a:pt x="0" y="0"/>
@@ -2873,15 +2873,15 @@
           </p:nvSpPr>
           <p:spPr>
             <a:xfrm>
-              <a:off x="4274200" y="1896563"/>
-              <a:ext cx="0" cy="3826579"/>
+              <a:off x="4274200" y="2073503"/>
+              <a:ext cx="0" cy="3649639"/>
             </a:xfrm>
             <a:custGeom>
               <a:avLst/>
               <a:pathLst>
-                <a:path w="0" h="3826579">
+                <a:path w="0" h="3649639">
                   <a:moveTo>
-                    <a:pt x="0" y="3826579"/>
+                    <a:pt x="0" y="3649639"/>
                   </a:moveTo>
                   <a:lnTo>
                     <a:pt x="0" y="0"/>
@@ -2916,15 +2916,15 @@
           </p:nvSpPr>
           <p:spPr>
             <a:xfrm>
-              <a:off x="6046857" y="1896563"/>
-              <a:ext cx="0" cy="3826579"/>
+              <a:off x="6046857" y="2073503"/>
+              <a:ext cx="0" cy="3649639"/>
             </a:xfrm>
             <a:custGeom>
               <a:avLst/>
               <a:pathLst>
-                <a:path w="0" h="3826579">
+                <a:path w="0" h="3649639">
                   <a:moveTo>
-                    <a:pt x="0" y="3826579"/>
+                    <a:pt x="0" y="3649639"/>
                   </a:moveTo>
                   <a:lnTo>
                     <a:pt x="0" y="0"/>
@@ -2959,15 +2959,15 @@
           </p:nvSpPr>
           <p:spPr>
             <a:xfrm>
-              <a:off x="7819515" y="1896563"/>
-              <a:ext cx="0" cy="3826579"/>
+              <a:off x="7819515" y="2073503"/>
+              <a:ext cx="0" cy="3649639"/>
             </a:xfrm>
             <a:custGeom>
               <a:avLst/>
               <a:pathLst>
-                <a:path w="0" h="3826579">
+                <a:path w="0" h="3649639">
                   <a:moveTo>
-                    <a:pt x="0" y="3826579"/>
+                    <a:pt x="0" y="3649639"/>
                   </a:moveTo>
                   <a:lnTo>
                     <a:pt x="0" y="0"/>
@@ -3002,567 +3002,567 @@
           </p:nvSpPr>
           <p:spPr>
             <a:xfrm>
-              <a:off x="817517" y="1896563"/>
-              <a:ext cx="7392041" cy="3562978"/>
+              <a:off x="817517" y="2073503"/>
+              <a:ext cx="7392041" cy="3398227"/>
             </a:xfrm>
             <a:custGeom>
               <a:avLst/>
               <a:pathLst>
-                <a:path w="7392041" h="3562978">
+                <a:path w="7392041" h="3398227">
                   <a:moveTo>
                     <a:pt x="715703" y="0"/>
                   </a:moveTo>
                   <a:lnTo>
-                    <a:pt x="749094" y="67903"/>
-                  </a:lnTo>
-                  <a:lnTo>
-                    <a:pt x="826337" y="218395"/>
-                  </a:lnTo>
-                  <a:lnTo>
-                    <a:pt x="903581" y="362569"/>
-                  </a:lnTo>
-                  <a:lnTo>
-                    <a:pt x="980824" y="500690"/>
-                  </a:lnTo>
-                  <a:lnTo>
-                    <a:pt x="1058068" y="633013"/>
-                  </a:lnTo>
-                  <a:lnTo>
-                    <a:pt x="1135311" y="759781"/>
-                  </a:lnTo>
-                  <a:lnTo>
-                    <a:pt x="1212555" y="881227"/>
-                  </a:lnTo>
-                  <a:lnTo>
-                    <a:pt x="1289799" y="997574"/>
-                  </a:lnTo>
-                  <a:lnTo>
-                    <a:pt x="1367042" y="1109037"/>
-                  </a:lnTo>
-                  <a:lnTo>
-                    <a:pt x="1444286" y="1215821"/>
-                  </a:lnTo>
-                  <a:lnTo>
-                    <a:pt x="1521529" y="1318122"/>
-                  </a:lnTo>
-                  <a:lnTo>
-                    <a:pt x="1598773" y="1416128"/>
-                  </a:lnTo>
-                  <a:lnTo>
-                    <a:pt x="1676016" y="1510019"/>
-                  </a:lnTo>
-                  <a:lnTo>
-                    <a:pt x="1753260" y="1599969"/>
-                  </a:lnTo>
-                  <a:lnTo>
-                    <a:pt x="1830504" y="1686143"/>
-                  </a:lnTo>
-                  <a:lnTo>
-                    <a:pt x="1907747" y="1768699"/>
-                  </a:lnTo>
-                  <a:lnTo>
-                    <a:pt x="1984991" y="1847789"/>
-                  </a:lnTo>
-                  <a:lnTo>
-                    <a:pt x="2062234" y="1923559"/>
-                  </a:lnTo>
-                  <a:lnTo>
-                    <a:pt x="2139478" y="1996148"/>
-                  </a:lnTo>
-                  <a:lnTo>
-                    <a:pt x="2216721" y="2065690"/>
-                  </a:lnTo>
-                  <a:lnTo>
-                    <a:pt x="2293965" y="2132312"/>
-                  </a:lnTo>
-                  <a:lnTo>
-                    <a:pt x="2371209" y="2196138"/>
-                  </a:lnTo>
-                  <a:lnTo>
-                    <a:pt x="2448452" y="2257284"/>
-                  </a:lnTo>
-                  <a:lnTo>
-                    <a:pt x="2525696" y="2315863"/>
-                  </a:lnTo>
-                  <a:lnTo>
-                    <a:pt x="2602939" y="2371982"/>
-                  </a:lnTo>
-                  <a:lnTo>
-                    <a:pt x="2680183" y="2425746"/>
-                  </a:lnTo>
-                  <a:lnTo>
-                    <a:pt x="2757426" y="2477253"/>
-                  </a:lnTo>
-                  <a:lnTo>
-                    <a:pt x="2834670" y="2526597"/>
-                  </a:lnTo>
-                  <a:lnTo>
-                    <a:pt x="2911914" y="2573870"/>
-                  </a:lnTo>
-                  <a:lnTo>
-                    <a:pt x="2989157" y="2619158"/>
-                  </a:lnTo>
-                  <a:lnTo>
-                    <a:pt x="3066401" y="2662545"/>
-                  </a:lnTo>
-                  <a:lnTo>
-                    <a:pt x="3143644" y="2704110"/>
-                  </a:lnTo>
-                  <a:lnTo>
-                    <a:pt x="3220888" y="2743931"/>
-                  </a:lnTo>
-                  <a:lnTo>
-                    <a:pt x="3298131" y="2782080"/>
-                  </a:lnTo>
-                  <a:lnTo>
-                    <a:pt x="3375375" y="2784464"/>
-                  </a:lnTo>
-                  <a:lnTo>
-                    <a:pt x="3452619" y="2785995"/>
-                  </a:lnTo>
-                  <a:lnTo>
-                    <a:pt x="3529862" y="2787523"/>
-                  </a:lnTo>
-                  <a:lnTo>
-                    <a:pt x="3607106" y="2789049"/>
-                  </a:lnTo>
-                  <a:lnTo>
-                    <a:pt x="3684349" y="2790572"/>
-                  </a:lnTo>
-                  <a:lnTo>
-                    <a:pt x="3761593" y="2792093"/>
-                  </a:lnTo>
-                  <a:lnTo>
-                    <a:pt x="3838836" y="2793610"/>
-                  </a:lnTo>
-                  <a:lnTo>
-                    <a:pt x="3916080" y="2795126"/>
-                  </a:lnTo>
-                  <a:lnTo>
-                    <a:pt x="3993324" y="2796638"/>
-                  </a:lnTo>
-                  <a:lnTo>
-                    <a:pt x="4070567" y="2798148"/>
-                  </a:lnTo>
-                  <a:lnTo>
-                    <a:pt x="4147811" y="2799655"/>
-                  </a:lnTo>
-                  <a:lnTo>
-                    <a:pt x="4225054" y="2801159"/>
-                  </a:lnTo>
-                  <a:lnTo>
-                    <a:pt x="4302298" y="2802661"/>
-                  </a:lnTo>
-                  <a:lnTo>
-                    <a:pt x="4379541" y="2804160"/>
-                  </a:lnTo>
-                  <a:lnTo>
-                    <a:pt x="4456785" y="2805657"/>
-                  </a:lnTo>
-                  <a:lnTo>
-                    <a:pt x="4534029" y="2807150"/>
-                  </a:lnTo>
-                  <a:lnTo>
-                    <a:pt x="4611272" y="2808642"/>
-                  </a:lnTo>
-                  <a:lnTo>
-                    <a:pt x="4688516" y="2810130"/>
-                  </a:lnTo>
-                  <a:lnTo>
-                    <a:pt x="4765759" y="2811616"/>
-                  </a:lnTo>
-                  <a:lnTo>
-                    <a:pt x="4843003" y="2813099"/>
-                  </a:lnTo>
-                  <a:lnTo>
-                    <a:pt x="4920246" y="2814580"/>
-                  </a:lnTo>
-                  <a:lnTo>
-                    <a:pt x="4997490" y="2816058"/>
-                  </a:lnTo>
-                  <a:lnTo>
-                    <a:pt x="5074734" y="2817534"/>
-                  </a:lnTo>
-                  <a:lnTo>
-                    <a:pt x="5151977" y="2819007"/>
-                  </a:lnTo>
-                  <a:lnTo>
-                    <a:pt x="5229221" y="2820477"/>
-                  </a:lnTo>
-                  <a:lnTo>
-                    <a:pt x="5306464" y="2821945"/>
-                  </a:lnTo>
-                  <a:lnTo>
-                    <a:pt x="5383708" y="2823410"/>
-                  </a:lnTo>
-                  <a:lnTo>
-                    <a:pt x="5460951" y="2824872"/>
-                  </a:lnTo>
-                  <a:lnTo>
-                    <a:pt x="5538195" y="2826332"/>
-                  </a:lnTo>
-                  <a:lnTo>
-                    <a:pt x="5615439" y="2827789"/>
-                  </a:lnTo>
-                  <a:lnTo>
-                    <a:pt x="5692682" y="2829244"/>
-                  </a:lnTo>
-                  <a:lnTo>
-                    <a:pt x="5769926" y="2830697"/>
-                  </a:lnTo>
-                  <a:lnTo>
-                    <a:pt x="5847169" y="2832146"/>
-                  </a:lnTo>
-                  <a:lnTo>
-                    <a:pt x="5924413" y="2833593"/>
-                  </a:lnTo>
-                  <a:lnTo>
-                    <a:pt x="6001656" y="2835038"/>
-                  </a:lnTo>
-                  <a:lnTo>
-                    <a:pt x="6078900" y="2836480"/>
-                  </a:lnTo>
-                  <a:lnTo>
-                    <a:pt x="6156144" y="2837919"/>
-                  </a:lnTo>
-                  <a:lnTo>
-                    <a:pt x="6233387" y="2839356"/>
-                  </a:lnTo>
-                  <a:lnTo>
-                    <a:pt x="6310631" y="2840791"/>
-                  </a:lnTo>
-                  <a:lnTo>
-                    <a:pt x="6387874" y="2842223"/>
-                  </a:lnTo>
-                  <a:lnTo>
-                    <a:pt x="6465118" y="2843652"/>
-                  </a:lnTo>
-                  <a:lnTo>
-                    <a:pt x="6542361" y="2845079"/>
-                  </a:lnTo>
-                  <a:lnTo>
-                    <a:pt x="6619605" y="2846503"/>
-                  </a:lnTo>
-                  <a:lnTo>
-                    <a:pt x="6696849" y="2847925"/>
-                  </a:lnTo>
-                  <a:lnTo>
-                    <a:pt x="6774092" y="2849344"/>
-                  </a:lnTo>
-                  <a:lnTo>
-                    <a:pt x="6851336" y="2850761"/>
-                  </a:lnTo>
-                  <a:lnTo>
-                    <a:pt x="6928579" y="2852175"/>
-                  </a:lnTo>
-                  <a:lnTo>
-                    <a:pt x="7005823" y="2853587"/>
-                  </a:lnTo>
-                  <a:lnTo>
-                    <a:pt x="7083066" y="2854996"/>
-                  </a:lnTo>
-                  <a:lnTo>
-                    <a:pt x="7160310" y="2856403"/>
-                  </a:lnTo>
-                  <a:lnTo>
-                    <a:pt x="7237554" y="2857807"/>
-                  </a:lnTo>
-                  <a:lnTo>
-                    <a:pt x="7314797" y="2859209"/>
-                  </a:lnTo>
-                  <a:lnTo>
-                    <a:pt x="7392041" y="2860609"/>
-                  </a:lnTo>
-                  <a:lnTo>
-                    <a:pt x="7392041" y="3562978"/>
-                  </a:lnTo>
-                  <a:lnTo>
-                    <a:pt x="7314797" y="3559049"/>
-                  </a:lnTo>
-                  <a:lnTo>
-                    <a:pt x="7237554" y="3554948"/>
-                  </a:lnTo>
-                  <a:lnTo>
-                    <a:pt x="7160310" y="3550666"/>
-                  </a:lnTo>
-                  <a:lnTo>
-                    <a:pt x="7083066" y="3546198"/>
-                  </a:lnTo>
-                  <a:lnTo>
-                    <a:pt x="7005823" y="3541533"/>
-                  </a:lnTo>
-                  <a:lnTo>
-                    <a:pt x="6928579" y="3536664"/>
-                  </a:lnTo>
-                  <a:lnTo>
-                    <a:pt x="6851336" y="3531582"/>
-                  </a:lnTo>
-                  <a:lnTo>
-                    <a:pt x="6774092" y="3526277"/>
-                  </a:lnTo>
-                  <a:lnTo>
-                    <a:pt x="6696849" y="3520739"/>
-                  </a:lnTo>
-                  <a:lnTo>
-                    <a:pt x="6619605" y="3514959"/>
-                  </a:lnTo>
-                  <a:lnTo>
-                    <a:pt x="6542361" y="3508926"/>
-                  </a:lnTo>
-                  <a:lnTo>
-                    <a:pt x="6465118" y="3502628"/>
-                  </a:lnTo>
-                  <a:lnTo>
-                    <a:pt x="6387874" y="3496054"/>
-                  </a:lnTo>
-                  <a:lnTo>
-                    <a:pt x="6310631" y="3489192"/>
-                  </a:lnTo>
-                  <a:lnTo>
-                    <a:pt x="6233387" y="3482030"/>
-                  </a:lnTo>
-                  <a:lnTo>
-                    <a:pt x="6156144" y="3474553"/>
-                  </a:lnTo>
-                  <a:lnTo>
-                    <a:pt x="6078900" y="3466749"/>
-                  </a:lnTo>
-                  <a:lnTo>
-                    <a:pt x="6001656" y="3458603"/>
-                  </a:lnTo>
-                  <a:lnTo>
-                    <a:pt x="5924413" y="3450100"/>
-                  </a:lnTo>
-                  <a:lnTo>
-                    <a:pt x="5847169" y="3441225"/>
-                  </a:lnTo>
-                  <a:lnTo>
-                    <a:pt x="5769926" y="3431960"/>
-                  </a:lnTo>
-                  <a:lnTo>
-                    <a:pt x="5692682" y="3422290"/>
-                  </a:lnTo>
-                  <a:lnTo>
-                    <a:pt x="5615439" y="3412195"/>
-                  </a:lnTo>
-                  <a:lnTo>
-                    <a:pt x="5538195" y="3401659"/>
-                  </a:lnTo>
-                  <a:lnTo>
-                    <a:pt x="5460951" y="3390660"/>
-                  </a:lnTo>
-                  <a:lnTo>
-                    <a:pt x="5383708" y="3379180"/>
-                  </a:lnTo>
-                  <a:lnTo>
-                    <a:pt x="5306464" y="3367197"/>
-                  </a:lnTo>
-                  <a:lnTo>
-                    <a:pt x="5229221" y="3354688"/>
-                  </a:lnTo>
-                  <a:lnTo>
-                    <a:pt x="5151977" y="3341631"/>
-                  </a:lnTo>
-                  <a:lnTo>
-                    <a:pt x="5074734" y="3328003"/>
-                  </a:lnTo>
-                  <a:lnTo>
-                    <a:pt x="4997490" y="3313777"/>
-                  </a:lnTo>
-                  <a:lnTo>
-                    <a:pt x="4920246" y="3298927"/>
-                  </a:lnTo>
-                  <a:lnTo>
-                    <a:pt x="4843003" y="3283427"/>
-                  </a:lnTo>
-                  <a:lnTo>
-                    <a:pt x="4765759" y="3267248"/>
-                  </a:lnTo>
-                  <a:lnTo>
-                    <a:pt x="4688516" y="3250359"/>
-                  </a:lnTo>
-                  <a:lnTo>
-                    <a:pt x="4611272" y="3232731"/>
-                  </a:lnTo>
-                  <a:lnTo>
-                    <a:pt x="4534029" y="3214330"/>
-                  </a:lnTo>
-                  <a:lnTo>
-                    <a:pt x="4456785" y="3195123"/>
-                  </a:lnTo>
-                  <a:lnTo>
-                    <a:pt x="4379541" y="3175074"/>
-                  </a:lnTo>
-                  <a:lnTo>
-                    <a:pt x="4302298" y="3154146"/>
-                  </a:lnTo>
-                  <a:lnTo>
-                    <a:pt x="4225054" y="3132301"/>
-                  </a:lnTo>
-                  <a:lnTo>
-                    <a:pt x="4147811" y="3109500"/>
-                  </a:lnTo>
-                  <a:lnTo>
-                    <a:pt x="4070567" y="3085699"/>
-                  </a:lnTo>
-                  <a:lnTo>
-                    <a:pt x="3993324" y="3060855"/>
-                  </a:lnTo>
-                  <a:lnTo>
-                    <a:pt x="3916080" y="3034922"/>
-                  </a:lnTo>
-                  <a:lnTo>
-                    <a:pt x="3838836" y="3007853"/>
-                  </a:lnTo>
-                  <a:lnTo>
-                    <a:pt x="3761593" y="2979598"/>
-                  </a:lnTo>
-                  <a:lnTo>
-                    <a:pt x="3684349" y="2950104"/>
-                  </a:lnTo>
-                  <a:lnTo>
-                    <a:pt x="3607106" y="2919318"/>
-                  </a:lnTo>
-                  <a:lnTo>
-                    <a:pt x="3529862" y="2887183"/>
-                  </a:lnTo>
-                  <a:lnTo>
-                    <a:pt x="3452619" y="2853640"/>
-                  </a:lnTo>
-                  <a:lnTo>
-                    <a:pt x="3375375" y="2818627"/>
-                  </a:lnTo>
-                  <a:lnTo>
-                    <a:pt x="3298131" y="2782930"/>
-                  </a:lnTo>
-                  <a:lnTo>
-                    <a:pt x="3220888" y="2781393"/>
-                  </a:lnTo>
-                  <a:lnTo>
-                    <a:pt x="3143644" y="2779854"/>
-                  </a:lnTo>
-                  <a:lnTo>
-                    <a:pt x="3066401" y="2778312"/>
-                  </a:lnTo>
-                  <a:lnTo>
-                    <a:pt x="2989157" y="2776767"/>
-                  </a:lnTo>
-                  <a:lnTo>
-                    <a:pt x="2911914" y="2775219"/>
-                  </a:lnTo>
-                  <a:lnTo>
-                    <a:pt x="2834670" y="2773669"/>
-                  </a:lnTo>
-                  <a:lnTo>
-                    <a:pt x="2757426" y="2772116"/>
-                  </a:lnTo>
-                  <a:lnTo>
-                    <a:pt x="2680183" y="2770560"/>
-                  </a:lnTo>
-                  <a:lnTo>
-                    <a:pt x="2602939" y="2769002"/>
-                  </a:lnTo>
-                  <a:lnTo>
-                    <a:pt x="2525696" y="2767441"/>
-                  </a:lnTo>
-                  <a:lnTo>
-                    <a:pt x="2448452" y="2765877"/>
-                  </a:lnTo>
-                  <a:lnTo>
-                    <a:pt x="2371209" y="2764310"/>
-                  </a:lnTo>
-                  <a:lnTo>
-                    <a:pt x="2293965" y="2762740"/>
-                  </a:lnTo>
-                  <a:lnTo>
-                    <a:pt x="2216721" y="2761168"/>
-                  </a:lnTo>
-                  <a:lnTo>
-                    <a:pt x="2139478" y="2759593"/>
-                  </a:lnTo>
-                  <a:lnTo>
-                    <a:pt x="2062234" y="2758015"/>
-                  </a:lnTo>
-                  <a:lnTo>
-                    <a:pt x="1984991" y="2756435"/>
-                  </a:lnTo>
-                  <a:lnTo>
-                    <a:pt x="1907747" y="2754851"/>
-                  </a:lnTo>
-                  <a:lnTo>
-                    <a:pt x="1830504" y="2753265"/>
-                  </a:lnTo>
-                  <a:lnTo>
-                    <a:pt x="1753260" y="2751676"/>
-                  </a:lnTo>
-                  <a:lnTo>
-                    <a:pt x="1676016" y="2750084"/>
-                  </a:lnTo>
-                  <a:lnTo>
-                    <a:pt x="1598773" y="2748489"/>
-                  </a:lnTo>
-                  <a:lnTo>
-                    <a:pt x="1521529" y="2746892"/>
-                  </a:lnTo>
-                  <a:lnTo>
-                    <a:pt x="1444286" y="2745292"/>
-                  </a:lnTo>
-                  <a:lnTo>
-                    <a:pt x="1367042" y="2743689"/>
-                  </a:lnTo>
-                  <a:lnTo>
-                    <a:pt x="1289799" y="2742083"/>
-                  </a:lnTo>
-                  <a:lnTo>
-                    <a:pt x="1212555" y="2740474"/>
-                  </a:lnTo>
-                  <a:lnTo>
-                    <a:pt x="1135311" y="2738862"/>
-                  </a:lnTo>
-                  <a:lnTo>
-                    <a:pt x="1058068" y="2737248"/>
-                  </a:lnTo>
-                  <a:lnTo>
-                    <a:pt x="980824" y="2735630"/>
-                  </a:lnTo>
-                  <a:lnTo>
-                    <a:pt x="903581" y="2734010"/>
-                  </a:lnTo>
-                  <a:lnTo>
-                    <a:pt x="826337" y="2732387"/>
-                  </a:lnTo>
-                  <a:lnTo>
-                    <a:pt x="749094" y="2730761"/>
-                  </a:lnTo>
-                  <a:lnTo>
-                    <a:pt x="671850" y="2729132"/>
-                  </a:lnTo>
-                  <a:lnTo>
-                    <a:pt x="594606" y="2727501"/>
-                  </a:lnTo>
-                  <a:lnTo>
-                    <a:pt x="517363" y="2725866"/>
-                  </a:lnTo>
-                  <a:lnTo>
-                    <a:pt x="440119" y="2724229"/>
-                  </a:lnTo>
-                  <a:lnTo>
-                    <a:pt x="362876" y="2722588"/>
-                  </a:lnTo>
-                  <a:lnTo>
-                    <a:pt x="285632" y="2720945"/>
-                  </a:lnTo>
-                  <a:lnTo>
-                    <a:pt x="208389" y="2719299"/>
-                  </a:lnTo>
-                  <a:lnTo>
-                    <a:pt x="131145" y="2717650"/>
-                  </a:lnTo>
-                  <a:lnTo>
-                    <a:pt x="53901" y="2715998"/>
-                  </a:lnTo>
-                  <a:lnTo>
-                    <a:pt x="0" y="2714843"/>
+                    <a:pt x="749094" y="64764"/>
+                  </a:lnTo>
+                  <a:lnTo>
+                    <a:pt x="826337" y="208297"/>
+                  </a:lnTo>
+                  <a:lnTo>
+                    <a:pt x="903581" y="345804"/>
+                  </a:lnTo>
+                  <a:lnTo>
+                    <a:pt x="980824" y="477539"/>
+                  </a:lnTo>
+                  <a:lnTo>
+                    <a:pt x="1058068" y="603743"/>
+                  </a:lnTo>
+                  <a:lnTo>
+                    <a:pt x="1135311" y="724649"/>
+                  </a:lnTo>
+                  <a:lnTo>
+                    <a:pt x="1212555" y="840479"/>
+                  </a:lnTo>
+                  <a:lnTo>
+                    <a:pt x="1289799" y="951447"/>
+                  </a:lnTo>
+                  <a:lnTo>
+                    <a:pt x="1367042" y="1057756"/>
+                  </a:lnTo>
+                  <a:lnTo>
+                    <a:pt x="1444286" y="1159602"/>
+                  </a:lnTo>
+                  <a:lnTo>
+                    <a:pt x="1521529" y="1257172"/>
+                  </a:lnTo>
+                  <a:lnTo>
+                    <a:pt x="1598773" y="1350647"/>
+                  </a:lnTo>
+                  <a:lnTo>
+                    <a:pt x="1676016" y="1440197"/>
+                  </a:lnTo>
+                  <a:lnTo>
+                    <a:pt x="1753260" y="1525987"/>
+                  </a:lnTo>
+                  <a:lnTo>
+                    <a:pt x="1830504" y="1608176"/>
+                  </a:lnTo>
+                  <a:lnTo>
+                    <a:pt x="1907747" y="1686915"/>
+                  </a:lnTo>
+                  <a:lnTo>
+                    <a:pt x="1984991" y="1762348"/>
+                  </a:lnTo>
+                  <a:lnTo>
+                    <a:pt x="2062234" y="1834615"/>
+                  </a:lnTo>
+                  <a:lnTo>
+                    <a:pt x="2139478" y="1903847"/>
+                  </a:lnTo>
+                  <a:lnTo>
+                    <a:pt x="2216721" y="1970173"/>
+                  </a:lnTo>
+                  <a:lnTo>
+                    <a:pt x="2293965" y="2033715"/>
+                  </a:lnTo>
+                  <a:lnTo>
+                    <a:pt x="2371209" y="2094589"/>
+                  </a:lnTo>
+                  <a:lnTo>
+                    <a:pt x="2448452" y="2152908"/>
+                  </a:lnTo>
+                  <a:lnTo>
+                    <a:pt x="2525696" y="2208778"/>
+                  </a:lnTo>
+                  <a:lnTo>
+                    <a:pt x="2602939" y="2262303"/>
+                  </a:lnTo>
+                  <a:lnTo>
+                    <a:pt x="2680183" y="2313580"/>
+                  </a:lnTo>
+                  <a:lnTo>
+                    <a:pt x="2757426" y="2362705"/>
+                  </a:lnTo>
+                  <a:lnTo>
+                    <a:pt x="2834670" y="2409768"/>
+                  </a:lnTo>
+                  <a:lnTo>
+                    <a:pt x="2911914" y="2454855"/>
+                  </a:lnTo>
+                  <a:lnTo>
+                    <a:pt x="2989157" y="2498049"/>
+                  </a:lnTo>
+                  <a:lnTo>
+                    <a:pt x="3066401" y="2539430"/>
+                  </a:lnTo>
+                  <a:lnTo>
+                    <a:pt x="3143644" y="2579073"/>
+                  </a:lnTo>
+                  <a:lnTo>
+                    <a:pt x="3220888" y="2617053"/>
+                  </a:lnTo>
+                  <a:lnTo>
+                    <a:pt x="3298131" y="2653437"/>
+                  </a:lnTo>
+                  <a:lnTo>
+                    <a:pt x="3375375" y="2655711"/>
+                  </a:lnTo>
+                  <a:lnTo>
+                    <a:pt x="3452619" y="2657171"/>
+                  </a:lnTo>
+                  <a:lnTo>
+                    <a:pt x="3529862" y="2658629"/>
+                  </a:lnTo>
+                  <a:lnTo>
+                    <a:pt x="3607106" y="2660085"/>
+                  </a:lnTo>
+                  <a:lnTo>
+                    <a:pt x="3684349" y="2661537"/>
+                  </a:lnTo>
+                  <a:lnTo>
+                    <a:pt x="3761593" y="2662987"/>
+                  </a:lnTo>
+                  <a:lnTo>
+                    <a:pt x="3838836" y="2664435"/>
+                  </a:lnTo>
+                  <a:lnTo>
+                    <a:pt x="3916080" y="2665880"/>
+                  </a:lnTo>
+                  <a:lnTo>
+                    <a:pt x="3993324" y="2667322"/>
+                  </a:lnTo>
+                  <a:lnTo>
+                    <a:pt x="4070567" y="2668762"/>
+                  </a:lnTo>
+                  <a:lnTo>
+                    <a:pt x="4147811" y="2670200"/>
+                  </a:lnTo>
+                  <a:lnTo>
+                    <a:pt x="4225054" y="2671635"/>
+                  </a:lnTo>
+                  <a:lnTo>
+                    <a:pt x="4302298" y="2673067"/>
+                  </a:lnTo>
+                  <a:lnTo>
+                    <a:pt x="4379541" y="2674497"/>
+                  </a:lnTo>
+                  <a:lnTo>
+                    <a:pt x="4456785" y="2675924"/>
+                  </a:lnTo>
+                  <a:lnTo>
+                    <a:pt x="4534029" y="2677349"/>
+                  </a:lnTo>
+                  <a:lnTo>
+                    <a:pt x="4611272" y="2678771"/>
+                  </a:lnTo>
+                  <a:lnTo>
+                    <a:pt x="4688516" y="2680191"/>
+                  </a:lnTo>
+                  <a:lnTo>
+                    <a:pt x="4765759" y="2681608"/>
+                  </a:lnTo>
+                  <a:lnTo>
+                    <a:pt x="4843003" y="2683023"/>
+                  </a:lnTo>
+                  <a:lnTo>
+                    <a:pt x="4920246" y="2684435"/>
+                  </a:lnTo>
+                  <a:lnTo>
+                    <a:pt x="4997490" y="2685845"/>
+                  </a:lnTo>
+                  <a:lnTo>
+                    <a:pt x="5074734" y="2687252"/>
+                  </a:lnTo>
+                  <a:lnTo>
+                    <a:pt x="5151977" y="2688657"/>
+                  </a:lnTo>
+                  <a:lnTo>
+                    <a:pt x="5229221" y="2690059"/>
+                  </a:lnTo>
+                  <a:lnTo>
+                    <a:pt x="5306464" y="2691459"/>
+                  </a:lnTo>
+                  <a:lnTo>
+                    <a:pt x="5383708" y="2692856"/>
+                  </a:lnTo>
+                  <a:lnTo>
+                    <a:pt x="5460951" y="2694251"/>
+                  </a:lnTo>
+                  <a:lnTo>
+                    <a:pt x="5538195" y="2695644"/>
+                  </a:lnTo>
+                  <a:lnTo>
+                    <a:pt x="5615439" y="2697034"/>
+                  </a:lnTo>
+                  <a:lnTo>
+                    <a:pt x="5692682" y="2698421"/>
+                  </a:lnTo>
+                  <a:lnTo>
+                    <a:pt x="5769926" y="2699806"/>
+                  </a:lnTo>
+                  <a:lnTo>
+                    <a:pt x="5847169" y="2701189"/>
+                  </a:lnTo>
+                  <a:lnTo>
+                    <a:pt x="5924413" y="2702569"/>
+                  </a:lnTo>
+                  <a:lnTo>
+                    <a:pt x="6001656" y="2703947"/>
+                  </a:lnTo>
+                  <a:lnTo>
+                    <a:pt x="6078900" y="2705322"/>
+                  </a:lnTo>
+                  <a:lnTo>
+                    <a:pt x="6156144" y="2706695"/>
+                  </a:lnTo>
+                  <a:lnTo>
+                    <a:pt x="6233387" y="2708065"/>
+                  </a:lnTo>
+                  <a:lnTo>
+                    <a:pt x="6310631" y="2709434"/>
+                  </a:lnTo>
+                  <a:lnTo>
+                    <a:pt x="6387874" y="2710799"/>
+                  </a:lnTo>
+                  <a:lnTo>
+                    <a:pt x="6465118" y="2712162"/>
+                  </a:lnTo>
+                  <a:lnTo>
+                    <a:pt x="6542361" y="2713523"/>
+                  </a:lnTo>
+                  <a:lnTo>
+                    <a:pt x="6619605" y="2714882"/>
+                  </a:lnTo>
+                  <a:lnTo>
+                    <a:pt x="6696849" y="2716238"/>
+                  </a:lnTo>
+                  <a:lnTo>
+                    <a:pt x="6774092" y="2717591"/>
+                  </a:lnTo>
+                  <a:lnTo>
+                    <a:pt x="6851336" y="2718943"/>
+                  </a:lnTo>
+                  <a:lnTo>
+                    <a:pt x="6928579" y="2720292"/>
+                  </a:lnTo>
+                  <a:lnTo>
+                    <a:pt x="7005823" y="2721638"/>
+                  </a:lnTo>
+                  <a:lnTo>
+                    <a:pt x="7083066" y="2722982"/>
+                  </a:lnTo>
+                  <a:lnTo>
+                    <a:pt x="7160310" y="2724324"/>
+                  </a:lnTo>
+                  <a:lnTo>
+                    <a:pt x="7237554" y="2725663"/>
+                  </a:lnTo>
+                  <a:lnTo>
+                    <a:pt x="7314797" y="2727000"/>
+                  </a:lnTo>
+                  <a:lnTo>
+                    <a:pt x="7392041" y="2728335"/>
+                  </a:lnTo>
+                  <a:lnTo>
+                    <a:pt x="7392041" y="3398227"/>
+                  </a:lnTo>
+                  <a:lnTo>
+                    <a:pt x="7314797" y="3394480"/>
+                  </a:lnTo>
+                  <a:lnTo>
+                    <a:pt x="7237554" y="3390568"/>
+                  </a:lnTo>
+                  <a:lnTo>
+                    <a:pt x="7160310" y="3386485"/>
+                  </a:lnTo>
+                  <a:lnTo>
+                    <a:pt x="7083066" y="3382223"/>
+                  </a:lnTo>
+                  <a:lnTo>
+                    <a:pt x="7005823" y="3377774"/>
+                  </a:lnTo>
+                  <a:lnTo>
+                    <a:pt x="6928579" y="3373130"/>
+                  </a:lnTo>
+                  <a:lnTo>
+                    <a:pt x="6851336" y="3368283"/>
+                  </a:lnTo>
+                  <a:lnTo>
+                    <a:pt x="6774092" y="3363223"/>
+                  </a:lnTo>
+                  <a:lnTo>
+                    <a:pt x="6696849" y="3357942"/>
+                  </a:lnTo>
+                  <a:lnTo>
+                    <a:pt x="6619605" y="3352429"/>
+                  </a:lnTo>
+                  <a:lnTo>
+                    <a:pt x="6542361" y="3346674"/>
+                  </a:lnTo>
+                  <a:lnTo>
+                    <a:pt x="6465118" y="3340668"/>
+                  </a:lnTo>
+                  <a:lnTo>
+                    <a:pt x="6387874" y="3334398"/>
+                  </a:lnTo>
+                  <a:lnTo>
+                    <a:pt x="6310631" y="3327853"/>
+                  </a:lnTo>
+                  <a:lnTo>
+                    <a:pt x="6233387" y="3321022"/>
+                  </a:lnTo>
+                  <a:lnTo>
+                    <a:pt x="6156144" y="3313891"/>
+                  </a:lnTo>
+                  <a:lnTo>
+                    <a:pt x="6078900" y="3306448"/>
+                  </a:lnTo>
+                  <a:lnTo>
+                    <a:pt x="6001656" y="3298679"/>
+                  </a:lnTo>
+                  <a:lnTo>
+                    <a:pt x="5924413" y="3290569"/>
+                  </a:lnTo>
+                  <a:lnTo>
+                    <a:pt x="5847169" y="3282104"/>
+                  </a:lnTo>
+                  <a:lnTo>
+                    <a:pt x="5769926" y="3273268"/>
+                  </a:lnTo>
+                  <a:lnTo>
+                    <a:pt x="5692682" y="3264044"/>
+                  </a:lnTo>
+                  <a:lnTo>
+                    <a:pt x="5615439" y="3254417"/>
+                  </a:lnTo>
+                  <a:lnTo>
+                    <a:pt x="5538195" y="3244367"/>
+                  </a:lnTo>
+                  <a:lnTo>
+                    <a:pt x="5460951" y="3233877"/>
+                  </a:lnTo>
+                  <a:lnTo>
+                    <a:pt x="5383708" y="3222928"/>
+                  </a:lnTo>
+                  <a:lnTo>
+                    <a:pt x="5306464" y="3211499"/>
+                  </a:lnTo>
+                  <a:lnTo>
+                    <a:pt x="5229221" y="3199568"/>
+                  </a:lnTo>
+                  <a:lnTo>
+                    <a:pt x="5151977" y="3187116"/>
+                  </a:lnTo>
+                  <a:lnTo>
+                    <a:pt x="5074734" y="3174117"/>
+                  </a:lnTo>
+                  <a:lnTo>
+                    <a:pt x="4997490" y="3160549"/>
+                  </a:lnTo>
+                  <a:lnTo>
+                    <a:pt x="4920246" y="3146386"/>
+                  </a:lnTo>
+                  <a:lnTo>
+                    <a:pt x="4843003" y="3131602"/>
+                  </a:lnTo>
+                  <a:lnTo>
+                    <a:pt x="4765759" y="3116171"/>
+                  </a:lnTo>
+                  <a:lnTo>
+                    <a:pt x="4688516" y="3100064"/>
+                  </a:lnTo>
+                  <a:lnTo>
+                    <a:pt x="4611272" y="3083250"/>
+                  </a:lnTo>
+                  <a:lnTo>
+                    <a:pt x="4534029" y="3065700"/>
+                  </a:lnTo>
+                  <a:lnTo>
+                    <a:pt x="4456785" y="3047381"/>
+                  </a:lnTo>
+                  <a:lnTo>
+                    <a:pt x="4379541" y="3028259"/>
+                  </a:lnTo>
+                  <a:lnTo>
+                    <a:pt x="4302298" y="3008300"/>
+                  </a:lnTo>
+                  <a:lnTo>
+                    <a:pt x="4225054" y="2987465"/>
+                  </a:lnTo>
+                  <a:lnTo>
+                    <a:pt x="4147811" y="2965718"/>
+                  </a:lnTo>
+                  <a:lnTo>
+                    <a:pt x="4070567" y="2943017"/>
+                  </a:lnTo>
+                  <a:lnTo>
+                    <a:pt x="3993324" y="2919322"/>
+                  </a:lnTo>
+                  <a:lnTo>
+                    <a:pt x="3916080" y="2894588"/>
+                  </a:lnTo>
+                  <a:lnTo>
+                    <a:pt x="3838836" y="2868771"/>
+                  </a:lnTo>
+                  <a:lnTo>
+                    <a:pt x="3761593" y="2841822"/>
+                  </a:lnTo>
+                  <a:lnTo>
+                    <a:pt x="3684349" y="2813692"/>
+                  </a:lnTo>
+                  <a:lnTo>
+                    <a:pt x="3607106" y="2784330"/>
+                  </a:lnTo>
+                  <a:lnTo>
+                    <a:pt x="3529862" y="2753681"/>
+                  </a:lnTo>
+                  <a:lnTo>
+                    <a:pt x="3452619" y="2721689"/>
+                  </a:lnTo>
+                  <a:lnTo>
+                    <a:pt x="3375375" y="2688295"/>
+                  </a:lnTo>
+                  <a:lnTo>
+                    <a:pt x="3298131" y="2654248"/>
+                  </a:lnTo>
+                  <a:lnTo>
+                    <a:pt x="3220888" y="2652783"/>
+                  </a:lnTo>
+                  <a:lnTo>
+                    <a:pt x="3143644" y="2651314"/>
+                  </a:lnTo>
+                  <a:lnTo>
+                    <a:pt x="3066401" y="2649844"/>
+                  </a:lnTo>
+                  <a:lnTo>
+                    <a:pt x="2989157" y="2648370"/>
+                  </a:lnTo>
+                  <a:lnTo>
+                    <a:pt x="2911914" y="2646894"/>
+                  </a:lnTo>
+                  <a:lnTo>
+                    <a:pt x="2834670" y="2645416"/>
+                  </a:lnTo>
+                  <a:lnTo>
+                    <a:pt x="2757426" y="2643935"/>
+                  </a:lnTo>
+                  <a:lnTo>
+                    <a:pt x="2680183" y="2642451"/>
+                  </a:lnTo>
+                  <a:lnTo>
+                    <a:pt x="2602939" y="2640964"/>
+                  </a:lnTo>
+                  <a:lnTo>
+                    <a:pt x="2525696" y="2639475"/>
+                  </a:lnTo>
+                  <a:lnTo>
+                    <a:pt x="2448452" y="2637984"/>
+                  </a:lnTo>
+                  <a:lnTo>
+                    <a:pt x="2371209" y="2636489"/>
+                  </a:lnTo>
+                  <a:lnTo>
+                    <a:pt x="2293965" y="2634992"/>
+                  </a:lnTo>
+                  <a:lnTo>
+                    <a:pt x="2216721" y="2633493"/>
+                  </a:lnTo>
+                  <a:lnTo>
+                    <a:pt x="2139478" y="2631991"/>
+                  </a:lnTo>
+                  <a:lnTo>
+                    <a:pt x="2062234" y="2630486"/>
+                  </a:lnTo>
+                  <a:lnTo>
+                    <a:pt x="1984991" y="2628978"/>
+                  </a:lnTo>
+                  <a:lnTo>
+                    <a:pt x="1907747" y="2627468"/>
+                  </a:lnTo>
+                  <a:lnTo>
+                    <a:pt x="1830504" y="2625955"/>
+                  </a:lnTo>
+                  <a:lnTo>
+                    <a:pt x="1753260" y="2624439"/>
+                  </a:lnTo>
+                  <a:lnTo>
+                    <a:pt x="1676016" y="2622921"/>
+                  </a:lnTo>
+                  <a:lnTo>
+                    <a:pt x="1598773" y="2621400"/>
+                  </a:lnTo>
+                  <a:lnTo>
+                    <a:pt x="1521529" y="2619877"/>
+                  </a:lnTo>
+                  <a:lnTo>
+                    <a:pt x="1444286" y="2618350"/>
+                  </a:lnTo>
+                  <a:lnTo>
+                    <a:pt x="1367042" y="2616821"/>
+                  </a:lnTo>
+                  <a:lnTo>
+                    <a:pt x="1289799" y="2615290"/>
+                  </a:lnTo>
+                  <a:lnTo>
+                    <a:pt x="1212555" y="2613755"/>
+                  </a:lnTo>
+                  <a:lnTo>
+                    <a:pt x="1135311" y="2612218"/>
+                  </a:lnTo>
+                  <a:lnTo>
+                    <a:pt x="1058068" y="2610678"/>
+                  </a:lnTo>
+                  <a:lnTo>
+                    <a:pt x="980824" y="2609136"/>
+                  </a:lnTo>
+                  <a:lnTo>
+                    <a:pt x="903581" y="2607590"/>
+                  </a:lnTo>
+                  <a:lnTo>
+                    <a:pt x="826337" y="2606042"/>
+                  </a:lnTo>
+                  <a:lnTo>
+                    <a:pt x="749094" y="2604492"/>
+                  </a:lnTo>
+                  <a:lnTo>
+                    <a:pt x="671850" y="2602938"/>
+                  </a:lnTo>
+                  <a:lnTo>
+                    <a:pt x="594606" y="2601382"/>
+                  </a:lnTo>
+                  <a:lnTo>
+                    <a:pt x="517363" y="2599823"/>
+                  </a:lnTo>
+                  <a:lnTo>
+                    <a:pt x="440119" y="2598261"/>
+                  </a:lnTo>
+                  <a:lnTo>
+                    <a:pt x="362876" y="2596697"/>
+                  </a:lnTo>
+                  <a:lnTo>
+                    <a:pt x="285632" y="2595130"/>
+                  </a:lnTo>
+                  <a:lnTo>
+                    <a:pt x="208389" y="2593560"/>
+                  </a:lnTo>
+                  <a:lnTo>
+                    <a:pt x="131145" y="2591987"/>
+                  </a:lnTo>
+                  <a:lnTo>
+                    <a:pt x="53901" y="2590411"/>
+                  </a:lnTo>
+                  <a:lnTo>
+                    <a:pt x="0" y="2589310"/>
                   </a:lnTo>
                   <a:close/>
                 </a:path>
@@ -3588,276 +3588,276 @@
           </p:nvSpPr>
           <p:spPr>
             <a:xfrm>
-              <a:off x="1533221" y="1896563"/>
-              <a:ext cx="6676337" cy="2860609"/>
+              <a:off x="1533221" y="2073503"/>
+              <a:ext cx="6676337" cy="2728335"/>
             </a:xfrm>
             <a:custGeom>
               <a:avLst/>
               <a:pathLst>
-                <a:path w="6676337" h="2860609">
+                <a:path w="6676337" h="2728335">
                   <a:moveTo>
                     <a:pt x="0" y="0"/>
                   </a:moveTo>
                   <a:lnTo>
-                    <a:pt x="33390" y="67903"/>
-                  </a:lnTo>
-                  <a:lnTo>
-                    <a:pt x="110633" y="218395"/>
-                  </a:lnTo>
-                  <a:lnTo>
-                    <a:pt x="187877" y="362569"/>
-                  </a:lnTo>
-                  <a:lnTo>
-                    <a:pt x="265120" y="500690"/>
-                  </a:lnTo>
-                  <a:lnTo>
-                    <a:pt x="342364" y="633013"/>
-                  </a:lnTo>
-                  <a:lnTo>
-                    <a:pt x="419608" y="759781"/>
-                  </a:lnTo>
-                  <a:lnTo>
-                    <a:pt x="496851" y="881227"/>
-                  </a:lnTo>
-                  <a:lnTo>
-                    <a:pt x="574095" y="997574"/>
-                  </a:lnTo>
-                  <a:lnTo>
-                    <a:pt x="651338" y="1109037"/>
-                  </a:lnTo>
-                  <a:lnTo>
-                    <a:pt x="728582" y="1215821"/>
-                  </a:lnTo>
-                  <a:lnTo>
-                    <a:pt x="805825" y="1318122"/>
-                  </a:lnTo>
-                  <a:lnTo>
-                    <a:pt x="883069" y="1416128"/>
-                  </a:lnTo>
-                  <a:lnTo>
-                    <a:pt x="960313" y="1510019"/>
-                  </a:lnTo>
-                  <a:lnTo>
-                    <a:pt x="1037556" y="1599969"/>
-                  </a:lnTo>
-                  <a:lnTo>
-                    <a:pt x="1114800" y="1686143"/>
-                  </a:lnTo>
-                  <a:lnTo>
-                    <a:pt x="1192043" y="1768699"/>
-                  </a:lnTo>
-                  <a:lnTo>
-                    <a:pt x="1269287" y="1847789"/>
-                  </a:lnTo>
-                  <a:lnTo>
-                    <a:pt x="1346530" y="1923559"/>
-                  </a:lnTo>
-                  <a:lnTo>
-                    <a:pt x="1423774" y="1996148"/>
-                  </a:lnTo>
-                  <a:lnTo>
-                    <a:pt x="1501018" y="2065690"/>
-                  </a:lnTo>
-                  <a:lnTo>
-                    <a:pt x="1578261" y="2132312"/>
-                  </a:lnTo>
-                  <a:lnTo>
-                    <a:pt x="1655505" y="2196138"/>
-                  </a:lnTo>
-                  <a:lnTo>
-                    <a:pt x="1732748" y="2257284"/>
-                  </a:lnTo>
-                  <a:lnTo>
-                    <a:pt x="1809992" y="2315863"/>
-                  </a:lnTo>
-                  <a:lnTo>
-                    <a:pt x="1887235" y="2371982"/>
-                  </a:lnTo>
-                  <a:lnTo>
-                    <a:pt x="1964479" y="2425746"/>
-                  </a:lnTo>
-                  <a:lnTo>
-                    <a:pt x="2041723" y="2477253"/>
-                  </a:lnTo>
-                  <a:lnTo>
-                    <a:pt x="2118966" y="2526597"/>
-                  </a:lnTo>
-                  <a:lnTo>
-                    <a:pt x="2196210" y="2573870"/>
-                  </a:lnTo>
-                  <a:lnTo>
-                    <a:pt x="2273453" y="2619158"/>
-                  </a:lnTo>
-                  <a:lnTo>
-                    <a:pt x="2350697" y="2662545"/>
-                  </a:lnTo>
-                  <a:lnTo>
-                    <a:pt x="2427940" y="2704110"/>
-                  </a:lnTo>
-                  <a:lnTo>
-                    <a:pt x="2505184" y="2743931"/>
-                  </a:lnTo>
-                  <a:lnTo>
-                    <a:pt x="2582428" y="2782080"/>
-                  </a:lnTo>
-                  <a:lnTo>
-                    <a:pt x="2659671" y="2784464"/>
-                  </a:lnTo>
-                  <a:lnTo>
-                    <a:pt x="2736915" y="2785995"/>
-                  </a:lnTo>
-                  <a:lnTo>
-                    <a:pt x="2814158" y="2787523"/>
-                  </a:lnTo>
-                  <a:lnTo>
-                    <a:pt x="2891402" y="2789049"/>
-                  </a:lnTo>
-                  <a:lnTo>
-                    <a:pt x="2968645" y="2790572"/>
-                  </a:lnTo>
-                  <a:lnTo>
-                    <a:pt x="3045889" y="2792093"/>
-                  </a:lnTo>
-                  <a:lnTo>
-                    <a:pt x="3123133" y="2793610"/>
-                  </a:lnTo>
-                  <a:lnTo>
-                    <a:pt x="3200376" y="2795126"/>
-                  </a:lnTo>
-                  <a:lnTo>
-                    <a:pt x="3277620" y="2796638"/>
-                  </a:lnTo>
-                  <a:lnTo>
-                    <a:pt x="3354863" y="2798148"/>
-                  </a:lnTo>
-                  <a:lnTo>
-                    <a:pt x="3432107" y="2799655"/>
-                  </a:lnTo>
-                  <a:lnTo>
-                    <a:pt x="3509350" y="2801159"/>
-                  </a:lnTo>
-                  <a:lnTo>
-                    <a:pt x="3586594" y="2802661"/>
-                  </a:lnTo>
-                  <a:lnTo>
-                    <a:pt x="3663838" y="2804160"/>
-                  </a:lnTo>
-                  <a:lnTo>
-                    <a:pt x="3741081" y="2805657"/>
-                  </a:lnTo>
-                  <a:lnTo>
-                    <a:pt x="3818325" y="2807150"/>
-                  </a:lnTo>
-                  <a:lnTo>
-                    <a:pt x="3895568" y="2808642"/>
-                  </a:lnTo>
-                  <a:lnTo>
-                    <a:pt x="3972812" y="2810130"/>
-                  </a:lnTo>
-                  <a:lnTo>
-                    <a:pt x="4050055" y="2811616"/>
-                  </a:lnTo>
-                  <a:lnTo>
-                    <a:pt x="4127299" y="2813099"/>
-                  </a:lnTo>
-                  <a:lnTo>
-                    <a:pt x="4204543" y="2814580"/>
-                  </a:lnTo>
-                  <a:lnTo>
-                    <a:pt x="4281786" y="2816058"/>
-                  </a:lnTo>
-                  <a:lnTo>
-                    <a:pt x="4359030" y="2817534"/>
-                  </a:lnTo>
-                  <a:lnTo>
-                    <a:pt x="4436273" y="2819007"/>
-                  </a:lnTo>
-                  <a:lnTo>
-                    <a:pt x="4513517" y="2820477"/>
-                  </a:lnTo>
-                  <a:lnTo>
-                    <a:pt x="4590760" y="2821945"/>
-                  </a:lnTo>
-                  <a:lnTo>
-                    <a:pt x="4668004" y="2823410"/>
-                  </a:lnTo>
-                  <a:lnTo>
-                    <a:pt x="4745248" y="2824872"/>
-                  </a:lnTo>
-                  <a:lnTo>
-                    <a:pt x="4822491" y="2826332"/>
-                  </a:lnTo>
-                  <a:lnTo>
-                    <a:pt x="4899735" y="2827789"/>
-                  </a:lnTo>
-                  <a:lnTo>
-                    <a:pt x="4976978" y="2829244"/>
-                  </a:lnTo>
-                  <a:lnTo>
-                    <a:pt x="5054222" y="2830697"/>
-                  </a:lnTo>
-                  <a:lnTo>
-                    <a:pt x="5131465" y="2832146"/>
-                  </a:lnTo>
-                  <a:lnTo>
-                    <a:pt x="5208709" y="2833593"/>
-                  </a:lnTo>
-                  <a:lnTo>
-                    <a:pt x="5285953" y="2835038"/>
-                  </a:lnTo>
-                  <a:lnTo>
-                    <a:pt x="5363196" y="2836480"/>
-                  </a:lnTo>
-                  <a:lnTo>
-                    <a:pt x="5440440" y="2837919"/>
-                  </a:lnTo>
-                  <a:lnTo>
-                    <a:pt x="5517683" y="2839356"/>
-                  </a:lnTo>
-                  <a:lnTo>
-                    <a:pt x="5594927" y="2840791"/>
-                  </a:lnTo>
-                  <a:lnTo>
-                    <a:pt x="5672170" y="2842223"/>
-                  </a:lnTo>
-                  <a:lnTo>
-                    <a:pt x="5749414" y="2843652"/>
-                  </a:lnTo>
-                  <a:lnTo>
-                    <a:pt x="5826658" y="2845079"/>
-                  </a:lnTo>
-                  <a:lnTo>
-                    <a:pt x="5903901" y="2846503"/>
-                  </a:lnTo>
-                  <a:lnTo>
-                    <a:pt x="5981145" y="2847925"/>
-                  </a:lnTo>
-                  <a:lnTo>
-                    <a:pt x="6058388" y="2849344"/>
-                  </a:lnTo>
-                  <a:lnTo>
-                    <a:pt x="6135632" y="2850761"/>
-                  </a:lnTo>
-                  <a:lnTo>
-                    <a:pt x="6212875" y="2852175"/>
-                  </a:lnTo>
-                  <a:lnTo>
-                    <a:pt x="6290119" y="2853587"/>
-                  </a:lnTo>
-                  <a:lnTo>
-                    <a:pt x="6367363" y="2854996"/>
-                  </a:lnTo>
-                  <a:lnTo>
-                    <a:pt x="6444606" y="2856403"/>
-                  </a:lnTo>
-                  <a:lnTo>
-                    <a:pt x="6521850" y="2857807"/>
-                  </a:lnTo>
-                  <a:lnTo>
-                    <a:pt x="6599093" y="2859209"/>
-                  </a:lnTo>
-                  <a:lnTo>
-                    <a:pt x="6676337" y="2860609"/>
+                    <a:pt x="33390" y="64764"/>
+                  </a:lnTo>
+                  <a:lnTo>
+                    <a:pt x="110633" y="208297"/>
+                  </a:lnTo>
+                  <a:lnTo>
+                    <a:pt x="187877" y="345804"/>
+                  </a:lnTo>
+                  <a:lnTo>
+                    <a:pt x="265120" y="477539"/>
+                  </a:lnTo>
+                  <a:lnTo>
+                    <a:pt x="342364" y="603743"/>
+                  </a:lnTo>
+                  <a:lnTo>
+                    <a:pt x="419608" y="724649"/>
+                  </a:lnTo>
+                  <a:lnTo>
+                    <a:pt x="496851" y="840479"/>
+                  </a:lnTo>
+                  <a:lnTo>
+                    <a:pt x="574095" y="951447"/>
+                  </a:lnTo>
+                  <a:lnTo>
+                    <a:pt x="651338" y="1057756"/>
+                  </a:lnTo>
+                  <a:lnTo>
+                    <a:pt x="728582" y="1159602"/>
+                  </a:lnTo>
+                  <a:lnTo>
+                    <a:pt x="805825" y="1257172"/>
+                  </a:lnTo>
+                  <a:lnTo>
+                    <a:pt x="883069" y="1350647"/>
+                  </a:lnTo>
+                  <a:lnTo>
+                    <a:pt x="960313" y="1440197"/>
+                  </a:lnTo>
+                  <a:lnTo>
+                    <a:pt x="1037556" y="1525987"/>
+                  </a:lnTo>
+                  <a:lnTo>
+                    <a:pt x="1114800" y="1608176"/>
+                  </a:lnTo>
+                  <a:lnTo>
+                    <a:pt x="1192043" y="1686915"/>
+                  </a:lnTo>
+                  <a:lnTo>
+                    <a:pt x="1269287" y="1762348"/>
+                  </a:lnTo>
+                  <a:lnTo>
+                    <a:pt x="1346530" y="1834615"/>
+                  </a:lnTo>
+                  <a:lnTo>
+                    <a:pt x="1423774" y="1903847"/>
+                  </a:lnTo>
+                  <a:lnTo>
+                    <a:pt x="1501018" y="1970173"/>
+                  </a:lnTo>
+                  <a:lnTo>
+                    <a:pt x="1578261" y="2033715"/>
+                  </a:lnTo>
+                  <a:lnTo>
+                    <a:pt x="1655505" y="2094589"/>
+                  </a:lnTo>
+                  <a:lnTo>
+                    <a:pt x="1732748" y="2152908"/>
+                  </a:lnTo>
+                  <a:lnTo>
+                    <a:pt x="1809992" y="2208778"/>
+                  </a:lnTo>
+                  <a:lnTo>
+                    <a:pt x="1887235" y="2262303"/>
+                  </a:lnTo>
+                  <a:lnTo>
+                    <a:pt x="1964479" y="2313580"/>
+                  </a:lnTo>
+                  <a:lnTo>
+                    <a:pt x="2041723" y="2362705"/>
+                  </a:lnTo>
+                  <a:lnTo>
+                    <a:pt x="2118966" y="2409768"/>
+                  </a:lnTo>
+                  <a:lnTo>
+                    <a:pt x="2196210" y="2454855"/>
+                  </a:lnTo>
+                  <a:lnTo>
+                    <a:pt x="2273453" y="2498049"/>
+                  </a:lnTo>
+                  <a:lnTo>
+                    <a:pt x="2350697" y="2539430"/>
+                  </a:lnTo>
+                  <a:lnTo>
+                    <a:pt x="2427940" y="2579073"/>
+                  </a:lnTo>
+                  <a:lnTo>
+                    <a:pt x="2505184" y="2617053"/>
+                  </a:lnTo>
+                  <a:lnTo>
+                    <a:pt x="2582428" y="2653437"/>
+                  </a:lnTo>
+                  <a:lnTo>
+                    <a:pt x="2659671" y="2655711"/>
+                  </a:lnTo>
+                  <a:lnTo>
+                    <a:pt x="2736915" y="2657171"/>
+                  </a:lnTo>
+                  <a:lnTo>
+                    <a:pt x="2814158" y="2658629"/>
+                  </a:lnTo>
+                  <a:lnTo>
+                    <a:pt x="2891402" y="2660085"/>
+                  </a:lnTo>
+                  <a:lnTo>
+                    <a:pt x="2968645" y="2661537"/>
+                  </a:lnTo>
+                  <a:lnTo>
+                    <a:pt x="3045889" y="2662987"/>
+                  </a:lnTo>
+                  <a:lnTo>
+                    <a:pt x="3123133" y="2664435"/>
+                  </a:lnTo>
+                  <a:lnTo>
+                    <a:pt x="3200376" y="2665880"/>
+                  </a:lnTo>
+                  <a:lnTo>
+                    <a:pt x="3277620" y="2667322"/>
+                  </a:lnTo>
+                  <a:lnTo>
+                    <a:pt x="3354863" y="2668762"/>
+                  </a:lnTo>
+                  <a:lnTo>
+                    <a:pt x="3432107" y="2670200"/>
+                  </a:lnTo>
+                  <a:lnTo>
+                    <a:pt x="3509350" y="2671635"/>
+                  </a:lnTo>
+                  <a:lnTo>
+                    <a:pt x="3586594" y="2673067"/>
+                  </a:lnTo>
+                  <a:lnTo>
+                    <a:pt x="3663838" y="2674497"/>
+                  </a:lnTo>
+                  <a:lnTo>
+                    <a:pt x="3741081" y="2675924"/>
+                  </a:lnTo>
+                  <a:lnTo>
+                    <a:pt x="3818325" y="2677349"/>
+                  </a:lnTo>
+                  <a:lnTo>
+                    <a:pt x="3895568" y="2678771"/>
+                  </a:lnTo>
+                  <a:lnTo>
+                    <a:pt x="3972812" y="2680191"/>
+                  </a:lnTo>
+                  <a:lnTo>
+                    <a:pt x="4050055" y="2681608"/>
+                  </a:lnTo>
+                  <a:lnTo>
+                    <a:pt x="4127299" y="2683023"/>
+                  </a:lnTo>
+                  <a:lnTo>
+                    <a:pt x="4204543" y="2684435"/>
+                  </a:lnTo>
+                  <a:lnTo>
+                    <a:pt x="4281786" y="2685845"/>
+                  </a:lnTo>
+                  <a:lnTo>
+                    <a:pt x="4359030" y="2687252"/>
+                  </a:lnTo>
+                  <a:lnTo>
+                    <a:pt x="4436273" y="2688657"/>
+                  </a:lnTo>
+                  <a:lnTo>
+                    <a:pt x="4513517" y="2690059"/>
+                  </a:lnTo>
+                  <a:lnTo>
+                    <a:pt x="4590760" y="2691459"/>
+                  </a:lnTo>
+                  <a:lnTo>
+                    <a:pt x="4668004" y="2692856"/>
+                  </a:lnTo>
+                  <a:lnTo>
+                    <a:pt x="4745248" y="2694251"/>
+                  </a:lnTo>
+                  <a:lnTo>
+                    <a:pt x="4822491" y="2695644"/>
+                  </a:lnTo>
+                  <a:lnTo>
+                    <a:pt x="4899735" y="2697034"/>
+                  </a:lnTo>
+                  <a:lnTo>
+                    <a:pt x="4976978" y="2698421"/>
+                  </a:lnTo>
+                  <a:lnTo>
+                    <a:pt x="5054222" y="2699806"/>
+                  </a:lnTo>
+                  <a:lnTo>
+                    <a:pt x="5131465" y="2701189"/>
+                  </a:lnTo>
+                  <a:lnTo>
+                    <a:pt x="5208709" y="2702569"/>
+                  </a:lnTo>
+                  <a:lnTo>
+                    <a:pt x="5285953" y="2703947"/>
+                  </a:lnTo>
+                  <a:lnTo>
+                    <a:pt x="5363196" y="2705322"/>
+                  </a:lnTo>
+                  <a:lnTo>
+                    <a:pt x="5440440" y="2706695"/>
+                  </a:lnTo>
+                  <a:lnTo>
+                    <a:pt x="5517683" y="2708065"/>
+                  </a:lnTo>
+                  <a:lnTo>
+                    <a:pt x="5594927" y="2709434"/>
+                  </a:lnTo>
+                  <a:lnTo>
+                    <a:pt x="5672170" y="2710799"/>
+                  </a:lnTo>
+                  <a:lnTo>
+                    <a:pt x="5749414" y="2712162"/>
+                  </a:lnTo>
+                  <a:lnTo>
+                    <a:pt x="5826658" y="2713523"/>
+                  </a:lnTo>
+                  <a:lnTo>
+                    <a:pt x="5903901" y="2714882"/>
+                  </a:lnTo>
+                  <a:lnTo>
+                    <a:pt x="5981145" y="2716238"/>
+                  </a:lnTo>
+                  <a:lnTo>
+                    <a:pt x="6058388" y="2717591"/>
+                  </a:lnTo>
+                  <a:lnTo>
+                    <a:pt x="6135632" y="2718943"/>
+                  </a:lnTo>
+                  <a:lnTo>
+                    <a:pt x="6212875" y="2720292"/>
+                  </a:lnTo>
+                  <a:lnTo>
+                    <a:pt x="6290119" y="2721638"/>
+                  </a:lnTo>
+                  <a:lnTo>
+                    <a:pt x="6367363" y="2722982"/>
+                  </a:lnTo>
+                  <a:lnTo>
+                    <a:pt x="6444606" y="2724324"/>
+                  </a:lnTo>
+                  <a:lnTo>
+                    <a:pt x="6521850" y="2725663"/>
+                  </a:lnTo>
+                  <a:lnTo>
+                    <a:pt x="6599093" y="2727000"/>
+                  </a:lnTo>
+                  <a:lnTo>
+                    <a:pt x="6676337" y="2728335"/>
                   </a:lnTo>
                 </a:path>
               </a:pathLst>
@@ -3877,300 +3877,300 @@
           </p:nvSpPr>
           <p:spPr>
             <a:xfrm>
-              <a:off x="817517" y="4611407"/>
-              <a:ext cx="7392041" cy="848135"/>
+              <a:off x="817517" y="4662813"/>
+              <a:ext cx="7392041" cy="808917"/>
             </a:xfrm>
             <a:custGeom>
               <a:avLst/>
               <a:pathLst>
-                <a:path w="7392041" h="848135">
+                <a:path w="7392041" h="808917">
                   <a:moveTo>
-                    <a:pt x="7392041" y="848135"/>
+                    <a:pt x="7392041" y="808917"/>
                   </a:moveTo>
                   <a:lnTo>
-                    <a:pt x="7314797" y="844205"/>
-                  </a:lnTo>
-                  <a:lnTo>
-                    <a:pt x="7237554" y="840104"/>
-                  </a:lnTo>
-                  <a:lnTo>
-                    <a:pt x="7160310" y="835823"/>
-                  </a:lnTo>
-                  <a:lnTo>
-                    <a:pt x="7083066" y="831354"/>
-                  </a:lnTo>
-                  <a:lnTo>
-                    <a:pt x="7005823" y="826690"/>
-                  </a:lnTo>
-                  <a:lnTo>
-                    <a:pt x="6928579" y="821821"/>
-                  </a:lnTo>
-                  <a:lnTo>
-                    <a:pt x="6851336" y="816738"/>
-                  </a:lnTo>
-                  <a:lnTo>
-                    <a:pt x="6774092" y="811433"/>
-                  </a:lnTo>
-                  <a:lnTo>
-                    <a:pt x="6696849" y="805896"/>
-                  </a:lnTo>
-                  <a:lnTo>
-                    <a:pt x="6619605" y="800116"/>
-                  </a:lnTo>
-                  <a:lnTo>
-                    <a:pt x="6542361" y="794082"/>
-                  </a:lnTo>
-                  <a:lnTo>
-                    <a:pt x="6465118" y="787784"/>
-                  </a:lnTo>
-                  <a:lnTo>
-                    <a:pt x="6387874" y="781211"/>
-                  </a:lnTo>
-                  <a:lnTo>
-                    <a:pt x="6310631" y="774349"/>
-                  </a:lnTo>
-                  <a:lnTo>
-                    <a:pt x="6233387" y="767186"/>
-                  </a:lnTo>
-                  <a:lnTo>
-                    <a:pt x="6156144" y="759710"/>
-                  </a:lnTo>
-                  <a:lnTo>
-                    <a:pt x="6078900" y="751906"/>
-                  </a:lnTo>
-                  <a:lnTo>
-                    <a:pt x="6001656" y="743760"/>
-                  </a:lnTo>
-                  <a:lnTo>
-                    <a:pt x="5924413" y="735257"/>
-                  </a:lnTo>
-                  <a:lnTo>
-                    <a:pt x="5847169" y="726381"/>
-                  </a:lnTo>
-                  <a:lnTo>
-                    <a:pt x="5769926" y="717117"/>
-                  </a:lnTo>
-                  <a:lnTo>
-                    <a:pt x="5692682" y="707446"/>
-                  </a:lnTo>
-                  <a:lnTo>
-                    <a:pt x="5615439" y="697352"/>
-                  </a:lnTo>
-                  <a:lnTo>
-                    <a:pt x="5538195" y="686815"/>
-                  </a:lnTo>
-                  <a:lnTo>
-                    <a:pt x="5460951" y="675817"/>
-                  </a:lnTo>
-                  <a:lnTo>
-                    <a:pt x="5383708" y="664336"/>
-                  </a:lnTo>
-                  <a:lnTo>
-                    <a:pt x="5306464" y="652353"/>
-                  </a:lnTo>
-                  <a:lnTo>
-                    <a:pt x="5229221" y="639844"/>
-                  </a:lnTo>
-                  <a:lnTo>
-                    <a:pt x="5151977" y="626788"/>
-                  </a:lnTo>
-                  <a:lnTo>
-                    <a:pt x="5074734" y="613159"/>
-                  </a:lnTo>
-                  <a:lnTo>
-                    <a:pt x="4997490" y="598933"/>
-                  </a:lnTo>
-                  <a:lnTo>
-                    <a:pt x="4920246" y="584083"/>
-                  </a:lnTo>
-                  <a:lnTo>
-                    <a:pt x="4843003" y="568583"/>
-                  </a:lnTo>
-                  <a:lnTo>
-                    <a:pt x="4765759" y="552404"/>
-                  </a:lnTo>
-                  <a:lnTo>
-                    <a:pt x="4688516" y="535516"/>
-                  </a:lnTo>
-                  <a:lnTo>
-                    <a:pt x="4611272" y="517887"/>
-                  </a:lnTo>
-                  <a:lnTo>
-                    <a:pt x="4534029" y="499486"/>
-                  </a:lnTo>
-                  <a:lnTo>
-                    <a:pt x="4456785" y="480279"/>
-                  </a:lnTo>
-                  <a:lnTo>
-                    <a:pt x="4379541" y="460230"/>
-                  </a:lnTo>
-                  <a:lnTo>
-                    <a:pt x="4302298" y="439302"/>
-                  </a:lnTo>
-                  <a:lnTo>
-                    <a:pt x="4225054" y="417458"/>
-                  </a:lnTo>
-                  <a:lnTo>
-                    <a:pt x="4147811" y="394656"/>
-                  </a:lnTo>
-                  <a:lnTo>
-                    <a:pt x="4070567" y="370855"/>
-                  </a:lnTo>
-                  <a:lnTo>
-                    <a:pt x="3993324" y="346011"/>
-                  </a:lnTo>
-                  <a:lnTo>
-                    <a:pt x="3916080" y="320078"/>
-                  </a:lnTo>
-                  <a:lnTo>
-                    <a:pt x="3838836" y="293009"/>
-                  </a:lnTo>
-                  <a:lnTo>
-                    <a:pt x="3761593" y="264754"/>
-                  </a:lnTo>
-                  <a:lnTo>
-                    <a:pt x="3684349" y="235260"/>
-                  </a:lnTo>
-                  <a:lnTo>
-                    <a:pt x="3607106" y="204475"/>
-                  </a:lnTo>
-                  <a:lnTo>
-                    <a:pt x="3529862" y="172340"/>
-                  </a:lnTo>
-                  <a:lnTo>
-                    <a:pt x="3452619" y="138797"/>
-                  </a:lnTo>
-                  <a:lnTo>
-                    <a:pt x="3375375" y="103784"/>
-                  </a:lnTo>
-                  <a:lnTo>
-                    <a:pt x="3298131" y="68086"/>
-                  </a:lnTo>
-                  <a:lnTo>
-                    <a:pt x="3220888" y="66549"/>
-                  </a:lnTo>
-                  <a:lnTo>
-                    <a:pt x="3143644" y="65010"/>
-                  </a:lnTo>
-                  <a:lnTo>
-                    <a:pt x="3066401" y="63468"/>
-                  </a:lnTo>
-                  <a:lnTo>
-                    <a:pt x="2989157" y="61923"/>
-                  </a:lnTo>
-                  <a:lnTo>
-                    <a:pt x="2911914" y="60376"/>
-                  </a:lnTo>
-                  <a:lnTo>
-                    <a:pt x="2834670" y="58826"/>
-                  </a:lnTo>
-                  <a:lnTo>
-                    <a:pt x="2757426" y="57273"/>
-                  </a:lnTo>
-                  <a:lnTo>
-                    <a:pt x="2680183" y="55717"/>
-                  </a:lnTo>
-                  <a:lnTo>
-                    <a:pt x="2602939" y="54158"/>
-                  </a:lnTo>
-                  <a:lnTo>
-                    <a:pt x="2525696" y="52597"/>
-                  </a:lnTo>
-                  <a:lnTo>
-                    <a:pt x="2448452" y="51033"/>
-                  </a:lnTo>
-                  <a:lnTo>
-                    <a:pt x="2371209" y="49466"/>
-                  </a:lnTo>
-                  <a:lnTo>
-                    <a:pt x="2293965" y="47897"/>
-                  </a:lnTo>
-                  <a:lnTo>
-                    <a:pt x="2216721" y="46325"/>
-                  </a:lnTo>
-                  <a:lnTo>
-                    <a:pt x="2139478" y="44749"/>
-                  </a:lnTo>
-                  <a:lnTo>
-                    <a:pt x="2062234" y="43172"/>
-                  </a:lnTo>
-                  <a:lnTo>
-                    <a:pt x="1984991" y="41591"/>
-                  </a:lnTo>
-                  <a:lnTo>
-                    <a:pt x="1907747" y="40008"/>
-                  </a:lnTo>
-                  <a:lnTo>
-                    <a:pt x="1830504" y="38421"/>
-                  </a:lnTo>
-                  <a:lnTo>
-                    <a:pt x="1753260" y="36832"/>
-                  </a:lnTo>
-                  <a:lnTo>
-                    <a:pt x="1676016" y="35240"/>
-                  </a:lnTo>
-                  <a:lnTo>
-                    <a:pt x="1598773" y="33646"/>
-                  </a:lnTo>
-                  <a:lnTo>
-                    <a:pt x="1521529" y="32048"/>
-                  </a:lnTo>
-                  <a:lnTo>
-                    <a:pt x="1444286" y="30448"/>
-                  </a:lnTo>
-                  <a:lnTo>
-                    <a:pt x="1367042" y="28845"/>
-                  </a:lnTo>
-                  <a:lnTo>
-                    <a:pt x="1289799" y="27239"/>
-                  </a:lnTo>
-                  <a:lnTo>
-                    <a:pt x="1212555" y="25630"/>
-                  </a:lnTo>
-                  <a:lnTo>
-                    <a:pt x="1135311" y="24019"/>
-                  </a:lnTo>
-                  <a:lnTo>
-                    <a:pt x="1058068" y="22404"/>
-                  </a:lnTo>
-                  <a:lnTo>
-                    <a:pt x="980824" y="20787"/>
-                  </a:lnTo>
-                  <a:lnTo>
-                    <a:pt x="903581" y="19166"/>
-                  </a:lnTo>
-                  <a:lnTo>
-                    <a:pt x="826337" y="17543"/>
-                  </a:lnTo>
-                  <a:lnTo>
-                    <a:pt x="749094" y="15918"/>
-                  </a:lnTo>
-                  <a:lnTo>
-                    <a:pt x="671850" y="14289"/>
-                  </a:lnTo>
-                  <a:lnTo>
-                    <a:pt x="594606" y="12657"/>
-                  </a:lnTo>
-                  <a:lnTo>
-                    <a:pt x="517363" y="11022"/>
-                  </a:lnTo>
-                  <a:lnTo>
-                    <a:pt x="440119" y="9385"/>
-                  </a:lnTo>
-                  <a:lnTo>
-                    <a:pt x="362876" y="7745"/>
-                  </a:lnTo>
-                  <a:lnTo>
-                    <a:pt x="285632" y="6101"/>
-                  </a:lnTo>
-                  <a:lnTo>
-                    <a:pt x="208389" y="4455"/>
-                  </a:lnTo>
-                  <a:lnTo>
-                    <a:pt x="131145" y="2806"/>
-                  </a:lnTo>
-                  <a:lnTo>
-                    <a:pt x="53901" y="1154"/>
+                    <a:pt x="7314797" y="805170"/>
+                  </a:lnTo>
+                  <a:lnTo>
+                    <a:pt x="7237554" y="801258"/>
+                  </a:lnTo>
+                  <a:lnTo>
+                    <a:pt x="7160310" y="797175"/>
+                  </a:lnTo>
+                  <a:lnTo>
+                    <a:pt x="7083066" y="792913"/>
+                  </a:lnTo>
+                  <a:lnTo>
+                    <a:pt x="7005823" y="788464"/>
+                  </a:lnTo>
+                  <a:lnTo>
+                    <a:pt x="6928579" y="783820"/>
+                  </a:lnTo>
+                  <a:lnTo>
+                    <a:pt x="6851336" y="778973"/>
+                  </a:lnTo>
+                  <a:lnTo>
+                    <a:pt x="6774092" y="773913"/>
+                  </a:lnTo>
+                  <a:lnTo>
+                    <a:pt x="6696849" y="768631"/>
+                  </a:lnTo>
+                  <a:lnTo>
+                    <a:pt x="6619605" y="763119"/>
+                  </a:lnTo>
+                  <a:lnTo>
+                    <a:pt x="6542361" y="757364"/>
+                  </a:lnTo>
+                  <a:lnTo>
+                    <a:pt x="6465118" y="751358"/>
+                  </a:lnTo>
+                  <a:lnTo>
+                    <a:pt x="6387874" y="745088"/>
+                  </a:lnTo>
+                  <a:lnTo>
+                    <a:pt x="6310631" y="738543"/>
+                  </a:lnTo>
+                  <a:lnTo>
+                    <a:pt x="6233387" y="731712"/>
+                  </a:lnTo>
+                  <a:lnTo>
+                    <a:pt x="6156144" y="724581"/>
+                  </a:lnTo>
+                  <a:lnTo>
+                    <a:pt x="6078900" y="717138"/>
+                  </a:lnTo>
+                  <a:lnTo>
+                    <a:pt x="6001656" y="709368"/>
+                  </a:lnTo>
+                  <a:lnTo>
+                    <a:pt x="5924413" y="701259"/>
+                  </a:lnTo>
+                  <a:lnTo>
+                    <a:pt x="5847169" y="692793"/>
+                  </a:lnTo>
+                  <a:lnTo>
+                    <a:pt x="5769926" y="683957"/>
+                  </a:lnTo>
+                  <a:lnTo>
+                    <a:pt x="5692682" y="674734"/>
+                  </a:lnTo>
+                  <a:lnTo>
+                    <a:pt x="5615439" y="665106"/>
+                  </a:lnTo>
+                  <a:lnTo>
+                    <a:pt x="5538195" y="655057"/>
+                  </a:lnTo>
+                  <a:lnTo>
+                    <a:pt x="5460951" y="644567"/>
+                  </a:lnTo>
+                  <a:lnTo>
+                    <a:pt x="5383708" y="633618"/>
+                  </a:lnTo>
+                  <a:lnTo>
+                    <a:pt x="5306464" y="622188"/>
+                  </a:lnTo>
+                  <a:lnTo>
+                    <a:pt x="5229221" y="610258"/>
+                  </a:lnTo>
+                  <a:lnTo>
+                    <a:pt x="5151977" y="597805"/>
+                  </a:lnTo>
+                  <a:lnTo>
+                    <a:pt x="5074734" y="584807"/>
+                  </a:lnTo>
+                  <a:lnTo>
+                    <a:pt x="4997490" y="571238"/>
+                  </a:lnTo>
+                  <a:lnTo>
+                    <a:pt x="4920246" y="557076"/>
+                  </a:lnTo>
+                  <a:lnTo>
+                    <a:pt x="4843003" y="542292"/>
+                  </a:lnTo>
+                  <a:lnTo>
+                    <a:pt x="4765759" y="526861"/>
+                  </a:lnTo>
+                  <a:lnTo>
+                    <a:pt x="4688516" y="510754"/>
+                  </a:lnTo>
+                  <a:lnTo>
+                    <a:pt x="4611272" y="493940"/>
+                  </a:lnTo>
+                  <a:lnTo>
+                    <a:pt x="4534029" y="476390"/>
+                  </a:lnTo>
+                  <a:lnTo>
+                    <a:pt x="4456785" y="458071"/>
+                  </a:lnTo>
+                  <a:lnTo>
+                    <a:pt x="4379541" y="438949"/>
+                  </a:lnTo>
+                  <a:lnTo>
+                    <a:pt x="4302298" y="418989"/>
+                  </a:lnTo>
+                  <a:lnTo>
+                    <a:pt x="4225054" y="398155"/>
+                  </a:lnTo>
+                  <a:lnTo>
+                    <a:pt x="4147811" y="376407"/>
+                  </a:lnTo>
+                  <a:lnTo>
+                    <a:pt x="4070567" y="353707"/>
+                  </a:lnTo>
+                  <a:lnTo>
+                    <a:pt x="3993324" y="330012"/>
+                  </a:lnTo>
+                  <a:lnTo>
+                    <a:pt x="3916080" y="305278"/>
+                  </a:lnTo>
+                  <a:lnTo>
+                    <a:pt x="3838836" y="279461"/>
+                  </a:lnTo>
+                  <a:lnTo>
+                    <a:pt x="3761593" y="252512"/>
+                  </a:lnTo>
+                  <a:lnTo>
+                    <a:pt x="3684349" y="224382"/>
+                  </a:lnTo>
+                  <a:lnTo>
+                    <a:pt x="3607106" y="195020"/>
+                  </a:lnTo>
+                  <a:lnTo>
+                    <a:pt x="3529862" y="164371"/>
+                  </a:lnTo>
+                  <a:lnTo>
+                    <a:pt x="3452619" y="132379"/>
+                  </a:lnTo>
+                  <a:lnTo>
+                    <a:pt x="3375375" y="98985"/>
+                  </a:lnTo>
+                  <a:lnTo>
+                    <a:pt x="3298131" y="64938"/>
+                  </a:lnTo>
+                  <a:lnTo>
+                    <a:pt x="3220888" y="63472"/>
+                  </a:lnTo>
+                  <a:lnTo>
+                    <a:pt x="3143644" y="62004"/>
+                  </a:lnTo>
+                  <a:lnTo>
+                    <a:pt x="3066401" y="60533"/>
+                  </a:lnTo>
+                  <a:lnTo>
+                    <a:pt x="2989157" y="59060"/>
+                  </a:lnTo>
+                  <a:lnTo>
+                    <a:pt x="2911914" y="57584"/>
+                  </a:lnTo>
+                  <a:lnTo>
+                    <a:pt x="2834670" y="56105"/>
+                  </a:lnTo>
+                  <a:lnTo>
+                    <a:pt x="2757426" y="54624"/>
+                  </a:lnTo>
+                  <a:lnTo>
+                    <a:pt x="2680183" y="53140"/>
+                  </a:lnTo>
+                  <a:lnTo>
+                    <a:pt x="2602939" y="51654"/>
+                  </a:lnTo>
+                  <a:lnTo>
+                    <a:pt x="2525696" y="50165"/>
+                  </a:lnTo>
+                  <a:lnTo>
+                    <a:pt x="2448452" y="48673"/>
+                  </a:lnTo>
+                  <a:lnTo>
+                    <a:pt x="2371209" y="47179"/>
+                  </a:lnTo>
+                  <a:lnTo>
+                    <a:pt x="2293965" y="45682"/>
+                  </a:lnTo>
+                  <a:lnTo>
+                    <a:pt x="2216721" y="44183"/>
+                  </a:lnTo>
+                  <a:lnTo>
+                    <a:pt x="2139478" y="42680"/>
+                  </a:lnTo>
+                  <a:lnTo>
+                    <a:pt x="2062234" y="41175"/>
+                  </a:lnTo>
+                  <a:lnTo>
+                    <a:pt x="1984991" y="39668"/>
+                  </a:lnTo>
+                  <a:lnTo>
+                    <a:pt x="1907747" y="38158"/>
+                  </a:lnTo>
+                  <a:lnTo>
+                    <a:pt x="1830504" y="36645"/>
+                  </a:lnTo>
+                  <a:lnTo>
+                    <a:pt x="1753260" y="35129"/>
+                  </a:lnTo>
+                  <a:lnTo>
+                    <a:pt x="1676016" y="33611"/>
+                  </a:lnTo>
+                  <a:lnTo>
+                    <a:pt x="1598773" y="32090"/>
+                  </a:lnTo>
+                  <a:lnTo>
+                    <a:pt x="1521529" y="30566"/>
+                  </a:lnTo>
+                  <a:lnTo>
+                    <a:pt x="1444286" y="29040"/>
+                  </a:lnTo>
+                  <a:lnTo>
+                    <a:pt x="1367042" y="27511"/>
+                  </a:lnTo>
+                  <a:lnTo>
+                    <a:pt x="1289799" y="25979"/>
+                  </a:lnTo>
+                  <a:lnTo>
+                    <a:pt x="1212555" y="24445"/>
+                  </a:lnTo>
+                  <a:lnTo>
+                    <a:pt x="1135311" y="22908"/>
+                  </a:lnTo>
+                  <a:lnTo>
+                    <a:pt x="1058068" y="21368"/>
+                  </a:lnTo>
+                  <a:lnTo>
+                    <a:pt x="980824" y="19825"/>
+                  </a:lnTo>
+                  <a:lnTo>
+                    <a:pt x="903581" y="18280"/>
+                  </a:lnTo>
+                  <a:lnTo>
+                    <a:pt x="826337" y="16732"/>
+                  </a:lnTo>
+                  <a:lnTo>
+                    <a:pt x="749094" y="15181"/>
+                  </a:lnTo>
+                  <a:lnTo>
+                    <a:pt x="671850" y="13628"/>
+                  </a:lnTo>
+                  <a:lnTo>
+                    <a:pt x="594606" y="12072"/>
+                  </a:lnTo>
+                  <a:lnTo>
+                    <a:pt x="517363" y="10513"/>
+                  </a:lnTo>
+                  <a:lnTo>
+                    <a:pt x="440119" y="8951"/>
+                  </a:lnTo>
+                  <a:lnTo>
+                    <a:pt x="362876" y="7387"/>
+                  </a:lnTo>
+                  <a:lnTo>
+                    <a:pt x="285632" y="5819"/>
+                  </a:lnTo>
+                  <a:lnTo>
+                    <a:pt x="208389" y="4249"/>
+                  </a:lnTo>
+                  <a:lnTo>
+                    <a:pt x="131145" y="2676"/>
+                  </a:lnTo>
+                  <a:lnTo>
+                    <a:pt x="53901" y="1101"/>
                   </a:lnTo>
                   <a:lnTo>
                     <a:pt x="0" y="0"/>
@@ -4193,303 +4193,303 @@
           </p:nvSpPr>
           <p:spPr>
             <a:xfrm>
-              <a:off x="817517" y="3291735"/>
-              <a:ext cx="7392041" cy="1990979"/>
+              <a:off x="817517" y="3404162"/>
+              <a:ext cx="7392041" cy="1898917"/>
             </a:xfrm>
             <a:custGeom>
               <a:avLst/>
               <a:pathLst>
-                <a:path w="7392041" h="1990979">
+                <a:path w="7392041" h="1898917">
                   <a:moveTo>
                     <a:pt x="0" y="0"/>
                   </a:moveTo>
                   <a:lnTo>
-                    <a:pt x="53901" y="35015"/>
-                  </a:lnTo>
-                  <a:lnTo>
-                    <a:pt x="131145" y="84085"/>
-                  </a:lnTo>
-                  <a:lnTo>
-                    <a:pt x="208389" y="132071"/>
-                  </a:lnTo>
-                  <a:lnTo>
-                    <a:pt x="285632" y="178998"/>
-                  </a:lnTo>
-                  <a:lnTo>
-                    <a:pt x="362876" y="224889"/>
-                  </a:lnTo>
-                  <a:lnTo>
-                    <a:pt x="440119" y="269767"/>
-                  </a:lnTo>
-                  <a:lnTo>
-                    <a:pt x="517363" y="313654"/>
-                  </a:lnTo>
-                  <a:lnTo>
-                    <a:pt x="594606" y="356572"/>
-                  </a:lnTo>
-                  <a:lnTo>
-                    <a:pt x="671850" y="398542"/>
-                  </a:lnTo>
-                  <a:lnTo>
-                    <a:pt x="749094" y="439586"/>
-                  </a:lnTo>
-                  <a:lnTo>
-                    <a:pt x="826337" y="479723"/>
-                  </a:lnTo>
-                  <a:lnTo>
-                    <a:pt x="903581" y="518974"/>
-                  </a:lnTo>
-                  <a:lnTo>
-                    <a:pt x="980824" y="557359"/>
-                  </a:lnTo>
-                  <a:lnTo>
-                    <a:pt x="1058068" y="594896"/>
-                  </a:lnTo>
-                  <a:lnTo>
-                    <a:pt x="1135311" y="631604"/>
-                  </a:lnTo>
-                  <a:lnTo>
-                    <a:pt x="1212555" y="667502"/>
-                  </a:lnTo>
-                  <a:lnTo>
-                    <a:pt x="1289799" y="702607"/>
-                  </a:lnTo>
-                  <a:lnTo>
-                    <a:pt x="1367042" y="736938"/>
-                  </a:lnTo>
-                  <a:lnTo>
-                    <a:pt x="1444286" y="770510"/>
-                  </a:lnTo>
-                  <a:lnTo>
-                    <a:pt x="1521529" y="803341"/>
-                  </a:lnTo>
-                  <a:lnTo>
-                    <a:pt x="1598773" y="835447"/>
-                  </a:lnTo>
-                  <a:lnTo>
-                    <a:pt x="1676016" y="866844"/>
-                  </a:lnTo>
-                  <a:lnTo>
-                    <a:pt x="1753260" y="897548"/>
-                  </a:lnTo>
-                  <a:lnTo>
-                    <a:pt x="1830504" y="927574"/>
-                  </a:lnTo>
-                  <a:lnTo>
-                    <a:pt x="1907747" y="956937"/>
-                  </a:lnTo>
-                  <a:lnTo>
-                    <a:pt x="1984991" y="985651"/>
-                  </a:lnTo>
-                  <a:lnTo>
-                    <a:pt x="2062234" y="1013732"/>
-                  </a:lnTo>
-                  <a:lnTo>
-                    <a:pt x="2139478" y="1041193"/>
-                  </a:lnTo>
-                  <a:lnTo>
-                    <a:pt x="2216721" y="1068047"/>
-                  </a:lnTo>
-                  <a:lnTo>
-                    <a:pt x="2293965" y="1094309"/>
-                  </a:lnTo>
-                  <a:lnTo>
-                    <a:pt x="2371209" y="1119991"/>
-                  </a:lnTo>
-                  <a:lnTo>
-                    <a:pt x="2448452" y="1145105"/>
-                  </a:lnTo>
-                  <a:lnTo>
-                    <a:pt x="2525696" y="1169665"/>
-                  </a:lnTo>
-                  <a:lnTo>
-                    <a:pt x="2602939" y="1193683"/>
-                  </a:lnTo>
-                  <a:lnTo>
-                    <a:pt x="2680183" y="1217171"/>
-                  </a:lnTo>
-                  <a:lnTo>
-                    <a:pt x="2757426" y="1240140"/>
-                  </a:lnTo>
-                  <a:lnTo>
-                    <a:pt x="2834670" y="1262602"/>
-                  </a:lnTo>
-                  <a:lnTo>
-                    <a:pt x="2911914" y="1284567"/>
-                  </a:lnTo>
-                  <a:lnTo>
-                    <a:pt x="2989157" y="1306048"/>
-                  </a:lnTo>
-                  <a:lnTo>
-                    <a:pt x="3066401" y="1327055"/>
-                  </a:lnTo>
-                  <a:lnTo>
-                    <a:pt x="3143644" y="1347598"/>
-                  </a:lnTo>
-                  <a:lnTo>
-                    <a:pt x="3220888" y="1367687"/>
-                  </a:lnTo>
-                  <a:lnTo>
-                    <a:pt x="3298131" y="1387333"/>
-                  </a:lnTo>
-                  <a:lnTo>
-                    <a:pt x="3375375" y="1406545"/>
-                  </a:lnTo>
-                  <a:lnTo>
-                    <a:pt x="3452619" y="1425333"/>
-                  </a:lnTo>
-                  <a:lnTo>
-                    <a:pt x="3529862" y="1443705"/>
-                  </a:lnTo>
-                  <a:lnTo>
-                    <a:pt x="3607106" y="1461673"/>
-                  </a:lnTo>
-                  <a:lnTo>
-                    <a:pt x="3684349" y="1479243"/>
-                  </a:lnTo>
-                  <a:lnTo>
-                    <a:pt x="3761593" y="1496426"/>
-                  </a:lnTo>
-                  <a:lnTo>
-                    <a:pt x="3838836" y="1513229"/>
-                  </a:lnTo>
-                  <a:lnTo>
-                    <a:pt x="3916080" y="1529662"/>
-                  </a:lnTo>
-                  <a:lnTo>
-                    <a:pt x="3993324" y="1545731"/>
-                  </a:lnTo>
-                  <a:lnTo>
-                    <a:pt x="4070567" y="1561446"/>
-                  </a:lnTo>
-                  <a:lnTo>
-                    <a:pt x="4147811" y="1576813"/>
-                  </a:lnTo>
-                  <a:lnTo>
-                    <a:pt x="4225054" y="1591842"/>
-                  </a:lnTo>
-                  <a:lnTo>
-                    <a:pt x="4302298" y="1606538"/>
-                  </a:lnTo>
-                  <a:lnTo>
-                    <a:pt x="4379541" y="1620910"/>
-                  </a:lnTo>
-                  <a:lnTo>
-                    <a:pt x="4456785" y="1634965"/>
-                  </a:lnTo>
-                  <a:lnTo>
-                    <a:pt x="4534029" y="1648709"/>
-                  </a:lnTo>
-                  <a:lnTo>
-                    <a:pt x="4611272" y="1662150"/>
-                  </a:lnTo>
-                  <a:lnTo>
-                    <a:pt x="4688516" y="1675295"/>
-                  </a:lnTo>
-                  <a:lnTo>
-                    <a:pt x="4765759" y="1688149"/>
-                  </a:lnTo>
-                  <a:lnTo>
-                    <a:pt x="4843003" y="1700719"/>
-                  </a:lnTo>
-                  <a:lnTo>
-                    <a:pt x="4920246" y="1713011"/>
-                  </a:lnTo>
-                  <a:lnTo>
-                    <a:pt x="4997490" y="1725033"/>
-                  </a:lnTo>
-                  <a:lnTo>
-                    <a:pt x="5074734" y="1736788"/>
-                  </a:lnTo>
-                  <a:lnTo>
-                    <a:pt x="5151977" y="1748285"/>
-                  </a:lnTo>
-                  <a:lnTo>
-                    <a:pt x="5229221" y="1759527"/>
-                  </a:lnTo>
-                  <a:lnTo>
-                    <a:pt x="5306464" y="1770521"/>
-                  </a:lnTo>
-                  <a:lnTo>
-                    <a:pt x="5383708" y="1781273"/>
-                  </a:lnTo>
-                  <a:lnTo>
-                    <a:pt x="5460951" y="1791787"/>
-                  </a:lnTo>
-                  <a:lnTo>
-                    <a:pt x="5538195" y="1802069"/>
-                  </a:lnTo>
-                  <a:lnTo>
-                    <a:pt x="5615439" y="1812124"/>
-                  </a:lnTo>
-                  <a:lnTo>
-                    <a:pt x="5692682" y="1821957"/>
-                  </a:lnTo>
-                  <a:lnTo>
-                    <a:pt x="5769926" y="1831572"/>
-                  </a:lnTo>
-                  <a:lnTo>
-                    <a:pt x="5847169" y="1840976"/>
-                  </a:lnTo>
-                  <a:lnTo>
-                    <a:pt x="5924413" y="1850172"/>
-                  </a:lnTo>
-                  <a:lnTo>
-                    <a:pt x="6001656" y="1859165"/>
-                  </a:lnTo>
-                  <a:lnTo>
-                    <a:pt x="6078900" y="1867959"/>
-                  </a:lnTo>
-                  <a:lnTo>
-                    <a:pt x="6156144" y="1876559"/>
-                  </a:lnTo>
-                  <a:lnTo>
-                    <a:pt x="6233387" y="1884969"/>
-                  </a:lnTo>
-                  <a:lnTo>
-                    <a:pt x="6310631" y="1893194"/>
-                  </a:lnTo>
-                  <a:lnTo>
-                    <a:pt x="6387874" y="1901237"/>
-                  </a:lnTo>
-                  <a:lnTo>
-                    <a:pt x="6465118" y="1909102"/>
-                  </a:lnTo>
-                  <a:lnTo>
-                    <a:pt x="6542361" y="1916794"/>
-                  </a:lnTo>
-                  <a:lnTo>
-                    <a:pt x="6619605" y="1924316"/>
-                  </a:lnTo>
-                  <a:lnTo>
-                    <a:pt x="6696849" y="1931672"/>
-                  </a:lnTo>
-                  <a:lnTo>
-                    <a:pt x="6774092" y="1938865"/>
-                  </a:lnTo>
-                  <a:lnTo>
-                    <a:pt x="6851336" y="1945899"/>
-                  </a:lnTo>
-                  <a:lnTo>
-                    <a:pt x="6928579" y="1952779"/>
-                  </a:lnTo>
-                  <a:lnTo>
-                    <a:pt x="7005823" y="1959506"/>
-                  </a:lnTo>
-                  <a:lnTo>
-                    <a:pt x="7083066" y="1966085"/>
-                  </a:lnTo>
-                  <a:lnTo>
-                    <a:pt x="7160310" y="1972518"/>
-                  </a:lnTo>
-                  <a:lnTo>
-                    <a:pt x="7237554" y="1978810"/>
-                  </a:lnTo>
-                  <a:lnTo>
-                    <a:pt x="7314797" y="1984963"/>
-                  </a:lnTo>
-                  <a:lnTo>
-                    <a:pt x="7392041" y="1990979"/>
+                    <a:pt x="53901" y="33395"/>
+                  </a:lnTo>
+                  <a:lnTo>
+                    <a:pt x="131145" y="80197"/>
+                  </a:lnTo>
+                  <a:lnTo>
+                    <a:pt x="208389" y="125964"/>
+                  </a:lnTo>
+                  <a:lnTo>
+                    <a:pt x="285632" y="170721"/>
+                  </a:lnTo>
+                  <a:lnTo>
+                    <a:pt x="362876" y="214490"/>
+                  </a:lnTo>
+                  <a:lnTo>
+                    <a:pt x="440119" y="257293"/>
+                  </a:lnTo>
+                  <a:lnTo>
+                    <a:pt x="517363" y="299151"/>
+                  </a:lnTo>
+                  <a:lnTo>
+                    <a:pt x="594606" y="340084"/>
+                  </a:lnTo>
+                  <a:lnTo>
+                    <a:pt x="671850" y="380114"/>
+                  </a:lnTo>
+                  <a:lnTo>
+                    <a:pt x="749094" y="419259"/>
+                  </a:lnTo>
+                  <a:lnTo>
+                    <a:pt x="826337" y="457541"/>
+                  </a:lnTo>
+                  <a:lnTo>
+                    <a:pt x="903581" y="494977"/>
+                  </a:lnTo>
+                  <a:lnTo>
+                    <a:pt x="980824" y="531587"/>
+                  </a:lnTo>
+                  <a:lnTo>
+                    <a:pt x="1058068" y="567388"/>
+                  </a:lnTo>
+                  <a:lnTo>
+                    <a:pt x="1135311" y="602399"/>
+                  </a:lnTo>
+                  <a:lnTo>
+                    <a:pt x="1212555" y="636637"/>
+                  </a:lnTo>
+                  <a:lnTo>
+                    <a:pt x="1289799" y="670119"/>
+                  </a:lnTo>
+                  <a:lnTo>
+                    <a:pt x="1367042" y="702862"/>
+                  </a:lnTo>
+                  <a:lnTo>
+                    <a:pt x="1444286" y="734882"/>
+                  </a:lnTo>
+                  <a:lnTo>
+                    <a:pt x="1521529" y="766194"/>
+                  </a:lnTo>
+                  <a:lnTo>
+                    <a:pt x="1598773" y="796816"/>
+                  </a:lnTo>
+                  <a:lnTo>
+                    <a:pt x="1676016" y="826761"/>
+                  </a:lnTo>
+                  <a:lnTo>
+                    <a:pt x="1753260" y="856045"/>
+                  </a:lnTo>
+                  <a:lnTo>
+                    <a:pt x="1830504" y="884683"/>
+                  </a:lnTo>
+                  <a:lnTo>
+                    <a:pt x="1907747" y="912688"/>
+                  </a:lnTo>
+                  <a:lnTo>
+                    <a:pt x="1984991" y="940075"/>
+                  </a:lnTo>
+                  <a:lnTo>
+                    <a:pt x="2062234" y="966858"/>
+                  </a:lnTo>
+                  <a:lnTo>
+                    <a:pt x="2139478" y="993049"/>
+                  </a:lnTo>
+                  <a:lnTo>
+                    <a:pt x="2216721" y="1018661"/>
+                  </a:lnTo>
+                  <a:lnTo>
+                    <a:pt x="2293965" y="1043708"/>
+                  </a:lnTo>
+                  <a:lnTo>
+                    <a:pt x="2371209" y="1068203"/>
+                  </a:lnTo>
+                  <a:lnTo>
+                    <a:pt x="2448452" y="1092156"/>
+                  </a:lnTo>
+                  <a:lnTo>
+                    <a:pt x="2525696" y="1115580"/>
+                  </a:lnTo>
+                  <a:lnTo>
+                    <a:pt x="2602939" y="1138488"/>
+                  </a:lnTo>
+                  <a:lnTo>
+                    <a:pt x="2680183" y="1160889"/>
+                  </a:lnTo>
+                  <a:lnTo>
+                    <a:pt x="2757426" y="1182796"/>
+                  </a:lnTo>
+                  <a:lnTo>
+                    <a:pt x="2834670" y="1204219"/>
+                  </a:lnTo>
+                  <a:lnTo>
+                    <a:pt x="2911914" y="1225170"/>
+                  </a:lnTo>
+                  <a:lnTo>
+                    <a:pt x="2989157" y="1245657"/>
+                  </a:lnTo>
+                  <a:lnTo>
+                    <a:pt x="3066401" y="1265692"/>
+                  </a:lnTo>
+                  <a:lnTo>
+                    <a:pt x="3143644" y="1285285"/>
+                  </a:lnTo>
+                  <a:lnTo>
+                    <a:pt x="3220888" y="1304446"/>
+                  </a:lnTo>
+                  <a:lnTo>
+                    <a:pt x="3298131" y="1323183"/>
+                  </a:lnTo>
+                  <a:lnTo>
+                    <a:pt x="3375375" y="1341507"/>
+                  </a:lnTo>
+                  <a:lnTo>
+                    <a:pt x="3452619" y="1359426"/>
+                  </a:lnTo>
+                  <a:lnTo>
+                    <a:pt x="3529862" y="1376949"/>
+                  </a:lnTo>
+                  <a:lnTo>
+                    <a:pt x="3607106" y="1394086"/>
+                  </a:lnTo>
+                  <a:lnTo>
+                    <a:pt x="3684349" y="1410844"/>
+                  </a:lnTo>
+                  <a:lnTo>
+                    <a:pt x="3761593" y="1427232"/>
+                  </a:lnTo>
+                  <a:lnTo>
+                    <a:pt x="3838836" y="1443258"/>
+                  </a:lnTo>
+                  <a:lnTo>
+                    <a:pt x="3916080" y="1458931"/>
+                  </a:lnTo>
+                  <a:lnTo>
+                    <a:pt x="3993324" y="1474257"/>
+                  </a:lnTo>
+                  <a:lnTo>
+                    <a:pt x="4070567" y="1489245"/>
+                  </a:lnTo>
+                  <a:lnTo>
+                    <a:pt x="4147811" y="1503902"/>
+                  </a:lnTo>
+                  <a:lnTo>
+                    <a:pt x="4225054" y="1518235"/>
+                  </a:lnTo>
+                  <a:lnTo>
+                    <a:pt x="4302298" y="1532252"/>
+                  </a:lnTo>
+                  <a:lnTo>
+                    <a:pt x="4379541" y="1545960"/>
+                  </a:lnTo>
+                  <a:lnTo>
+                    <a:pt x="4456785" y="1559365"/>
+                  </a:lnTo>
+                  <a:lnTo>
+                    <a:pt x="4534029" y="1572474"/>
+                  </a:lnTo>
+                  <a:lnTo>
+                    <a:pt x="4611272" y="1585293"/>
+                  </a:lnTo>
+                  <a:lnTo>
+                    <a:pt x="4688516" y="1597830"/>
+                  </a:lnTo>
+                  <a:lnTo>
+                    <a:pt x="4765759" y="1610089"/>
+                  </a:lnTo>
+                  <a:lnTo>
+                    <a:pt x="4843003" y="1622078"/>
+                  </a:lnTo>
+                  <a:lnTo>
+                    <a:pt x="4920246" y="1633802"/>
+                  </a:lnTo>
+                  <a:lnTo>
+                    <a:pt x="4997490" y="1645268"/>
+                  </a:lnTo>
+                  <a:lnTo>
+                    <a:pt x="5074734" y="1656480"/>
+                  </a:lnTo>
+                  <a:lnTo>
+                    <a:pt x="5151977" y="1667445"/>
+                  </a:lnTo>
+                  <a:lnTo>
+                    <a:pt x="5229221" y="1678167"/>
+                  </a:lnTo>
+                  <a:lnTo>
+                    <a:pt x="5306464" y="1688653"/>
+                  </a:lnTo>
+                  <a:lnTo>
+                    <a:pt x="5383708" y="1698907"/>
+                  </a:lnTo>
+                  <a:lnTo>
+                    <a:pt x="5460951" y="1708935"/>
+                  </a:lnTo>
+                  <a:lnTo>
+                    <a:pt x="5538195" y="1718742"/>
+                  </a:lnTo>
+                  <a:lnTo>
+                    <a:pt x="5615439" y="1728332"/>
+                  </a:lnTo>
+                  <a:lnTo>
+                    <a:pt x="5692682" y="1737710"/>
+                  </a:lnTo>
+                  <a:lnTo>
+                    <a:pt x="5769926" y="1746881"/>
+                  </a:lnTo>
+                  <a:lnTo>
+                    <a:pt x="5847169" y="1755850"/>
+                  </a:lnTo>
+                  <a:lnTo>
+                    <a:pt x="5924413" y="1764621"/>
+                  </a:lnTo>
+                  <a:lnTo>
+                    <a:pt x="6001656" y="1773198"/>
+                  </a:lnTo>
+                  <a:lnTo>
+                    <a:pt x="6078900" y="1781585"/>
+                  </a:lnTo>
+                  <a:lnTo>
+                    <a:pt x="6156144" y="1789788"/>
+                  </a:lnTo>
+                  <a:lnTo>
+                    <a:pt x="6233387" y="1797809"/>
+                  </a:lnTo>
+                  <a:lnTo>
+                    <a:pt x="6310631" y="1805653"/>
+                  </a:lnTo>
+                  <a:lnTo>
+                    <a:pt x="6387874" y="1813324"/>
+                  </a:lnTo>
+                  <a:lnTo>
+                    <a:pt x="6465118" y="1820826"/>
+                  </a:lnTo>
+                  <a:lnTo>
+                    <a:pt x="6542361" y="1828162"/>
+                  </a:lnTo>
+                  <a:lnTo>
+                    <a:pt x="6619605" y="1835336"/>
+                  </a:lnTo>
+                  <a:lnTo>
+                    <a:pt x="6696849" y="1842352"/>
+                  </a:lnTo>
+                  <a:lnTo>
+                    <a:pt x="6774092" y="1849212"/>
+                  </a:lnTo>
+                  <a:lnTo>
+                    <a:pt x="6851336" y="1855922"/>
+                  </a:lnTo>
+                  <a:lnTo>
+                    <a:pt x="6928579" y="1862483"/>
+                  </a:lnTo>
+                  <a:lnTo>
+                    <a:pt x="7005823" y="1868899"/>
+                  </a:lnTo>
+                  <a:lnTo>
+                    <a:pt x="7083066" y="1875174"/>
+                  </a:lnTo>
+                  <a:lnTo>
+                    <a:pt x="7160310" y="1881310"/>
+                  </a:lnTo>
+                  <a:lnTo>
+                    <a:pt x="7237554" y="1887311"/>
+                  </a:lnTo>
+                  <a:lnTo>
+                    <a:pt x="7314797" y="1893179"/>
+                  </a:lnTo>
+                  <a:lnTo>
+                    <a:pt x="7392041" y="1898917"/>
                   </a:lnTo>
                 </a:path>
               </a:pathLst>
@@ -4518,7 +4518,7 @@
           </p:nvSpPr>
           <p:spPr>
             <a:xfrm>
-              <a:off x="817517" y="4679530"/>
+              <a:off x="817517" y="4727786"/>
               <a:ext cx="7799693" cy="0"/>
             </a:xfrm>
             <a:custGeom>
@@ -4561,15 +4561,15 @@
           </p:nvSpPr>
           <p:spPr>
             <a:xfrm>
-              <a:off x="4117484" y="1896563"/>
-              <a:ext cx="0" cy="3826579"/>
+              <a:off x="4117484" y="2073503"/>
+              <a:ext cx="0" cy="3649639"/>
             </a:xfrm>
             <a:custGeom>
               <a:avLst/>
               <a:pathLst>
-                <a:path w="0" h="3826579">
+                <a:path w="0" h="3649639">
                   <a:moveTo>
-                    <a:pt x="0" y="3826579"/>
+                    <a:pt x="0" y="3649639"/>
                   </a:moveTo>
                   <a:lnTo>
                     <a:pt x="0" y="0"/>
@@ -4604,7 +4604,7 @@
           </p:nvSpPr>
           <p:spPr>
             <a:xfrm>
-              <a:off x="692708" y="5509156"/>
+              <a:off x="692708" y="5517199"/>
               <a:ext cx="62179" cy="80101"/>
             </a:xfrm>
             <a:prstGeom prst="rect">
@@ -4650,7 +4650,7 @@
           </p:nvSpPr>
           <p:spPr>
             <a:xfrm>
-              <a:off x="692708" y="4639479"/>
+              <a:off x="692708" y="4687735"/>
               <a:ext cx="62179" cy="80101"/>
             </a:xfrm>
             <a:prstGeom prst="rect">
@@ -4696,7 +4696,7 @@
           </p:nvSpPr>
           <p:spPr>
             <a:xfrm>
-              <a:off x="692708" y="3769802"/>
+              <a:off x="692708" y="3858272"/>
               <a:ext cx="62179" cy="80101"/>
             </a:xfrm>
             <a:prstGeom prst="rect">
@@ -4742,7 +4742,7 @@
           </p:nvSpPr>
           <p:spPr>
             <a:xfrm>
-              <a:off x="692708" y="2900125"/>
+              <a:off x="692708" y="3028808"/>
               <a:ext cx="62179" cy="80101"/>
             </a:xfrm>
             <a:prstGeom prst="rect">
@@ -4788,7 +4788,7 @@
           </p:nvSpPr>
           <p:spPr>
             <a:xfrm>
-              <a:off x="692708" y="2030448"/>
+              <a:off x="692708" y="2199345"/>
               <a:ext cx="62179" cy="80101"/>
             </a:xfrm>
             <a:prstGeom prst="rect">
@@ -5064,7 +5064,7 @@
           </p:nvSpPr>
           <p:spPr>
             <a:xfrm rot="-5400000">
-              <a:off x="68446" y="3759743"/>
+              <a:off x="68446" y="3848213"/>
               <a:ext cx="1016904" cy="100218"/>
             </a:xfrm>
             <a:prstGeom prst="rect">
@@ -5105,6 +5105,52 @@
         <p:sp>
           <p:nvSpPr>
             <p:cNvPr id="38" name="tx38"/>
+            <p:cNvSpPr/>
+            <p:nvPr/>
+          </p:nvSpPr>
+          <p:spPr>
+            <a:xfrm>
+              <a:off x="817517" y="1896563"/>
+              <a:ext cx="5626211" cy="82021"/>
+            </a:xfrm>
+            <a:prstGeom prst="rect">
+              <a:avLst/>
+            </a:prstGeom>
+            <a:noFill/>
+          </p:spPr>
+          <p:txBody>
+            <a:bodyPr lIns="0" rIns="0" tIns="0" bIns="0" anchorCtr="1" anchor="ctr" wrap="none"/>
+            <a:lstStyle/>
+            <a:p>
+              <a:pPr algn="l" marL="0" marR="0" indent="0">
+                <a:lnSpc>
+                  <a:spcPts val="900"/>
+                </a:lnSpc>
+                <a:spcBef>
+                  <a:spcPts val="0"/>
+                </a:spcBef>
+                <a:spcAft>
+                  <a:spcPts val="0"/>
+                </a:spcAft>
+              </a:pPr>
+              <a:r>
+                <a:rPr sz="900">
+                  <a:solidFill>
+                    <a:srgbClr val="404040">
+                      <a:alpha val="100000"/>
+                    </a:srgbClr>
+                  </a:solidFill>
+                  <a:latin typeface="Helvetica"/>
+                  <a:cs typeface="Helvetica"/>
+                </a:rPr>
+                <a:t>subHR per 0.1 ratio decline: 1.29 (1.02-1.64)  |  per IQR decline (Δ = 0.30): 2.13 (1.06-4.28)  |  IQR: [0.84, 1.14]</a:t>
+              </a:r>
+            </a:p>
+          </p:txBody>
+        </p:sp>
+        <p:sp>
+          <p:nvSpPr>
+            <p:cNvPr id="39" name="tx39"/>
             <p:cNvSpPr/>
             <p:nvPr/>
           </p:nvSpPr>

--- a/docs/pptx/auc3/jx-auc3-linsubhr-ratio-hosp2.pptx
+++ b/docs/pptx/auc3/jx-auc3-linsubhr-ratio-hosp2.pptx
@@ -5111,7 +5111,7 @@
           <p:spPr>
             <a:xfrm>
               <a:off x="817517" y="1896563"/>
-              <a:ext cx="5626211" cy="82021"/>
+              <a:ext cx="6169365" cy="82021"/>
             </a:xfrm>
             <a:prstGeom prst="rect">
               <a:avLst/>
@@ -5143,7 +5143,7 @@
                   <a:latin typeface="Helvetica"/>
                   <a:cs typeface="Helvetica"/>
                 </a:rPr>
-                <a:t>subHR per 0.1 ratio decline: 1.29 (1.02-1.64)  |  per IQR decline (Δ = 0.30): 2.13 (1.06-4.28)  |  IQR: [0.84, 1.14]</a:t>
+                <a:t>subHR per 0.1 ratio decline: 1.29 (1.02-1.64), p = 0.033  |  per IQR decline (Δ = 0.30): 2.13 (1.06-4.28)  |  IQR: [0.84, 1.14]</a:t>
               </a:r>
             </a:p>
           </p:txBody>

--- a/docs/pptx/auc3/jx-auc3-linsubhr-ratio-hosp2.pptx
+++ b/docs/pptx/auc3/jx-auc3-linsubhr-ratio-hosp2.pptx
@@ -2443,7 +2443,7 @@
           </p:nvSpPr>
           <p:spPr>
             <a:xfrm>
-              <a:off x="1615213" y="2073503"/>
+              <a:off x="1531834" y="2073503"/>
               <a:ext cx="0" cy="3649639"/>
             </a:xfrm>
             <a:custGeom>
@@ -2486,7 +2486,7 @@
           </p:nvSpPr>
           <p:spPr>
             <a:xfrm>
-              <a:off x="3387871" y="2073503"/>
+              <a:off x="3586410" y="2073503"/>
               <a:ext cx="0" cy="3649639"/>
             </a:xfrm>
             <a:custGeom>
@@ -2529,7 +2529,7 @@
           </p:nvSpPr>
           <p:spPr>
             <a:xfrm>
-              <a:off x="5160528" y="2073503"/>
+              <a:off x="5640985" y="2073503"/>
               <a:ext cx="0" cy="3649639"/>
             </a:xfrm>
             <a:custGeom>
@@ -2572,7 +2572,7 @@
           </p:nvSpPr>
           <p:spPr>
             <a:xfrm>
-              <a:off x="6933186" y="2073503"/>
+              <a:off x="7695561" y="2073503"/>
               <a:ext cx="0" cy="3649639"/>
             </a:xfrm>
             <a:custGeom>
@@ -2830,7 +2830,7 @@
           </p:nvSpPr>
           <p:spPr>
             <a:xfrm>
-              <a:off x="2501542" y="2073503"/>
+              <a:off x="2559122" y="2073503"/>
               <a:ext cx="0" cy="3649639"/>
             </a:xfrm>
             <a:custGeom>
@@ -2873,7 +2873,7 @@
           </p:nvSpPr>
           <p:spPr>
             <a:xfrm>
-              <a:off x="4274200" y="2073503"/>
+              <a:off x="4613698" y="2073503"/>
               <a:ext cx="0" cy="3649639"/>
             </a:xfrm>
             <a:custGeom>
@@ -2916,7 +2916,7 @@
           </p:nvSpPr>
           <p:spPr>
             <a:xfrm>
-              <a:off x="6046857" y="2073503"/>
+              <a:off x="6668273" y="2073503"/>
               <a:ext cx="0" cy="3649639"/>
             </a:xfrm>
             <a:custGeom>
@@ -2953,616 +2953,582 @@
         </p:sp>
         <p:sp>
           <p:nvSpPr>
-            <p:cNvPr id="20" name="pl20"/>
+            <p:cNvPr id="20" name="pg20"/>
             <p:cNvSpPr/>
             <p:nvPr/>
           </p:nvSpPr>
           <p:spPr>
             <a:xfrm>
-              <a:off x="7819515" y="2073503"/>
-              <a:ext cx="0" cy="3649639"/>
+              <a:off x="1172049" y="2073503"/>
+              <a:ext cx="7090630" cy="3398227"/>
             </a:xfrm>
             <a:custGeom>
               <a:avLst/>
               <a:pathLst>
-                <a:path w="0" h="3649639">
+                <a:path w="7090630" h="3398227">
                   <a:moveTo>
-                    <a:pt x="0" y="3649639"/>
+                    <a:pt x="900132" y="0"/>
                   </a:moveTo>
                   <a:lnTo>
-                    <a:pt x="0" y="0"/>
-                  </a:lnTo>
-                  <a:lnTo>
-                    <a:pt x="0" y="0"/>
-                  </a:lnTo>
-                </a:path>
-              </a:pathLst>
-            </a:custGeom>
-            <a:ln w="13550" cap="flat">
-              <a:solidFill>
-                <a:srgbClr val="EBEBEB">
-                  <a:alpha val="100000"/>
-                </a:srgbClr>
-              </a:solidFill>
-              <a:prstDash val="solid"/>
-              <a:round/>
-            </a:ln>
-          </p:spPr>
-          <p:txBody>
-            <a:bodyPr/>
-            <a:lstStyle/>
-            <a:p/>
-          </p:txBody>
-        </p:sp>
-        <p:sp>
-          <p:nvSpPr>
-            <p:cNvPr id="21" name="pg21"/>
-            <p:cNvSpPr/>
-            <p:nvPr/>
-          </p:nvSpPr>
-          <p:spPr>
-            <a:xfrm>
-              <a:off x="817517" y="2073503"/>
-              <a:ext cx="7392041" cy="3398227"/>
-            </a:xfrm>
-            <a:custGeom>
-              <a:avLst/>
-              <a:pathLst>
-                <a:path w="7392041" h="3398227">
-                  <a:moveTo>
-                    <a:pt x="715703" y="0"/>
-                  </a:moveTo>
-                  <a:lnTo>
-                    <a:pt x="749094" y="64764"/>
-                  </a:lnTo>
-                  <a:lnTo>
-                    <a:pt x="826337" y="208297"/>
-                  </a:lnTo>
-                  <a:lnTo>
-                    <a:pt x="903581" y="345804"/>
-                  </a:lnTo>
-                  <a:lnTo>
-                    <a:pt x="980824" y="477539"/>
-                  </a:lnTo>
-                  <a:lnTo>
-                    <a:pt x="1058068" y="603743"/>
-                  </a:lnTo>
-                  <a:lnTo>
-                    <a:pt x="1135311" y="724649"/>
-                  </a:lnTo>
-                  <a:lnTo>
-                    <a:pt x="1212555" y="840479"/>
-                  </a:lnTo>
-                  <a:lnTo>
-                    <a:pt x="1289799" y="951447"/>
-                  </a:lnTo>
-                  <a:lnTo>
-                    <a:pt x="1367042" y="1057756"/>
-                  </a:lnTo>
-                  <a:lnTo>
-                    <a:pt x="1444286" y="1159602"/>
-                  </a:lnTo>
-                  <a:lnTo>
-                    <a:pt x="1521529" y="1257172"/>
-                  </a:lnTo>
-                  <a:lnTo>
-                    <a:pt x="1598773" y="1350647"/>
-                  </a:lnTo>
-                  <a:lnTo>
-                    <a:pt x="1676016" y="1440197"/>
-                  </a:lnTo>
-                  <a:lnTo>
-                    <a:pt x="1753260" y="1525987"/>
-                  </a:lnTo>
-                  <a:lnTo>
-                    <a:pt x="1830504" y="1608176"/>
-                  </a:lnTo>
-                  <a:lnTo>
-                    <a:pt x="1907747" y="1686915"/>
-                  </a:lnTo>
-                  <a:lnTo>
-                    <a:pt x="1984991" y="1762348"/>
-                  </a:lnTo>
-                  <a:lnTo>
-                    <a:pt x="2062234" y="1834615"/>
-                  </a:lnTo>
-                  <a:lnTo>
-                    <a:pt x="2139478" y="1903847"/>
-                  </a:lnTo>
-                  <a:lnTo>
-                    <a:pt x="2216721" y="1970173"/>
-                  </a:lnTo>
-                  <a:lnTo>
-                    <a:pt x="2293965" y="2033715"/>
-                  </a:lnTo>
-                  <a:lnTo>
-                    <a:pt x="2371209" y="2094589"/>
-                  </a:lnTo>
-                  <a:lnTo>
-                    <a:pt x="2448452" y="2152908"/>
-                  </a:lnTo>
-                  <a:lnTo>
-                    <a:pt x="2525696" y="2208778"/>
-                  </a:lnTo>
-                  <a:lnTo>
-                    <a:pt x="2602939" y="2262303"/>
-                  </a:lnTo>
-                  <a:lnTo>
-                    <a:pt x="2680183" y="2313580"/>
-                  </a:lnTo>
-                  <a:lnTo>
-                    <a:pt x="2757426" y="2362705"/>
-                  </a:lnTo>
-                  <a:lnTo>
-                    <a:pt x="2834670" y="2409768"/>
-                  </a:lnTo>
-                  <a:lnTo>
-                    <a:pt x="2911914" y="2454855"/>
-                  </a:lnTo>
-                  <a:lnTo>
-                    <a:pt x="2989157" y="2498049"/>
-                  </a:lnTo>
-                  <a:lnTo>
-                    <a:pt x="3066401" y="2539430"/>
-                  </a:lnTo>
-                  <a:lnTo>
-                    <a:pt x="3143644" y="2579073"/>
-                  </a:lnTo>
-                  <a:lnTo>
-                    <a:pt x="3220888" y="2617053"/>
-                  </a:lnTo>
-                  <a:lnTo>
-                    <a:pt x="3298131" y="2653437"/>
-                  </a:lnTo>
-                  <a:lnTo>
-                    <a:pt x="3375375" y="2655711"/>
-                  </a:lnTo>
-                  <a:lnTo>
-                    <a:pt x="3452619" y="2657171"/>
-                  </a:lnTo>
-                  <a:lnTo>
-                    <a:pt x="3529862" y="2658629"/>
-                  </a:lnTo>
-                  <a:lnTo>
-                    <a:pt x="3607106" y="2660085"/>
-                  </a:lnTo>
-                  <a:lnTo>
-                    <a:pt x="3684349" y="2661537"/>
-                  </a:lnTo>
-                  <a:lnTo>
-                    <a:pt x="3761593" y="2662987"/>
-                  </a:lnTo>
-                  <a:lnTo>
-                    <a:pt x="3838836" y="2664435"/>
-                  </a:lnTo>
-                  <a:lnTo>
-                    <a:pt x="3916080" y="2665880"/>
-                  </a:lnTo>
-                  <a:lnTo>
-                    <a:pt x="3993324" y="2667322"/>
-                  </a:lnTo>
-                  <a:lnTo>
-                    <a:pt x="4070567" y="2668762"/>
-                  </a:lnTo>
-                  <a:lnTo>
-                    <a:pt x="4147811" y="2670200"/>
-                  </a:lnTo>
-                  <a:lnTo>
-                    <a:pt x="4225054" y="2671635"/>
-                  </a:lnTo>
-                  <a:lnTo>
-                    <a:pt x="4302298" y="2673067"/>
-                  </a:lnTo>
-                  <a:lnTo>
-                    <a:pt x="4379541" y="2674497"/>
-                  </a:lnTo>
-                  <a:lnTo>
-                    <a:pt x="4456785" y="2675924"/>
-                  </a:lnTo>
-                  <a:lnTo>
-                    <a:pt x="4534029" y="2677349"/>
-                  </a:lnTo>
-                  <a:lnTo>
-                    <a:pt x="4611272" y="2678771"/>
-                  </a:lnTo>
-                  <a:lnTo>
-                    <a:pt x="4688516" y="2680191"/>
-                  </a:lnTo>
-                  <a:lnTo>
-                    <a:pt x="4765759" y="2681608"/>
-                  </a:lnTo>
-                  <a:lnTo>
-                    <a:pt x="4843003" y="2683023"/>
-                  </a:lnTo>
-                  <a:lnTo>
-                    <a:pt x="4920246" y="2684435"/>
-                  </a:lnTo>
-                  <a:lnTo>
-                    <a:pt x="4997490" y="2685845"/>
-                  </a:lnTo>
-                  <a:lnTo>
-                    <a:pt x="5074734" y="2687252"/>
-                  </a:lnTo>
-                  <a:lnTo>
-                    <a:pt x="5151977" y="2688657"/>
-                  </a:lnTo>
-                  <a:lnTo>
-                    <a:pt x="5229221" y="2690059"/>
-                  </a:lnTo>
-                  <a:lnTo>
-                    <a:pt x="5306464" y="2691459"/>
-                  </a:lnTo>
-                  <a:lnTo>
-                    <a:pt x="5383708" y="2692856"/>
-                  </a:lnTo>
-                  <a:lnTo>
-                    <a:pt x="5460951" y="2694251"/>
-                  </a:lnTo>
-                  <a:lnTo>
-                    <a:pt x="5538195" y="2695644"/>
-                  </a:lnTo>
-                  <a:lnTo>
-                    <a:pt x="5615439" y="2697034"/>
-                  </a:lnTo>
-                  <a:lnTo>
-                    <a:pt x="5692682" y="2698421"/>
-                  </a:lnTo>
-                  <a:lnTo>
-                    <a:pt x="5769926" y="2699806"/>
-                  </a:lnTo>
-                  <a:lnTo>
-                    <a:pt x="5847169" y="2701189"/>
-                  </a:lnTo>
-                  <a:lnTo>
-                    <a:pt x="5924413" y="2702569"/>
-                  </a:lnTo>
-                  <a:lnTo>
-                    <a:pt x="6001656" y="2703947"/>
-                  </a:lnTo>
-                  <a:lnTo>
-                    <a:pt x="6078900" y="2705322"/>
-                  </a:lnTo>
-                  <a:lnTo>
-                    <a:pt x="6156144" y="2706695"/>
-                  </a:lnTo>
-                  <a:lnTo>
-                    <a:pt x="6233387" y="2708065"/>
-                  </a:lnTo>
-                  <a:lnTo>
-                    <a:pt x="6310631" y="2709434"/>
-                  </a:lnTo>
-                  <a:lnTo>
-                    <a:pt x="6387874" y="2710799"/>
-                  </a:lnTo>
-                  <a:lnTo>
-                    <a:pt x="6465118" y="2712162"/>
-                  </a:lnTo>
-                  <a:lnTo>
-                    <a:pt x="6542361" y="2713523"/>
-                  </a:lnTo>
-                  <a:lnTo>
-                    <a:pt x="6619605" y="2714882"/>
-                  </a:lnTo>
-                  <a:lnTo>
-                    <a:pt x="6696849" y="2716238"/>
-                  </a:lnTo>
-                  <a:lnTo>
-                    <a:pt x="6774092" y="2717591"/>
-                  </a:lnTo>
-                  <a:lnTo>
-                    <a:pt x="6851336" y="2718943"/>
-                  </a:lnTo>
-                  <a:lnTo>
-                    <a:pt x="6928579" y="2720292"/>
-                  </a:lnTo>
-                  <a:lnTo>
-                    <a:pt x="7005823" y="2721638"/>
-                  </a:lnTo>
-                  <a:lnTo>
-                    <a:pt x="7083066" y="2722982"/>
-                  </a:lnTo>
-                  <a:lnTo>
-                    <a:pt x="7160310" y="2724324"/>
-                  </a:lnTo>
-                  <a:lnTo>
-                    <a:pt x="7237554" y="2725663"/>
-                  </a:lnTo>
-                  <a:lnTo>
-                    <a:pt x="7314797" y="2727000"/>
-                  </a:lnTo>
-                  <a:lnTo>
-                    <a:pt x="7392041" y="2728335"/>
-                  </a:lnTo>
-                  <a:lnTo>
-                    <a:pt x="7392041" y="3398227"/>
-                  </a:lnTo>
-                  <a:lnTo>
-                    <a:pt x="7314797" y="3394480"/>
-                  </a:lnTo>
-                  <a:lnTo>
-                    <a:pt x="7237554" y="3390568"/>
-                  </a:lnTo>
-                  <a:lnTo>
-                    <a:pt x="7160310" y="3386485"/>
-                  </a:lnTo>
-                  <a:lnTo>
-                    <a:pt x="7083066" y="3382223"/>
-                  </a:lnTo>
-                  <a:lnTo>
-                    <a:pt x="7005823" y="3377774"/>
-                  </a:lnTo>
-                  <a:lnTo>
-                    <a:pt x="6928579" y="3373130"/>
-                  </a:lnTo>
-                  <a:lnTo>
-                    <a:pt x="6851336" y="3368283"/>
-                  </a:lnTo>
-                  <a:lnTo>
-                    <a:pt x="6774092" y="3363223"/>
-                  </a:lnTo>
-                  <a:lnTo>
-                    <a:pt x="6696849" y="3357942"/>
-                  </a:lnTo>
-                  <a:lnTo>
-                    <a:pt x="6619605" y="3352429"/>
-                  </a:lnTo>
-                  <a:lnTo>
-                    <a:pt x="6542361" y="3346674"/>
-                  </a:lnTo>
-                  <a:lnTo>
-                    <a:pt x="6465118" y="3340668"/>
-                  </a:lnTo>
-                  <a:lnTo>
-                    <a:pt x="6387874" y="3334398"/>
-                  </a:lnTo>
-                  <a:lnTo>
-                    <a:pt x="6310631" y="3327853"/>
-                  </a:lnTo>
-                  <a:lnTo>
-                    <a:pt x="6233387" y="3321022"/>
-                  </a:lnTo>
-                  <a:lnTo>
-                    <a:pt x="6156144" y="3313891"/>
-                  </a:lnTo>
-                  <a:lnTo>
-                    <a:pt x="6078900" y="3306448"/>
-                  </a:lnTo>
-                  <a:lnTo>
-                    <a:pt x="6001656" y="3298679"/>
-                  </a:lnTo>
-                  <a:lnTo>
-                    <a:pt x="5924413" y="3290569"/>
-                  </a:lnTo>
-                  <a:lnTo>
-                    <a:pt x="5847169" y="3282104"/>
-                  </a:lnTo>
-                  <a:lnTo>
-                    <a:pt x="5769926" y="3273268"/>
-                  </a:lnTo>
-                  <a:lnTo>
-                    <a:pt x="5692682" y="3264044"/>
-                  </a:lnTo>
-                  <a:lnTo>
-                    <a:pt x="5615439" y="3254417"/>
-                  </a:lnTo>
-                  <a:lnTo>
-                    <a:pt x="5538195" y="3244367"/>
-                  </a:lnTo>
-                  <a:lnTo>
-                    <a:pt x="5460951" y="3233877"/>
-                  </a:lnTo>
-                  <a:lnTo>
-                    <a:pt x="5383708" y="3222928"/>
-                  </a:lnTo>
-                  <a:lnTo>
-                    <a:pt x="5306464" y="3211499"/>
-                  </a:lnTo>
-                  <a:lnTo>
-                    <a:pt x="5229221" y="3199568"/>
-                  </a:lnTo>
-                  <a:lnTo>
-                    <a:pt x="5151977" y="3187116"/>
-                  </a:lnTo>
-                  <a:lnTo>
-                    <a:pt x="5074734" y="3174117"/>
-                  </a:lnTo>
-                  <a:lnTo>
-                    <a:pt x="4997490" y="3160549"/>
-                  </a:lnTo>
-                  <a:lnTo>
-                    <a:pt x="4920246" y="3146386"/>
-                  </a:lnTo>
-                  <a:lnTo>
-                    <a:pt x="4843003" y="3131602"/>
-                  </a:lnTo>
-                  <a:lnTo>
-                    <a:pt x="4765759" y="3116171"/>
-                  </a:lnTo>
-                  <a:lnTo>
-                    <a:pt x="4688516" y="3100064"/>
-                  </a:lnTo>
-                  <a:lnTo>
-                    <a:pt x="4611272" y="3083250"/>
-                  </a:lnTo>
-                  <a:lnTo>
-                    <a:pt x="4534029" y="3065700"/>
-                  </a:lnTo>
-                  <a:lnTo>
-                    <a:pt x="4456785" y="3047381"/>
-                  </a:lnTo>
-                  <a:lnTo>
-                    <a:pt x="4379541" y="3028259"/>
-                  </a:lnTo>
-                  <a:lnTo>
-                    <a:pt x="4302298" y="3008300"/>
-                  </a:lnTo>
-                  <a:lnTo>
-                    <a:pt x="4225054" y="2987465"/>
-                  </a:lnTo>
-                  <a:lnTo>
-                    <a:pt x="4147811" y="2965718"/>
-                  </a:lnTo>
-                  <a:lnTo>
-                    <a:pt x="4070567" y="2943017"/>
-                  </a:lnTo>
-                  <a:lnTo>
-                    <a:pt x="3993324" y="2919322"/>
-                  </a:lnTo>
-                  <a:lnTo>
-                    <a:pt x="3916080" y="2894588"/>
-                  </a:lnTo>
-                  <a:lnTo>
-                    <a:pt x="3838836" y="2868771"/>
-                  </a:lnTo>
-                  <a:lnTo>
-                    <a:pt x="3761593" y="2841822"/>
-                  </a:lnTo>
-                  <a:lnTo>
-                    <a:pt x="3684349" y="2813692"/>
-                  </a:lnTo>
-                  <a:lnTo>
-                    <a:pt x="3607106" y="2784330"/>
-                  </a:lnTo>
-                  <a:lnTo>
-                    <a:pt x="3529862" y="2753681"/>
-                  </a:lnTo>
-                  <a:lnTo>
-                    <a:pt x="3452619" y="2721689"/>
-                  </a:lnTo>
-                  <a:lnTo>
-                    <a:pt x="3375375" y="2688295"/>
-                  </a:lnTo>
-                  <a:lnTo>
-                    <a:pt x="3298131" y="2654248"/>
-                  </a:lnTo>
-                  <a:lnTo>
-                    <a:pt x="3220888" y="2652783"/>
-                  </a:lnTo>
-                  <a:lnTo>
-                    <a:pt x="3143644" y="2651314"/>
-                  </a:lnTo>
-                  <a:lnTo>
-                    <a:pt x="3066401" y="2649844"/>
-                  </a:lnTo>
-                  <a:lnTo>
-                    <a:pt x="2989157" y="2648370"/>
-                  </a:lnTo>
-                  <a:lnTo>
-                    <a:pt x="2911914" y="2646894"/>
-                  </a:lnTo>
-                  <a:lnTo>
-                    <a:pt x="2834670" y="2645416"/>
-                  </a:lnTo>
-                  <a:lnTo>
-                    <a:pt x="2757426" y="2643935"/>
-                  </a:lnTo>
-                  <a:lnTo>
-                    <a:pt x="2680183" y="2642451"/>
-                  </a:lnTo>
-                  <a:lnTo>
-                    <a:pt x="2602939" y="2640964"/>
-                  </a:lnTo>
-                  <a:lnTo>
-                    <a:pt x="2525696" y="2639475"/>
-                  </a:lnTo>
-                  <a:lnTo>
-                    <a:pt x="2448452" y="2637984"/>
-                  </a:lnTo>
-                  <a:lnTo>
-                    <a:pt x="2371209" y="2636489"/>
-                  </a:lnTo>
-                  <a:lnTo>
-                    <a:pt x="2293965" y="2634992"/>
-                  </a:lnTo>
-                  <a:lnTo>
-                    <a:pt x="2216721" y="2633493"/>
-                  </a:lnTo>
-                  <a:lnTo>
-                    <a:pt x="2139478" y="2631991"/>
-                  </a:lnTo>
-                  <a:lnTo>
-                    <a:pt x="2062234" y="2630486"/>
-                  </a:lnTo>
-                  <a:lnTo>
-                    <a:pt x="1984991" y="2628978"/>
-                  </a:lnTo>
-                  <a:lnTo>
-                    <a:pt x="1907747" y="2627468"/>
-                  </a:lnTo>
-                  <a:lnTo>
-                    <a:pt x="1830504" y="2625955"/>
-                  </a:lnTo>
-                  <a:lnTo>
-                    <a:pt x="1753260" y="2624439"/>
-                  </a:lnTo>
-                  <a:lnTo>
-                    <a:pt x="1676016" y="2622921"/>
-                  </a:lnTo>
-                  <a:lnTo>
-                    <a:pt x="1598773" y="2621400"/>
-                  </a:lnTo>
-                  <a:lnTo>
-                    <a:pt x="1521529" y="2619877"/>
-                  </a:lnTo>
-                  <a:lnTo>
-                    <a:pt x="1444286" y="2618350"/>
-                  </a:lnTo>
-                  <a:lnTo>
-                    <a:pt x="1367042" y="2616821"/>
-                  </a:lnTo>
-                  <a:lnTo>
-                    <a:pt x="1289799" y="2615290"/>
-                  </a:lnTo>
-                  <a:lnTo>
-                    <a:pt x="1212555" y="2613755"/>
-                  </a:lnTo>
-                  <a:lnTo>
-                    <a:pt x="1135311" y="2612218"/>
-                  </a:lnTo>
-                  <a:lnTo>
-                    <a:pt x="1058068" y="2610678"/>
-                  </a:lnTo>
-                  <a:lnTo>
-                    <a:pt x="980824" y="2609136"/>
-                  </a:lnTo>
-                  <a:lnTo>
-                    <a:pt x="903581" y="2607590"/>
-                  </a:lnTo>
-                  <a:lnTo>
-                    <a:pt x="826337" y="2606042"/>
-                  </a:lnTo>
-                  <a:lnTo>
-                    <a:pt x="749094" y="2604492"/>
-                  </a:lnTo>
-                  <a:lnTo>
-                    <a:pt x="671850" y="2602938"/>
-                  </a:lnTo>
-                  <a:lnTo>
-                    <a:pt x="594606" y="2601382"/>
-                  </a:lnTo>
-                  <a:lnTo>
-                    <a:pt x="517363" y="2599823"/>
-                  </a:lnTo>
-                  <a:lnTo>
-                    <a:pt x="440119" y="2598261"/>
-                  </a:lnTo>
-                  <a:lnTo>
-                    <a:pt x="362876" y="2596697"/>
-                  </a:lnTo>
-                  <a:lnTo>
-                    <a:pt x="285632" y="2595130"/>
-                  </a:lnTo>
-                  <a:lnTo>
-                    <a:pt x="208389" y="2593560"/>
-                  </a:lnTo>
-                  <a:lnTo>
-                    <a:pt x="131145" y="2591987"/>
-                  </a:lnTo>
-                  <a:lnTo>
-                    <a:pt x="53901" y="2590411"/>
-                  </a:lnTo>
-                  <a:lnTo>
-                    <a:pt x="0" y="2589310"/>
+                    <a:pt x="931092" y="64764"/>
+                  </a:lnTo>
+                  <a:lnTo>
+                    <a:pt x="1002715" y="208297"/>
+                  </a:lnTo>
+                  <a:lnTo>
+                    <a:pt x="1074337" y="345804"/>
+                  </a:lnTo>
+                  <a:lnTo>
+                    <a:pt x="1145960" y="477539"/>
+                  </a:lnTo>
+                  <a:lnTo>
+                    <a:pt x="1217582" y="603743"/>
+                  </a:lnTo>
+                  <a:lnTo>
+                    <a:pt x="1289205" y="724649"/>
+                  </a:lnTo>
+                  <a:lnTo>
+                    <a:pt x="1360827" y="840479"/>
+                  </a:lnTo>
+                  <a:lnTo>
+                    <a:pt x="1432450" y="951447"/>
+                  </a:lnTo>
+                  <a:lnTo>
+                    <a:pt x="1504073" y="1057756"/>
+                  </a:lnTo>
+                  <a:lnTo>
+                    <a:pt x="1575695" y="1159602"/>
+                  </a:lnTo>
+                  <a:lnTo>
+                    <a:pt x="1647318" y="1257172"/>
+                  </a:lnTo>
+                  <a:lnTo>
+                    <a:pt x="1718940" y="1350647"/>
+                  </a:lnTo>
+                  <a:lnTo>
+                    <a:pt x="1790563" y="1440197"/>
+                  </a:lnTo>
+                  <a:lnTo>
+                    <a:pt x="1862185" y="1525987"/>
+                  </a:lnTo>
+                  <a:lnTo>
+                    <a:pt x="1933808" y="1608176"/>
+                  </a:lnTo>
+                  <a:lnTo>
+                    <a:pt x="2005430" y="1686915"/>
+                  </a:lnTo>
+                  <a:lnTo>
+                    <a:pt x="2077053" y="1762348"/>
+                  </a:lnTo>
+                  <a:lnTo>
+                    <a:pt x="2148675" y="1834615"/>
+                  </a:lnTo>
+                  <a:lnTo>
+                    <a:pt x="2220298" y="1903847"/>
+                  </a:lnTo>
+                  <a:lnTo>
+                    <a:pt x="2291920" y="1970173"/>
+                  </a:lnTo>
+                  <a:lnTo>
+                    <a:pt x="2363543" y="2033715"/>
+                  </a:lnTo>
+                  <a:lnTo>
+                    <a:pt x="2435165" y="2094589"/>
+                  </a:lnTo>
+                  <a:lnTo>
+                    <a:pt x="2506788" y="2152908"/>
+                  </a:lnTo>
+                  <a:lnTo>
+                    <a:pt x="2578410" y="2208778"/>
+                  </a:lnTo>
+                  <a:lnTo>
+                    <a:pt x="2650033" y="2262303"/>
+                  </a:lnTo>
+                  <a:lnTo>
+                    <a:pt x="2721655" y="2313580"/>
+                  </a:lnTo>
+                  <a:lnTo>
+                    <a:pt x="2793278" y="2362705"/>
+                  </a:lnTo>
+                  <a:lnTo>
+                    <a:pt x="2864901" y="2409768"/>
+                  </a:lnTo>
+                  <a:lnTo>
+                    <a:pt x="2936523" y="2454855"/>
+                  </a:lnTo>
+                  <a:lnTo>
+                    <a:pt x="3008146" y="2498049"/>
+                  </a:lnTo>
+                  <a:lnTo>
+                    <a:pt x="3079768" y="2539430"/>
+                  </a:lnTo>
+                  <a:lnTo>
+                    <a:pt x="3151391" y="2579073"/>
+                  </a:lnTo>
+                  <a:lnTo>
+                    <a:pt x="3223013" y="2617053"/>
+                  </a:lnTo>
+                  <a:lnTo>
+                    <a:pt x="3294636" y="2653437"/>
+                  </a:lnTo>
+                  <a:lnTo>
+                    <a:pt x="3366258" y="2655711"/>
+                  </a:lnTo>
+                  <a:lnTo>
+                    <a:pt x="3437881" y="2657171"/>
+                  </a:lnTo>
+                  <a:lnTo>
+                    <a:pt x="3509503" y="2658629"/>
+                  </a:lnTo>
+                  <a:lnTo>
+                    <a:pt x="3581126" y="2660085"/>
+                  </a:lnTo>
+                  <a:lnTo>
+                    <a:pt x="3652748" y="2661537"/>
+                  </a:lnTo>
+                  <a:lnTo>
+                    <a:pt x="3724371" y="2662987"/>
+                  </a:lnTo>
+                  <a:lnTo>
+                    <a:pt x="3795993" y="2664435"/>
+                  </a:lnTo>
+                  <a:lnTo>
+                    <a:pt x="3867616" y="2665880"/>
+                  </a:lnTo>
+                  <a:lnTo>
+                    <a:pt x="3939238" y="2667322"/>
+                  </a:lnTo>
+                  <a:lnTo>
+                    <a:pt x="4010861" y="2668762"/>
+                  </a:lnTo>
+                  <a:lnTo>
+                    <a:pt x="4082483" y="2670200"/>
+                  </a:lnTo>
+                  <a:lnTo>
+                    <a:pt x="4154106" y="2671635"/>
+                  </a:lnTo>
+                  <a:lnTo>
+                    <a:pt x="4225729" y="2673067"/>
+                  </a:lnTo>
+                  <a:lnTo>
+                    <a:pt x="4297351" y="2674497"/>
+                  </a:lnTo>
+                  <a:lnTo>
+                    <a:pt x="4368974" y="2675924"/>
+                  </a:lnTo>
+                  <a:lnTo>
+                    <a:pt x="4440596" y="2677349"/>
+                  </a:lnTo>
+                  <a:lnTo>
+                    <a:pt x="4512219" y="2678771"/>
+                  </a:lnTo>
+                  <a:lnTo>
+                    <a:pt x="4583841" y="2680191"/>
+                  </a:lnTo>
+                  <a:lnTo>
+                    <a:pt x="4655464" y="2681608"/>
+                  </a:lnTo>
+                  <a:lnTo>
+                    <a:pt x="4727086" y="2683023"/>
+                  </a:lnTo>
+                  <a:lnTo>
+                    <a:pt x="4798709" y="2684435"/>
+                  </a:lnTo>
+                  <a:lnTo>
+                    <a:pt x="4870331" y="2685845"/>
+                  </a:lnTo>
+                  <a:lnTo>
+                    <a:pt x="4941954" y="2687252"/>
+                  </a:lnTo>
+                  <a:lnTo>
+                    <a:pt x="5013576" y="2688657"/>
+                  </a:lnTo>
+                  <a:lnTo>
+                    <a:pt x="5085199" y="2690059"/>
+                  </a:lnTo>
+                  <a:lnTo>
+                    <a:pt x="5156821" y="2691459"/>
+                  </a:lnTo>
+                  <a:lnTo>
+                    <a:pt x="5228444" y="2692856"/>
+                  </a:lnTo>
+                  <a:lnTo>
+                    <a:pt x="5300066" y="2694251"/>
+                  </a:lnTo>
+                  <a:lnTo>
+                    <a:pt x="5371689" y="2695644"/>
+                  </a:lnTo>
+                  <a:lnTo>
+                    <a:pt x="5443311" y="2697034"/>
+                  </a:lnTo>
+                  <a:lnTo>
+                    <a:pt x="5514934" y="2698421"/>
+                  </a:lnTo>
+                  <a:lnTo>
+                    <a:pt x="5586557" y="2699806"/>
+                  </a:lnTo>
+                  <a:lnTo>
+                    <a:pt x="5658179" y="2701189"/>
+                  </a:lnTo>
+                  <a:lnTo>
+                    <a:pt x="5729802" y="2702569"/>
+                  </a:lnTo>
+                  <a:lnTo>
+                    <a:pt x="5801424" y="2703947"/>
+                  </a:lnTo>
+                  <a:lnTo>
+                    <a:pt x="5873047" y="2705322"/>
+                  </a:lnTo>
+                  <a:lnTo>
+                    <a:pt x="5944669" y="2706695"/>
+                  </a:lnTo>
+                  <a:lnTo>
+                    <a:pt x="6016292" y="2708065"/>
+                  </a:lnTo>
+                  <a:lnTo>
+                    <a:pt x="6087914" y="2709434"/>
+                  </a:lnTo>
+                  <a:lnTo>
+                    <a:pt x="6159537" y="2710799"/>
+                  </a:lnTo>
+                  <a:lnTo>
+                    <a:pt x="6231159" y="2712162"/>
+                  </a:lnTo>
+                  <a:lnTo>
+                    <a:pt x="6302782" y="2713523"/>
+                  </a:lnTo>
+                  <a:lnTo>
+                    <a:pt x="6374404" y="2714882"/>
+                  </a:lnTo>
+                  <a:lnTo>
+                    <a:pt x="6446027" y="2716238"/>
+                  </a:lnTo>
+                  <a:lnTo>
+                    <a:pt x="6517649" y="2717591"/>
+                  </a:lnTo>
+                  <a:lnTo>
+                    <a:pt x="6589272" y="2718943"/>
+                  </a:lnTo>
+                  <a:lnTo>
+                    <a:pt x="6660894" y="2720292"/>
+                  </a:lnTo>
+                  <a:lnTo>
+                    <a:pt x="6732517" y="2721638"/>
+                  </a:lnTo>
+                  <a:lnTo>
+                    <a:pt x="6804139" y="2722982"/>
+                  </a:lnTo>
+                  <a:lnTo>
+                    <a:pt x="6875762" y="2724324"/>
+                  </a:lnTo>
+                  <a:lnTo>
+                    <a:pt x="6947385" y="2725663"/>
+                  </a:lnTo>
+                  <a:lnTo>
+                    <a:pt x="7019007" y="2727000"/>
+                  </a:lnTo>
+                  <a:lnTo>
+                    <a:pt x="7090630" y="2728335"/>
+                  </a:lnTo>
+                  <a:lnTo>
+                    <a:pt x="7090630" y="3398227"/>
+                  </a:lnTo>
+                  <a:lnTo>
+                    <a:pt x="7019007" y="3394480"/>
+                  </a:lnTo>
+                  <a:lnTo>
+                    <a:pt x="6947385" y="3390568"/>
+                  </a:lnTo>
+                  <a:lnTo>
+                    <a:pt x="6875762" y="3386485"/>
+                  </a:lnTo>
+                  <a:lnTo>
+                    <a:pt x="6804139" y="3382223"/>
+                  </a:lnTo>
+                  <a:lnTo>
+                    <a:pt x="6732517" y="3377774"/>
+                  </a:lnTo>
+                  <a:lnTo>
+                    <a:pt x="6660894" y="3373130"/>
+                  </a:lnTo>
+                  <a:lnTo>
+                    <a:pt x="6589272" y="3368283"/>
+                  </a:lnTo>
+                  <a:lnTo>
+                    <a:pt x="6517649" y="3363223"/>
+                  </a:lnTo>
+                  <a:lnTo>
+                    <a:pt x="6446027" y="3357942"/>
+                  </a:lnTo>
+                  <a:lnTo>
+                    <a:pt x="6374404" y="3352429"/>
+                  </a:lnTo>
+                  <a:lnTo>
+                    <a:pt x="6302782" y="3346674"/>
+                  </a:lnTo>
+                  <a:lnTo>
+                    <a:pt x="6231159" y="3340668"/>
+                  </a:lnTo>
+                  <a:lnTo>
+                    <a:pt x="6159537" y="3334398"/>
+                  </a:lnTo>
+                  <a:lnTo>
+                    <a:pt x="6087914" y="3327853"/>
+                  </a:lnTo>
+                  <a:lnTo>
+                    <a:pt x="6016292" y="3321022"/>
+                  </a:lnTo>
+                  <a:lnTo>
+                    <a:pt x="5944669" y="3313891"/>
+                  </a:lnTo>
+                  <a:lnTo>
+                    <a:pt x="5873047" y="3306448"/>
+                  </a:lnTo>
+                  <a:lnTo>
+                    <a:pt x="5801424" y="3298679"/>
+                  </a:lnTo>
+                  <a:lnTo>
+                    <a:pt x="5729802" y="3290569"/>
+                  </a:lnTo>
+                  <a:lnTo>
+                    <a:pt x="5658179" y="3282104"/>
+                  </a:lnTo>
+                  <a:lnTo>
+                    <a:pt x="5586557" y="3273268"/>
+                  </a:lnTo>
+                  <a:lnTo>
+                    <a:pt x="5514934" y="3264044"/>
+                  </a:lnTo>
+                  <a:lnTo>
+                    <a:pt x="5443311" y="3254417"/>
+                  </a:lnTo>
+                  <a:lnTo>
+                    <a:pt x="5371689" y="3244367"/>
+                  </a:lnTo>
+                  <a:lnTo>
+                    <a:pt x="5300066" y="3233877"/>
+                  </a:lnTo>
+                  <a:lnTo>
+                    <a:pt x="5228444" y="3222928"/>
+                  </a:lnTo>
+                  <a:lnTo>
+                    <a:pt x="5156821" y="3211499"/>
+                  </a:lnTo>
+                  <a:lnTo>
+                    <a:pt x="5085199" y="3199568"/>
+                  </a:lnTo>
+                  <a:lnTo>
+                    <a:pt x="5013576" y="3187116"/>
+                  </a:lnTo>
+                  <a:lnTo>
+                    <a:pt x="4941954" y="3174117"/>
+                  </a:lnTo>
+                  <a:lnTo>
+                    <a:pt x="4870331" y="3160549"/>
+                  </a:lnTo>
+                  <a:lnTo>
+                    <a:pt x="4798709" y="3146386"/>
+                  </a:lnTo>
+                  <a:lnTo>
+                    <a:pt x="4727086" y="3131602"/>
+                  </a:lnTo>
+                  <a:lnTo>
+                    <a:pt x="4655464" y="3116171"/>
+                  </a:lnTo>
+                  <a:lnTo>
+                    <a:pt x="4583841" y="3100064"/>
+                  </a:lnTo>
+                  <a:lnTo>
+                    <a:pt x="4512219" y="3083250"/>
+                  </a:lnTo>
+                  <a:lnTo>
+                    <a:pt x="4440596" y="3065700"/>
+                  </a:lnTo>
+                  <a:lnTo>
+                    <a:pt x="4368974" y="3047381"/>
+                  </a:lnTo>
+                  <a:lnTo>
+                    <a:pt x="4297351" y="3028259"/>
+                  </a:lnTo>
+                  <a:lnTo>
+                    <a:pt x="4225729" y="3008300"/>
+                  </a:lnTo>
+                  <a:lnTo>
+                    <a:pt x="4154106" y="2987465"/>
+                  </a:lnTo>
+                  <a:lnTo>
+                    <a:pt x="4082483" y="2965718"/>
+                  </a:lnTo>
+                  <a:lnTo>
+                    <a:pt x="4010861" y="2943017"/>
+                  </a:lnTo>
+                  <a:lnTo>
+                    <a:pt x="3939238" y="2919322"/>
+                  </a:lnTo>
+                  <a:lnTo>
+                    <a:pt x="3867616" y="2894588"/>
+                  </a:lnTo>
+                  <a:lnTo>
+                    <a:pt x="3795993" y="2868771"/>
+                  </a:lnTo>
+                  <a:lnTo>
+                    <a:pt x="3724371" y="2841822"/>
+                  </a:lnTo>
+                  <a:lnTo>
+                    <a:pt x="3652748" y="2813692"/>
+                  </a:lnTo>
+                  <a:lnTo>
+                    <a:pt x="3581126" y="2784330"/>
+                  </a:lnTo>
+                  <a:lnTo>
+                    <a:pt x="3509503" y="2753681"/>
+                  </a:lnTo>
+                  <a:lnTo>
+                    <a:pt x="3437881" y="2721689"/>
+                  </a:lnTo>
+                  <a:lnTo>
+                    <a:pt x="3366258" y="2688295"/>
+                  </a:lnTo>
+                  <a:lnTo>
+                    <a:pt x="3294636" y="2654248"/>
+                  </a:lnTo>
+                  <a:lnTo>
+                    <a:pt x="3223013" y="2652783"/>
+                  </a:lnTo>
+                  <a:lnTo>
+                    <a:pt x="3151391" y="2651314"/>
+                  </a:lnTo>
+                  <a:lnTo>
+                    <a:pt x="3079768" y="2649844"/>
+                  </a:lnTo>
+                  <a:lnTo>
+                    <a:pt x="3008146" y="2648370"/>
+                  </a:lnTo>
+                  <a:lnTo>
+                    <a:pt x="2936523" y="2646894"/>
+                  </a:lnTo>
+                  <a:lnTo>
+                    <a:pt x="2864901" y="2645416"/>
+                  </a:lnTo>
+                  <a:lnTo>
+                    <a:pt x="2793278" y="2643935"/>
+                  </a:lnTo>
+                  <a:lnTo>
+                    <a:pt x="2721655" y="2642451"/>
+                  </a:lnTo>
+                  <a:lnTo>
+                    <a:pt x="2650033" y="2640964"/>
+                  </a:lnTo>
+                  <a:lnTo>
+                    <a:pt x="2578410" y="2639475"/>
+                  </a:lnTo>
+                  <a:lnTo>
+                    <a:pt x="2506788" y="2637984"/>
+                  </a:lnTo>
+                  <a:lnTo>
+                    <a:pt x="2435165" y="2636489"/>
+                  </a:lnTo>
+                  <a:lnTo>
+                    <a:pt x="2363543" y="2634992"/>
+                  </a:lnTo>
+                  <a:lnTo>
+                    <a:pt x="2291920" y="2633493"/>
+                  </a:lnTo>
+                  <a:lnTo>
+                    <a:pt x="2220298" y="2631991"/>
+                  </a:lnTo>
+                  <a:lnTo>
+                    <a:pt x="2148675" y="2630486"/>
+                  </a:lnTo>
+                  <a:lnTo>
+                    <a:pt x="2077053" y="2628978"/>
+                  </a:lnTo>
+                  <a:lnTo>
+                    <a:pt x="2005430" y="2627468"/>
+                  </a:lnTo>
+                  <a:lnTo>
+                    <a:pt x="1933808" y="2625955"/>
+                  </a:lnTo>
+                  <a:lnTo>
+                    <a:pt x="1862185" y="2624439"/>
+                  </a:lnTo>
+                  <a:lnTo>
+                    <a:pt x="1790563" y="2622921"/>
+                  </a:lnTo>
+                  <a:lnTo>
+                    <a:pt x="1718940" y="2621400"/>
+                  </a:lnTo>
+                  <a:lnTo>
+                    <a:pt x="1647318" y="2619877"/>
+                  </a:lnTo>
+                  <a:lnTo>
+                    <a:pt x="1575695" y="2618350"/>
+                  </a:lnTo>
+                  <a:lnTo>
+                    <a:pt x="1504073" y="2616821"/>
+                  </a:lnTo>
+                  <a:lnTo>
+                    <a:pt x="1432450" y="2615290"/>
+                  </a:lnTo>
+                  <a:lnTo>
+                    <a:pt x="1360827" y="2613755"/>
+                  </a:lnTo>
+                  <a:lnTo>
+                    <a:pt x="1289205" y="2612218"/>
+                  </a:lnTo>
+                  <a:lnTo>
+                    <a:pt x="1217582" y="2610678"/>
+                  </a:lnTo>
+                  <a:lnTo>
+                    <a:pt x="1145960" y="2609136"/>
+                  </a:lnTo>
+                  <a:lnTo>
+                    <a:pt x="1074337" y="2607590"/>
+                  </a:lnTo>
+                  <a:lnTo>
+                    <a:pt x="1002715" y="2606042"/>
+                  </a:lnTo>
+                  <a:lnTo>
+                    <a:pt x="931092" y="2604492"/>
+                  </a:lnTo>
+                  <a:lnTo>
+                    <a:pt x="859470" y="2602938"/>
+                  </a:lnTo>
+                  <a:lnTo>
+                    <a:pt x="787847" y="2601382"/>
+                  </a:lnTo>
+                  <a:lnTo>
+                    <a:pt x="716225" y="2599823"/>
+                  </a:lnTo>
+                  <a:lnTo>
+                    <a:pt x="644602" y="2598261"/>
+                  </a:lnTo>
+                  <a:lnTo>
+                    <a:pt x="572980" y="2596697"/>
+                  </a:lnTo>
+                  <a:lnTo>
+                    <a:pt x="501357" y="2595130"/>
+                  </a:lnTo>
+                  <a:lnTo>
+                    <a:pt x="429735" y="2593560"/>
+                  </a:lnTo>
+                  <a:lnTo>
+                    <a:pt x="358112" y="2591987"/>
+                  </a:lnTo>
+                  <a:lnTo>
+                    <a:pt x="286490" y="2590411"/>
+                  </a:lnTo>
+                  <a:lnTo>
+                    <a:pt x="214867" y="2588833"/>
+                  </a:lnTo>
+                  <a:lnTo>
+                    <a:pt x="143245" y="2587252"/>
+                  </a:lnTo>
+                  <a:lnTo>
+                    <a:pt x="71622" y="2585668"/>
+                  </a:lnTo>
+                  <a:lnTo>
+                    <a:pt x="0" y="2584081"/>
                   </a:lnTo>
                   <a:close/>
                 </a:path>
@@ -3582,282 +3548,607 @@
         </p:sp>
         <p:sp>
           <p:nvSpPr>
+            <p:cNvPr id="21" name="pl21"/>
+            <p:cNvSpPr/>
+            <p:nvPr/>
+          </p:nvSpPr>
+          <p:spPr>
+            <a:xfrm>
+              <a:off x="2072181" y="2073503"/>
+              <a:ext cx="6190497" cy="2728335"/>
+            </a:xfrm>
+            <a:custGeom>
+              <a:avLst/>
+              <a:pathLst>
+                <a:path w="6190497" h="2728335">
+                  <a:moveTo>
+                    <a:pt x="0" y="0"/>
+                  </a:moveTo>
+                  <a:lnTo>
+                    <a:pt x="30960" y="64764"/>
+                  </a:lnTo>
+                  <a:lnTo>
+                    <a:pt x="102582" y="208297"/>
+                  </a:lnTo>
+                  <a:lnTo>
+                    <a:pt x="174205" y="345804"/>
+                  </a:lnTo>
+                  <a:lnTo>
+                    <a:pt x="245827" y="477539"/>
+                  </a:lnTo>
+                  <a:lnTo>
+                    <a:pt x="317450" y="603743"/>
+                  </a:lnTo>
+                  <a:lnTo>
+                    <a:pt x="389072" y="724649"/>
+                  </a:lnTo>
+                  <a:lnTo>
+                    <a:pt x="460695" y="840479"/>
+                  </a:lnTo>
+                  <a:lnTo>
+                    <a:pt x="532318" y="951447"/>
+                  </a:lnTo>
+                  <a:lnTo>
+                    <a:pt x="603940" y="1057756"/>
+                  </a:lnTo>
+                  <a:lnTo>
+                    <a:pt x="675563" y="1159602"/>
+                  </a:lnTo>
+                  <a:lnTo>
+                    <a:pt x="747185" y="1257172"/>
+                  </a:lnTo>
+                  <a:lnTo>
+                    <a:pt x="818808" y="1350647"/>
+                  </a:lnTo>
+                  <a:lnTo>
+                    <a:pt x="890430" y="1440197"/>
+                  </a:lnTo>
+                  <a:lnTo>
+                    <a:pt x="962053" y="1525987"/>
+                  </a:lnTo>
+                  <a:lnTo>
+                    <a:pt x="1033675" y="1608176"/>
+                  </a:lnTo>
+                  <a:lnTo>
+                    <a:pt x="1105298" y="1686915"/>
+                  </a:lnTo>
+                  <a:lnTo>
+                    <a:pt x="1176920" y="1762348"/>
+                  </a:lnTo>
+                  <a:lnTo>
+                    <a:pt x="1248543" y="1834615"/>
+                  </a:lnTo>
+                  <a:lnTo>
+                    <a:pt x="1320165" y="1903847"/>
+                  </a:lnTo>
+                  <a:lnTo>
+                    <a:pt x="1391788" y="1970173"/>
+                  </a:lnTo>
+                  <a:lnTo>
+                    <a:pt x="1463410" y="2033715"/>
+                  </a:lnTo>
+                  <a:lnTo>
+                    <a:pt x="1535033" y="2094589"/>
+                  </a:lnTo>
+                  <a:lnTo>
+                    <a:pt x="1606655" y="2152908"/>
+                  </a:lnTo>
+                  <a:lnTo>
+                    <a:pt x="1678278" y="2208778"/>
+                  </a:lnTo>
+                  <a:lnTo>
+                    <a:pt x="1749900" y="2262303"/>
+                  </a:lnTo>
+                  <a:lnTo>
+                    <a:pt x="1821523" y="2313580"/>
+                  </a:lnTo>
+                  <a:lnTo>
+                    <a:pt x="1893146" y="2362705"/>
+                  </a:lnTo>
+                  <a:lnTo>
+                    <a:pt x="1964768" y="2409768"/>
+                  </a:lnTo>
+                  <a:lnTo>
+                    <a:pt x="2036391" y="2454855"/>
+                  </a:lnTo>
+                  <a:lnTo>
+                    <a:pt x="2108013" y="2498049"/>
+                  </a:lnTo>
+                  <a:lnTo>
+                    <a:pt x="2179636" y="2539430"/>
+                  </a:lnTo>
+                  <a:lnTo>
+                    <a:pt x="2251258" y="2579073"/>
+                  </a:lnTo>
+                  <a:lnTo>
+                    <a:pt x="2322881" y="2617053"/>
+                  </a:lnTo>
+                  <a:lnTo>
+                    <a:pt x="2394503" y="2653437"/>
+                  </a:lnTo>
+                  <a:lnTo>
+                    <a:pt x="2466126" y="2655711"/>
+                  </a:lnTo>
+                  <a:lnTo>
+                    <a:pt x="2537748" y="2657171"/>
+                  </a:lnTo>
+                  <a:lnTo>
+                    <a:pt x="2609371" y="2658629"/>
+                  </a:lnTo>
+                  <a:lnTo>
+                    <a:pt x="2680993" y="2660085"/>
+                  </a:lnTo>
+                  <a:lnTo>
+                    <a:pt x="2752616" y="2661537"/>
+                  </a:lnTo>
+                  <a:lnTo>
+                    <a:pt x="2824238" y="2662987"/>
+                  </a:lnTo>
+                  <a:lnTo>
+                    <a:pt x="2895861" y="2664435"/>
+                  </a:lnTo>
+                  <a:lnTo>
+                    <a:pt x="2967483" y="2665880"/>
+                  </a:lnTo>
+                  <a:lnTo>
+                    <a:pt x="3039106" y="2667322"/>
+                  </a:lnTo>
+                  <a:lnTo>
+                    <a:pt x="3110728" y="2668762"/>
+                  </a:lnTo>
+                  <a:lnTo>
+                    <a:pt x="3182351" y="2670200"/>
+                  </a:lnTo>
+                  <a:lnTo>
+                    <a:pt x="3253974" y="2671635"/>
+                  </a:lnTo>
+                  <a:lnTo>
+                    <a:pt x="3325596" y="2673067"/>
+                  </a:lnTo>
+                  <a:lnTo>
+                    <a:pt x="3397219" y="2674497"/>
+                  </a:lnTo>
+                  <a:lnTo>
+                    <a:pt x="3468841" y="2675924"/>
+                  </a:lnTo>
+                  <a:lnTo>
+                    <a:pt x="3540464" y="2677349"/>
+                  </a:lnTo>
+                  <a:lnTo>
+                    <a:pt x="3612086" y="2678771"/>
+                  </a:lnTo>
+                  <a:lnTo>
+                    <a:pt x="3683709" y="2680191"/>
+                  </a:lnTo>
+                  <a:lnTo>
+                    <a:pt x="3755331" y="2681608"/>
+                  </a:lnTo>
+                  <a:lnTo>
+                    <a:pt x="3826954" y="2683023"/>
+                  </a:lnTo>
+                  <a:lnTo>
+                    <a:pt x="3898576" y="2684435"/>
+                  </a:lnTo>
+                  <a:lnTo>
+                    <a:pt x="3970199" y="2685845"/>
+                  </a:lnTo>
+                  <a:lnTo>
+                    <a:pt x="4041821" y="2687252"/>
+                  </a:lnTo>
+                  <a:lnTo>
+                    <a:pt x="4113444" y="2688657"/>
+                  </a:lnTo>
+                  <a:lnTo>
+                    <a:pt x="4185066" y="2690059"/>
+                  </a:lnTo>
+                  <a:lnTo>
+                    <a:pt x="4256689" y="2691459"/>
+                  </a:lnTo>
+                  <a:lnTo>
+                    <a:pt x="4328311" y="2692856"/>
+                  </a:lnTo>
+                  <a:lnTo>
+                    <a:pt x="4399934" y="2694251"/>
+                  </a:lnTo>
+                  <a:lnTo>
+                    <a:pt x="4471556" y="2695644"/>
+                  </a:lnTo>
+                  <a:lnTo>
+                    <a:pt x="4543179" y="2697034"/>
+                  </a:lnTo>
+                  <a:lnTo>
+                    <a:pt x="4614802" y="2698421"/>
+                  </a:lnTo>
+                  <a:lnTo>
+                    <a:pt x="4686424" y="2699806"/>
+                  </a:lnTo>
+                  <a:lnTo>
+                    <a:pt x="4758047" y="2701189"/>
+                  </a:lnTo>
+                  <a:lnTo>
+                    <a:pt x="4829669" y="2702569"/>
+                  </a:lnTo>
+                  <a:lnTo>
+                    <a:pt x="4901292" y="2703947"/>
+                  </a:lnTo>
+                  <a:lnTo>
+                    <a:pt x="4972914" y="2705322"/>
+                  </a:lnTo>
+                  <a:lnTo>
+                    <a:pt x="5044537" y="2706695"/>
+                  </a:lnTo>
+                  <a:lnTo>
+                    <a:pt x="5116159" y="2708065"/>
+                  </a:lnTo>
+                  <a:lnTo>
+                    <a:pt x="5187782" y="2709434"/>
+                  </a:lnTo>
+                  <a:lnTo>
+                    <a:pt x="5259404" y="2710799"/>
+                  </a:lnTo>
+                  <a:lnTo>
+                    <a:pt x="5331027" y="2712162"/>
+                  </a:lnTo>
+                  <a:lnTo>
+                    <a:pt x="5402649" y="2713523"/>
+                  </a:lnTo>
+                  <a:lnTo>
+                    <a:pt x="5474272" y="2714882"/>
+                  </a:lnTo>
+                  <a:lnTo>
+                    <a:pt x="5545894" y="2716238"/>
+                  </a:lnTo>
+                  <a:lnTo>
+                    <a:pt x="5617517" y="2717591"/>
+                  </a:lnTo>
+                  <a:lnTo>
+                    <a:pt x="5689139" y="2718943"/>
+                  </a:lnTo>
+                  <a:lnTo>
+                    <a:pt x="5760762" y="2720292"/>
+                  </a:lnTo>
+                  <a:lnTo>
+                    <a:pt x="5832384" y="2721638"/>
+                  </a:lnTo>
+                  <a:lnTo>
+                    <a:pt x="5904007" y="2722982"/>
+                  </a:lnTo>
+                  <a:lnTo>
+                    <a:pt x="5975630" y="2724324"/>
+                  </a:lnTo>
+                  <a:lnTo>
+                    <a:pt x="6047252" y="2725663"/>
+                  </a:lnTo>
+                  <a:lnTo>
+                    <a:pt x="6118875" y="2727000"/>
+                  </a:lnTo>
+                  <a:lnTo>
+                    <a:pt x="6190497" y="2728335"/>
+                  </a:lnTo>
+                </a:path>
+              </a:pathLst>
+            </a:custGeom>
+          </p:spPr>
+          <p:txBody>
+            <a:bodyPr/>
+            <a:lstStyle/>
+            <a:p/>
+          </p:txBody>
+        </p:sp>
+        <p:sp>
+          <p:nvSpPr>
             <p:cNvPr id="22" name="pl22"/>
             <p:cNvSpPr/>
             <p:nvPr/>
           </p:nvSpPr>
           <p:spPr>
             <a:xfrm>
-              <a:off x="1533221" y="2073503"/>
-              <a:ext cx="6676337" cy="2728335"/>
+              <a:off x="1172049" y="4657584"/>
+              <a:ext cx="7090630" cy="814146"/>
             </a:xfrm>
             <a:custGeom>
               <a:avLst/>
               <a:pathLst>
-                <a:path w="6676337" h="2728335">
+                <a:path w="7090630" h="814146">
                   <a:moveTo>
+                    <a:pt x="7090630" y="814146"/>
+                  </a:moveTo>
+                  <a:lnTo>
+                    <a:pt x="7019007" y="810398"/>
+                  </a:lnTo>
+                  <a:lnTo>
+                    <a:pt x="6947385" y="806487"/>
+                  </a:lnTo>
+                  <a:lnTo>
+                    <a:pt x="6875762" y="802403"/>
+                  </a:lnTo>
+                  <a:lnTo>
+                    <a:pt x="6804139" y="798141"/>
+                  </a:lnTo>
+                  <a:lnTo>
+                    <a:pt x="6732517" y="793693"/>
+                  </a:lnTo>
+                  <a:lnTo>
+                    <a:pt x="6660894" y="789049"/>
+                  </a:lnTo>
+                  <a:lnTo>
+                    <a:pt x="6589272" y="784201"/>
+                  </a:lnTo>
+                  <a:lnTo>
+                    <a:pt x="6517649" y="779142"/>
+                  </a:lnTo>
+                  <a:lnTo>
+                    <a:pt x="6446027" y="773860"/>
+                  </a:lnTo>
+                  <a:lnTo>
+                    <a:pt x="6374404" y="768347"/>
+                  </a:lnTo>
+                  <a:lnTo>
+                    <a:pt x="6302782" y="762593"/>
+                  </a:lnTo>
+                  <a:lnTo>
+                    <a:pt x="6231159" y="756586"/>
+                  </a:lnTo>
+                  <a:lnTo>
+                    <a:pt x="6159537" y="750316"/>
+                  </a:lnTo>
+                  <a:lnTo>
+                    <a:pt x="6087914" y="743772"/>
+                  </a:lnTo>
+                  <a:lnTo>
+                    <a:pt x="6016292" y="736941"/>
+                  </a:lnTo>
+                  <a:lnTo>
+                    <a:pt x="5944669" y="729810"/>
+                  </a:lnTo>
+                  <a:lnTo>
+                    <a:pt x="5873047" y="722367"/>
+                  </a:lnTo>
+                  <a:lnTo>
+                    <a:pt x="5801424" y="714597"/>
+                  </a:lnTo>
+                  <a:lnTo>
+                    <a:pt x="5729802" y="706487"/>
+                  </a:lnTo>
+                  <a:lnTo>
+                    <a:pt x="5658179" y="698022"/>
+                  </a:lnTo>
+                  <a:lnTo>
+                    <a:pt x="5586557" y="689186"/>
+                  </a:lnTo>
+                  <a:lnTo>
+                    <a:pt x="5514934" y="679963"/>
+                  </a:lnTo>
+                  <a:lnTo>
+                    <a:pt x="5443311" y="670335"/>
+                  </a:lnTo>
+                  <a:lnTo>
+                    <a:pt x="5371689" y="660286"/>
+                  </a:lnTo>
+                  <a:lnTo>
+                    <a:pt x="5300066" y="649796"/>
+                  </a:lnTo>
+                  <a:lnTo>
+                    <a:pt x="5228444" y="638846"/>
+                  </a:lnTo>
+                  <a:lnTo>
+                    <a:pt x="5156821" y="627417"/>
+                  </a:lnTo>
+                  <a:lnTo>
+                    <a:pt x="5085199" y="615487"/>
+                  </a:lnTo>
+                  <a:lnTo>
+                    <a:pt x="5013576" y="603034"/>
+                  </a:lnTo>
+                  <a:lnTo>
+                    <a:pt x="4941954" y="590035"/>
+                  </a:lnTo>
+                  <a:lnTo>
+                    <a:pt x="4870331" y="576467"/>
+                  </a:lnTo>
+                  <a:lnTo>
+                    <a:pt x="4798709" y="562304"/>
+                  </a:lnTo>
+                  <a:lnTo>
+                    <a:pt x="4727086" y="547521"/>
+                  </a:lnTo>
+                  <a:lnTo>
+                    <a:pt x="4655464" y="532090"/>
+                  </a:lnTo>
+                  <a:lnTo>
+                    <a:pt x="4583841" y="515982"/>
+                  </a:lnTo>
+                  <a:lnTo>
+                    <a:pt x="4512219" y="499169"/>
+                  </a:lnTo>
+                  <a:lnTo>
+                    <a:pt x="4440596" y="481619"/>
+                  </a:lnTo>
+                  <a:lnTo>
+                    <a:pt x="4368974" y="463300"/>
+                  </a:lnTo>
+                  <a:lnTo>
+                    <a:pt x="4297351" y="444178"/>
+                  </a:lnTo>
+                  <a:lnTo>
+                    <a:pt x="4225729" y="424218"/>
+                  </a:lnTo>
+                  <a:lnTo>
+                    <a:pt x="4154106" y="403384"/>
+                  </a:lnTo>
+                  <a:lnTo>
+                    <a:pt x="4082483" y="381636"/>
+                  </a:lnTo>
+                  <a:lnTo>
+                    <a:pt x="4010861" y="358936"/>
+                  </a:lnTo>
+                  <a:lnTo>
+                    <a:pt x="3939238" y="335240"/>
+                  </a:lnTo>
+                  <a:lnTo>
+                    <a:pt x="3867616" y="310507"/>
+                  </a:lnTo>
+                  <a:lnTo>
+                    <a:pt x="3795993" y="284689"/>
+                  </a:lnTo>
+                  <a:lnTo>
+                    <a:pt x="3724371" y="257741"/>
+                  </a:lnTo>
+                  <a:lnTo>
+                    <a:pt x="3652748" y="229611"/>
+                  </a:lnTo>
+                  <a:lnTo>
+                    <a:pt x="3581126" y="200249"/>
+                  </a:lnTo>
+                  <a:lnTo>
+                    <a:pt x="3509503" y="169600"/>
+                  </a:lnTo>
+                  <a:lnTo>
+                    <a:pt x="3437881" y="137607"/>
+                  </a:lnTo>
+                  <a:lnTo>
+                    <a:pt x="3366258" y="104213"/>
+                  </a:lnTo>
+                  <a:lnTo>
+                    <a:pt x="3294636" y="70167"/>
+                  </a:lnTo>
+                  <a:lnTo>
+                    <a:pt x="3223013" y="68701"/>
+                  </a:lnTo>
+                  <a:lnTo>
+                    <a:pt x="3151391" y="67233"/>
+                  </a:lnTo>
+                  <a:lnTo>
+                    <a:pt x="3079768" y="65762"/>
+                  </a:lnTo>
+                  <a:lnTo>
+                    <a:pt x="3008146" y="64289"/>
+                  </a:lnTo>
+                  <a:lnTo>
+                    <a:pt x="2936523" y="62813"/>
+                  </a:lnTo>
+                  <a:lnTo>
+                    <a:pt x="2864901" y="61334"/>
+                  </a:lnTo>
+                  <a:lnTo>
+                    <a:pt x="2793278" y="59853"/>
+                  </a:lnTo>
+                  <a:lnTo>
+                    <a:pt x="2721655" y="58369"/>
+                  </a:lnTo>
+                  <a:lnTo>
+                    <a:pt x="2650033" y="56883"/>
+                  </a:lnTo>
+                  <a:lnTo>
+                    <a:pt x="2578410" y="55394"/>
+                  </a:lnTo>
+                  <a:lnTo>
+                    <a:pt x="2506788" y="53902"/>
+                  </a:lnTo>
+                  <a:lnTo>
+                    <a:pt x="2435165" y="52408"/>
+                  </a:lnTo>
+                  <a:lnTo>
+                    <a:pt x="2363543" y="50911"/>
+                  </a:lnTo>
+                  <a:lnTo>
+                    <a:pt x="2291920" y="49411"/>
+                  </a:lnTo>
+                  <a:lnTo>
+                    <a:pt x="2220298" y="47909"/>
+                  </a:lnTo>
+                  <a:lnTo>
+                    <a:pt x="2148675" y="46404"/>
+                  </a:lnTo>
+                  <a:lnTo>
+                    <a:pt x="2077053" y="44897"/>
+                  </a:lnTo>
+                  <a:lnTo>
+                    <a:pt x="2005430" y="43386"/>
+                  </a:lnTo>
+                  <a:lnTo>
+                    <a:pt x="1933808" y="41873"/>
+                  </a:lnTo>
+                  <a:lnTo>
+                    <a:pt x="1862185" y="40358"/>
+                  </a:lnTo>
+                  <a:lnTo>
+                    <a:pt x="1790563" y="38840"/>
+                  </a:lnTo>
+                  <a:lnTo>
+                    <a:pt x="1718940" y="37319"/>
+                  </a:lnTo>
+                  <a:lnTo>
+                    <a:pt x="1647318" y="35795"/>
+                  </a:lnTo>
+                  <a:lnTo>
+                    <a:pt x="1575695" y="34269"/>
+                  </a:lnTo>
+                  <a:lnTo>
+                    <a:pt x="1504073" y="32740"/>
+                  </a:lnTo>
+                  <a:lnTo>
+                    <a:pt x="1432450" y="31208"/>
+                  </a:lnTo>
+                  <a:lnTo>
+                    <a:pt x="1360827" y="29674"/>
+                  </a:lnTo>
+                  <a:lnTo>
+                    <a:pt x="1289205" y="28137"/>
+                  </a:lnTo>
+                  <a:lnTo>
+                    <a:pt x="1217582" y="26597"/>
+                  </a:lnTo>
+                  <a:lnTo>
+                    <a:pt x="1145960" y="25054"/>
+                  </a:lnTo>
+                  <a:lnTo>
+                    <a:pt x="1074337" y="23509"/>
+                  </a:lnTo>
+                  <a:lnTo>
+                    <a:pt x="1002715" y="21961"/>
+                  </a:lnTo>
+                  <a:lnTo>
+                    <a:pt x="931092" y="20410"/>
+                  </a:lnTo>
+                  <a:lnTo>
+                    <a:pt x="859470" y="18857"/>
+                  </a:lnTo>
+                  <a:lnTo>
+                    <a:pt x="787847" y="17301"/>
+                  </a:lnTo>
+                  <a:lnTo>
+                    <a:pt x="716225" y="15742"/>
+                  </a:lnTo>
+                  <a:lnTo>
+                    <a:pt x="644602" y="14180"/>
+                  </a:lnTo>
+                  <a:lnTo>
+                    <a:pt x="572980" y="12615"/>
+                  </a:lnTo>
+                  <a:lnTo>
+                    <a:pt x="501357" y="11048"/>
+                  </a:lnTo>
+                  <a:lnTo>
+                    <a:pt x="429735" y="9478"/>
+                  </a:lnTo>
+                  <a:lnTo>
+                    <a:pt x="358112" y="7905"/>
+                  </a:lnTo>
+                  <a:lnTo>
+                    <a:pt x="286490" y="6330"/>
+                  </a:lnTo>
+                  <a:lnTo>
+                    <a:pt x="214867" y="4751"/>
+                  </a:lnTo>
+                  <a:lnTo>
+                    <a:pt x="143245" y="3170"/>
+                  </a:lnTo>
+                  <a:lnTo>
+                    <a:pt x="71622" y="1586"/>
+                  </a:lnTo>
+                  <a:lnTo>
                     <a:pt x="0" y="0"/>
-                  </a:moveTo>
-                  <a:lnTo>
-                    <a:pt x="33390" y="64764"/>
-                  </a:lnTo>
-                  <a:lnTo>
-                    <a:pt x="110633" y="208297"/>
-                  </a:lnTo>
-                  <a:lnTo>
-                    <a:pt x="187877" y="345804"/>
-                  </a:lnTo>
-                  <a:lnTo>
-                    <a:pt x="265120" y="477539"/>
-                  </a:lnTo>
-                  <a:lnTo>
-                    <a:pt x="342364" y="603743"/>
-                  </a:lnTo>
-                  <a:lnTo>
-                    <a:pt x="419608" y="724649"/>
-                  </a:lnTo>
-                  <a:lnTo>
-                    <a:pt x="496851" y="840479"/>
-                  </a:lnTo>
-                  <a:lnTo>
-                    <a:pt x="574095" y="951447"/>
-                  </a:lnTo>
-                  <a:lnTo>
-                    <a:pt x="651338" y="1057756"/>
-                  </a:lnTo>
-                  <a:lnTo>
-                    <a:pt x="728582" y="1159602"/>
-                  </a:lnTo>
-                  <a:lnTo>
-                    <a:pt x="805825" y="1257172"/>
-                  </a:lnTo>
-                  <a:lnTo>
-                    <a:pt x="883069" y="1350647"/>
-                  </a:lnTo>
-                  <a:lnTo>
-                    <a:pt x="960313" y="1440197"/>
-                  </a:lnTo>
-                  <a:lnTo>
-                    <a:pt x="1037556" y="1525987"/>
-                  </a:lnTo>
-                  <a:lnTo>
-                    <a:pt x="1114800" y="1608176"/>
-                  </a:lnTo>
-                  <a:lnTo>
-                    <a:pt x="1192043" y="1686915"/>
-                  </a:lnTo>
-                  <a:lnTo>
-                    <a:pt x="1269287" y="1762348"/>
-                  </a:lnTo>
-                  <a:lnTo>
-                    <a:pt x="1346530" y="1834615"/>
-                  </a:lnTo>
-                  <a:lnTo>
-                    <a:pt x="1423774" y="1903847"/>
-                  </a:lnTo>
-                  <a:lnTo>
-                    <a:pt x="1501018" y="1970173"/>
-                  </a:lnTo>
-                  <a:lnTo>
-                    <a:pt x="1578261" y="2033715"/>
-                  </a:lnTo>
-                  <a:lnTo>
-                    <a:pt x="1655505" y="2094589"/>
-                  </a:lnTo>
-                  <a:lnTo>
-                    <a:pt x="1732748" y="2152908"/>
-                  </a:lnTo>
-                  <a:lnTo>
-                    <a:pt x="1809992" y="2208778"/>
-                  </a:lnTo>
-                  <a:lnTo>
-                    <a:pt x="1887235" y="2262303"/>
-                  </a:lnTo>
-                  <a:lnTo>
-                    <a:pt x="1964479" y="2313580"/>
-                  </a:lnTo>
-                  <a:lnTo>
-                    <a:pt x="2041723" y="2362705"/>
-                  </a:lnTo>
-                  <a:lnTo>
-                    <a:pt x="2118966" y="2409768"/>
-                  </a:lnTo>
-                  <a:lnTo>
-                    <a:pt x="2196210" y="2454855"/>
-                  </a:lnTo>
-                  <a:lnTo>
-                    <a:pt x="2273453" y="2498049"/>
-                  </a:lnTo>
-                  <a:lnTo>
-                    <a:pt x="2350697" y="2539430"/>
-                  </a:lnTo>
-                  <a:lnTo>
-                    <a:pt x="2427940" y="2579073"/>
-                  </a:lnTo>
-                  <a:lnTo>
-                    <a:pt x="2505184" y="2617053"/>
-                  </a:lnTo>
-                  <a:lnTo>
-                    <a:pt x="2582428" y="2653437"/>
-                  </a:lnTo>
-                  <a:lnTo>
-                    <a:pt x="2659671" y="2655711"/>
-                  </a:lnTo>
-                  <a:lnTo>
-                    <a:pt x="2736915" y="2657171"/>
-                  </a:lnTo>
-                  <a:lnTo>
-                    <a:pt x="2814158" y="2658629"/>
-                  </a:lnTo>
-                  <a:lnTo>
-                    <a:pt x="2891402" y="2660085"/>
-                  </a:lnTo>
-                  <a:lnTo>
-                    <a:pt x="2968645" y="2661537"/>
-                  </a:lnTo>
-                  <a:lnTo>
-                    <a:pt x="3045889" y="2662987"/>
-                  </a:lnTo>
-                  <a:lnTo>
-                    <a:pt x="3123133" y="2664435"/>
-                  </a:lnTo>
-                  <a:lnTo>
-                    <a:pt x="3200376" y="2665880"/>
-                  </a:lnTo>
-                  <a:lnTo>
-                    <a:pt x="3277620" y="2667322"/>
-                  </a:lnTo>
-                  <a:lnTo>
-                    <a:pt x="3354863" y="2668762"/>
-                  </a:lnTo>
-                  <a:lnTo>
-                    <a:pt x="3432107" y="2670200"/>
-                  </a:lnTo>
-                  <a:lnTo>
-                    <a:pt x="3509350" y="2671635"/>
-                  </a:lnTo>
-                  <a:lnTo>
-                    <a:pt x="3586594" y="2673067"/>
-                  </a:lnTo>
-                  <a:lnTo>
-                    <a:pt x="3663838" y="2674497"/>
-                  </a:lnTo>
-                  <a:lnTo>
-                    <a:pt x="3741081" y="2675924"/>
-                  </a:lnTo>
-                  <a:lnTo>
-                    <a:pt x="3818325" y="2677349"/>
-                  </a:lnTo>
-                  <a:lnTo>
-                    <a:pt x="3895568" y="2678771"/>
-                  </a:lnTo>
-                  <a:lnTo>
-                    <a:pt x="3972812" y="2680191"/>
-                  </a:lnTo>
-                  <a:lnTo>
-                    <a:pt x="4050055" y="2681608"/>
-                  </a:lnTo>
-                  <a:lnTo>
-                    <a:pt x="4127299" y="2683023"/>
-                  </a:lnTo>
-                  <a:lnTo>
-                    <a:pt x="4204543" y="2684435"/>
-                  </a:lnTo>
-                  <a:lnTo>
-                    <a:pt x="4281786" y="2685845"/>
-                  </a:lnTo>
-                  <a:lnTo>
-                    <a:pt x="4359030" y="2687252"/>
-                  </a:lnTo>
-                  <a:lnTo>
-                    <a:pt x="4436273" y="2688657"/>
-                  </a:lnTo>
-                  <a:lnTo>
-                    <a:pt x="4513517" y="2690059"/>
-                  </a:lnTo>
-                  <a:lnTo>
-                    <a:pt x="4590760" y="2691459"/>
-                  </a:lnTo>
-                  <a:lnTo>
-                    <a:pt x="4668004" y="2692856"/>
-                  </a:lnTo>
-                  <a:lnTo>
-                    <a:pt x="4745248" y="2694251"/>
-                  </a:lnTo>
-                  <a:lnTo>
-                    <a:pt x="4822491" y="2695644"/>
-                  </a:lnTo>
-                  <a:lnTo>
-                    <a:pt x="4899735" y="2697034"/>
-                  </a:lnTo>
-                  <a:lnTo>
-                    <a:pt x="4976978" y="2698421"/>
-                  </a:lnTo>
-                  <a:lnTo>
-                    <a:pt x="5054222" y="2699806"/>
-                  </a:lnTo>
-                  <a:lnTo>
-                    <a:pt x="5131465" y="2701189"/>
-                  </a:lnTo>
-                  <a:lnTo>
-                    <a:pt x="5208709" y="2702569"/>
-                  </a:lnTo>
-                  <a:lnTo>
-                    <a:pt x="5285953" y="2703947"/>
-                  </a:lnTo>
-                  <a:lnTo>
-                    <a:pt x="5363196" y="2705322"/>
-                  </a:lnTo>
-                  <a:lnTo>
-                    <a:pt x="5440440" y="2706695"/>
-                  </a:lnTo>
-                  <a:lnTo>
-                    <a:pt x="5517683" y="2708065"/>
-                  </a:lnTo>
-                  <a:lnTo>
-                    <a:pt x="5594927" y="2709434"/>
-                  </a:lnTo>
-                  <a:lnTo>
-                    <a:pt x="5672170" y="2710799"/>
-                  </a:lnTo>
-                  <a:lnTo>
-                    <a:pt x="5749414" y="2712162"/>
-                  </a:lnTo>
-                  <a:lnTo>
-                    <a:pt x="5826658" y="2713523"/>
-                  </a:lnTo>
-                  <a:lnTo>
-                    <a:pt x="5903901" y="2714882"/>
-                  </a:lnTo>
-                  <a:lnTo>
-                    <a:pt x="5981145" y="2716238"/>
-                  </a:lnTo>
-                  <a:lnTo>
-                    <a:pt x="6058388" y="2717591"/>
-                  </a:lnTo>
-                  <a:lnTo>
-                    <a:pt x="6135632" y="2718943"/>
-                  </a:lnTo>
-                  <a:lnTo>
-                    <a:pt x="6212875" y="2720292"/>
-                  </a:lnTo>
-                  <a:lnTo>
-                    <a:pt x="6290119" y="2721638"/>
-                  </a:lnTo>
-                  <a:lnTo>
-                    <a:pt x="6367363" y="2722982"/>
-                  </a:lnTo>
-                  <a:lnTo>
-                    <a:pt x="6444606" y="2724324"/>
-                  </a:lnTo>
-                  <a:lnTo>
-                    <a:pt x="6521850" y="2725663"/>
-                  </a:lnTo>
-                  <a:lnTo>
-                    <a:pt x="6599093" y="2727000"/>
-                  </a:lnTo>
-                  <a:lnTo>
-                    <a:pt x="6676337" y="2728335"/>
                   </a:lnTo>
                 </a:path>
               </a:pathLst>
@@ -3877,619 +4168,312 @@
           </p:nvSpPr>
           <p:spPr>
             <a:xfrm>
-              <a:off x="817517" y="4662813"/>
-              <a:ext cx="7392041" cy="808917"/>
+              <a:off x="1172049" y="3239546"/>
+              <a:ext cx="7090630" cy="2063533"/>
             </a:xfrm>
             <a:custGeom>
               <a:avLst/>
               <a:pathLst>
-                <a:path w="7392041" h="808917">
-                  <a:moveTo>
-                    <a:pt x="7392041" y="808917"/>
-                  </a:moveTo>
-                  <a:lnTo>
-                    <a:pt x="7314797" y="805170"/>
-                  </a:lnTo>
-                  <a:lnTo>
-                    <a:pt x="7237554" y="801258"/>
-                  </a:lnTo>
-                  <a:lnTo>
-                    <a:pt x="7160310" y="797175"/>
-                  </a:lnTo>
-                  <a:lnTo>
-                    <a:pt x="7083066" y="792913"/>
-                  </a:lnTo>
-                  <a:lnTo>
-                    <a:pt x="7005823" y="788464"/>
-                  </a:lnTo>
-                  <a:lnTo>
-                    <a:pt x="6928579" y="783820"/>
-                  </a:lnTo>
-                  <a:lnTo>
-                    <a:pt x="6851336" y="778973"/>
-                  </a:lnTo>
-                  <a:lnTo>
-                    <a:pt x="6774092" y="773913"/>
-                  </a:lnTo>
-                  <a:lnTo>
-                    <a:pt x="6696849" y="768631"/>
-                  </a:lnTo>
-                  <a:lnTo>
-                    <a:pt x="6619605" y="763119"/>
-                  </a:lnTo>
-                  <a:lnTo>
-                    <a:pt x="6542361" y="757364"/>
-                  </a:lnTo>
-                  <a:lnTo>
-                    <a:pt x="6465118" y="751358"/>
-                  </a:lnTo>
-                  <a:lnTo>
-                    <a:pt x="6387874" y="745088"/>
-                  </a:lnTo>
-                  <a:lnTo>
-                    <a:pt x="6310631" y="738543"/>
-                  </a:lnTo>
-                  <a:lnTo>
-                    <a:pt x="6233387" y="731712"/>
-                  </a:lnTo>
-                  <a:lnTo>
-                    <a:pt x="6156144" y="724581"/>
-                  </a:lnTo>
-                  <a:lnTo>
-                    <a:pt x="6078900" y="717138"/>
-                  </a:lnTo>
-                  <a:lnTo>
-                    <a:pt x="6001656" y="709368"/>
-                  </a:lnTo>
-                  <a:lnTo>
-                    <a:pt x="5924413" y="701259"/>
-                  </a:lnTo>
-                  <a:lnTo>
-                    <a:pt x="5847169" y="692793"/>
-                  </a:lnTo>
-                  <a:lnTo>
-                    <a:pt x="5769926" y="683957"/>
-                  </a:lnTo>
-                  <a:lnTo>
-                    <a:pt x="5692682" y="674734"/>
-                  </a:lnTo>
-                  <a:lnTo>
-                    <a:pt x="5615439" y="665106"/>
-                  </a:lnTo>
-                  <a:lnTo>
-                    <a:pt x="5538195" y="655057"/>
-                  </a:lnTo>
-                  <a:lnTo>
-                    <a:pt x="5460951" y="644567"/>
-                  </a:lnTo>
-                  <a:lnTo>
-                    <a:pt x="5383708" y="633618"/>
-                  </a:lnTo>
-                  <a:lnTo>
-                    <a:pt x="5306464" y="622188"/>
-                  </a:lnTo>
-                  <a:lnTo>
-                    <a:pt x="5229221" y="610258"/>
-                  </a:lnTo>
-                  <a:lnTo>
-                    <a:pt x="5151977" y="597805"/>
-                  </a:lnTo>
-                  <a:lnTo>
-                    <a:pt x="5074734" y="584807"/>
-                  </a:lnTo>
-                  <a:lnTo>
-                    <a:pt x="4997490" y="571238"/>
-                  </a:lnTo>
-                  <a:lnTo>
-                    <a:pt x="4920246" y="557076"/>
-                  </a:lnTo>
-                  <a:lnTo>
-                    <a:pt x="4843003" y="542292"/>
-                  </a:lnTo>
-                  <a:lnTo>
-                    <a:pt x="4765759" y="526861"/>
-                  </a:lnTo>
-                  <a:lnTo>
-                    <a:pt x="4688516" y="510754"/>
-                  </a:lnTo>
-                  <a:lnTo>
-                    <a:pt x="4611272" y="493940"/>
-                  </a:lnTo>
-                  <a:lnTo>
-                    <a:pt x="4534029" y="476390"/>
-                  </a:lnTo>
-                  <a:lnTo>
-                    <a:pt x="4456785" y="458071"/>
-                  </a:lnTo>
-                  <a:lnTo>
-                    <a:pt x="4379541" y="438949"/>
-                  </a:lnTo>
-                  <a:lnTo>
-                    <a:pt x="4302298" y="418989"/>
-                  </a:lnTo>
-                  <a:lnTo>
-                    <a:pt x="4225054" y="398155"/>
-                  </a:lnTo>
-                  <a:lnTo>
-                    <a:pt x="4147811" y="376407"/>
-                  </a:lnTo>
-                  <a:lnTo>
-                    <a:pt x="4070567" y="353707"/>
-                  </a:lnTo>
-                  <a:lnTo>
-                    <a:pt x="3993324" y="330012"/>
-                  </a:lnTo>
-                  <a:lnTo>
-                    <a:pt x="3916080" y="305278"/>
-                  </a:lnTo>
-                  <a:lnTo>
-                    <a:pt x="3838836" y="279461"/>
-                  </a:lnTo>
-                  <a:lnTo>
-                    <a:pt x="3761593" y="252512"/>
-                  </a:lnTo>
-                  <a:lnTo>
-                    <a:pt x="3684349" y="224382"/>
-                  </a:lnTo>
-                  <a:lnTo>
-                    <a:pt x="3607106" y="195020"/>
-                  </a:lnTo>
-                  <a:lnTo>
-                    <a:pt x="3529862" y="164371"/>
-                  </a:lnTo>
-                  <a:lnTo>
-                    <a:pt x="3452619" y="132379"/>
-                  </a:lnTo>
-                  <a:lnTo>
-                    <a:pt x="3375375" y="98985"/>
-                  </a:lnTo>
-                  <a:lnTo>
-                    <a:pt x="3298131" y="64938"/>
-                  </a:lnTo>
-                  <a:lnTo>
-                    <a:pt x="3220888" y="63472"/>
-                  </a:lnTo>
-                  <a:lnTo>
-                    <a:pt x="3143644" y="62004"/>
-                  </a:lnTo>
-                  <a:lnTo>
-                    <a:pt x="3066401" y="60533"/>
-                  </a:lnTo>
-                  <a:lnTo>
-                    <a:pt x="2989157" y="59060"/>
-                  </a:lnTo>
-                  <a:lnTo>
-                    <a:pt x="2911914" y="57584"/>
-                  </a:lnTo>
-                  <a:lnTo>
-                    <a:pt x="2834670" y="56105"/>
-                  </a:lnTo>
-                  <a:lnTo>
-                    <a:pt x="2757426" y="54624"/>
-                  </a:lnTo>
-                  <a:lnTo>
-                    <a:pt x="2680183" y="53140"/>
-                  </a:lnTo>
-                  <a:lnTo>
-                    <a:pt x="2602939" y="51654"/>
-                  </a:lnTo>
-                  <a:lnTo>
-                    <a:pt x="2525696" y="50165"/>
-                  </a:lnTo>
-                  <a:lnTo>
-                    <a:pt x="2448452" y="48673"/>
-                  </a:lnTo>
-                  <a:lnTo>
-                    <a:pt x="2371209" y="47179"/>
-                  </a:lnTo>
-                  <a:lnTo>
-                    <a:pt x="2293965" y="45682"/>
-                  </a:lnTo>
-                  <a:lnTo>
-                    <a:pt x="2216721" y="44183"/>
-                  </a:lnTo>
-                  <a:lnTo>
-                    <a:pt x="2139478" y="42680"/>
-                  </a:lnTo>
-                  <a:lnTo>
-                    <a:pt x="2062234" y="41175"/>
-                  </a:lnTo>
-                  <a:lnTo>
-                    <a:pt x="1984991" y="39668"/>
-                  </a:lnTo>
-                  <a:lnTo>
-                    <a:pt x="1907747" y="38158"/>
-                  </a:lnTo>
-                  <a:lnTo>
-                    <a:pt x="1830504" y="36645"/>
-                  </a:lnTo>
-                  <a:lnTo>
-                    <a:pt x="1753260" y="35129"/>
-                  </a:lnTo>
-                  <a:lnTo>
-                    <a:pt x="1676016" y="33611"/>
-                  </a:lnTo>
-                  <a:lnTo>
-                    <a:pt x="1598773" y="32090"/>
-                  </a:lnTo>
-                  <a:lnTo>
-                    <a:pt x="1521529" y="30566"/>
-                  </a:lnTo>
-                  <a:lnTo>
-                    <a:pt x="1444286" y="29040"/>
-                  </a:lnTo>
-                  <a:lnTo>
-                    <a:pt x="1367042" y="27511"/>
-                  </a:lnTo>
-                  <a:lnTo>
-                    <a:pt x="1289799" y="25979"/>
-                  </a:lnTo>
-                  <a:lnTo>
-                    <a:pt x="1212555" y="24445"/>
-                  </a:lnTo>
-                  <a:lnTo>
-                    <a:pt x="1135311" y="22908"/>
-                  </a:lnTo>
-                  <a:lnTo>
-                    <a:pt x="1058068" y="21368"/>
-                  </a:lnTo>
-                  <a:lnTo>
-                    <a:pt x="980824" y="19825"/>
-                  </a:lnTo>
-                  <a:lnTo>
-                    <a:pt x="903581" y="18280"/>
-                  </a:lnTo>
-                  <a:lnTo>
-                    <a:pt x="826337" y="16732"/>
-                  </a:lnTo>
-                  <a:lnTo>
-                    <a:pt x="749094" y="15181"/>
-                  </a:lnTo>
-                  <a:lnTo>
-                    <a:pt x="671850" y="13628"/>
-                  </a:lnTo>
-                  <a:lnTo>
-                    <a:pt x="594606" y="12072"/>
-                  </a:lnTo>
-                  <a:lnTo>
-                    <a:pt x="517363" y="10513"/>
-                  </a:lnTo>
-                  <a:lnTo>
-                    <a:pt x="440119" y="8951"/>
-                  </a:lnTo>
-                  <a:lnTo>
-                    <a:pt x="362876" y="7387"/>
-                  </a:lnTo>
-                  <a:lnTo>
-                    <a:pt x="285632" y="5819"/>
-                  </a:lnTo>
-                  <a:lnTo>
-                    <a:pt x="208389" y="4249"/>
-                  </a:lnTo>
-                  <a:lnTo>
-                    <a:pt x="131145" y="2676"/>
-                  </a:lnTo>
-                  <a:lnTo>
-                    <a:pt x="53901" y="1101"/>
-                  </a:lnTo>
-                  <a:lnTo>
-                    <a:pt x="0" y="0"/>
-                  </a:lnTo>
-                </a:path>
-              </a:pathLst>
-            </a:custGeom>
-          </p:spPr>
-          <p:txBody>
-            <a:bodyPr/>
-            <a:lstStyle/>
-            <a:p/>
-          </p:txBody>
-        </p:sp>
-        <p:sp>
-          <p:nvSpPr>
-            <p:cNvPr id="24" name="pl24"/>
-            <p:cNvSpPr/>
-            <p:nvPr/>
-          </p:nvSpPr>
-          <p:spPr>
-            <a:xfrm>
-              <a:off x="817517" y="3404162"/>
-              <a:ext cx="7392041" cy="1898917"/>
-            </a:xfrm>
-            <a:custGeom>
-              <a:avLst/>
-              <a:pathLst>
-                <a:path w="7392041" h="1898917">
+                <a:path w="7090630" h="2063533">
                   <a:moveTo>
                     <a:pt x="0" y="0"/>
                   </a:moveTo>
                   <a:lnTo>
-                    <a:pt x="53901" y="33395"/>
-                  </a:lnTo>
-                  <a:lnTo>
-                    <a:pt x="131145" y="80197"/>
-                  </a:lnTo>
-                  <a:lnTo>
-                    <a:pt x="208389" y="125964"/>
-                  </a:lnTo>
-                  <a:lnTo>
-                    <a:pt x="285632" y="170721"/>
-                  </a:lnTo>
-                  <a:lnTo>
-                    <a:pt x="362876" y="214490"/>
-                  </a:lnTo>
-                  <a:lnTo>
-                    <a:pt x="440119" y="257293"/>
-                  </a:lnTo>
-                  <a:lnTo>
-                    <a:pt x="517363" y="299151"/>
-                  </a:lnTo>
-                  <a:lnTo>
-                    <a:pt x="594606" y="340084"/>
-                  </a:lnTo>
-                  <a:lnTo>
-                    <a:pt x="671850" y="380114"/>
-                  </a:lnTo>
-                  <a:lnTo>
-                    <a:pt x="749094" y="419259"/>
-                  </a:lnTo>
-                  <a:lnTo>
-                    <a:pt x="826337" y="457541"/>
-                  </a:lnTo>
-                  <a:lnTo>
-                    <a:pt x="903581" y="494977"/>
-                  </a:lnTo>
-                  <a:lnTo>
-                    <a:pt x="980824" y="531587"/>
-                  </a:lnTo>
-                  <a:lnTo>
-                    <a:pt x="1058068" y="567388"/>
-                  </a:lnTo>
-                  <a:lnTo>
-                    <a:pt x="1135311" y="602399"/>
-                  </a:lnTo>
-                  <a:lnTo>
-                    <a:pt x="1212555" y="636637"/>
-                  </a:lnTo>
-                  <a:lnTo>
-                    <a:pt x="1289799" y="670119"/>
-                  </a:lnTo>
-                  <a:lnTo>
-                    <a:pt x="1367042" y="702862"/>
-                  </a:lnTo>
-                  <a:lnTo>
-                    <a:pt x="1444286" y="734882"/>
-                  </a:lnTo>
-                  <a:lnTo>
-                    <a:pt x="1521529" y="766194"/>
-                  </a:lnTo>
-                  <a:lnTo>
-                    <a:pt x="1598773" y="796816"/>
-                  </a:lnTo>
-                  <a:lnTo>
-                    <a:pt x="1676016" y="826761"/>
-                  </a:lnTo>
-                  <a:lnTo>
-                    <a:pt x="1753260" y="856045"/>
-                  </a:lnTo>
-                  <a:lnTo>
-                    <a:pt x="1830504" y="884683"/>
-                  </a:lnTo>
-                  <a:lnTo>
-                    <a:pt x="1907747" y="912688"/>
-                  </a:lnTo>
-                  <a:lnTo>
-                    <a:pt x="1984991" y="940075"/>
-                  </a:lnTo>
-                  <a:lnTo>
-                    <a:pt x="2062234" y="966858"/>
-                  </a:lnTo>
-                  <a:lnTo>
-                    <a:pt x="2139478" y="993049"/>
-                  </a:lnTo>
-                  <a:lnTo>
-                    <a:pt x="2216721" y="1018661"/>
-                  </a:lnTo>
-                  <a:lnTo>
-                    <a:pt x="2293965" y="1043708"/>
-                  </a:lnTo>
-                  <a:lnTo>
-                    <a:pt x="2371209" y="1068203"/>
-                  </a:lnTo>
-                  <a:lnTo>
-                    <a:pt x="2448452" y="1092156"/>
-                  </a:lnTo>
-                  <a:lnTo>
-                    <a:pt x="2525696" y="1115580"/>
-                  </a:lnTo>
-                  <a:lnTo>
-                    <a:pt x="2602939" y="1138488"/>
-                  </a:lnTo>
-                  <a:lnTo>
-                    <a:pt x="2680183" y="1160889"/>
-                  </a:lnTo>
-                  <a:lnTo>
-                    <a:pt x="2757426" y="1182796"/>
-                  </a:lnTo>
-                  <a:lnTo>
-                    <a:pt x="2834670" y="1204219"/>
-                  </a:lnTo>
-                  <a:lnTo>
-                    <a:pt x="2911914" y="1225170"/>
-                  </a:lnTo>
-                  <a:lnTo>
-                    <a:pt x="2989157" y="1245657"/>
-                  </a:lnTo>
-                  <a:lnTo>
-                    <a:pt x="3066401" y="1265692"/>
-                  </a:lnTo>
-                  <a:lnTo>
-                    <a:pt x="3143644" y="1285285"/>
-                  </a:lnTo>
-                  <a:lnTo>
-                    <a:pt x="3220888" y="1304446"/>
-                  </a:lnTo>
-                  <a:lnTo>
-                    <a:pt x="3298131" y="1323183"/>
-                  </a:lnTo>
-                  <a:lnTo>
-                    <a:pt x="3375375" y="1341507"/>
-                  </a:lnTo>
-                  <a:lnTo>
-                    <a:pt x="3452619" y="1359426"/>
-                  </a:lnTo>
-                  <a:lnTo>
-                    <a:pt x="3529862" y="1376949"/>
-                  </a:lnTo>
-                  <a:lnTo>
-                    <a:pt x="3607106" y="1394086"/>
-                  </a:lnTo>
-                  <a:lnTo>
-                    <a:pt x="3684349" y="1410844"/>
-                  </a:lnTo>
-                  <a:lnTo>
-                    <a:pt x="3761593" y="1427232"/>
-                  </a:lnTo>
-                  <a:lnTo>
-                    <a:pt x="3838836" y="1443258"/>
-                  </a:lnTo>
-                  <a:lnTo>
-                    <a:pt x="3916080" y="1458931"/>
-                  </a:lnTo>
-                  <a:lnTo>
-                    <a:pt x="3993324" y="1474257"/>
-                  </a:lnTo>
-                  <a:lnTo>
-                    <a:pt x="4070567" y="1489245"/>
-                  </a:lnTo>
-                  <a:lnTo>
-                    <a:pt x="4147811" y="1503902"/>
-                  </a:lnTo>
-                  <a:lnTo>
-                    <a:pt x="4225054" y="1518235"/>
-                  </a:lnTo>
-                  <a:lnTo>
-                    <a:pt x="4302298" y="1532252"/>
-                  </a:lnTo>
-                  <a:lnTo>
-                    <a:pt x="4379541" y="1545960"/>
-                  </a:lnTo>
-                  <a:lnTo>
-                    <a:pt x="4456785" y="1559365"/>
-                  </a:lnTo>
-                  <a:lnTo>
-                    <a:pt x="4534029" y="1572474"/>
-                  </a:lnTo>
-                  <a:lnTo>
-                    <a:pt x="4611272" y="1585293"/>
-                  </a:lnTo>
-                  <a:lnTo>
-                    <a:pt x="4688516" y="1597830"/>
-                  </a:lnTo>
-                  <a:lnTo>
-                    <a:pt x="4765759" y="1610089"/>
-                  </a:lnTo>
-                  <a:lnTo>
-                    <a:pt x="4843003" y="1622078"/>
-                  </a:lnTo>
-                  <a:lnTo>
-                    <a:pt x="4920246" y="1633802"/>
-                  </a:lnTo>
-                  <a:lnTo>
-                    <a:pt x="4997490" y="1645268"/>
-                  </a:lnTo>
-                  <a:lnTo>
-                    <a:pt x="5074734" y="1656480"/>
-                  </a:lnTo>
-                  <a:lnTo>
-                    <a:pt x="5151977" y="1667445"/>
-                  </a:lnTo>
-                  <a:lnTo>
-                    <a:pt x="5229221" y="1678167"/>
-                  </a:lnTo>
-                  <a:lnTo>
-                    <a:pt x="5306464" y="1688653"/>
-                  </a:lnTo>
-                  <a:lnTo>
-                    <a:pt x="5383708" y="1698907"/>
-                  </a:lnTo>
-                  <a:lnTo>
-                    <a:pt x="5460951" y="1708935"/>
-                  </a:lnTo>
-                  <a:lnTo>
-                    <a:pt x="5538195" y="1718742"/>
-                  </a:lnTo>
-                  <a:lnTo>
-                    <a:pt x="5615439" y="1728332"/>
-                  </a:lnTo>
-                  <a:lnTo>
-                    <a:pt x="5692682" y="1737710"/>
-                  </a:lnTo>
-                  <a:lnTo>
-                    <a:pt x="5769926" y="1746881"/>
-                  </a:lnTo>
-                  <a:lnTo>
-                    <a:pt x="5847169" y="1755850"/>
-                  </a:lnTo>
-                  <a:lnTo>
-                    <a:pt x="5924413" y="1764621"/>
-                  </a:lnTo>
-                  <a:lnTo>
-                    <a:pt x="6001656" y="1773198"/>
-                  </a:lnTo>
-                  <a:lnTo>
-                    <a:pt x="6078900" y="1781585"/>
-                  </a:lnTo>
-                  <a:lnTo>
-                    <a:pt x="6156144" y="1789788"/>
-                  </a:lnTo>
-                  <a:lnTo>
-                    <a:pt x="6233387" y="1797809"/>
-                  </a:lnTo>
-                  <a:lnTo>
-                    <a:pt x="6310631" y="1805653"/>
-                  </a:lnTo>
-                  <a:lnTo>
-                    <a:pt x="6387874" y="1813324"/>
-                  </a:lnTo>
-                  <a:lnTo>
-                    <a:pt x="6465118" y="1820826"/>
-                  </a:lnTo>
-                  <a:lnTo>
-                    <a:pt x="6542361" y="1828162"/>
-                  </a:lnTo>
-                  <a:lnTo>
-                    <a:pt x="6619605" y="1835336"/>
-                  </a:lnTo>
-                  <a:lnTo>
-                    <a:pt x="6696849" y="1842352"/>
-                  </a:lnTo>
-                  <a:lnTo>
-                    <a:pt x="6774092" y="1849212"/>
-                  </a:lnTo>
-                  <a:lnTo>
-                    <a:pt x="6851336" y="1855922"/>
-                  </a:lnTo>
-                  <a:lnTo>
-                    <a:pt x="6928579" y="1862483"/>
-                  </a:lnTo>
-                  <a:lnTo>
-                    <a:pt x="7005823" y="1868899"/>
-                  </a:lnTo>
-                  <a:lnTo>
-                    <a:pt x="7083066" y="1875174"/>
-                  </a:lnTo>
-                  <a:lnTo>
-                    <a:pt x="7160310" y="1881310"/>
-                  </a:lnTo>
-                  <a:lnTo>
-                    <a:pt x="7237554" y="1887311"/>
-                  </a:lnTo>
-                  <a:lnTo>
-                    <a:pt x="7314797" y="1893179"/>
-                  </a:lnTo>
-                  <a:lnTo>
-                    <a:pt x="7392041" y="1898917"/>
+                    <a:pt x="71622" y="51172"/>
+                  </a:lnTo>
+                  <a:lnTo>
+                    <a:pt x="143245" y="101216"/>
+                  </a:lnTo>
+                  <a:lnTo>
+                    <a:pt x="214867" y="150154"/>
+                  </a:lnTo>
+                  <a:lnTo>
+                    <a:pt x="286490" y="198012"/>
+                  </a:lnTo>
+                  <a:lnTo>
+                    <a:pt x="358112" y="244813"/>
+                  </a:lnTo>
+                  <a:lnTo>
+                    <a:pt x="429735" y="290580"/>
+                  </a:lnTo>
+                  <a:lnTo>
+                    <a:pt x="501357" y="335338"/>
+                  </a:lnTo>
+                  <a:lnTo>
+                    <a:pt x="572980" y="379107"/>
+                  </a:lnTo>
+                  <a:lnTo>
+                    <a:pt x="644602" y="421909"/>
+                  </a:lnTo>
+                  <a:lnTo>
+                    <a:pt x="716225" y="463767"/>
+                  </a:lnTo>
+                  <a:lnTo>
+                    <a:pt x="787847" y="504700"/>
+                  </a:lnTo>
+                  <a:lnTo>
+                    <a:pt x="859470" y="544730"/>
+                  </a:lnTo>
+                  <a:lnTo>
+                    <a:pt x="931092" y="583876"/>
+                  </a:lnTo>
+                  <a:lnTo>
+                    <a:pt x="1002715" y="622157"/>
+                  </a:lnTo>
+                  <a:lnTo>
+                    <a:pt x="1074337" y="659593"/>
+                  </a:lnTo>
+                  <a:lnTo>
+                    <a:pt x="1145960" y="696203"/>
+                  </a:lnTo>
+                  <a:lnTo>
+                    <a:pt x="1217582" y="732004"/>
+                  </a:lnTo>
+                  <a:lnTo>
+                    <a:pt x="1289205" y="767015"/>
+                  </a:lnTo>
+                  <a:lnTo>
+                    <a:pt x="1360827" y="801253"/>
+                  </a:lnTo>
+                  <a:lnTo>
+                    <a:pt x="1432450" y="834735"/>
+                  </a:lnTo>
+                  <a:lnTo>
+                    <a:pt x="1504073" y="867478"/>
+                  </a:lnTo>
+                  <a:lnTo>
+                    <a:pt x="1575695" y="899498"/>
+                  </a:lnTo>
+                  <a:lnTo>
+                    <a:pt x="1647318" y="930810"/>
+                  </a:lnTo>
+                  <a:lnTo>
+                    <a:pt x="1718940" y="961432"/>
+                  </a:lnTo>
+                  <a:lnTo>
+                    <a:pt x="1790563" y="991377"/>
+                  </a:lnTo>
+                  <a:lnTo>
+                    <a:pt x="1862185" y="1020661"/>
+                  </a:lnTo>
+                  <a:lnTo>
+                    <a:pt x="1933808" y="1049299"/>
+                  </a:lnTo>
+                  <a:lnTo>
+                    <a:pt x="2005430" y="1077304"/>
+                  </a:lnTo>
+                  <a:lnTo>
+                    <a:pt x="2077053" y="1104691"/>
+                  </a:lnTo>
+                  <a:lnTo>
+                    <a:pt x="2148675" y="1131474"/>
+                  </a:lnTo>
+                  <a:lnTo>
+                    <a:pt x="2220298" y="1157665"/>
+                  </a:lnTo>
+                  <a:lnTo>
+                    <a:pt x="2291920" y="1183277"/>
+                  </a:lnTo>
+                  <a:lnTo>
+                    <a:pt x="2363543" y="1208324"/>
+                  </a:lnTo>
+                  <a:lnTo>
+                    <a:pt x="2435165" y="1232819"/>
+                  </a:lnTo>
+                  <a:lnTo>
+                    <a:pt x="2506788" y="1256772"/>
+                  </a:lnTo>
+                  <a:lnTo>
+                    <a:pt x="2578410" y="1280196"/>
+                  </a:lnTo>
+                  <a:lnTo>
+                    <a:pt x="2650033" y="1303104"/>
+                  </a:lnTo>
+                  <a:lnTo>
+                    <a:pt x="2721655" y="1325505"/>
+                  </a:lnTo>
+                  <a:lnTo>
+                    <a:pt x="2793278" y="1347412"/>
+                  </a:lnTo>
+                  <a:lnTo>
+                    <a:pt x="2864901" y="1368835"/>
+                  </a:lnTo>
+                  <a:lnTo>
+                    <a:pt x="2936523" y="1389786"/>
+                  </a:lnTo>
+                  <a:lnTo>
+                    <a:pt x="3008146" y="1410273"/>
+                  </a:lnTo>
+                  <a:lnTo>
+                    <a:pt x="3079768" y="1430309"/>
+                  </a:lnTo>
+                  <a:lnTo>
+                    <a:pt x="3151391" y="1449902"/>
+                  </a:lnTo>
+                  <a:lnTo>
+                    <a:pt x="3223013" y="1469062"/>
+                  </a:lnTo>
+                  <a:lnTo>
+                    <a:pt x="3294636" y="1487799"/>
+                  </a:lnTo>
+                  <a:lnTo>
+                    <a:pt x="3366258" y="1506123"/>
+                  </a:lnTo>
+                  <a:lnTo>
+                    <a:pt x="3437881" y="1524042"/>
+                  </a:lnTo>
+                  <a:lnTo>
+                    <a:pt x="3509503" y="1541565"/>
+                  </a:lnTo>
+                  <a:lnTo>
+                    <a:pt x="3581126" y="1558702"/>
+                  </a:lnTo>
+                  <a:lnTo>
+                    <a:pt x="3652748" y="1575460"/>
+                  </a:lnTo>
+                  <a:lnTo>
+                    <a:pt x="3724371" y="1591848"/>
+                  </a:lnTo>
+                  <a:lnTo>
+                    <a:pt x="3795993" y="1607874"/>
+                  </a:lnTo>
+                  <a:lnTo>
+                    <a:pt x="3867616" y="1623547"/>
+                  </a:lnTo>
+                  <a:lnTo>
+                    <a:pt x="3939238" y="1638873"/>
+                  </a:lnTo>
+                  <a:lnTo>
+                    <a:pt x="4010861" y="1653861"/>
+                  </a:lnTo>
+                  <a:lnTo>
+                    <a:pt x="4082483" y="1668518"/>
+                  </a:lnTo>
+                  <a:lnTo>
+                    <a:pt x="4154106" y="1682852"/>
+                  </a:lnTo>
+                  <a:lnTo>
+                    <a:pt x="4225729" y="1696869"/>
+                  </a:lnTo>
+                  <a:lnTo>
+                    <a:pt x="4297351" y="1710576"/>
+                  </a:lnTo>
+                  <a:lnTo>
+                    <a:pt x="4368974" y="1723981"/>
+                  </a:lnTo>
+                  <a:lnTo>
+                    <a:pt x="4440596" y="1737090"/>
+                  </a:lnTo>
+                  <a:lnTo>
+                    <a:pt x="4512219" y="1749909"/>
+                  </a:lnTo>
+                  <a:lnTo>
+                    <a:pt x="4583841" y="1762446"/>
+                  </a:lnTo>
+                  <a:lnTo>
+                    <a:pt x="4655464" y="1774705"/>
+                  </a:lnTo>
+                  <a:lnTo>
+                    <a:pt x="4727086" y="1786694"/>
+                  </a:lnTo>
+                  <a:lnTo>
+                    <a:pt x="4798709" y="1798418"/>
+                  </a:lnTo>
+                  <a:lnTo>
+                    <a:pt x="4870331" y="1809884"/>
+                  </a:lnTo>
+                  <a:lnTo>
+                    <a:pt x="4941954" y="1821096"/>
+                  </a:lnTo>
+                  <a:lnTo>
+                    <a:pt x="5013576" y="1832061"/>
+                  </a:lnTo>
+                  <a:lnTo>
+                    <a:pt x="5085199" y="1842783"/>
+                  </a:lnTo>
+                  <a:lnTo>
+                    <a:pt x="5156821" y="1853269"/>
+                  </a:lnTo>
+                  <a:lnTo>
+                    <a:pt x="5228444" y="1863523"/>
+                  </a:lnTo>
+                  <a:lnTo>
+                    <a:pt x="5300066" y="1873551"/>
+                  </a:lnTo>
+                  <a:lnTo>
+                    <a:pt x="5371689" y="1883358"/>
+                  </a:lnTo>
+                  <a:lnTo>
+                    <a:pt x="5443311" y="1892948"/>
+                  </a:lnTo>
+                  <a:lnTo>
+                    <a:pt x="5514934" y="1902326"/>
+                  </a:lnTo>
+                  <a:lnTo>
+                    <a:pt x="5586557" y="1911497"/>
+                  </a:lnTo>
+                  <a:lnTo>
+                    <a:pt x="5658179" y="1920466"/>
+                  </a:lnTo>
+                  <a:lnTo>
+                    <a:pt x="5729802" y="1929237"/>
+                  </a:lnTo>
+                  <a:lnTo>
+                    <a:pt x="5801424" y="1937814"/>
+                  </a:lnTo>
+                  <a:lnTo>
+                    <a:pt x="5873047" y="1946201"/>
+                  </a:lnTo>
+                  <a:lnTo>
+                    <a:pt x="5944669" y="1954404"/>
+                  </a:lnTo>
+                  <a:lnTo>
+                    <a:pt x="6016292" y="1962425"/>
+                  </a:lnTo>
+                  <a:lnTo>
+                    <a:pt x="6087914" y="1970269"/>
+                  </a:lnTo>
+                  <a:lnTo>
+                    <a:pt x="6159537" y="1977940"/>
+                  </a:lnTo>
+                  <a:lnTo>
+                    <a:pt x="6231159" y="1985442"/>
+                  </a:lnTo>
+                  <a:lnTo>
+                    <a:pt x="6302782" y="1992778"/>
+                  </a:lnTo>
+                  <a:lnTo>
+                    <a:pt x="6374404" y="1999952"/>
+                  </a:lnTo>
+                  <a:lnTo>
+                    <a:pt x="6446027" y="2006968"/>
+                  </a:lnTo>
+                  <a:lnTo>
+                    <a:pt x="6517649" y="2013829"/>
+                  </a:lnTo>
+                  <a:lnTo>
+                    <a:pt x="6589272" y="2020538"/>
+                  </a:lnTo>
+                  <a:lnTo>
+                    <a:pt x="6660894" y="2027099"/>
+                  </a:lnTo>
+                  <a:lnTo>
+                    <a:pt x="6732517" y="2033515"/>
+                  </a:lnTo>
+                  <a:lnTo>
+                    <a:pt x="6804139" y="2039790"/>
+                  </a:lnTo>
+                  <a:lnTo>
+                    <a:pt x="6875762" y="2045926"/>
+                  </a:lnTo>
+                  <a:lnTo>
+                    <a:pt x="6947385" y="2051927"/>
+                  </a:lnTo>
+                  <a:lnTo>
+                    <a:pt x="7019007" y="2057795"/>
+                  </a:lnTo>
+                  <a:lnTo>
+                    <a:pt x="7090630" y="2063533"/>
                   </a:lnTo>
                 </a:path>
               </a:pathLst>
@@ -4512,7 +4496,7 @@
         </p:sp>
         <p:sp>
           <p:nvSpPr>
-            <p:cNvPr id="25" name="pl25"/>
+            <p:cNvPr id="24" name="pl24"/>
             <p:cNvSpPr/>
             <p:nvPr/>
           </p:nvSpPr>
@@ -4555,13 +4539,13 @@
         </p:sp>
         <p:sp>
           <p:nvSpPr>
-            <p:cNvPr id="26" name="pl26"/>
+            <p:cNvPr id="25" name="pl25"/>
             <p:cNvSpPr/>
             <p:nvPr/>
           </p:nvSpPr>
           <p:spPr>
             <a:xfrm>
-              <a:off x="4117484" y="2073503"/>
+              <a:off x="4468386" y="2073503"/>
               <a:ext cx="0" cy="3649639"/>
             </a:xfrm>
             <a:custGeom>
@@ -4598,7 +4582,7 @@
         </p:sp>
         <p:sp>
           <p:nvSpPr>
-            <p:cNvPr id="27" name="tx27"/>
+            <p:cNvPr id="26" name="tx26"/>
             <p:cNvSpPr/>
             <p:nvPr/>
           </p:nvSpPr>
@@ -4644,7 +4628,7 @@
         </p:sp>
         <p:sp>
           <p:nvSpPr>
-            <p:cNvPr id="28" name="tx28"/>
+            <p:cNvPr id="27" name="tx27"/>
             <p:cNvSpPr/>
             <p:nvPr/>
           </p:nvSpPr>
@@ -4690,7 +4674,7 @@
         </p:sp>
         <p:sp>
           <p:nvSpPr>
-            <p:cNvPr id="29" name="tx29"/>
+            <p:cNvPr id="28" name="tx28"/>
             <p:cNvSpPr/>
             <p:nvPr/>
           </p:nvSpPr>
@@ -4736,7 +4720,7 @@
         </p:sp>
         <p:sp>
           <p:nvSpPr>
-            <p:cNvPr id="30" name="tx30"/>
+            <p:cNvPr id="29" name="tx29"/>
             <p:cNvSpPr/>
             <p:nvPr/>
           </p:nvSpPr>
@@ -4782,7 +4766,7 @@
         </p:sp>
         <p:sp>
           <p:nvSpPr>
-            <p:cNvPr id="31" name="tx31"/>
+            <p:cNvPr id="30" name="tx30"/>
             <p:cNvSpPr/>
             <p:nvPr/>
           </p:nvSpPr>
@@ -4828,14 +4812,14 @@
         </p:sp>
         <p:sp>
           <p:nvSpPr>
-            <p:cNvPr id="32" name="tx32"/>
+            <p:cNvPr id="31" name="tx31"/>
             <p:cNvSpPr/>
             <p:nvPr/>
           </p:nvSpPr>
           <p:spPr>
             <a:xfrm>
-              <a:off x="2423864" y="5785772"/>
-              <a:ext cx="155356" cy="80101"/>
+              <a:off x="2478335" y="5785772"/>
+              <a:ext cx="161574" cy="80101"/>
             </a:xfrm>
             <a:prstGeom prst="rect">
               <a:avLst/>
@@ -4867,21 +4851,21 @@
                   <a:latin typeface="Helvetica"/>
                   <a:cs typeface="Helvetica"/>
                 </a:rPr>
-                <a:t>0.8</a:t>
+                <a:t>-25</a:t>
               </a:r>
             </a:p>
           </p:txBody>
         </p:sp>
         <p:sp>
           <p:nvSpPr>
-            <p:cNvPr id="33" name="tx33"/>
+            <p:cNvPr id="32" name="tx32"/>
             <p:cNvSpPr/>
             <p:nvPr/>
           </p:nvSpPr>
           <p:spPr>
             <a:xfrm>
-              <a:off x="4196521" y="5785772"/>
-              <a:ext cx="155356" cy="80101"/>
+              <a:off x="4582608" y="5785772"/>
+              <a:ext cx="62179" cy="80101"/>
             </a:xfrm>
             <a:prstGeom prst="rect">
               <a:avLst/>
@@ -4913,21 +4897,21 @@
                   <a:latin typeface="Helvetica"/>
                   <a:cs typeface="Helvetica"/>
                 </a:rPr>
-                <a:t>1.0</a:t>
+                <a:t>0</a:t>
               </a:r>
             </a:p>
           </p:txBody>
         </p:sp>
         <p:sp>
           <p:nvSpPr>
-            <p:cNvPr id="34" name="tx34"/>
+            <p:cNvPr id="33" name="tx33"/>
             <p:cNvSpPr/>
             <p:nvPr/>
           </p:nvSpPr>
           <p:spPr>
             <a:xfrm>
-              <a:off x="5969179" y="5785772"/>
-              <a:ext cx="155356" cy="80101"/>
+              <a:off x="6606094" y="5785772"/>
+              <a:ext cx="124358" cy="80101"/>
             </a:xfrm>
             <a:prstGeom prst="rect">
               <a:avLst/>
@@ -4959,67 +4943,21 @@
                   <a:latin typeface="Helvetica"/>
                   <a:cs typeface="Helvetica"/>
                 </a:rPr>
-                <a:t>1.2</a:t>
+                <a:t>25</a:t>
               </a:r>
             </a:p>
           </p:txBody>
         </p:sp>
         <p:sp>
           <p:nvSpPr>
-            <p:cNvPr id="35" name="tx35"/>
+            <p:cNvPr id="34" name="tx34"/>
             <p:cNvSpPr/>
             <p:nvPr/>
           </p:nvSpPr>
           <p:spPr>
             <a:xfrm>
-              <a:off x="7741836" y="5785772"/>
-              <a:ext cx="155356" cy="80101"/>
-            </a:xfrm>
-            <a:prstGeom prst="rect">
-              <a:avLst/>
-            </a:prstGeom>
-            <a:noFill/>
-          </p:spPr>
-          <p:txBody>
-            <a:bodyPr lIns="0" rIns="0" tIns="0" bIns="0" anchorCtr="1" anchor="ctr" wrap="none"/>
-            <a:lstStyle/>
-            <a:p>
-              <a:pPr algn="l" marL="0" marR="0" indent="0">
-                <a:lnSpc>
-                  <a:spcPts val="880"/>
-                </a:lnSpc>
-                <a:spcBef>
-                  <a:spcPts val="0"/>
-                </a:spcBef>
-                <a:spcAft>
-                  <a:spcPts val="0"/>
-                </a:spcAft>
-              </a:pPr>
-              <a:r>
-                <a:rPr sz="880">
-                  <a:solidFill>
-                    <a:srgbClr val="4D4D4D">
-                      <a:alpha val="100000"/>
-                    </a:srgbClr>
-                  </a:solidFill>
-                  <a:latin typeface="Helvetica"/>
-                  <a:cs typeface="Helvetica"/>
-                </a:rPr>
-                <a:t>1.4</a:t>
-              </a:r>
-            </a:p>
-          </p:txBody>
-        </p:sp>
-        <p:sp>
-          <p:nvSpPr>
-            <p:cNvPr id="36" name="tx36"/>
-            <p:cNvSpPr/>
-            <p:nvPr/>
-          </p:nvSpPr>
-          <p:spPr>
-            <a:xfrm>
-              <a:off x="3879271" y="5925448"/>
-              <a:ext cx="1676186" cy="100218"/>
+              <a:off x="2928340" y="5925448"/>
+              <a:ext cx="3578047" cy="100218"/>
             </a:xfrm>
             <a:prstGeom prst="rect">
               <a:avLst/>
@@ -5051,14 +4989,14 @@
                   <a:latin typeface="Helvetica"/>
                   <a:cs typeface="Helvetica"/>
                 </a:rPr>
-                <a:t>CKD-EPI Cr-Cys / CG ratio</a:t>
+                <a:t>eGFR difference (%): 100 × (CKD-EPI Cr-Cys − CG) / CG</a:t>
               </a:r>
             </a:p>
           </p:txBody>
         </p:sp>
         <p:sp>
           <p:nvSpPr>
-            <p:cNvPr id="37" name="tx37"/>
+            <p:cNvPr id="35" name="tx35"/>
             <p:cNvSpPr/>
             <p:nvPr/>
           </p:nvSpPr>
@@ -5104,14 +5042,14 @@
         </p:sp>
         <p:sp>
           <p:nvSpPr>
-            <p:cNvPr id="38" name="tx38"/>
+            <p:cNvPr id="36" name="tx36"/>
             <p:cNvSpPr/>
             <p:nvPr/>
           </p:nvSpPr>
           <p:spPr>
             <a:xfrm>
               <a:off x="817517" y="1896563"/>
-              <a:ext cx="6169365" cy="82021"/>
+              <a:ext cx="6321612" cy="82021"/>
             </a:xfrm>
             <a:prstGeom prst="rect">
               <a:avLst/>
@@ -5143,14 +5081,14 @@
                   <a:latin typeface="Helvetica"/>
                   <a:cs typeface="Helvetica"/>
                 </a:rPr>
-                <a:t>subHR per 0.1 ratio decline: 1.29 (1.02-1.64), p = 0.033  |  per IQR decline (Δ = 0.30): 2.13 (1.06-4.28)  |  IQR: [0.84, 1.14]</a:t>
+                <a:t>subHR per 10 % decline: 1.29 (1.02-1.64), p = 0.033  |  per IQR decline (Δ = 29.5 %): 2.13 (1.06-4.28)  |  IQR: [-15.6, 13.9] %</a:t>
               </a:r>
             </a:p>
           </p:txBody>
         </p:sp>
         <p:sp>
           <p:nvSpPr>
-            <p:cNvPr id="39" name="tx39"/>
+            <p:cNvPr id="37" name="tx37"/>
             <p:cNvSpPr/>
             <p:nvPr/>
           </p:nvSpPr>

--- a/docs/pptx/auc3/jx-auc3-linsubhr-ratio-hosp2.pptx
+++ b/docs/pptx/auc3/jx-auc3-linsubhr-ratio-hosp2.pptx
@@ -2265,34 +2265,26 @@
         </p:sp>
         <p:sp>
           <p:nvSpPr>
-            <p:cNvPr id="4" name="pl4"/>
+            <p:cNvPr id="4" name="rc4"/>
             <p:cNvSpPr/>
             <p:nvPr/>
           </p:nvSpPr>
           <p:spPr>
             <a:xfrm>
-              <a:off x="817517" y="5142518"/>
-              <a:ext cx="7799693" cy="0"/>
+              <a:off x="457200" y="1600200"/>
+              <a:ext cx="8229600" cy="4525962"/>
             </a:xfrm>
-            <a:custGeom>
+            <a:prstGeom prst="rect">
               <a:avLst/>
-              <a:pathLst>
-                <a:path w="7799693" h="0">
-                  <a:moveTo>
-                    <a:pt x="0" y="0"/>
-                  </a:moveTo>
-                  <a:lnTo>
-                    <a:pt x="7799693" y="0"/>
-                  </a:lnTo>
-                  <a:lnTo>
-                    <a:pt x="7799693" y="0"/>
-                  </a:lnTo>
-                </a:path>
-              </a:pathLst>
-            </a:custGeom>
-            <a:ln w="6775" cap="flat">
+            </a:prstGeom>
+            <a:solidFill>
+              <a:srgbClr val="FFFFFF">
+                <a:alpha val="100000"/>
+              </a:srgbClr>
+            </a:solidFill>
+            <a:ln w="13550" cap="rnd">
               <a:solidFill>
-                <a:srgbClr val="EBEBEB">
+                <a:srgbClr val="FFFFFF">
                   <a:alpha val="100000"/>
                 </a:srgbClr>
               </a:solidFill>
@@ -2314,21 +2306,21 @@
           </p:nvSpPr>
           <p:spPr>
             <a:xfrm>
-              <a:off x="817517" y="4313054"/>
-              <a:ext cx="7799693" cy="0"/>
+              <a:off x="887106" y="3250627"/>
+              <a:ext cx="7660515" cy="0"/>
             </a:xfrm>
             <a:custGeom>
               <a:avLst/>
               <a:pathLst>
-                <a:path w="7799693" h="0">
+                <a:path w="7660515" h="0">
                   <a:moveTo>
                     <a:pt x="0" y="0"/>
                   </a:moveTo>
                   <a:lnTo>
-                    <a:pt x="7799693" y="0"/>
-                  </a:lnTo>
-                  <a:lnTo>
-                    <a:pt x="7799693" y="0"/>
+                    <a:pt x="7660515" y="0"/>
+                  </a:lnTo>
+                  <a:lnTo>
+                    <a:pt x="7660515" y="0"/>
                   </a:lnTo>
                 </a:path>
               </a:pathLst>
@@ -2357,21 +2349,21 @@
           </p:nvSpPr>
           <p:spPr>
             <a:xfrm>
-              <a:off x="817517" y="3483591"/>
-              <a:ext cx="7799693" cy="0"/>
+              <a:off x="887106" y="2951293"/>
+              <a:ext cx="7660515" cy="0"/>
             </a:xfrm>
             <a:custGeom>
               <a:avLst/>
               <a:pathLst>
-                <a:path w="7799693" h="0">
+                <a:path w="7660515" h="0">
                   <a:moveTo>
                     <a:pt x="0" y="0"/>
                   </a:moveTo>
                   <a:lnTo>
-                    <a:pt x="7799693" y="0"/>
-                  </a:lnTo>
-                  <a:lnTo>
-                    <a:pt x="7799693" y="0"/>
+                    <a:pt x="7660515" y="0"/>
+                  </a:lnTo>
+                  <a:lnTo>
+                    <a:pt x="7660515" y="0"/>
                   </a:lnTo>
                 </a:path>
               </a:pathLst>
@@ -2400,21 +2392,21 @@
           </p:nvSpPr>
           <p:spPr>
             <a:xfrm>
-              <a:off x="817517" y="2654127"/>
-              <a:ext cx="7799693" cy="0"/>
+              <a:off x="887106" y="2651959"/>
+              <a:ext cx="7660515" cy="0"/>
             </a:xfrm>
             <a:custGeom>
               <a:avLst/>
               <a:pathLst>
-                <a:path w="7799693" h="0">
+                <a:path w="7660515" h="0">
                   <a:moveTo>
                     <a:pt x="0" y="0"/>
                   </a:moveTo>
                   <a:lnTo>
-                    <a:pt x="7799693" y="0"/>
-                  </a:lnTo>
-                  <a:lnTo>
-                    <a:pt x="7799693" y="0"/>
+                    <a:pt x="7660515" y="0"/>
+                  </a:lnTo>
+                  <a:lnTo>
+                    <a:pt x="7660515" y="0"/>
                   </a:lnTo>
                 </a:path>
               </a:pathLst>
@@ -2443,21 +2435,21 @@
           </p:nvSpPr>
           <p:spPr>
             <a:xfrm>
-              <a:off x="1531834" y="2073503"/>
-              <a:ext cx="0" cy="3649639"/>
+              <a:off x="887106" y="2352625"/>
+              <a:ext cx="7660515" cy="0"/>
             </a:xfrm>
             <a:custGeom>
               <a:avLst/>
               <a:pathLst>
-                <a:path w="0" h="3649639">
+                <a:path w="7660515" h="0">
                   <a:moveTo>
-                    <a:pt x="0" y="3649639"/>
+                    <a:pt x="0" y="0"/>
                   </a:moveTo>
                   <a:lnTo>
-                    <a:pt x="0" y="0"/>
-                  </a:lnTo>
-                  <a:lnTo>
-                    <a:pt x="0" y="0"/>
+                    <a:pt x="7660515" y="0"/>
+                  </a:lnTo>
+                  <a:lnTo>
+                    <a:pt x="7660515" y="0"/>
                   </a:lnTo>
                 </a:path>
               </a:pathLst>
@@ -2486,15 +2478,15 @@
           </p:nvSpPr>
           <p:spPr>
             <a:xfrm>
-              <a:off x="3586410" y="2073503"/>
-              <a:ext cx="0" cy="3649639"/>
+              <a:off x="1588677" y="2143092"/>
+              <a:ext cx="0" cy="1317069"/>
             </a:xfrm>
             <a:custGeom>
               <a:avLst/>
               <a:pathLst>
-                <a:path w="0" h="3649639">
+                <a:path w="0" h="1317069">
                   <a:moveTo>
-                    <a:pt x="0" y="3649639"/>
+                    <a:pt x="0" y="1317069"/>
                   </a:moveTo>
                   <a:lnTo>
                     <a:pt x="0" y="0"/>
@@ -2529,15 +2521,15 @@
           </p:nvSpPr>
           <p:spPr>
             <a:xfrm>
-              <a:off x="5640985" y="2073503"/>
-              <a:ext cx="0" cy="3649639"/>
+              <a:off x="3606590" y="2143092"/>
+              <a:ext cx="0" cy="1317069"/>
             </a:xfrm>
             <a:custGeom>
               <a:avLst/>
               <a:pathLst>
-                <a:path w="0" h="3649639">
+                <a:path w="0" h="1317069">
                   <a:moveTo>
-                    <a:pt x="0" y="3649639"/>
+                    <a:pt x="0" y="1317069"/>
                   </a:moveTo>
                   <a:lnTo>
                     <a:pt x="0" y="0"/>
@@ -2572,15 +2564,15 @@
           </p:nvSpPr>
           <p:spPr>
             <a:xfrm>
-              <a:off x="7695561" y="2073503"/>
-              <a:ext cx="0" cy="3649639"/>
+              <a:off x="5624504" y="2143092"/>
+              <a:ext cx="0" cy="1317069"/>
             </a:xfrm>
             <a:custGeom>
               <a:avLst/>
               <a:pathLst>
-                <a:path w="0" h="3649639">
+                <a:path w="0" h="1317069">
                   <a:moveTo>
-                    <a:pt x="0" y="3649639"/>
+                    <a:pt x="0" y="1317069"/>
                   </a:moveTo>
                   <a:lnTo>
                     <a:pt x="0" y="0"/>
@@ -2615,26 +2607,26 @@
           </p:nvSpPr>
           <p:spPr>
             <a:xfrm>
-              <a:off x="817517" y="5557249"/>
-              <a:ext cx="7799693" cy="0"/>
+              <a:off x="7642418" y="2143092"/>
+              <a:ext cx="0" cy="1317069"/>
             </a:xfrm>
             <a:custGeom>
               <a:avLst/>
               <a:pathLst>
-                <a:path w="7799693" h="0">
+                <a:path w="0" h="1317069">
                   <a:moveTo>
+                    <a:pt x="0" y="1317069"/>
+                  </a:moveTo>
+                  <a:lnTo>
                     <a:pt x="0" y="0"/>
-                  </a:moveTo>
-                  <a:lnTo>
-                    <a:pt x="7799693" y="0"/>
-                  </a:lnTo>
-                  <a:lnTo>
-                    <a:pt x="7799693" y="0"/>
+                  </a:lnTo>
+                  <a:lnTo>
+                    <a:pt x="0" y="0"/>
                   </a:lnTo>
                 </a:path>
               </a:pathLst>
             </a:custGeom>
-            <a:ln w="13550" cap="flat">
+            <a:ln w="6775" cap="flat">
               <a:solidFill>
                 <a:srgbClr val="EBEBEB">
                   <a:alpha val="100000"/>
@@ -2658,21 +2650,21 @@
           </p:nvSpPr>
           <p:spPr>
             <a:xfrm>
-              <a:off x="817517" y="4727786"/>
-              <a:ext cx="7799693" cy="0"/>
+              <a:off x="887106" y="3400294"/>
+              <a:ext cx="7660515" cy="0"/>
             </a:xfrm>
             <a:custGeom>
               <a:avLst/>
               <a:pathLst>
-                <a:path w="7799693" h="0">
+                <a:path w="7660515" h="0">
                   <a:moveTo>
                     <a:pt x="0" y="0"/>
                   </a:moveTo>
                   <a:lnTo>
-                    <a:pt x="7799693" y="0"/>
-                  </a:lnTo>
-                  <a:lnTo>
-                    <a:pt x="7799693" y="0"/>
+                    <a:pt x="7660515" y="0"/>
+                  </a:lnTo>
+                  <a:lnTo>
+                    <a:pt x="7660515" y="0"/>
                   </a:lnTo>
                 </a:path>
               </a:pathLst>
@@ -2701,21 +2693,21 @@
           </p:nvSpPr>
           <p:spPr>
             <a:xfrm>
-              <a:off x="817517" y="3898322"/>
-              <a:ext cx="7799693" cy="0"/>
+              <a:off x="887106" y="3100960"/>
+              <a:ext cx="7660515" cy="0"/>
             </a:xfrm>
             <a:custGeom>
               <a:avLst/>
               <a:pathLst>
-                <a:path w="7799693" h="0">
+                <a:path w="7660515" h="0">
                   <a:moveTo>
                     <a:pt x="0" y="0"/>
                   </a:moveTo>
                   <a:lnTo>
-                    <a:pt x="7799693" y="0"/>
-                  </a:lnTo>
-                  <a:lnTo>
-                    <a:pt x="7799693" y="0"/>
+                    <a:pt x="7660515" y="0"/>
+                  </a:lnTo>
+                  <a:lnTo>
+                    <a:pt x="7660515" y="0"/>
                   </a:lnTo>
                 </a:path>
               </a:pathLst>
@@ -2744,21 +2736,21 @@
           </p:nvSpPr>
           <p:spPr>
             <a:xfrm>
-              <a:off x="817517" y="3068859"/>
-              <a:ext cx="7799693" cy="0"/>
+              <a:off x="887106" y="2801626"/>
+              <a:ext cx="7660515" cy="0"/>
             </a:xfrm>
             <a:custGeom>
               <a:avLst/>
               <a:pathLst>
-                <a:path w="7799693" h="0">
+                <a:path w="7660515" h="0">
                   <a:moveTo>
                     <a:pt x="0" y="0"/>
                   </a:moveTo>
                   <a:lnTo>
-                    <a:pt x="7799693" y="0"/>
-                  </a:lnTo>
-                  <a:lnTo>
-                    <a:pt x="7799693" y="0"/>
+                    <a:pt x="7660515" y="0"/>
+                  </a:lnTo>
+                  <a:lnTo>
+                    <a:pt x="7660515" y="0"/>
                   </a:lnTo>
                 </a:path>
               </a:pathLst>
@@ -2787,21 +2779,21 @@
           </p:nvSpPr>
           <p:spPr>
             <a:xfrm>
-              <a:off x="817517" y="2239395"/>
-              <a:ext cx="7799693" cy="0"/>
+              <a:off x="887106" y="2502292"/>
+              <a:ext cx="7660515" cy="0"/>
             </a:xfrm>
             <a:custGeom>
               <a:avLst/>
               <a:pathLst>
-                <a:path w="7799693" h="0">
+                <a:path w="7660515" h="0">
                   <a:moveTo>
                     <a:pt x="0" y="0"/>
                   </a:moveTo>
                   <a:lnTo>
-                    <a:pt x="7799693" y="0"/>
-                  </a:lnTo>
-                  <a:lnTo>
-                    <a:pt x="7799693" y="0"/>
+                    <a:pt x="7660515" y="0"/>
+                  </a:lnTo>
+                  <a:lnTo>
+                    <a:pt x="7660515" y="0"/>
                   </a:lnTo>
                 </a:path>
               </a:pathLst>
@@ -2830,21 +2822,21 @@
           </p:nvSpPr>
           <p:spPr>
             <a:xfrm>
-              <a:off x="2559122" y="2073503"/>
-              <a:ext cx="0" cy="3649639"/>
+              <a:off x="887106" y="2202958"/>
+              <a:ext cx="7660515" cy="0"/>
             </a:xfrm>
             <a:custGeom>
               <a:avLst/>
               <a:pathLst>
-                <a:path w="0" h="3649639">
+                <a:path w="7660515" h="0">
                   <a:moveTo>
-                    <a:pt x="0" y="3649639"/>
+                    <a:pt x="0" y="0"/>
                   </a:moveTo>
                   <a:lnTo>
-                    <a:pt x="0" y="0"/>
-                  </a:lnTo>
-                  <a:lnTo>
-                    <a:pt x="0" y="0"/>
+                    <a:pt x="7660515" y="0"/>
+                  </a:lnTo>
+                  <a:lnTo>
+                    <a:pt x="7660515" y="0"/>
                   </a:lnTo>
                 </a:path>
               </a:pathLst>
@@ -2873,15 +2865,15 @@
           </p:nvSpPr>
           <p:spPr>
             <a:xfrm>
-              <a:off x="4613698" y="2073503"/>
-              <a:ext cx="0" cy="3649639"/>
+              <a:off x="2597634" y="2143092"/>
+              <a:ext cx="0" cy="1317069"/>
             </a:xfrm>
             <a:custGeom>
               <a:avLst/>
               <a:pathLst>
-                <a:path w="0" h="3649639">
+                <a:path w="0" h="1317069">
                   <a:moveTo>
-                    <a:pt x="0" y="3649639"/>
+                    <a:pt x="0" y="1317069"/>
                   </a:moveTo>
                   <a:lnTo>
                     <a:pt x="0" y="0"/>
@@ -2916,15 +2908,15 @@
           </p:nvSpPr>
           <p:spPr>
             <a:xfrm>
-              <a:off x="6668273" y="2073503"/>
-              <a:ext cx="0" cy="3649639"/>
+              <a:off x="4615547" y="2143092"/>
+              <a:ext cx="0" cy="1317069"/>
             </a:xfrm>
             <a:custGeom>
               <a:avLst/>
               <a:pathLst>
-                <a:path w="0" h="3649639">
+                <a:path w="0" h="1317069">
                   <a:moveTo>
-                    <a:pt x="0" y="3649639"/>
+                    <a:pt x="0" y="1317069"/>
                   </a:moveTo>
                   <a:lnTo>
                     <a:pt x="0" y="0"/>
@@ -2953,582 +2945,625 @@
         </p:sp>
         <p:sp>
           <p:nvSpPr>
-            <p:cNvPr id="20" name="pg20"/>
+            <p:cNvPr id="20" name="pl20"/>
             <p:cNvSpPr/>
             <p:nvPr/>
           </p:nvSpPr>
           <p:spPr>
             <a:xfrm>
-              <a:off x="1172049" y="2073503"/>
-              <a:ext cx="7090630" cy="3398227"/>
+              <a:off x="6633461" y="2143092"/>
+              <a:ext cx="0" cy="1317069"/>
             </a:xfrm>
             <a:custGeom>
               <a:avLst/>
               <a:pathLst>
-                <a:path w="7090630" h="3398227">
+                <a:path w="0" h="1317069">
                   <a:moveTo>
-                    <a:pt x="900132" y="0"/>
+                    <a:pt x="0" y="1317069"/>
                   </a:moveTo>
                   <a:lnTo>
-                    <a:pt x="931092" y="64764"/>
-                  </a:lnTo>
-                  <a:lnTo>
-                    <a:pt x="1002715" y="208297"/>
-                  </a:lnTo>
-                  <a:lnTo>
-                    <a:pt x="1074337" y="345804"/>
-                  </a:lnTo>
-                  <a:lnTo>
-                    <a:pt x="1145960" y="477539"/>
-                  </a:lnTo>
-                  <a:lnTo>
-                    <a:pt x="1217582" y="603743"/>
-                  </a:lnTo>
-                  <a:lnTo>
-                    <a:pt x="1289205" y="724649"/>
-                  </a:lnTo>
-                  <a:lnTo>
-                    <a:pt x="1360827" y="840479"/>
-                  </a:lnTo>
-                  <a:lnTo>
-                    <a:pt x="1432450" y="951447"/>
-                  </a:lnTo>
-                  <a:lnTo>
-                    <a:pt x="1504073" y="1057756"/>
-                  </a:lnTo>
-                  <a:lnTo>
-                    <a:pt x="1575695" y="1159602"/>
-                  </a:lnTo>
-                  <a:lnTo>
-                    <a:pt x="1647318" y="1257172"/>
-                  </a:lnTo>
-                  <a:lnTo>
-                    <a:pt x="1718940" y="1350647"/>
-                  </a:lnTo>
-                  <a:lnTo>
-                    <a:pt x="1790563" y="1440197"/>
-                  </a:lnTo>
-                  <a:lnTo>
-                    <a:pt x="1862185" y="1525987"/>
-                  </a:lnTo>
-                  <a:lnTo>
-                    <a:pt x="1933808" y="1608176"/>
-                  </a:lnTo>
-                  <a:lnTo>
-                    <a:pt x="2005430" y="1686915"/>
-                  </a:lnTo>
-                  <a:lnTo>
-                    <a:pt x="2077053" y="1762348"/>
-                  </a:lnTo>
-                  <a:lnTo>
-                    <a:pt x="2148675" y="1834615"/>
-                  </a:lnTo>
-                  <a:lnTo>
-                    <a:pt x="2220298" y="1903847"/>
-                  </a:lnTo>
-                  <a:lnTo>
-                    <a:pt x="2291920" y="1970173"/>
-                  </a:lnTo>
-                  <a:lnTo>
-                    <a:pt x="2363543" y="2033715"/>
-                  </a:lnTo>
-                  <a:lnTo>
-                    <a:pt x="2435165" y="2094589"/>
-                  </a:lnTo>
-                  <a:lnTo>
-                    <a:pt x="2506788" y="2152908"/>
-                  </a:lnTo>
-                  <a:lnTo>
-                    <a:pt x="2578410" y="2208778"/>
-                  </a:lnTo>
-                  <a:lnTo>
-                    <a:pt x="2650033" y="2262303"/>
-                  </a:lnTo>
-                  <a:lnTo>
-                    <a:pt x="2721655" y="2313580"/>
-                  </a:lnTo>
-                  <a:lnTo>
-                    <a:pt x="2793278" y="2362705"/>
-                  </a:lnTo>
-                  <a:lnTo>
-                    <a:pt x="2864901" y="2409768"/>
-                  </a:lnTo>
-                  <a:lnTo>
-                    <a:pt x="2936523" y="2454855"/>
-                  </a:lnTo>
-                  <a:lnTo>
-                    <a:pt x="3008146" y="2498049"/>
-                  </a:lnTo>
-                  <a:lnTo>
-                    <a:pt x="3079768" y="2539430"/>
-                  </a:lnTo>
-                  <a:lnTo>
-                    <a:pt x="3151391" y="2579073"/>
-                  </a:lnTo>
-                  <a:lnTo>
-                    <a:pt x="3223013" y="2617053"/>
-                  </a:lnTo>
-                  <a:lnTo>
-                    <a:pt x="3294636" y="2653437"/>
-                  </a:lnTo>
-                  <a:lnTo>
-                    <a:pt x="3366258" y="2655711"/>
-                  </a:lnTo>
-                  <a:lnTo>
-                    <a:pt x="3437881" y="2657171"/>
-                  </a:lnTo>
-                  <a:lnTo>
-                    <a:pt x="3509503" y="2658629"/>
-                  </a:lnTo>
-                  <a:lnTo>
-                    <a:pt x="3581126" y="2660085"/>
-                  </a:lnTo>
-                  <a:lnTo>
-                    <a:pt x="3652748" y="2661537"/>
-                  </a:lnTo>
-                  <a:lnTo>
-                    <a:pt x="3724371" y="2662987"/>
-                  </a:lnTo>
-                  <a:lnTo>
-                    <a:pt x="3795993" y="2664435"/>
-                  </a:lnTo>
-                  <a:lnTo>
-                    <a:pt x="3867616" y="2665880"/>
-                  </a:lnTo>
-                  <a:lnTo>
-                    <a:pt x="3939238" y="2667322"/>
-                  </a:lnTo>
-                  <a:lnTo>
-                    <a:pt x="4010861" y="2668762"/>
-                  </a:lnTo>
-                  <a:lnTo>
-                    <a:pt x="4082483" y="2670200"/>
-                  </a:lnTo>
-                  <a:lnTo>
-                    <a:pt x="4154106" y="2671635"/>
-                  </a:lnTo>
-                  <a:lnTo>
-                    <a:pt x="4225729" y="2673067"/>
-                  </a:lnTo>
-                  <a:lnTo>
-                    <a:pt x="4297351" y="2674497"/>
-                  </a:lnTo>
-                  <a:lnTo>
-                    <a:pt x="4368974" y="2675924"/>
-                  </a:lnTo>
-                  <a:lnTo>
-                    <a:pt x="4440596" y="2677349"/>
-                  </a:lnTo>
-                  <a:lnTo>
-                    <a:pt x="4512219" y="2678771"/>
-                  </a:lnTo>
-                  <a:lnTo>
-                    <a:pt x="4583841" y="2680191"/>
-                  </a:lnTo>
-                  <a:lnTo>
-                    <a:pt x="4655464" y="2681608"/>
-                  </a:lnTo>
-                  <a:lnTo>
-                    <a:pt x="4727086" y="2683023"/>
-                  </a:lnTo>
-                  <a:lnTo>
-                    <a:pt x="4798709" y="2684435"/>
-                  </a:lnTo>
-                  <a:lnTo>
-                    <a:pt x="4870331" y="2685845"/>
-                  </a:lnTo>
-                  <a:lnTo>
-                    <a:pt x="4941954" y="2687252"/>
-                  </a:lnTo>
-                  <a:lnTo>
-                    <a:pt x="5013576" y="2688657"/>
-                  </a:lnTo>
-                  <a:lnTo>
-                    <a:pt x="5085199" y="2690059"/>
-                  </a:lnTo>
-                  <a:lnTo>
-                    <a:pt x="5156821" y="2691459"/>
-                  </a:lnTo>
-                  <a:lnTo>
-                    <a:pt x="5228444" y="2692856"/>
-                  </a:lnTo>
-                  <a:lnTo>
-                    <a:pt x="5300066" y="2694251"/>
-                  </a:lnTo>
-                  <a:lnTo>
-                    <a:pt x="5371689" y="2695644"/>
-                  </a:lnTo>
-                  <a:lnTo>
-                    <a:pt x="5443311" y="2697034"/>
-                  </a:lnTo>
-                  <a:lnTo>
-                    <a:pt x="5514934" y="2698421"/>
-                  </a:lnTo>
-                  <a:lnTo>
-                    <a:pt x="5586557" y="2699806"/>
-                  </a:lnTo>
-                  <a:lnTo>
-                    <a:pt x="5658179" y="2701189"/>
-                  </a:lnTo>
-                  <a:lnTo>
-                    <a:pt x="5729802" y="2702569"/>
-                  </a:lnTo>
-                  <a:lnTo>
-                    <a:pt x="5801424" y="2703947"/>
-                  </a:lnTo>
-                  <a:lnTo>
-                    <a:pt x="5873047" y="2705322"/>
-                  </a:lnTo>
-                  <a:lnTo>
-                    <a:pt x="5944669" y="2706695"/>
-                  </a:lnTo>
-                  <a:lnTo>
-                    <a:pt x="6016292" y="2708065"/>
-                  </a:lnTo>
-                  <a:lnTo>
-                    <a:pt x="6087914" y="2709434"/>
-                  </a:lnTo>
-                  <a:lnTo>
-                    <a:pt x="6159537" y="2710799"/>
-                  </a:lnTo>
-                  <a:lnTo>
-                    <a:pt x="6231159" y="2712162"/>
-                  </a:lnTo>
-                  <a:lnTo>
-                    <a:pt x="6302782" y="2713523"/>
-                  </a:lnTo>
-                  <a:lnTo>
-                    <a:pt x="6374404" y="2714882"/>
-                  </a:lnTo>
-                  <a:lnTo>
-                    <a:pt x="6446027" y="2716238"/>
-                  </a:lnTo>
-                  <a:lnTo>
-                    <a:pt x="6517649" y="2717591"/>
-                  </a:lnTo>
-                  <a:lnTo>
-                    <a:pt x="6589272" y="2718943"/>
-                  </a:lnTo>
-                  <a:lnTo>
-                    <a:pt x="6660894" y="2720292"/>
-                  </a:lnTo>
-                  <a:lnTo>
-                    <a:pt x="6732517" y="2721638"/>
-                  </a:lnTo>
-                  <a:lnTo>
-                    <a:pt x="6804139" y="2722982"/>
-                  </a:lnTo>
-                  <a:lnTo>
-                    <a:pt x="6875762" y="2724324"/>
-                  </a:lnTo>
-                  <a:lnTo>
-                    <a:pt x="6947385" y="2725663"/>
-                  </a:lnTo>
-                  <a:lnTo>
-                    <a:pt x="7019007" y="2727000"/>
-                  </a:lnTo>
-                  <a:lnTo>
-                    <a:pt x="7090630" y="2728335"/>
-                  </a:lnTo>
-                  <a:lnTo>
-                    <a:pt x="7090630" y="3398227"/>
-                  </a:lnTo>
-                  <a:lnTo>
-                    <a:pt x="7019007" y="3394480"/>
-                  </a:lnTo>
-                  <a:lnTo>
-                    <a:pt x="6947385" y="3390568"/>
-                  </a:lnTo>
-                  <a:lnTo>
-                    <a:pt x="6875762" y="3386485"/>
-                  </a:lnTo>
-                  <a:lnTo>
-                    <a:pt x="6804139" y="3382223"/>
-                  </a:lnTo>
-                  <a:lnTo>
-                    <a:pt x="6732517" y="3377774"/>
-                  </a:lnTo>
-                  <a:lnTo>
-                    <a:pt x="6660894" y="3373130"/>
-                  </a:lnTo>
-                  <a:lnTo>
-                    <a:pt x="6589272" y="3368283"/>
-                  </a:lnTo>
-                  <a:lnTo>
-                    <a:pt x="6517649" y="3363223"/>
-                  </a:lnTo>
-                  <a:lnTo>
-                    <a:pt x="6446027" y="3357942"/>
-                  </a:lnTo>
-                  <a:lnTo>
-                    <a:pt x="6374404" y="3352429"/>
-                  </a:lnTo>
-                  <a:lnTo>
-                    <a:pt x="6302782" y="3346674"/>
-                  </a:lnTo>
-                  <a:lnTo>
-                    <a:pt x="6231159" y="3340668"/>
-                  </a:lnTo>
-                  <a:lnTo>
-                    <a:pt x="6159537" y="3334398"/>
-                  </a:lnTo>
-                  <a:lnTo>
-                    <a:pt x="6087914" y="3327853"/>
-                  </a:lnTo>
-                  <a:lnTo>
-                    <a:pt x="6016292" y="3321022"/>
-                  </a:lnTo>
-                  <a:lnTo>
-                    <a:pt x="5944669" y="3313891"/>
-                  </a:lnTo>
-                  <a:lnTo>
-                    <a:pt x="5873047" y="3306448"/>
-                  </a:lnTo>
-                  <a:lnTo>
-                    <a:pt x="5801424" y="3298679"/>
-                  </a:lnTo>
-                  <a:lnTo>
-                    <a:pt x="5729802" y="3290569"/>
-                  </a:lnTo>
-                  <a:lnTo>
-                    <a:pt x="5658179" y="3282104"/>
-                  </a:lnTo>
-                  <a:lnTo>
-                    <a:pt x="5586557" y="3273268"/>
-                  </a:lnTo>
-                  <a:lnTo>
-                    <a:pt x="5514934" y="3264044"/>
-                  </a:lnTo>
-                  <a:lnTo>
-                    <a:pt x="5443311" y="3254417"/>
-                  </a:lnTo>
-                  <a:lnTo>
-                    <a:pt x="5371689" y="3244367"/>
-                  </a:lnTo>
-                  <a:lnTo>
-                    <a:pt x="5300066" y="3233877"/>
-                  </a:lnTo>
-                  <a:lnTo>
-                    <a:pt x="5228444" y="3222928"/>
-                  </a:lnTo>
-                  <a:lnTo>
-                    <a:pt x="5156821" y="3211499"/>
-                  </a:lnTo>
-                  <a:lnTo>
-                    <a:pt x="5085199" y="3199568"/>
-                  </a:lnTo>
-                  <a:lnTo>
-                    <a:pt x="5013576" y="3187116"/>
-                  </a:lnTo>
-                  <a:lnTo>
-                    <a:pt x="4941954" y="3174117"/>
-                  </a:lnTo>
-                  <a:lnTo>
-                    <a:pt x="4870331" y="3160549"/>
-                  </a:lnTo>
-                  <a:lnTo>
-                    <a:pt x="4798709" y="3146386"/>
-                  </a:lnTo>
-                  <a:lnTo>
-                    <a:pt x="4727086" y="3131602"/>
-                  </a:lnTo>
-                  <a:lnTo>
-                    <a:pt x="4655464" y="3116171"/>
-                  </a:lnTo>
-                  <a:lnTo>
-                    <a:pt x="4583841" y="3100064"/>
-                  </a:lnTo>
-                  <a:lnTo>
-                    <a:pt x="4512219" y="3083250"/>
-                  </a:lnTo>
-                  <a:lnTo>
-                    <a:pt x="4440596" y="3065700"/>
-                  </a:lnTo>
-                  <a:lnTo>
-                    <a:pt x="4368974" y="3047381"/>
-                  </a:lnTo>
-                  <a:lnTo>
-                    <a:pt x="4297351" y="3028259"/>
-                  </a:lnTo>
-                  <a:lnTo>
-                    <a:pt x="4225729" y="3008300"/>
-                  </a:lnTo>
-                  <a:lnTo>
-                    <a:pt x="4154106" y="2987465"/>
-                  </a:lnTo>
-                  <a:lnTo>
-                    <a:pt x="4082483" y="2965718"/>
-                  </a:lnTo>
-                  <a:lnTo>
-                    <a:pt x="4010861" y="2943017"/>
-                  </a:lnTo>
-                  <a:lnTo>
-                    <a:pt x="3939238" y="2919322"/>
-                  </a:lnTo>
-                  <a:lnTo>
-                    <a:pt x="3867616" y="2894588"/>
-                  </a:lnTo>
-                  <a:lnTo>
-                    <a:pt x="3795993" y="2868771"/>
-                  </a:lnTo>
-                  <a:lnTo>
-                    <a:pt x="3724371" y="2841822"/>
-                  </a:lnTo>
-                  <a:lnTo>
-                    <a:pt x="3652748" y="2813692"/>
-                  </a:lnTo>
-                  <a:lnTo>
-                    <a:pt x="3581126" y="2784330"/>
-                  </a:lnTo>
-                  <a:lnTo>
-                    <a:pt x="3509503" y="2753681"/>
-                  </a:lnTo>
-                  <a:lnTo>
-                    <a:pt x="3437881" y="2721689"/>
-                  </a:lnTo>
-                  <a:lnTo>
-                    <a:pt x="3366258" y="2688295"/>
-                  </a:lnTo>
-                  <a:lnTo>
-                    <a:pt x="3294636" y="2654248"/>
-                  </a:lnTo>
-                  <a:lnTo>
-                    <a:pt x="3223013" y="2652783"/>
-                  </a:lnTo>
-                  <a:lnTo>
-                    <a:pt x="3151391" y="2651314"/>
-                  </a:lnTo>
-                  <a:lnTo>
-                    <a:pt x="3079768" y="2649844"/>
-                  </a:lnTo>
-                  <a:lnTo>
-                    <a:pt x="3008146" y="2648370"/>
-                  </a:lnTo>
-                  <a:lnTo>
-                    <a:pt x="2936523" y="2646894"/>
-                  </a:lnTo>
-                  <a:lnTo>
-                    <a:pt x="2864901" y="2645416"/>
-                  </a:lnTo>
-                  <a:lnTo>
-                    <a:pt x="2793278" y="2643935"/>
-                  </a:lnTo>
-                  <a:lnTo>
-                    <a:pt x="2721655" y="2642451"/>
-                  </a:lnTo>
-                  <a:lnTo>
-                    <a:pt x="2650033" y="2640964"/>
-                  </a:lnTo>
-                  <a:lnTo>
-                    <a:pt x="2578410" y="2639475"/>
-                  </a:lnTo>
-                  <a:lnTo>
-                    <a:pt x="2506788" y="2637984"/>
-                  </a:lnTo>
-                  <a:lnTo>
-                    <a:pt x="2435165" y="2636489"/>
-                  </a:lnTo>
-                  <a:lnTo>
-                    <a:pt x="2363543" y="2634992"/>
-                  </a:lnTo>
-                  <a:lnTo>
-                    <a:pt x="2291920" y="2633493"/>
-                  </a:lnTo>
-                  <a:lnTo>
-                    <a:pt x="2220298" y="2631991"/>
-                  </a:lnTo>
-                  <a:lnTo>
-                    <a:pt x="2148675" y="2630486"/>
-                  </a:lnTo>
-                  <a:lnTo>
-                    <a:pt x="2077053" y="2628978"/>
-                  </a:lnTo>
-                  <a:lnTo>
-                    <a:pt x="2005430" y="2627468"/>
-                  </a:lnTo>
-                  <a:lnTo>
-                    <a:pt x="1933808" y="2625955"/>
-                  </a:lnTo>
-                  <a:lnTo>
-                    <a:pt x="1862185" y="2624439"/>
-                  </a:lnTo>
-                  <a:lnTo>
-                    <a:pt x="1790563" y="2622921"/>
-                  </a:lnTo>
-                  <a:lnTo>
-                    <a:pt x="1718940" y="2621400"/>
-                  </a:lnTo>
-                  <a:lnTo>
-                    <a:pt x="1647318" y="2619877"/>
-                  </a:lnTo>
-                  <a:lnTo>
-                    <a:pt x="1575695" y="2618350"/>
-                  </a:lnTo>
-                  <a:lnTo>
-                    <a:pt x="1504073" y="2616821"/>
-                  </a:lnTo>
-                  <a:lnTo>
-                    <a:pt x="1432450" y="2615290"/>
-                  </a:lnTo>
-                  <a:lnTo>
-                    <a:pt x="1360827" y="2613755"/>
-                  </a:lnTo>
-                  <a:lnTo>
-                    <a:pt x="1289205" y="2612218"/>
-                  </a:lnTo>
-                  <a:lnTo>
-                    <a:pt x="1217582" y="2610678"/>
-                  </a:lnTo>
-                  <a:lnTo>
-                    <a:pt x="1145960" y="2609136"/>
-                  </a:lnTo>
-                  <a:lnTo>
-                    <a:pt x="1074337" y="2607590"/>
-                  </a:lnTo>
-                  <a:lnTo>
-                    <a:pt x="1002715" y="2606042"/>
-                  </a:lnTo>
-                  <a:lnTo>
-                    <a:pt x="931092" y="2604492"/>
-                  </a:lnTo>
-                  <a:lnTo>
-                    <a:pt x="859470" y="2602938"/>
-                  </a:lnTo>
-                  <a:lnTo>
-                    <a:pt x="787847" y="2601382"/>
-                  </a:lnTo>
-                  <a:lnTo>
-                    <a:pt x="716225" y="2599823"/>
-                  </a:lnTo>
-                  <a:lnTo>
-                    <a:pt x="644602" y="2598261"/>
-                  </a:lnTo>
-                  <a:lnTo>
-                    <a:pt x="572980" y="2596697"/>
-                  </a:lnTo>
-                  <a:lnTo>
-                    <a:pt x="501357" y="2595130"/>
-                  </a:lnTo>
-                  <a:lnTo>
-                    <a:pt x="429735" y="2593560"/>
-                  </a:lnTo>
-                  <a:lnTo>
-                    <a:pt x="358112" y="2591987"/>
-                  </a:lnTo>
-                  <a:lnTo>
-                    <a:pt x="286490" y="2590411"/>
-                  </a:lnTo>
-                  <a:lnTo>
-                    <a:pt x="214867" y="2588833"/>
-                  </a:lnTo>
-                  <a:lnTo>
-                    <a:pt x="143245" y="2587252"/>
-                  </a:lnTo>
-                  <a:lnTo>
-                    <a:pt x="71622" y="2585668"/>
-                  </a:lnTo>
-                  <a:lnTo>
-                    <a:pt x="0" y="2584081"/>
+                    <a:pt x="0" y="0"/>
+                  </a:lnTo>
+                  <a:lnTo>
+                    <a:pt x="0" y="0"/>
+                  </a:lnTo>
+                </a:path>
+              </a:pathLst>
+            </a:custGeom>
+            <a:ln w="13550" cap="flat">
+              <a:solidFill>
+                <a:srgbClr val="EBEBEB">
+                  <a:alpha val="100000"/>
+                </a:srgbClr>
+              </a:solidFill>
+              <a:prstDash val="solid"/>
+              <a:round/>
+            </a:ln>
+          </p:spPr>
+          <p:txBody>
+            <a:bodyPr/>
+            <a:lstStyle/>
+            <a:p/>
+          </p:txBody>
+        </p:sp>
+        <p:sp>
+          <p:nvSpPr>
+            <p:cNvPr id="21" name="pg21"/>
+            <p:cNvSpPr/>
+            <p:nvPr/>
+          </p:nvSpPr>
+          <p:spPr>
+            <a:xfrm>
+              <a:off x="1235312" y="2143092"/>
+              <a:ext cx="6964104" cy="1226340"/>
+            </a:xfrm>
+            <a:custGeom>
+              <a:avLst/>
+              <a:pathLst>
+                <a:path w="6964104" h="1226340">
+                  <a:moveTo>
+                    <a:pt x="884070" y="0"/>
+                  </a:moveTo>
+                  <a:lnTo>
+                    <a:pt x="914478" y="23371"/>
+                  </a:lnTo>
+                  <a:lnTo>
+                    <a:pt x="984822" y="75169"/>
+                  </a:lnTo>
+                  <a:lnTo>
+                    <a:pt x="1055167" y="124792"/>
+                  </a:lnTo>
+                  <a:lnTo>
+                    <a:pt x="1125511" y="172332"/>
+                  </a:lnTo>
+                  <a:lnTo>
+                    <a:pt x="1195856" y="217876"/>
+                  </a:lnTo>
+                  <a:lnTo>
+                    <a:pt x="1266200" y="261508"/>
+                  </a:lnTo>
+                  <a:lnTo>
+                    <a:pt x="1336545" y="303309"/>
+                  </a:lnTo>
+                  <a:lnTo>
+                    <a:pt x="1406889" y="343354"/>
+                  </a:lnTo>
+                  <a:lnTo>
+                    <a:pt x="1477234" y="381719"/>
+                  </a:lnTo>
+                  <a:lnTo>
+                    <a:pt x="1547578" y="418473"/>
+                  </a:lnTo>
+                  <a:lnTo>
+                    <a:pt x="1617923" y="453684"/>
+                  </a:lnTo>
+                  <a:lnTo>
+                    <a:pt x="1688267" y="487416"/>
+                  </a:lnTo>
+                  <a:lnTo>
+                    <a:pt x="1758612" y="519733"/>
+                  </a:lnTo>
+                  <a:lnTo>
+                    <a:pt x="1828956" y="550693"/>
+                  </a:lnTo>
+                  <a:lnTo>
+                    <a:pt x="1899301" y="580353"/>
+                  </a:lnTo>
+                  <a:lnTo>
+                    <a:pt x="1969645" y="608768"/>
+                  </a:lnTo>
+                  <a:lnTo>
+                    <a:pt x="2039990" y="635990"/>
+                  </a:lnTo>
+                  <a:lnTo>
+                    <a:pt x="2110334" y="662069"/>
+                  </a:lnTo>
+                  <a:lnTo>
+                    <a:pt x="2180679" y="687053"/>
+                  </a:lnTo>
+                  <a:lnTo>
+                    <a:pt x="2251023" y="710989"/>
+                  </a:lnTo>
+                  <a:lnTo>
+                    <a:pt x="2321368" y="733920"/>
+                  </a:lnTo>
+                  <a:lnTo>
+                    <a:pt x="2391712" y="755888"/>
+                  </a:lnTo>
+                  <a:lnTo>
+                    <a:pt x="2462057" y="776933"/>
+                  </a:lnTo>
+                  <a:lnTo>
+                    <a:pt x="2532401" y="797096"/>
+                  </a:lnTo>
+                  <a:lnTo>
+                    <a:pt x="2602746" y="816411"/>
+                  </a:lnTo>
+                  <a:lnTo>
+                    <a:pt x="2673090" y="834916"/>
+                  </a:lnTo>
+                  <a:lnTo>
+                    <a:pt x="2743435" y="852644"/>
+                  </a:lnTo>
+                  <a:lnTo>
+                    <a:pt x="2813779" y="869628"/>
+                  </a:lnTo>
+                  <a:lnTo>
+                    <a:pt x="2884124" y="885899"/>
+                  </a:lnTo>
+                  <a:lnTo>
+                    <a:pt x="2954468" y="901487"/>
+                  </a:lnTo>
+                  <a:lnTo>
+                    <a:pt x="3024813" y="916420"/>
+                  </a:lnTo>
+                  <a:lnTo>
+                    <a:pt x="3095157" y="930727"/>
+                  </a:lnTo>
+                  <a:lnTo>
+                    <a:pt x="3165502" y="944432"/>
+                  </a:lnTo>
+                  <a:lnTo>
+                    <a:pt x="3235846" y="957563"/>
+                  </a:lnTo>
+                  <a:lnTo>
+                    <a:pt x="3306191" y="958383"/>
+                  </a:lnTo>
+                  <a:lnTo>
+                    <a:pt x="3376535" y="958910"/>
+                  </a:lnTo>
+                  <a:lnTo>
+                    <a:pt x="3446880" y="959436"/>
+                  </a:lnTo>
+                  <a:lnTo>
+                    <a:pt x="3517224" y="959962"/>
+                  </a:lnTo>
+                  <a:lnTo>
+                    <a:pt x="3587569" y="960486"/>
+                  </a:lnTo>
+                  <a:lnTo>
+                    <a:pt x="3657913" y="961009"/>
+                  </a:lnTo>
+                  <a:lnTo>
+                    <a:pt x="3728257" y="961532"/>
+                  </a:lnTo>
+                  <a:lnTo>
+                    <a:pt x="3798602" y="962053"/>
+                  </a:lnTo>
+                  <a:lnTo>
+                    <a:pt x="3868946" y="962574"/>
+                  </a:lnTo>
+                  <a:lnTo>
+                    <a:pt x="3939291" y="963093"/>
+                  </a:lnTo>
+                  <a:lnTo>
+                    <a:pt x="4009635" y="963612"/>
+                  </a:lnTo>
+                  <a:lnTo>
+                    <a:pt x="4079980" y="964130"/>
+                  </a:lnTo>
+                  <a:lnTo>
+                    <a:pt x="4150324" y="964647"/>
+                  </a:lnTo>
+                  <a:lnTo>
+                    <a:pt x="4220669" y="965163"/>
+                  </a:lnTo>
+                  <a:lnTo>
+                    <a:pt x="4291013" y="965678"/>
+                  </a:lnTo>
+                  <a:lnTo>
+                    <a:pt x="4361358" y="966192"/>
+                  </a:lnTo>
+                  <a:lnTo>
+                    <a:pt x="4431702" y="966705"/>
+                  </a:lnTo>
+                  <a:lnTo>
+                    <a:pt x="4502047" y="967217"/>
+                  </a:lnTo>
+                  <a:lnTo>
+                    <a:pt x="4572391" y="967729"/>
+                  </a:lnTo>
+                  <a:lnTo>
+                    <a:pt x="4642736" y="968239"/>
+                  </a:lnTo>
+                  <a:lnTo>
+                    <a:pt x="4713080" y="968749"/>
+                  </a:lnTo>
+                  <a:lnTo>
+                    <a:pt x="4783425" y="969258"/>
+                  </a:lnTo>
+                  <a:lnTo>
+                    <a:pt x="4853769" y="969766"/>
+                  </a:lnTo>
+                  <a:lnTo>
+                    <a:pt x="4924114" y="970273"/>
+                  </a:lnTo>
+                  <a:lnTo>
+                    <a:pt x="4994458" y="970779"/>
+                  </a:lnTo>
+                  <a:lnTo>
+                    <a:pt x="5064803" y="971284"/>
+                  </a:lnTo>
+                  <a:lnTo>
+                    <a:pt x="5135147" y="971788"/>
+                  </a:lnTo>
+                  <a:lnTo>
+                    <a:pt x="5205492" y="972292"/>
+                  </a:lnTo>
+                  <a:lnTo>
+                    <a:pt x="5275836" y="972794"/>
+                  </a:lnTo>
+                  <a:lnTo>
+                    <a:pt x="5346181" y="973296"/>
+                  </a:lnTo>
+                  <a:lnTo>
+                    <a:pt x="5416525" y="973796"/>
+                  </a:lnTo>
+                  <a:lnTo>
+                    <a:pt x="5486870" y="974296"/>
+                  </a:lnTo>
+                  <a:lnTo>
+                    <a:pt x="5557214" y="974795"/>
+                  </a:lnTo>
+                  <a:lnTo>
+                    <a:pt x="5627559" y="975293"/>
+                  </a:lnTo>
+                  <a:lnTo>
+                    <a:pt x="5697903" y="975790"/>
+                  </a:lnTo>
+                  <a:lnTo>
+                    <a:pt x="5768248" y="976287"/>
+                  </a:lnTo>
+                  <a:lnTo>
+                    <a:pt x="5838592" y="976782"/>
+                  </a:lnTo>
+                  <a:lnTo>
+                    <a:pt x="5908937" y="977277"/>
+                  </a:lnTo>
+                  <a:lnTo>
+                    <a:pt x="5979281" y="977770"/>
+                  </a:lnTo>
+                  <a:lnTo>
+                    <a:pt x="6049626" y="978263"/>
+                  </a:lnTo>
+                  <a:lnTo>
+                    <a:pt x="6119970" y="978755"/>
+                  </a:lnTo>
+                  <a:lnTo>
+                    <a:pt x="6190315" y="979246"/>
+                  </a:lnTo>
+                  <a:lnTo>
+                    <a:pt x="6260659" y="979737"/>
+                  </a:lnTo>
+                  <a:lnTo>
+                    <a:pt x="6331004" y="980226"/>
+                  </a:lnTo>
+                  <a:lnTo>
+                    <a:pt x="6401348" y="980714"/>
+                  </a:lnTo>
+                  <a:lnTo>
+                    <a:pt x="6471693" y="981202"/>
+                  </a:lnTo>
+                  <a:lnTo>
+                    <a:pt x="6542037" y="981689"/>
+                  </a:lnTo>
+                  <a:lnTo>
+                    <a:pt x="6612382" y="982175"/>
+                  </a:lnTo>
+                  <a:lnTo>
+                    <a:pt x="6682726" y="982660"/>
+                  </a:lnTo>
+                  <a:lnTo>
+                    <a:pt x="6753071" y="983144"/>
+                  </a:lnTo>
+                  <a:lnTo>
+                    <a:pt x="6823415" y="983627"/>
+                  </a:lnTo>
+                  <a:lnTo>
+                    <a:pt x="6893760" y="984110"/>
+                  </a:lnTo>
+                  <a:lnTo>
+                    <a:pt x="6964104" y="984592"/>
+                  </a:lnTo>
+                  <a:lnTo>
+                    <a:pt x="6964104" y="1226340"/>
+                  </a:lnTo>
+                  <a:lnTo>
+                    <a:pt x="6893760" y="1224988"/>
+                  </a:lnTo>
+                  <a:lnTo>
+                    <a:pt x="6823415" y="1223576"/>
+                  </a:lnTo>
+                  <a:lnTo>
+                    <a:pt x="6753071" y="1222102"/>
+                  </a:lnTo>
+                  <a:lnTo>
+                    <a:pt x="6682726" y="1220564"/>
+                  </a:lnTo>
+                  <a:lnTo>
+                    <a:pt x="6612382" y="1218959"/>
+                  </a:lnTo>
+                  <a:lnTo>
+                    <a:pt x="6542037" y="1217283"/>
+                  </a:lnTo>
+                  <a:lnTo>
+                    <a:pt x="6471693" y="1215534"/>
+                  </a:lnTo>
+                  <a:lnTo>
+                    <a:pt x="6401348" y="1213708"/>
+                  </a:lnTo>
+                  <a:lnTo>
+                    <a:pt x="6331004" y="1211802"/>
+                  </a:lnTo>
+                  <a:lnTo>
+                    <a:pt x="6260659" y="1209812"/>
+                  </a:lnTo>
+                  <a:lnTo>
+                    <a:pt x="6190315" y="1207736"/>
+                  </a:lnTo>
+                  <a:lnTo>
+                    <a:pt x="6119970" y="1205568"/>
+                  </a:lnTo>
+                  <a:lnTo>
+                    <a:pt x="6049626" y="1203305"/>
+                  </a:lnTo>
+                  <a:lnTo>
+                    <a:pt x="5979281" y="1200944"/>
+                  </a:lnTo>
+                  <a:lnTo>
+                    <a:pt x="5908937" y="1198478"/>
+                  </a:lnTo>
+                  <a:lnTo>
+                    <a:pt x="5838592" y="1195905"/>
+                  </a:lnTo>
+                  <a:lnTo>
+                    <a:pt x="5768248" y="1193219"/>
+                  </a:lnTo>
+                  <a:lnTo>
+                    <a:pt x="5697903" y="1190415"/>
+                  </a:lnTo>
+                  <a:lnTo>
+                    <a:pt x="5627559" y="1187489"/>
+                  </a:lnTo>
+                  <a:lnTo>
+                    <a:pt x="5557214" y="1184434"/>
+                  </a:lnTo>
+                  <a:lnTo>
+                    <a:pt x="5486870" y="1181245"/>
+                  </a:lnTo>
+                  <a:lnTo>
+                    <a:pt x="5416525" y="1177916"/>
+                  </a:lnTo>
+                  <a:lnTo>
+                    <a:pt x="5346181" y="1174442"/>
+                  </a:lnTo>
+                  <a:lnTo>
+                    <a:pt x="5275836" y="1170815"/>
+                  </a:lnTo>
+                  <a:lnTo>
+                    <a:pt x="5205492" y="1167030"/>
+                  </a:lnTo>
+                  <a:lnTo>
+                    <a:pt x="5135147" y="1163079"/>
+                  </a:lnTo>
+                  <a:lnTo>
+                    <a:pt x="5064803" y="1158954"/>
+                  </a:lnTo>
+                  <a:lnTo>
+                    <a:pt x="4994458" y="1154649"/>
+                  </a:lnTo>
+                  <a:lnTo>
+                    <a:pt x="4924114" y="1150155"/>
+                  </a:lnTo>
+                  <a:lnTo>
+                    <a:pt x="4853769" y="1145464"/>
+                  </a:lnTo>
+                  <a:lnTo>
+                    <a:pt x="4783425" y="1140567"/>
+                  </a:lnTo>
+                  <a:lnTo>
+                    <a:pt x="4713080" y="1135456"/>
+                  </a:lnTo>
+                  <a:lnTo>
+                    <a:pt x="4642736" y="1130121"/>
+                  </a:lnTo>
+                  <a:lnTo>
+                    <a:pt x="4572391" y="1124553"/>
+                  </a:lnTo>
+                  <a:lnTo>
+                    <a:pt x="4502047" y="1118740"/>
+                  </a:lnTo>
+                  <a:lnTo>
+                    <a:pt x="4431702" y="1112672"/>
+                  </a:lnTo>
+                  <a:lnTo>
+                    <a:pt x="4361358" y="1106339"/>
+                  </a:lnTo>
+                  <a:lnTo>
+                    <a:pt x="4291013" y="1099728"/>
+                  </a:lnTo>
+                  <a:lnTo>
+                    <a:pt x="4220669" y="1092827"/>
+                  </a:lnTo>
+                  <a:lnTo>
+                    <a:pt x="4150324" y="1085624"/>
+                  </a:lnTo>
+                  <a:lnTo>
+                    <a:pt x="4079980" y="1078106"/>
+                  </a:lnTo>
+                  <a:lnTo>
+                    <a:pt x="4009635" y="1070257"/>
+                  </a:lnTo>
+                  <a:lnTo>
+                    <a:pt x="3939291" y="1062065"/>
+                  </a:lnTo>
+                  <a:lnTo>
+                    <a:pt x="3868946" y="1053514"/>
+                  </a:lnTo>
+                  <a:lnTo>
+                    <a:pt x="3798602" y="1044588"/>
+                  </a:lnTo>
+                  <a:lnTo>
+                    <a:pt x="3728257" y="1035272"/>
+                  </a:lnTo>
+                  <a:lnTo>
+                    <a:pt x="3657913" y="1025546"/>
+                  </a:lnTo>
+                  <a:lnTo>
+                    <a:pt x="3587569" y="1015395"/>
+                  </a:lnTo>
+                  <a:lnTo>
+                    <a:pt x="3517224" y="1004799"/>
+                  </a:lnTo>
+                  <a:lnTo>
+                    <a:pt x="3446880" y="993738"/>
+                  </a:lnTo>
+                  <a:lnTo>
+                    <a:pt x="3376535" y="982193"/>
+                  </a:lnTo>
+                  <a:lnTo>
+                    <a:pt x="3306191" y="970142"/>
+                  </a:lnTo>
+                  <a:lnTo>
+                    <a:pt x="3235846" y="957855"/>
+                  </a:lnTo>
+                  <a:lnTo>
+                    <a:pt x="3165502" y="957326"/>
+                  </a:lnTo>
+                  <a:lnTo>
+                    <a:pt x="3095157" y="956797"/>
+                  </a:lnTo>
+                  <a:lnTo>
+                    <a:pt x="3024813" y="956266"/>
+                  </a:lnTo>
+                  <a:lnTo>
+                    <a:pt x="2954468" y="955734"/>
+                  </a:lnTo>
+                  <a:lnTo>
+                    <a:pt x="2884124" y="955202"/>
+                  </a:lnTo>
+                  <a:lnTo>
+                    <a:pt x="2813779" y="954668"/>
+                  </a:lnTo>
+                  <a:lnTo>
+                    <a:pt x="2743435" y="954133"/>
+                  </a:lnTo>
+                  <a:lnTo>
+                    <a:pt x="2673090" y="953598"/>
+                  </a:lnTo>
+                  <a:lnTo>
+                    <a:pt x="2602746" y="953062"/>
+                  </a:lnTo>
+                  <a:lnTo>
+                    <a:pt x="2532401" y="952524"/>
+                  </a:lnTo>
+                  <a:lnTo>
+                    <a:pt x="2462057" y="951986"/>
+                  </a:lnTo>
+                  <a:lnTo>
+                    <a:pt x="2391712" y="951447"/>
+                  </a:lnTo>
+                  <a:lnTo>
+                    <a:pt x="2321368" y="950906"/>
+                  </a:lnTo>
+                  <a:lnTo>
+                    <a:pt x="2251023" y="950365"/>
+                  </a:lnTo>
+                  <a:lnTo>
+                    <a:pt x="2180679" y="949823"/>
+                  </a:lnTo>
+                  <a:lnTo>
+                    <a:pt x="2110334" y="949280"/>
+                  </a:lnTo>
+                  <a:lnTo>
+                    <a:pt x="2039990" y="948736"/>
+                  </a:lnTo>
+                  <a:lnTo>
+                    <a:pt x="1969645" y="948191"/>
+                  </a:lnTo>
+                  <a:lnTo>
+                    <a:pt x="1899301" y="947645"/>
+                  </a:lnTo>
+                  <a:lnTo>
+                    <a:pt x="1828956" y="947098"/>
+                  </a:lnTo>
+                  <a:lnTo>
+                    <a:pt x="1758612" y="946550"/>
+                  </a:lnTo>
+                  <a:lnTo>
+                    <a:pt x="1688267" y="946001"/>
+                  </a:lnTo>
+                  <a:lnTo>
+                    <a:pt x="1617923" y="945452"/>
+                  </a:lnTo>
+                  <a:lnTo>
+                    <a:pt x="1547578" y="944901"/>
+                  </a:lnTo>
+                  <a:lnTo>
+                    <a:pt x="1477234" y="944349"/>
+                  </a:lnTo>
+                  <a:lnTo>
+                    <a:pt x="1406889" y="943796"/>
+                  </a:lnTo>
+                  <a:lnTo>
+                    <a:pt x="1336545" y="943242"/>
+                  </a:lnTo>
+                  <a:lnTo>
+                    <a:pt x="1266200" y="942688"/>
+                  </a:lnTo>
+                  <a:lnTo>
+                    <a:pt x="1195856" y="942132"/>
+                  </a:lnTo>
+                  <a:lnTo>
+                    <a:pt x="1125511" y="941575"/>
+                  </a:lnTo>
+                  <a:lnTo>
+                    <a:pt x="1055167" y="941018"/>
+                  </a:lnTo>
+                  <a:lnTo>
+                    <a:pt x="984822" y="940459"/>
+                  </a:lnTo>
+                  <a:lnTo>
+                    <a:pt x="914478" y="939899"/>
+                  </a:lnTo>
+                  <a:lnTo>
+                    <a:pt x="844133" y="939339"/>
+                  </a:lnTo>
+                  <a:lnTo>
+                    <a:pt x="773789" y="938777"/>
+                  </a:lnTo>
+                  <a:lnTo>
+                    <a:pt x="703444" y="938215"/>
+                  </a:lnTo>
+                  <a:lnTo>
+                    <a:pt x="633100" y="937651"/>
+                  </a:lnTo>
+                  <a:lnTo>
+                    <a:pt x="562755" y="937086"/>
+                  </a:lnTo>
+                  <a:lnTo>
+                    <a:pt x="492411" y="936521"/>
+                  </a:lnTo>
+                  <a:lnTo>
+                    <a:pt x="422066" y="935954"/>
+                  </a:lnTo>
+                  <a:lnTo>
+                    <a:pt x="351722" y="935387"/>
+                  </a:lnTo>
+                  <a:lnTo>
+                    <a:pt x="281377" y="934818"/>
+                  </a:lnTo>
+                  <a:lnTo>
+                    <a:pt x="211033" y="934249"/>
+                  </a:lnTo>
+                  <a:lnTo>
+                    <a:pt x="140688" y="933678"/>
+                  </a:lnTo>
+                  <a:lnTo>
+                    <a:pt x="70344" y="933106"/>
+                  </a:lnTo>
+                  <a:lnTo>
+                    <a:pt x="0" y="932534"/>
                   </a:lnTo>
                   <a:close/>
                 </a:path>
@@ -3548,607 +3583,282 @@
         </p:sp>
         <p:sp>
           <p:nvSpPr>
-            <p:cNvPr id="21" name="pl21"/>
-            <p:cNvSpPr/>
-            <p:nvPr/>
-          </p:nvSpPr>
-          <p:spPr>
-            <a:xfrm>
-              <a:off x="2072181" y="2073503"/>
-              <a:ext cx="6190497" cy="2728335"/>
-            </a:xfrm>
-            <a:custGeom>
-              <a:avLst/>
-              <a:pathLst>
-                <a:path w="6190497" h="2728335">
-                  <a:moveTo>
-                    <a:pt x="0" y="0"/>
-                  </a:moveTo>
-                  <a:lnTo>
-                    <a:pt x="30960" y="64764"/>
-                  </a:lnTo>
-                  <a:lnTo>
-                    <a:pt x="102582" y="208297"/>
-                  </a:lnTo>
-                  <a:lnTo>
-                    <a:pt x="174205" y="345804"/>
-                  </a:lnTo>
-                  <a:lnTo>
-                    <a:pt x="245827" y="477539"/>
-                  </a:lnTo>
-                  <a:lnTo>
-                    <a:pt x="317450" y="603743"/>
-                  </a:lnTo>
-                  <a:lnTo>
-                    <a:pt x="389072" y="724649"/>
-                  </a:lnTo>
-                  <a:lnTo>
-                    <a:pt x="460695" y="840479"/>
-                  </a:lnTo>
-                  <a:lnTo>
-                    <a:pt x="532318" y="951447"/>
-                  </a:lnTo>
-                  <a:lnTo>
-                    <a:pt x="603940" y="1057756"/>
-                  </a:lnTo>
-                  <a:lnTo>
-                    <a:pt x="675563" y="1159602"/>
-                  </a:lnTo>
-                  <a:lnTo>
-                    <a:pt x="747185" y="1257172"/>
-                  </a:lnTo>
-                  <a:lnTo>
-                    <a:pt x="818808" y="1350647"/>
-                  </a:lnTo>
-                  <a:lnTo>
-                    <a:pt x="890430" y="1440197"/>
-                  </a:lnTo>
-                  <a:lnTo>
-                    <a:pt x="962053" y="1525987"/>
-                  </a:lnTo>
-                  <a:lnTo>
-                    <a:pt x="1033675" y="1608176"/>
-                  </a:lnTo>
-                  <a:lnTo>
-                    <a:pt x="1105298" y="1686915"/>
-                  </a:lnTo>
-                  <a:lnTo>
-                    <a:pt x="1176920" y="1762348"/>
-                  </a:lnTo>
-                  <a:lnTo>
-                    <a:pt x="1248543" y="1834615"/>
-                  </a:lnTo>
-                  <a:lnTo>
-                    <a:pt x="1320165" y="1903847"/>
-                  </a:lnTo>
-                  <a:lnTo>
-                    <a:pt x="1391788" y="1970173"/>
-                  </a:lnTo>
-                  <a:lnTo>
-                    <a:pt x="1463410" y="2033715"/>
-                  </a:lnTo>
-                  <a:lnTo>
-                    <a:pt x="1535033" y="2094589"/>
-                  </a:lnTo>
-                  <a:lnTo>
-                    <a:pt x="1606655" y="2152908"/>
-                  </a:lnTo>
-                  <a:lnTo>
-                    <a:pt x="1678278" y="2208778"/>
-                  </a:lnTo>
-                  <a:lnTo>
-                    <a:pt x="1749900" y="2262303"/>
-                  </a:lnTo>
-                  <a:lnTo>
-                    <a:pt x="1821523" y="2313580"/>
-                  </a:lnTo>
-                  <a:lnTo>
-                    <a:pt x="1893146" y="2362705"/>
-                  </a:lnTo>
-                  <a:lnTo>
-                    <a:pt x="1964768" y="2409768"/>
-                  </a:lnTo>
-                  <a:lnTo>
-                    <a:pt x="2036391" y="2454855"/>
-                  </a:lnTo>
-                  <a:lnTo>
-                    <a:pt x="2108013" y="2498049"/>
-                  </a:lnTo>
-                  <a:lnTo>
-                    <a:pt x="2179636" y="2539430"/>
-                  </a:lnTo>
-                  <a:lnTo>
-                    <a:pt x="2251258" y="2579073"/>
-                  </a:lnTo>
-                  <a:lnTo>
-                    <a:pt x="2322881" y="2617053"/>
-                  </a:lnTo>
-                  <a:lnTo>
-                    <a:pt x="2394503" y="2653437"/>
-                  </a:lnTo>
-                  <a:lnTo>
-                    <a:pt x="2466126" y="2655711"/>
-                  </a:lnTo>
-                  <a:lnTo>
-                    <a:pt x="2537748" y="2657171"/>
-                  </a:lnTo>
-                  <a:lnTo>
-                    <a:pt x="2609371" y="2658629"/>
-                  </a:lnTo>
-                  <a:lnTo>
-                    <a:pt x="2680993" y="2660085"/>
-                  </a:lnTo>
-                  <a:lnTo>
-                    <a:pt x="2752616" y="2661537"/>
-                  </a:lnTo>
-                  <a:lnTo>
-                    <a:pt x="2824238" y="2662987"/>
-                  </a:lnTo>
-                  <a:lnTo>
-                    <a:pt x="2895861" y="2664435"/>
-                  </a:lnTo>
-                  <a:lnTo>
-                    <a:pt x="2967483" y="2665880"/>
-                  </a:lnTo>
-                  <a:lnTo>
-                    <a:pt x="3039106" y="2667322"/>
-                  </a:lnTo>
-                  <a:lnTo>
-                    <a:pt x="3110728" y="2668762"/>
-                  </a:lnTo>
-                  <a:lnTo>
-                    <a:pt x="3182351" y="2670200"/>
-                  </a:lnTo>
-                  <a:lnTo>
-                    <a:pt x="3253974" y="2671635"/>
-                  </a:lnTo>
-                  <a:lnTo>
-                    <a:pt x="3325596" y="2673067"/>
-                  </a:lnTo>
-                  <a:lnTo>
-                    <a:pt x="3397219" y="2674497"/>
-                  </a:lnTo>
-                  <a:lnTo>
-                    <a:pt x="3468841" y="2675924"/>
-                  </a:lnTo>
-                  <a:lnTo>
-                    <a:pt x="3540464" y="2677349"/>
-                  </a:lnTo>
-                  <a:lnTo>
-                    <a:pt x="3612086" y="2678771"/>
-                  </a:lnTo>
-                  <a:lnTo>
-                    <a:pt x="3683709" y="2680191"/>
-                  </a:lnTo>
-                  <a:lnTo>
-                    <a:pt x="3755331" y="2681608"/>
-                  </a:lnTo>
-                  <a:lnTo>
-                    <a:pt x="3826954" y="2683023"/>
-                  </a:lnTo>
-                  <a:lnTo>
-                    <a:pt x="3898576" y="2684435"/>
-                  </a:lnTo>
-                  <a:lnTo>
-                    <a:pt x="3970199" y="2685845"/>
-                  </a:lnTo>
-                  <a:lnTo>
-                    <a:pt x="4041821" y="2687252"/>
-                  </a:lnTo>
-                  <a:lnTo>
-                    <a:pt x="4113444" y="2688657"/>
-                  </a:lnTo>
-                  <a:lnTo>
-                    <a:pt x="4185066" y="2690059"/>
-                  </a:lnTo>
-                  <a:lnTo>
-                    <a:pt x="4256689" y="2691459"/>
-                  </a:lnTo>
-                  <a:lnTo>
-                    <a:pt x="4328311" y="2692856"/>
-                  </a:lnTo>
-                  <a:lnTo>
-                    <a:pt x="4399934" y="2694251"/>
-                  </a:lnTo>
-                  <a:lnTo>
-                    <a:pt x="4471556" y="2695644"/>
-                  </a:lnTo>
-                  <a:lnTo>
-                    <a:pt x="4543179" y="2697034"/>
-                  </a:lnTo>
-                  <a:lnTo>
-                    <a:pt x="4614802" y="2698421"/>
-                  </a:lnTo>
-                  <a:lnTo>
-                    <a:pt x="4686424" y="2699806"/>
-                  </a:lnTo>
-                  <a:lnTo>
-                    <a:pt x="4758047" y="2701189"/>
-                  </a:lnTo>
-                  <a:lnTo>
-                    <a:pt x="4829669" y="2702569"/>
-                  </a:lnTo>
-                  <a:lnTo>
-                    <a:pt x="4901292" y="2703947"/>
-                  </a:lnTo>
-                  <a:lnTo>
-                    <a:pt x="4972914" y="2705322"/>
-                  </a:lnTo>
-                  <a:lnTo>
-                    <a:pt x="5044537" y="2706695"/>
-                  </a:lnTo>
-                  <a:lnTo>
-                    <a:pt x="5116159" y="2708065"/>
-                  </a:lnTo>
-                  <a:lnTo>
-                    <a:pt x="5187782" y="2709434"/>
-                  </a:lnTo>
-                  <a:lnTo>
-                    <a:pt x="5259404" y="2710799"/>
-                  </a:lnTo>
-                  <a:lnTo>
-                    <a:pt x="5331027" y="2712162"/>
-                  </a:lnTo>
-                  <a:lnTo>
-                    <a:pt x="5402649" y="2713523"/>
-                  </a:lnTo>
-                  <a:lnTo>
-                    <a:pt x="5474272" y="2714882"/>
-                  </a:lnTo>
-                  <a:lnTo>
-                    <a:pt x="5545894" y="2716238"/>
-                  </a:lnTo>
-                  <a:lnTo>
-                    <a:pt x="5617517" y="2717591"/>
-                  </a:lnTo>
-                  <a:lnTo>
-                    <a:pt x="5689139" y="2718943"/>
-                  </a:lnTo>
-                  <a:lnTo>
-                    <a:pt x="5760762" y="2720292"/>
-                  </a:lnTo>
-                  <a:lnTo>
-                    <a:pt x="5832384" y="2721638"/>
-                  </a:lnTo>
-                  <a:lnTo>
-                    <a:pt x="5904007" y="2722982"/>
-                  </a:lnTo>
-                  <a:lnTo>
-                    <a:pt x="5975630" y="2724324"/>
-                  </a:lnTo>
-                  <a:lnTo>
-                    <a:pt x="6047252" y="2725663"/>
-                  </a:lnTo>
-                  <a:lnTo>
-                    <a:pt x="6118875" y="2727000"/>
-                  </a:lnTo>
-                  <a:lnTo>
-                    <a:pt x="6190497" y="2728335"/>
-                  </a:lnTo>
-                </a:path>
-              </a:pathLst>
-            </a:custGeom>
-          </p:spPr>
-          <p:txBody>
-            <a:bodyPr/>
-            <a:lstStyle/>
-            <a:p/>
-          </p:txBody>
-        </p:sp>
-        <p:sp>
-          <p:nvSpPr>
             <p:cNvPr id="22" name="pl22"/>
             <p:cNvSpPr/>
             <p:nvPr/>
           </p:nvSpPr>
           <p:spPr>
             <a:xfrm>
-              <a:off x="1172049" y="4657584"/>
-              <a:ext cx="7090630" cy="814146"/>
+              <a:off x="2119382" y="2143092"/>
+              <a:ext cx="6080034" cy="984592"/>
             </a:xfrm>
             <a:custGeom>
               <a:avLst/>
               <a:pathLst>
-                <a:path w="7090630" h="814146">
+                <a:path w="6080034" h="984592">
                   <a:moveTo>
-                    <a:pt x="7090630" y="814146"/>
+                    <a:pt x="0" y="0"/>
                   </a:moveTo>
                   <a:lnTo>
-                    <a:pt x="7019007" y="810398"/>
-                  </a:lnTo>
-                  <a:lnTo>
-                    <a:pt x="6947385" y="806487"/>
-                  </a:lnTo>
-                  <a:lnTo>
-                    <a:pt x="6875762" y="802403"/>
-                  </a:lnTo>
-                  <a:lnTo>
-                    <a:pt x="6804139" y="798141"/>
-                  </a:lnTo>
-                  <a:lnTo>
-                    <a:pt x="6732517" y="793693"/>
-                  </a:lnTo>
-                  <a:lnTo>
-                    <a:pt x="6660894" y="789049"/>
-                  </a:lnTo>
-                  <a:lnTo>
-                    <a:pt x="6589272" y="784201"/>
-                  </a:lnTo>
-                  <a:lnTo>
-                    <a:pt x="6517649" y="779142"/>
-                  </a:lnTo>
-                  <a:lnTo>
-                    <a:pt x="6446027" y="773860"/>
-                  </a:lnTo>
-                  <a:lnTo>
-                    <a:pt x="6374404" y="768347"/>
-                  </a:lnTo>
-                  <a:lnTo>
-                    <a:pt x="6302782" y="762593"/>
-                  </a:lnTo>
-                  <a:lnTo>
-                    <a:pt x="6231159" y="756586"/>
-                  </a:lnTo>
-                  <a:lnTo>
-                    <a:pt x="6159537" y="750316"/>
-                  </a:lnTo>
-                  <a:lnTo>
-                    <a:pt x="6087914" y="743772"/>
-                  </a:lnTo>
-                  <a:lnTo>
-                    <a:pt x="6016292" y="736941"/>
-                  </a:lnTo>
-                  <a:lnTo>
-                    <a:pt x="5944669" y="729810"/>
-                  </a:lnTo>
-                  <a:lnTo>
-                    <a:pt x="5873047" y="722367"/>
-                  </a:lnTo>
-                  <a:lnTo>
-                    <a:pt x="5801424" y="714597"/>
-                  </a:lnTo>
-                  <a:lnTo>
-                    <a:pt x="5729802" y="706487"/>
-                  </a:lnTo>
-                  <a:lnTo>
-                    <a:pt x="5658179" y="698022"/>
-                  </a:lnTo>
-                  <a:lnTo>
-                    <a:pt x="5586557" y="689186"/>
-                  </a:lnTo>
-                  <a:lnTo>
-                    <a:pt x="5514934" y="679963"/>
-                  </a:lnTo>
-                  <a:lnTo>
-                    <a:pt x="5443311" y="670335"/>
-                  </a:lnTo>
-                  <a:lnTo>
-                    <a:pt x="5371689" y="660286"/>
-                  </a:lnTo>
-                  <a:lnTo>
-                    <a:pt x="5300066" y="649796"/>
-                  </a:lnTo>
-                  <a:lnTo>
-                    <a:pt x="5228444" y="638846"/>
-                  </a:lnTo>
-                  <a:lnTo>
-                    <a:pt x="5156821" y="627417"/>
-                  </a:lnTo>
-                  <a:lnTo>
-                    <a:pt x="5085199" y="615487"/>
-                  </a:lnTo>
-                  <a:lnTo>
-                    <a:pt x="5013576" y="603034"/>
-                  </a:lnTo>
-                  <a:lnTo>
-                    <a:pt x="4941954" y="590035"/>
-                  </a:lnTo>
-                  <a:lnTo>
-                    <a:pt x="4870331" y="576467"/>
-                  </a:lnTo>
-                  <a:lnTo>
-                    <a:pt x="4798709" y="562304"/>
-                  </a:lnTo>
-                  <a:lnTo>
-                    <a:pt x="4727086" y="547521"/>
-                  </a:lnTo>
-                  <a:lnTo>
-                    <a:pt x="4655464" y="532090"/>
-                  </a:lnTo>
-                  <a:lnTo>
-                    <a:pt x="4583841" y="515982"/>
-                  </a:lnTo>
-                  <a:lnTo>
-                    <a:pt x="4512219" y="499169"/>
-                  </a:lnTo>
-                  <a:lnTo>
-                    <a:pt x="4440596" y="481619"/>
-                  </a:lnTo>
-                  <a:lnTo>
-                    <a:pt x="4368974" y="463300"/>
-                  </a:lnTo>
-                  <a:lnTo>
-                    <a:pt x="4297351" y="444178"/>
-                  </a:lnTo>
-                  <a:lnTo>
-                    <a:pt x="4225729" y="424218"/>
-                  </a:lnTo>
-                  <a:lnTo>
-                    <a:pt x="4154106" y="403384"/>
-                  </a:lnTo>
-                  <a:lnTo>
-                    <a:pt x="4082483" y="381636"/>
-                  </a:lnTo>
-                  <a:lnTo>
-                    <a:pt x="4010861" y="358936"/>
-                  </a:lnTo>
-                  <a:lnTo>
-                    <a:pt x="3939238" y="335240"/>
-                  </a:lnTo>
-                  <a:lnTo>
-                    <a:pt x="3867616" y="310507"/>
-                  </a:lnTo>
-                  <a:lnTo>
-                    <a:pt x="3795993" y="284689"/>
-                  </a:lnTo>
-                  <a:lnTo>
-                    <a:pt x="3724371" y="257741"/>
-                  </a:lnTo>
-                  <a:lnTo>
-                    <a:pt x="3652748" y="229611"/>
-                  </a:lnTo>
-                  <a:lnTo>
-                    <a:pt x="3581126" y="200249"/>
-                  </a:lnTo>
-                  <a:lnTo>
-                    <a:pt x="3509503" y="169600"/>
-                  </a:lnTo>
-                  <a:lnTo>
-                    <a:pt x="3437881" y="137607"/>
-                  </a:lnTo>
-                  <a:lnTo>
-                    <a:pt x="3366258" y="104213"/>
-                  </a:lnTo>
-                  <a:lnTo>
-                    <a:pt x="3294636" y="70167"/>
-                  </a:lnTo>
-                  <a:lnTo>
-                    <a:pt x="3223013" y="68701"/>
-                  </a:lnTo>
-                  <a:lnTo>
-                    <a:pt x="3151391" y="67233"/>
-                  </a:lnTo>
-                  <a:lnTo>
-                    <a:pt x="3079768" y="65762"/>
-                  </a:lnTo>
-                  <a:lnTo>
-                    <a:pt x="3008146" y="64289"/>
-                  </a:lnTo>
-                  <a:lnTo>
-                    <a:pt x="2936523" y="62813"/>
-                  </a:lnTo>
-                  <a:lnTo>
-                    <a:pt x="2864901" y="61334"/>
-                  </a:lnTo>
-                  <a:lnTo>
-                    <a:pt x="2793278" y="59853"/>
-                  </a:lnTo>
-                  <a:lnTo>
-                    <a:pt x="2721655" y="58369"/>
-                  </a:lnTo>
-                  <a:lnTo>
-                    <a:pt x="2650033" y="56883"/>
-                  </a:lnTo>
-                  <a:lnTo>
-                    <a:pt x="2578410" y="55394"/>
-                  </a:lnTo>
-                  <a:lnTo>
-                    <a:pt x="2506788" y="53902"/>
-                  </a:lnTo>
-                  <a:lnTo>
-                    <a:pt x="2435165" y="52408"/>
-                  </a:lnTo>
-                  <a:lnTo>
-                    <a:pt x="2363543" y="50911"/>
-                  </a:lnTo>
-                  <a:lnTo>
-                    <a:pt x="2291920" y="49411"/>
-                  </a:lnTo>
-                  <a:lnTo>
-                    <a:pt x="2220298" y="47909"/>
-                  </a:lnTo>
-                  <a:lnTo>
-                    <a:pt x="2148675" y="46404"/>
-                  </a:lnTo>
-                  <a:lnTo>
-                    <a:pt x="2077053" y="44897"/>
-                  </a:lnTo>
-                  <a:lnTo>
-                    <a:pt x="2005430" y="43386"/>
-                  </a:lnTo>
-                  <a:lnTo>
-                    <a:pt x="1933808" y="41873"/>
-                  </a:lnTo>
-                  <a:lnTo>
-                    <a:pt x="1862185" y="40358"/>
-                  </a:lnTo>
-                  <a:lnTo>
-                    <a:pt x="1790563" y="38840"/>
-                  </a:lnTo>
-                  <a:lnTo>
-                    <a:pt x="1718940" y="37319"/>
-                  </a:lnTo>
-                  <a:lnTo>
-                    <a:pt x="1647318" y="35795"/>
-                  </a:lnTo>
-                  <a:lnTo>
-                    <a:pt x="1575695" y="34269"/>
-                  </a:lnTo>
-                  <a:lnTo>
-                    <a:pt x="1504073" y="32740"/>
-                  </a:lnTo>
-                  <a:lnTo>
-                    <a:pt x="1432450" y="31208"/>
-                  </a:lnTo>
-                  <a:lnTo>
-                    <a:pt x="1360827" y="29674"/>
-                  </a:lnTo>
-                  <a:lnTo>
-                    <a:pt x="1289205" y="28137"/>
-                  </a:lnTo>
-                  <a:lnTo>
-                    <a:pt x="1217582" y="26597"/>
-                  </a:lnTo>
-                  <a:lnTo>
-                    <a:pt x="1145960" y="25054"/>
-                  </a:lnTo>
-                  <a:lnTo>
-                    <a:pt x="1074337" y="23509"/>
-                  </a:lnTo>
-                  <a:lnTo>
-                    <a:pt x="1002715" y="21961"/>
-                  </a:lnTo>
-                  <a:lnTo>
-                    <a:pt x="931092" y="20410"/>
-                  </a:lnTo>
-                  <a:lnTo>
-                    <a:pt x="859470" y="18857"/>
-                  </a:lnTo>
-                  <a:lnTo>
-                    <a:pt x="787847" y="17301"/>
-                  </a:lnTo>
-                  <a:lnTo>
-                    <a:pt x="716225" y="15742"/>
-                  </a:lnTo>
-                  <a:lnTo>
-                    <a:pt x="644602" y="14180"/>
-                  </a:lnTo>
-                  <a:lnTo>
-                    <a:pt x="572980" y="12615"/>
-                  </a:lnTo>
-                  <a:lnTo>
-                    <a:pt x="501357" y="11048"/>
-                  </a:lnTo>
-                  <a:lnTo>
-                    <a:pt x="429735" y="9478"/>
-                  </a:lnTo>
-                  <a:lnTo>
-                    <a:pt x="358112" y="7905"/>
-                  </a:lnTo>
-                  <a:lnTo>
-                    <a:pt x="286490" y="6330"/>
-                  </a:lnTo>
-                  <a:lnTo>
-                    <a:pt x="214867" y="4751"/>
-                  </a:lnTo>
-                  <a:lnTo>
-                    <a:pt x="143245" y="3170"/>
-                  </a:lnTo>
-                  <a:lnTo>
-                    <a:pt x="71622" y="1586"/>
-                  </a:lnTo>
-                  <a:lnTo>
-                    <a:pt x="0" y="0"/>
+                    <a:pt x="30407" y="23371"/>
+                  </a:lnTo>
+                  <a:lnTo>
+                    <a:pt x="100752" y="75169"/>
+                  </a:lnTo>
+                  <a:lnTo>
+                    <a:pt x="171096" y="124792"/>
+                  </a:lnTo>
+                  <a:lnTo>
+                    <a:pt x="241441" y="172332"/>
+                  </a:lnTo>
+                  <a:lnTo>
+                    <a:pt x="311785" y="217876"/>
+                  </a:lnTo>
+                  <a:lnTo>
+                    <a:pt x="382130" y="261508"/>
+                  </a:lnTo>
+                  <a:lnTo>
+                    <a:pt x="452474" y="303309"/>
+                  </a:lnTo>
+                  <a:lnTo>
+                    <a:pt x="522819" y="343354"/>
+                  </a:lnTo>
+                  <a:lnTo>
+                    <a:pt x="593163" y="381719"/>
+                  </a:lnTo>
+                  <a:lnTo>
+                    <a:pt x="663508" y="418473"/>
+                  </a:lnTo>
+                  <a:lnTo>
+                    <a:pt x="733852" y="453684"/>
+                  </a:lnTo>
+                  <a:lnTo>
+                    <a:pt x="804197" y="487416"/>
+                  </a:lnTo>
+                  <a:lnTo>
+                    <a:pt x="874541" y="519733"/>
+                  </a:lnTo>
+                  <a:lnTo>
+                    <a:pt x="944886" y="550693"/>
+                  </a:lnTo>
+                  <a:lnTo>
+                    <a:pt x="1015230" y="580353"/>
+                  </a:lnTo>
+                  <a:lnTo>
+                    <a:pt x="1085575" y="608768"/>
+                  </a:lnTo>
+                  <a:lnTo>
+                    <a:pt x="1155919" y="635990"/>
+                  </a:lnTo>
+                  <a:lnTo>
+                    <a:pt x="1226264" y="662069"/>
+                  </a:lnTo>
+                  <a:lnTo>
+                    <a:pt x="1296608" y="687053"/>
+                  </a:lnTo>
+                  <a:lnTo>
+                    <a:pt x="1366953" y="710989"/>
+                  </a:lnTo>
+                  <a:lnTo>
+                    <a:pt x="1437297" y="733920"/>
+                  </a:lnTo>
+                  <a:lnTo>
+                    <a:pt x="1507642" y="755888"/>
+                  </a:lnTo>
+                  <a:lnTo>
+                    <a:pt x="1577986" y="776933"/>
+                  </a:lnTo>
+                  <a:lnTo>
+                    <a:pt x="1648331" y="797096"/>
+                  </a:lnTo>
+                  <a:lnTo>
+                    <a:pt x="1718675" y="816411"/>
+                  </a:lnTo>
+                  <a:lnTo>
+                    <a:pt x="1789020" y="834916"/>
+                  </a:lnTo>
+                  <a:lnTo>
+                    <a:pt x="1859364" y="852644"/>
+                  </a:lnTo>
+                  <a:lnTo>
+                    <a:pt x="1929709" y="869628"/>
+                  </a:lnTo>
+                  <a:lnTo>
+                    <a:pt x="2000053" y="885899"/>
+                  </a:lnTo>
+                  <a:lnTo>
+                    <a:pt x="2070398" y="901487"/>
+                  </a:lnTo>
+                  <a:lnTo>
+                    <a:pt x="2140742" y="916420"/>
+                  </a:lnTo>
+                  <a:lnTo>
+                    <a:pt x="2211087" y="930727"/>
+                  </a:lnTo>
+                  <a:lnTo>
+                    <a:pt x="2281431" y="944432"/>
+                  </a:lnTo>
+                  <a:lnTo>
+                    <a:pt x="2351776" y="957563"/>
+                  </a:lnTo>
+                  <a:lnTo>
+                    <a:pt x="2422120" y="958383"/>
+                  </a:lnTo>
+                  <a:lnTo>
+                    <a:pt x="2492465" y="958910"/>
+                  </a:lnTo>
+                  <a:lnTo>
+                    <a:pt x="2562809" y="959436"/>
+                  </a:lnTo>
+                  <a:lnTo>
+                    <a:pt x="2633154" y="959962"/>
+                  </a:lnTo>
+                  <a:lnTo>
+                    <a:pt x="2703498" y="960486"/>
+                  </a:lnTo>
+                  <a:lnTo>
+                    <a:pt x="2773843" y="961009"/>
+                  </a:lnTo>
+                  <a:lnTo>
+                    <a:pt x="2844187" y="961532"/>
+                  </a:lnTo>
+                  <a:lnTo>
+                    <a:pt x="2914532" y="962053"/>
+                  </a:lnTo>
+                  <a:lnTo>
+                    <a:pt x="2984876" y="962574"/>
+                  </a:lnTo>
+                  <a:lnTo>
+                    <a:pt x="3055220" y="963093"/>
+                  </a:lnTo>
+                  <a:lnTo>
+                    <a:pt x="3125565" y="963612"/>
+                  </a:lnTo>
+                  <a:lnTo>
+                    <a:pt x="3195909" y="964130"/>
+                  </a:lnTo>
+                  <a:lnTo>
+                    <a:pt x="3266254" y="964647"/>
+                  </a:lnTo>
+                  <a:lnTo>
+                    <a:pt x="3336598" y="965163"/>
+                  </a:lnTo>
+                  <a:lnTo>
+                    <a:pt x="3406943" y="965678"/>
+                  </a:lnTo>
+                  <a:lnTo>
+                    <a:pt x="3477287" y="966192"/>
+                  </a:lnTo>
+                  <a:lnTo>
+                    <a:pt x="3547632" y="966705"/>
+                  </a:lnTo>
+                  <a:lnTo>
+                    <a:pt x="3617976" y="967217"/>
+                  </a:lnTo>
+                  <a:lnTo>
+                    <a:pt x="3688321" y="967729"/>
+                  </a:lnTo>
+                  <a:lnTo>
+                    <a:pt x="3758665" y="968239"/>
+                  </a:lnTo>
+                  <a:lnTo>
+                    <a:pt x="3829010" y="968749"/>
+                  </a:lnTo>
+                  <a:lnTo>
+                    <a:pt x="3899354" y="969258"/>
+                  </a:lnTo>
+                  <a:lnTo>
+                    <a:pt x="3969699" y="969766"/>
+                  </a:lnTo>
+                  <a:lnTo>
+                    <a:pt x="4040043" y="970273"/>
+                  </a:lnTo>
+                  <a:lnTo>
+                    <a:pt x="4110388" y="970779"/>
+                  </a:lnTo>
+                  <a:lnTo>
+                    <a:pt x="4180732" y="971284"/>
+                  </a:lnTo>
+                  <a:lnTo>
+                    <a:pt x="4251077" y="971788"/>
+                  </a:lnTo>
+                  <a:lnTo>
+                    <a:pt x="4321421" y="972292"/>
+                  </a:lnTo>
+                  <a:lnTo>
+                    <a:pt x="4391766" y="972794"/>
+                  </a:lnTo>
+                  <a:lnTo>
+                    <a:pt x="4462110" y="973296"/>
+                  </a:lnTo>
+                  <a:lnTo>
+                    <a:pt x="4532455" y="973796"/>
+                  </a:lnTo>
+                  <a:lnTo>
+                    <a:pt x="4602799" y="974296"/>
+                  </a:lnTo>
+                  <a:lnTo>
+                    <a:pt x="4673144" y="974795"/>
+                  </a:lnTo>
+                  <a:lnTo>
+                    <a:pt x="4743488" y="975293"/>
+                  </a:lnTo>
+                  <a:lnTo>
+                    <a:pt x="4813833" y="975790"/>
+                  </a:lnTo>
+                  <a:lnTo>
+                    <a:pt x="4884177" y="976287"/>
+                  </a:lnTo>
+                  <a:lnTo>
+                    <a:pt x="4954522" y="976782"/>
+                  </a:lnTo>
+                  <a:lnTo>
+                    <a:pt x="5024866" y="977277"/>
+                  </a:lnTo>
+                  <a:lnTo>
+                    <a:pt x="5095211" y="977770"/>
+                  </a:lnTo>
+                  <a:lnTo>
+                    <a:pt x="5165555" y="978263"/>
+                  </a:lnTo>
+                  <a:lnTo>
+                    <a:pt x="5235900" y="978755"/>
+                  </a:lnTo>
+                  <a:lnTo>
+                    <a:pt x="5306244" y="979246"/>
+                  </a:lnTo>
+                  <a:lnTo>
+                    <a:pt x="5376589" y="979737"/>
+                  </a:lnTo>
+                  <a:lnTo>
+                    <a:pt x="5446933" y="980226"/>
+                  </a:lnTo>
+                  <a:lnTo>
+                    <a:pt x="5517278" y="980714"/>
+                  </a:lnTo>
+                  <a:lnTo>
+                    <a:pt x="5587622" y="981202"/>
+                  </a:lnTo>
+                  <a:lnTo>
+                    <a:pt x="5657967" y="981689"/>
+                  </a:lnTo>
+                  <a:lnTo>
+                    <a:pt x="5728311" y="982175"/>
+                  </a:lnTo>
+                  <a:lnTo>
+                    <a:pt x="5798656" y="982660"/>
+                  </a:lnTo>
+                  <a:lnTo>
+                    <a:pt x="5869000" y="983144"/>
+                  </a:lnTo>
+                  <a:lnTo>
+                    <a:pt x="5939345" y="983627"/>
+                  </a:lnTo>
+                  <a:lnTo>
+                    <a:pt x="6009689" y="984110"/>
+                  </a:lnTo>
+                  <a:lnTo>
+                    <a:pt x="6080034" y="984592"/>
                   </a:lnTo>
                 </a:path>
               </a:pathLst>
@@ -4168,312 +3878,637 @@
           </p:nvSpPr>
           <p:spPr>
             <a:xfrm>
-              <a:off x="1172049" y="3239546"/>
-              <a:ext cx="7090630" cy="2063533"/>
+              <a:off x="1235312" y="3075626"/>
+              <a:ext cx="6964104" cy="293806"/>
             </a:xfrm>
             <a:custGeom>
               <a:avLst/>
               <a:pathLst>
-                <a:path w="7090630" h="2063533">
+                <a:path w="6964104" h="293806">
+                  <a:moveTo>
+                    <a:pt x="6964104" y="293806"/>
+                  </a:moveTo>
+                  <a:lnTo>
+                    <a:pt x="6893760" y="292453"/>
+                  </a:lnTo>
+                  <a:lnTo>
+                    <a:pt x="6823415" y="291042"/>
+                  </a:lnTo>
+                  <a:lnTo>
+                    <a:pt x="6753071" y="289568"/>
+                  </a:lnTo>
+                  <a:lnTo>
+                    <a:pt x="6682726" y="288030"/>
+                  </a:lnTo>
+                  <a:lnTo>
+                    <a:pt x="6612382" y="286425"/>
+                  </a:lnTo>
+                  <a:lnTo>
+                    <a:pt x="6542037" y="284749"/>
+                  </a:lnTo>
+                  <a:lnTo>
+                    <a:pt x="6471693" y="283000"/>
+                  </a:lnTo>
+                  <a:lnTo>
+                    <a:pt x="6401348" y="281174"/>
+                  </a:lnTo>
+                  <a:lnTo>
+                    <a:pt x="6331004" y="279268"/>
+                  </a:lnTo>
+                  <a:lnTo>
+                    <a:pt x="6260659" y="277278"/>
+                  </a:lnTo>
+                  <a:lnTo>
+                    <a:pt x="6190315" y="275202"/>
+                  </a:lnTo>
+                  <a:lnTo>
+                    <a:pt x="6119970" y="273034"/>
+                  </a:lnTo>
+                  <a:lnTo>
+                    <a:pt x="6049626" y="270771"/>
+                  </a:lnTo>
+                  <a:lnTo>
+                    <a:pt x="5979281" y="268409"/>
+                  </a:lnTo>
+                  <a:lnTo>
+                    <a:pt x="5908937" y="265944"/>
+                  </a:lnTo>
+                  <a:lnTo>
+                    <a:pt x="5838592" y="263371"/>
+                  </a:lnTo>
+                  <a:lnTo>
+                    <a:pt x="5768248" y="260685"/>
+                  </a:lnTo>
+                  <a:lnTo>
+                    <a:pt x="5697903" y="257881"/>
+                  </a:lnTo>
+                  <a:lnTo>
+                    <a:pt x="5627559" y="254954"/>
+                  </a:lnTo>
+                  <a:lnTo>
+                    <a:pt x="5557214" y="251899"/>
+                  </a:lnTo>
+                  <a:lnTo>
+                    <a:pt x="5486870" y="248711"/>
+                  </a:lnTo>
+                  <a:lnTo>
+                    <a:pt x="5416525" y="245382"/>
+                  </a:lnTo>
+                  <a:lnTo>
+                    <a:pt x="5346181" y="241908"/>
+                  </a:lnTo>
+                  <a:lnTo>
+                    <a:pt x="5275836" y="238281"/>
+                  </a:lnTo>
+                  <a:lnTo>
+                    <a:pt x="5205492" y="234496"/>
+                  </a:lnTo>
+                  <a:lnTo>
+                    <a:pt x="5135147" y="230544"/>
+                  </a:lnTo>
+                  <a:lnTo>
+                    <a:pt x="5064803" y="226420"/>
+                  </a:lnTo>
+                  <a:lnTo>
+                    <a:pt x="4994458" y="222114"/>
+                  </a:lnTo>
+                  <a:lnTo>
+                    <a:pt x="4924114" y="217621"/>
+                  </a:lnTo>
+                  <a:lnTo>
+                    <a:pt x="4853769" y="212930"/>
+                  </a:lnTo>
+                  <a:lnTo>
+                    <a:pt x="4783425" y="208033"/>
+                  </a:lnTo>
+                  <a:lnTo>
+                    <a:pt x="4713080" y="202922"/>
+                  </a:lnTo>
+                  <a:lnTo>
+                    <a:pt x="4642736" y="197587"/>
+                  </a:lnTo>
+                  <a:lnTo>
+                    <a:pt x="4572391" y="192018"/>
+                  </a:lnTo>
+                  <a:lnTo>
+                    <a:pt x="4502047" y="186206"/>
+                  </a:lnTo>
+                  <a:lnTo>
+                    <a:pt x="4431702" y="180138"/>
+                  </a:lnTo>
+                  <a:lnTo>
+                    <a:pt x="4361358" y="173805"/>
+                  </a:lnTo>
+                  <a:lnTo>
+                    <a:pt x="4291013" y="167194"/>
+                  </a:lnTo>
+                  <a:lnTo>
+                    <a:pt x="4220669" y="160293"/>
+                  </a:lnTo>
+                  <a:lnTo>
+                    <a:pt x="4150324" y="153090"/>
+                  </a:lnTo>
+                  <a:lnTo>
+                    <a:pt x="4079980" y="145571"/>
+                  </a:lnTo>
+                  <a:lnTo>
+                    <a:pt x="4009635" y="137723"/>
+                  </a:lnTo>
+                  <a:lnTo>
+                    <a:pt x="3939291" y="129531"/>
+                  </a:lnTo>
+                  <a:lnTo>
+                    <a:pt x="3868946" y="120980"/>
+                  </a:lnTo>
+                  <a:lnTo>
+                    <a:pt x="3798602" y="112054"/>
+                  </a:lnTo>
+                  <a:lnTo>
+                    <a:pt x="3728257" y="102737"/>
+                  </a:lnTo>
+                  <a:lnTo>
+                    <a:pt x="3657913" y="93012"/>
+                  </a:lnTo>
+                  <a:lnTo>
+                    <a:pt x="3587569" y="82861"/>
+                  </a:lnTo>
+                  <a:lnTo>
+                    <a:pt x="3517224" y="72265"/>
+                  </a:lnTo>
+                  <a:lnTo>
+                    <a:pt x="3446880" y="61204"/>
+                  </a:lnTo>
+                  <a:lnTo>
+                    <a:pt x="3376535" y="49659"/>
+                  </a:lnTo>
+                  <a:lnTo>
+                    <a:pt x="3306191" y="37608"/>
+                  </a:lnTo>
+                  <a:lnTo>
+                    <a:pt x="3235846" y="25321"/>
+                  </a:lnTo>
+                  <a:lnTo>
+                    <a:pt x="3165502" y="24792"/>
+                  </a:lnTo>
+                  <a:lnTo>
+                    <a:pt x="3095157" y="24262"/>
+                  </a:lnTo>
+                  <a:lnTo>
+                    <a:pt x="3024813" y="23732"/>
+                  </a:lnTo>
+                  <a:lnTo>
+                    <a:pt x="2954468" y="23200"/>
+                  </a:lnTo>
+                  <a:lnTo>
+                    <a:pt x="2884124" y="22667"/>
+                  </a:lnTo>
+                  <a:lnTo>
+                    <a:pt x="2813779" y="22134"/>
+                  </a:lnTo>
+                  <a:lnTo>
+                    <a:pt x="2743435" y="21599"/>
+                  </a:lnTo>
+                  <a:lnTo>
+                    <a:pt x="2673090" y="21064"/>
+                  </a:lnTo>
+                  <a:lnTo>
+                    <a:pt x="2602746" y="20527"/>
+                  </a:lnTo>
+                  <a:lnTo>
+                    <a:pt x="2532401" y="19990"/>
+                  </a:lnTo>
+                  <a:lnTo>
+                    <a:pt x="2462057" y="19452"/>
+                  </a:lnTo>
+                  <a:lnTo>
+                    <a:pt x="2391712" y="18912"/>
+                  </a:lnTo>
+                  <a:lnTo>
+                    <a:pt x="2321368" y="18372"/>
+                  </a:lnTo>
+                  <a:lnTo>
+                    <a:pt x="2251023" y="17831"/>
+                  </a:lnTo>
+                  <a:lnTo>
+                    <a:pt x="2180679" y="17289"/>
+                  </a:lnTo>
+                  <a:lnTo>
+                    <a:pt x="2110334" y="16746"/>
+                  </a:lnTo>
+                  <a:lnTo>
+                    <a:pt x="2039990" y="16202"/>
+                  </a:lnTo>
+                  <a:lnTo>
+                    <a:pt x="1969645" y="15657"/>
+                  </a:lnTo>
+                  <a:lnTo>
+                    <a:pt x="1899301" y="15111"/>
+                  </a:lnTo>
+                  <a:lnTo>
+                    <a:pt x="1828956" y="14564"/>
+                  </a:lnTo>
+                  <a:lnTo>
+                    <a:pt x="1758612" y="14016"/>
+                  </a:lnTo>
+                  <a:lnTo>
+                    <a:pt x="1688267" y="13467"/>
+                  </a:lnTo>
+                  <a:lnTo>
+                    <a:pt x="1617923" y="12917"/>
+                  </a:lnTo>
+                  <a:lnTo>
+                    <a:pt x="1547578" y="12367"/>
+                  </a:lnTo>
+                  <a:lnTo>
+                    <a:pt x="1477234" y="11815"/>
+                  </a:lnTo>
+                  <a:lnTo>
+                    <a:pt x="1406889" y="11262"/>
+                  </a:lnTo>
+                  <a:lnTo>
+                    <a:pt x="1336545" y="10708"/>
+                  </a:lnTo>
+                  <a:lnTo>
+                    <a:pt x="1266200" y="10154"/>
+                  </a:lnTo>
+                  <a:lnTo>
+                    <a:pt x="1195856" y="9598"/>
+                  </a:lnTo>
+                  <a:lnTo>
+                    <a:pt x="1125511" y="9041"/>
+                  </a:lnTo>
+                  <a:lnTo>
+                    <a:pt x="1055167" y="8484"/>
+                  </a:lnTo>
+                  <a:lnTo>
+                    <a:pt x="984822" y="7925"/>
+                  </a:lnTo>
+                  <a:lnTo>
+                    <a:pt x="914478" y="7365"/>
+                  </a:lnTo>
+                  <a:lnTo>
+                    <a:pt x="844133" y="6805"/>
+                  </a:lnTo>
+                  <a:lnTo>
+                    <a:pt x="773789" y="6243"/>
+                  </a:lnTo>
+                  <a:lnTo>
+                    <a:pt x="703444" y="5680"/>
+                  </a:lnTo>
+                  <a:lnTo>
+                    <a:pt x="633100" y="5117"/>
+                  </a:lnTo>
+                  <a:lnTo>
+                    <a:pt x="562755" y="4552"/>
+                  </a:lnTo>
+                  <a:lnTo>
+                    <a:pt x="492411" y="3987"/>
+                  </a:lnTo>
+                  <a:lnTo>
+                    <a:pt x="422066" y="3420"/>
+                  </a:lnTo>
+                  <a:lnTo>
+                    <a:pt x="351722" y="2853"/>
+                  </a:lnTo>
+                  <a:lnTo>
+                    <a:pt x="281377" y="2284"/>
+                  </a:lnTo>
+                  <a:lnTo>
+                    <a:pt x="211033" y="1714"/>
+                  </a:lnTo>
+                  <a:lnTo>
+                    <a:pt x="140688" y="1144"/>
+                  </a:lnTo>
+                  <a:lnTo>
+                    <a:pt x="70344" y="572"/>
+                  </a:lnTo>
+                  <a:lnTo>
+                    <a:pt x="0" y="0"/>
+                  </a:lnTo>
+                </a:path>
+              </a:pathLst>
+            </a:custGeom>
+          </p:spPr>
+          <p:txBody>
+            <a:bodyPr/>
+            <a:lstStyle/>
+            <a:p/>
+          </p:txBody>
+        </p:sp>
+        <p:sp>
+          <p:nvSpPr>
+            <p:cNvPr id="24" name="pl24"/>
+            <p:cNvSpPr/>
+            <p:nvPr/>
+          </p:nvSpPr>
+          <p:spPr>
+            <a:xfrm>
+              <a:off x="1235312" y="2563889"/>
+              <a:ext cx="6964104" cy="744680"/>
+            </a:xfrm>
+            <a:custGeom>
+              <a:avLst/>
+              <a:pathLst>
+                <a:path w="6964104" h="744680">
                   <a:moveTo>
                     <a:pt x="0" y="0"/>
                   </a:moveTo>
                   <a:lnTo>
-                    <a:pt x="71622" y="51172"/>
-                  </a:lnTo>
-                  <a:lnTo>
-                    <a:pt x="143245" y="101216"/>
-                  </a:lnTo>
-                  <a:lnTo>
-                    <a:pt x="214867" y="150154"/>
-                  </a:lnTo>
-                  <a:lnTo>
-                    <a:pt x="286490" y="198012"/>
-                  </a:lnTo>
-                  <a:lnTo>
-                    <a:pt x="358112" y="244813"/>
-                  </a:lnTo>
-                  <a:lnTo>
-                    <a:pt x="429735" y="290580"/>
-                  </a:lnTo>
-                  <a:lnTo>
-                    <a:pt x="501357" y="335338"/>
-                  </a:lnTo>
-                  <a:lnTo>
-                    <a:pt x="572980" y="379107"/>
-                  </a:lnTo>
-                  <a:lnTo>
-                    <a:pt x="644602" y="421909"/>
-                  </a:lnTo>
-                  <a:lnTo>
-                    <a:pt x="716225" y="463767"/>
-                  </a:lnTo>
-                  <a:lnTo>
-                    <a:pt x="787847" y="504700"/>
-                  </a:lnTo>
-                  <a:lnTo>
-                    <a:pt x="859470" y="544730"/>
-                  </a:lnTo>
-                  <a:lnTo>
-                    <a:pt x="931092" y="583876"/>
-                  </a:lnTo>
-                  <a:lnTo>
-                    <a:pt x="1002715" y="622157"/>
-                  </a:lnTo>
-                  <a:lnTo>
-                    <a:pt x="1074337" y="659593"/>
-                  </a:lnTo>
-                  <a:lnTo>
-                    <a:pt x="1145960" y="696203"/>
-                  </a:lnTo>
-                  <a:lnTo>
-                    <a:pt x="1217582" y="732004"/>
-                  </a:lnTo>
-                  <a:lnTo>
-                    <a:pt x="1289205" y="767015"/>
-                  </a:lnTo>
-                  <a:lnTo>
-                    <a:pt x="1360827" y="801253"/>
-                  </a:lnTo>
-                  <a:lnTo>
-                    <a:pt x="1432450" y="834735"/>
-                  </a:lnTo>
-                  <a:lnTo>
-                    <a:pt x="1504073" y="867478"/>
-                  </a:lnTo>
-                  <a:lnTo>
-                    <a:pt x="1575695" y="899498"/>
-                  </a:lnTo>
-                  <a:lnTo>
-                    <a:pt x="1647318" y="930810"/>
-                  </a:lnTo>
-                  <a:lnTo>
-                    <a:pt x="1718940" y="961432"/>
-                  </a:lnTo>
-                  <a:lnTo>
-                    <a:pt x="1790563" y="991377"/>
-                  </a:lnTo>
-                  <a:lnTo>
-                    <a:pt x="1862185" y="1020661"/>
-                  </a:lnTo>
-                  <a:lnTo>
-                    <a:pt x="1933808" y="1049299"/>
-                  </a:lnTo>
-                  <a:lnTo>
-                    <a:pt x="2005430" y="1077304"/>
-                  </a:lnTo>
-                  <a:lnTo>
-                    <a:pt x="2077053" y="1104691"/>
-                  </a:lnTo>
-                  <a:lnTo>
-                    <a:pt x="2148675" y="1131474"/>
-                  </a:lnTo>
-                  <a:lnTo>
-                    <a:pt x="2220298" y="1157665"/>
-                  </a:lnTo>
-                  <a:lnTo>
-                    <a:pt x="2291920" y="1183277"/>
-                  </a:lnTo>
-                  <a:lnTo>
-                    <a:pt x="2363543" y="1208324"/>
-                  </a:lnTo>
-                  <a:lnTo>
-                    <a:pt x="2435165" y="1232819"/>
-                  </a:lnTo>
-                  <a:lnTo>
-                    <a:pt x="2506788" y="1256772"/>
-                  </a:lnTo>
-                  <a:lnTo>
-                    <a:pt x="2578410" y="1280196"/>
-                  </a:lnTo>
-                  <a:lnTo>
-                    <a:pt x="2650033" y="1303104"/>
-                  </a:lnTo>
-                  <a:lnTo>
-                    <a:pt x="2721655" y="1325505"/>
-                  </a:lnTo>
-                  <a:lnTo>
-                    <a:pt x="2793278" y="1347412"/>
-                  </a:lnTo>
-                  <a:lnTo>
-                    <a:pt x="2864901" y="1368835"/>
-                  </a:lnTo>
-                  <a:lnTo>
-                    <a:pt x="2936523" y="1389786"/>
-                  </a:lnTo>
-                  <a:lnTo>
-                    <a:pt x="3008146" y="1410273"/>
-                  </a:lnTo>
-                  <a:lnTo>
-                    <a:pt x="3079768" y="1430309"/>
-                  </a:lnTo>
-                  <a:lnTo>
-                    <a:pt x="3151391" y="1449902"/>
-                  </a:lnTo>
-                  <a:lnTo>
-                    <a:pt x="3223013" y="1469062"/>
-                  </a:lnTo>
-                  <a:lnTo>
-                    <a:pt x="3294636" y="1487799"/>
-                  </a:lnTo>
-                  <a:lnTo>
-                    <a:pt x="3366258" y="1506123"/>
-                  </a:lnTo>
-                  <a:lnTo>
-                    <a:pt x="3437881" y="1524042"/>
-                  </a:lnTo>
-                  <a:lnTo>
-                    <a:pt x="3509503" y="1541565"/>
-                  </a:lnTo>
-                  <a:lnTo>
-                    <a:pt x="3581126" y="1558702"/>
-                  </a:lnTo>
-                  <a:lnTo>
-                    <a:pt x="3652748" y="1575460"/>
-                  </a:lnTo>
-                  <a:lnTo>
-                    <a:pt x="3724371" y="1591848"/>
-                  </a:lnTo>
-                  <a:lnTo>
-                    <a:pt x="3795993" y="1607874"/>
-                  </a:lnTo>
-                  <a:lnTo>
-                    <a:pt x="3867616" y="1623547"/>
-                  </a:lnTo>
-                  <a:lnTo>
-                    <a:pt x="3939238" y="1638873"/>
-                  </a:lnTo>
-                  <a:lnTo>
-                    <a:pt x="4010861" y="1653861"/>
-                  </a:lnTo>
-                  <a:lnTo>
-                    <a:pt x="4082483" y="1668518"/>
-                  </a:lnTo>
-                  <a:lnTo>
-                    <a:pt x="4154106" y="1682852"/>
-                  </a:lnTo>
-                  <a:lnTo>
-                    <a:pt x="4225729" y="1696869"/>
-                  </a:lnTo>
-                  <a:lnTo>
-                    <a:pt x="4297351" y="1710576"/>
-                  </a:lnTo>
-                  <a:lnTo>
-                    <a:pt x="4368974" y="1723981"/>
-                  </a:lnTo>
-                  <a:lnTo>
-                    <a:pt x="4440596" y="1737090"/>
-                  </a:lnTo>
-                  <a:lnTo>
-                    <a:pt x="4512219" y="1749909"/>
-                  </a:lnTo>
-                  <a:lnTo>
-                    <a:pt x="4583841" y="1762446"/>
-                  </a:lnTo>
-                  <a:lnTo>
-                    <a:pt x="4655464" y="1774705"/>
-                  </a:lnTo>
-                  <a:lnTo>
-                    <a:pt x="4727086" y="1786694"/>
-                  </a:lnTo>
-                  <a:lnTo>
-                    <a:pt x="4798709" y="1798418"/>
-                  </a:lnTo>
-                  <a:lnTo>
-                    <a:pt x="4870331" y="1809884"/>
-                  </a:lnTo>
-                  <a:lnTo>
-                    <a:pt x="4941954" y="1821096"/>
-                  </a:lnTo>
-                  <a:lnTo>
-                    <a:pt x="5013576" y="1832061"/>
-                  </a:lnTo>
-                  <a:lnTo>
-                    <a:pt x="5085199" y="1842783"/>
-                  </a:lnTo>
-                  <a:lnTo>
-                    <a:pt x="5156821" y="1853269"/>
-                  </a:lnTo>
-                  <a:lnTo>
-                    <a:pt x="5228444" y="1863523"/>
-                  </a:lnTo>
-                  <a:lnTo>
-                    <a:pt x="5300066" y="1873551"/>
-                  </a:lnTo>
-                  <a:lnTo>
-                    <a:pt x="5371689" y="1883358"/>
-                  </a:lnTo>
-                  <a:lnTo>
-                    <a:pt x="5443311" y="1892948"/>
-                  </a:lnTo>
-                  <a:lnTo>
-                    <a:pt x="5514934" y="1902326"/>
-                  </a:lnTo>
-                  <a:lnTo>
-                    <a:pt x="5586557" y="1911497"/>
-                  </a:lnTo>
-                  <a:lnTo>
-                    <a:pt x="5658179" y="1920466"/>
-                  </a:lnTo>
-                  <a:lnTo>
-                    <a:pt x="5729802" y="1929237"/>
-                  </a:lnTo>
-                  <a:lnTo>
-                    <a:pt x="5801424" y="1937814"/>
-                  </a:lnTo>
-                  <a:lnTo>
-                    <a:pt x="5873047" y="1946201"/>
-                  </a:lnTo>
-                  <a:lnTo>
-                    <a:pt x="5944669" y="1954404"/>
-                  </a:lnTo>
-                  <a:lnTo>
-                    <a:pt x="6016292" y="1962425"/>
-                  </a:lnTo>
-                  <a:lnTo>
-                    <a:pt x="6087914" y="1970269"/>
-                  </a:lnTo>
-                  <a:lnTo>
-                    <a:pt x="6159537" y="1977940"/>
-                  </a:lnTo>
-                  <a:lnTo>
-                    <a:pt x="6231159" y="1985442"/>
-                  </a:lnTo>
-                  <a:lnTo>
-                    <a:pt x="6302782" y="1992778"/>
-                  </a:lnTo>
-                  <a:lnTo>
-                    <a:pt x="6374404" y="1999952"/>
-                  </a:lnTo>
-                  <a:lnTo>
-                    <a:pt x="6446027" y="2006968"/>
-                  </a:lnTo>
-                  <a:lnTo>
-                    <a:pt x="6517649" y="2013829"/>
-                  </a:lnTo>
-                  <a:lnTo>
-                    <a:pt x="6589272" y="2020538"/>
-                  </a:lnTo>
-                  <a:lnTo>
-                    <a:pt x="6660894" y="2027099"/>
-                  </a:lnTo>
-                  <a:lnTo>
-                    <a:pt x="6732517" y="2033515"/>
-                  </a:lnTo>
-                  <a:lnTo>
-                    <a:pt x="6804139" y="2039790"/>
-                  </a:lnTo>
-                  <a:lnTo>
-                    <a:pt x="6875762" y="2045926"/>
-                  </a:lnTo>
-                  <a:lnTo>
-                    <a:pt x="6947385" y="2051927"/>
-                  </a:lnTo>
-                  <a:lnTo>
-                    <a:pt x="7019007" y="2057795"/>
-                  </a:lnTo>
-                  <a:lnTo>
-                    <a:pt x="7090630" y="2063533"/>
+                    <a:pt x="70344" y="18467"/>
+                  </a:lnTo>
+                  <a:lnTo>
+                    <a:pt x="140688" y="36526"/>
+                  </a:lnTo>
+                  <a:lnTo>
+                    <a:pt x="211033" y="54187"/>
+                  </a:lnTo>
+                  <a:lnTo>
+                    <a:pt x="281377" y="71457"/>
+                  </a:lnTo>
+                  <a:lnTo>
+                    <a:pt x="351722" y="88347"/>
+                  </a:lnTo>
+                  <a:lnTo>
+                    <a:pt x="422066" y="104863"/>
+                  </a:lnTo>
+                  <a:lnTo>
+                    <a:pt x="492411" y="121015"/>
+                  </a:lnTo>
+                  <a:lnTo>
+                    <a:pt x="562755" y="136810"/>
+                  </a:lnTo>
+                  <a:lnTo>
+                    <a:pt x="633100" y="152257"/>
+                  </a:lnTo>
+                  <a:lnTo>
+                    <a:pt x="703444" y="167362"/>
+                  </a:lnTo>
+                  <a:lnTo>
+                    <a:pt x="773789" y="182134"/>
+                  </a:lnTo>
+                  <a:lnTo>
+                    <a:pt x="844133" y="196580"/>
+                  </a:lnTo>
+                  <a:lnTo>
+                    <a:pt x="914478" y="210707"/>
+                  </a:lnTo>
+                  <a:lnTo>
+                    <a:pt x="984822" y="224522"/>
+                  </a:lnTo>
+                  <a:lnTo>
+                    <a:pt x="1055167" y="238031"/>
+                  </a:lnTo>
+                  <a:lnTo>
+                    <a:pt x="1125511" y="251243"/>
+                  </a:lnTo>
+                  <a:lnTo>
+                    <a:pt x="1195856" y="264163"/>
+                  </a:lnTo>
+                  <a:lnTo>
+                    <a:pt x="1266200" y="276797"/>
+                  </a:lnTo>
+                  <a:lnTo>
+                    <a:pt x="1336545" y="289153"/>
+                  </a:lnTo>
+                  <a:lnTo>
+                    <a:pt x="1406889" y="301236"/>
+                  </a:lnTo>
+                  <a:lnTo>
+                    <a:pt x="1477234" y="313052"/>
+                  </a:lnTo>
+                  <a:lnTo>
+                    <a:pt x="1547578" y="324607"/>
+                  </a:lnTo>
+                  <a:lnTo>
+                    <a:pt x="1617923" y="335907"/>
+                  </a:lnTo>
+                  <a:lnTo>
+                    <a:pt x="1688267" y="346958"/>
+                  </a:lnTo>
+                  <a:lnTo>
+                    <a:pt x="1758612" y="357764"/>
+                  </a:lnTo>
+                  <a:lnTo>
+                    <a:pt x="1828956" y="368332"/>
+                  </a:lnTo>
+                  <a:lnTo>
+                    <a:pt x="1899301" y="378667"/>
+                  </a:lnTo>
+                  <a:lnTo>
+                    <a:pt x="1969645" y="388773"/>
+                  </a:lnTo>
+                  <a:lnTo>
+                    <a:pt x="2039990" y="398657"/>
+                  </a:lnTo>
+                  <a:lnTo>
+                    <a:pt x="2110334" y="408322"/>
+                  </a:lnTo>
+                  <a:lnTo>
+                    <a:pt x="2180679" y="417774"/>
+                  </a:lnTo>
+                  <a:lnTo>
+                    <a:pt x="2251023" y="427017"/>
+                  </a:lnTo>
+                  <a:lnTo>
+                    <a:pt x="2321368" y="436056"/>
+                  </a:lnTo>
+                  <a:lnTo>
+                    <a:pt x="2391712" y="444895"/>
+                  </a:lnTo>
+                  <a:lnTo>
+                    <a:pt x="2462057" y="453539"/>
+                  </a:lnTo>
+                  <a:lnTo>
+                    <a:pt x="2532401" y="461992"/>
+                  </a:lnTo>
+                  <a:lnTo>
+                    <a:pt x="2602746" y="470259"/>
+                  </a:lnTo>
+                  <a:lnTo>
+                    <a:pt x="2673090" y="478343"/>
+                  </a:lnTo>
+                  <a:lnTo>
+                    <a:pt x="2743435" y="486249"/>
+                  </a:lnTo>
+                  <a:lnTo>
+                    <a:pt x="2813779" y="493980"/>
+                  </a:lnTo>
+                  <a:lnTo>
+                    <a:pt x="2884124" y="501541"/>
+                  </a:lnTo>
+                  <a:lnTo>
+                    <a:pt x="2954468" y="508934"/>
+                  </a:lnTo>
+                  <a:lnTo>
+                    <a:pt x="3024813" y="516164"/>
+                  </a:lnTo>
+                  <a:lnTo>
+                    <a:pt x="3095157" y="523235"/>
+                  </a:lnTo>
+                  <a:lnTo>
+                    <a:pt x="3165502" y="530150"/>
+                  </a:lnTo>
+                  <a:lnTo>
+                    <a:pt x="3235846" y="536911"/>
+                  </a:lnTo>
+                  <a:lnTo>
+                    <a:pt x="3306191" y="543524"/>
+                  </a:lnTo>
+                  <a:lnTo>
+                    <a:pt x="3376535" y="549991"/>
+                  </a:lnTo>
+                  <a:lnTo>
+                    <a:pt x="3446880" y="556314"/>
+                  </a:lnTo>
+                  <a:lnTo>
+                    <a:pt x="3517224" y="562498"/>
+                  </a:lnTo>
+                  <a:lnTo>
+                    <a:pt x="3587569" y="568546"/>
+                  </a:lnTo>
+                  <a:lnTo>
+                    <a:pt x="3657913" y="574460"/>
+                  </a:lnTo>
+                  <a:lnTo>
+                    <a:pt x="3728257" y="580244"/>
+                  </a:lnTo>
+                  <a:lnTo>
+                    <a:pt x="3798602" y="585899"/>
+                  </a:lnTo>
+                  <a:lnTo>
+                    <a:pt x="3868946" y="591430"/>
+                  </a:lnTo>
+                  <a:lnTo>
+                    <a:pt x="3939291" y="596839"/>
+                  </a:lnTo>
+                  <a:lnTo>
+                    <a:pt x="4009635" y="602129"/>
+                  </a:lnTo>
+                  <a:lnTo>
+                    <a:pt x="4079980" y="607301"/>
+                  </a:lnTo>
+                  <a:lnTo>
+                    <a:pt x="4150324" y="612360"/>
+                  </a:lnTo>
+                  <a:lnTo>
+                    <a:pt x="4220669" y="617306"/>
+                  </a:lnTo>
+                  <a:lnTo>
+                    <a:pt x="4291013" y="622144"/>
+                  </a:lnTo>
+                  <a:lnTo>
+                    <a:pt x="4361358" y="626875"/>
+                  </a:lnTo>
+                  <a:lnTo>
+                    <a:pt x="4431702" y="631501"/>
+                  </a:lnTo>
+                  <a:lnTo>
+                    <a:pt x="4502047" y="636025"/>
+                  </a:lnTo>
+                  <a:lnTo>
+                    <a:pt x="4572391" y="640449"/>
+                  </a:lnTo>
+                  <a:lnTo>
+                    <a:pt x="4642736" y="644776"/>
+                  </a:lnTo>
+                  <a:lnTo>
+                    <a:pt x="4713080" y="649007"/>
+                  </a:lnTo>
+                  <a:lnTo>
+                    <a:pt x="4783425" y="653144"/>
+                  </a:lnTo>
+                  <a:lnTo>
+                    <a:pt x="4853769" y="657190"/>
+                  </a:lnTo>
+                  <a:lnTo>
+                    <a:pt x="4924114" y="661147"/>
+                  </a:lnTo>
+                  <a:lnTo>
+                    <a:pt x="4994458" y="665017"/>
+                  </a:lnTo>
+                  <a:lnTo>
+                    <a:pt x="5064803" y="668801"/>
+                  </a:lnTo>
+                  <a:lnTo>
+                    <a:pt x="5135147" y="672501"/>
+                  </a:lnTo>
+                  <a:lnTo>
+                    <a:pt x="5205492" y="676120"/>
+                  </a:lnTo>
+                  <a:lnTo>
+                    <a:pt x="5275836" y="679659"/>
+                  </a:lnTo>
+                  <a:lnTo>
+                    <a:pt x="5346181" y="683120"/>
+                  </a:lnTo>
+                  <a:lnTo>
+                    <a:pt x="5416525" y="686504"/>
+                  </a:lnTo>
+                  <a:lnTo>
+                    <a:pt x="5486870" y="689814"/>
+                  </a:lnTo>
+                  <a:lnTo>
+                    <a:pt x="5557214" y="693051"/>
+                  </a:lnTo>
+                  <a:lnTo>
+                    <a:pt x="5627559" y="696216"/>
+                  </a:lnTo>
+                  <a:lnTo>
+                    <a:pt x="5697903" y="699311"/>
+                  </a:lnTo>
+                  <a:lnTo>
+                    <a:pt x="5768248" y="702338"/>
+                  </a:lnTo>
+                  <a:lnTo>
+                    <a:pt x="5838592" y="705298"/>
+                  </a:lnTo>
+                  <a:lnTo>
+                    <a:pt x="5908937" y="708193"/>
+                  </a:lnTo>
+                  <a:lnTo>
+                    <a:pt x="5979281" y="711024"/>
+                  </a:lnTo>
+                  <a:lnTo>
+                    <a:pt x="6049626" y="713792"/>
+                  </a:lnTo>
+                  <a:lnTo>
+                    <a:pt x="6119970" y="716499"/>
+                  </a:lnTo>
+                  <a:lnTo>
+                    <a:pt x="6190315" y="719146"/>
+                  </a:lnTo>
+                  <a:lnTo>
+                    <a:pt x="6260659" y="721735"/>
+                  </a:lnTo>
+                  <a:lnTo>
+                    <a:pt x="6331004" y="724267"/>
+                  </a:lnTo>
+                  <a:lnTo>
+                    <a:pt x="6401348" y="726743"/>
+                  </a:lnTo>
+                  <a:lnTo>
+                    <a:pt x="6471693" y="729164"/>
+                  </a:lnTo>
+                  <a:lnTo>
+                    <a:pt x="6542037" y="731532"/>
+                  </a:lnTo>
+                  <a:lnTo>
+                    <a:pt x="6612382" y="733848"/>
+                  </a:lnTo>
+                  <a:lnTo>
+                    <a:pt x="6682726" y="736112"/>
+                  </a:lnTo>
+                  <a:lnTo>
+                    <a:pt x="6753071" y="738326"/>
+                  </a:lnTo>
+                  <a:lnTo>
+                    <a:pt x="6823415" y="740492"/>
+                  </a:lnTo>
+                  <a:lnTo>
+                    <a:pt x="6893760" y="742609"/>
+                  </a:lnTo>
+                  <a:lnTo>
+                    <a:pt x="6964104" y="744680"/>
                   </a:lnTo>
                 </a:path>
               </a:pathLst>
@@ -4496,27 +4531,27 @@
         </p:sp>
         <p:sp>
           <p:nvSpPr>
-            <p:cNvPr id="24" name="pl24"/>
+            <p:cNvPr id="25" name="pl25"/>
             <p:cNvSpPr/>
             <p:nvPr/>
           </p:nvSpPr>
           <p:spPr>
             <a:xfrm>
-              <a:off x="817517" y="4727786"/>
-              <a:ext cx="7799693" cy="0"/>
+              <a:off x="887106" y="3100960"/>
+              <a:ext cx="7660515" cy="0"/>
             </a:xfrm>
             <a:custGeom>
               <a:avLst/>
               <a:pathLst>
-                <a:path w="7799693" h="0">
+                <a:path w="7660515" h="0">
                   <a:moveTo>
                     <a:pt x="0" y="0"/>
                   </a:moveTo>
                   <a:lnTo>
-                    <a:pt x="7799693" y="0"/>
-                  </a:lnTo>
-                  <a:lnTo>
-                    <a:pt x="7799693" y="0"/>
+                    <a:pt x="7660515" y="0"/>
+                  </a:lnTo>
+                  <a:lnTo>
+                    <a:pt x="7660515" y="0"/>
                   </a:lnTo>
                 </a:path>
               </a:pathLst>
@@ -4539,21 +4574,21 @@
         </p:sp>
         <p:sp>
           <p:nvSpPr>
-            <p:cNvPr id="25" name="pl25"/>
+            <p:cNvPr id="26" name="pl26"/>
             <p:cNvSpPr/>
             <p:nvPr/>
           </p:nvSpPr>
           <p:spPr>
             <a:xfrm>
-              <a:off x="4468386" y="2073503"/>
-              <a:ext cx="0" cy="3649639"/>
+              <a:off x="4472829" y="2143092"/>
+              <a:ext cx="0" cy="1317069"/>
             </a:xfrm>
             <a:custGeom>
               <a:avLst/>
               <a:pathLst>
-                <a:path w="0" h="3649639">
+                <a:path w="0" h="1317069">
                   <a:moveTo>
-                    <a:pt x="0" y="3649639"/>
+                    <a:pt x="0" y="1317069"/>
                   </a:moveTo>
                   <a:lnTo>
                     <a:pt x="0" y="0"/>
@@ -4582,13 +4617,13 @@
         </p:sp>
         <p:sp>
           <p:nvSpPr>
-            <p:cNvPr id="26" name="tx26"/>
+            <p:cNvPr id="27" name="tx27"/>
             <p:cNvSpPr/>
             <p:nvPr/>
           </p:nvSpPr>
           <p:spPr>
             <a:xfrm>
-              <a:off x="692708" y="5517199"/>
+              <a:off x="762297" y="3360243"/>
               <a:ext cx="62179" cy="80101"/>
             </a:xfrm>
             <a:prstGeom prst="rect">
@@ -4628,13 +4663,13 @@
         </p:sp>
         <p:sp>
           <p:nvSpPr>
-            <p:cNvPr id="27" name="tx27"/>
+            <p:cNvPr id="28" name="tx28"/>
             <p:cNvSpPr/>
             <p:nvPr/>
           </p:nvSpPr>
           <p:spPr>
             <a:xfrm>
-              <a:off x="692708" y="4687735"/>
+              <a:off x="762297" y="3060909"/>
               <a:ext cx="62179" cy="80101"/>
             </a:xfrm>
             <a:prstGeom prst="rect">
@@ -4674,13 +4709,13 @@
         </p:sp>
         <p:sp>
           <p:nvSpPr>
-            <p:cNvPr id="28" name="tx28"/>
+            <p:cNvPr id="29" name="tx29"/>
             <p:cNvSpPr/>
             <p:nvPr/>
           </p:nvSpPr>
           <p:spPr>
             <a:xfrm>
-              <a:off x="692708" y="3858272"/>
+              <a:off x="762297" y="2761575"/>
               <a:ext cx="62179" cy="80101"/>
             </a:xfrm>
             <a:prstGeom prst="rect">
@@ -4720,13 +4755,13 @@
         </p:sp>
         <p:sp>
           <p:nvSpPr>
-            <p:cNvPr id="29" name="tx29"/>
+            <p:cNvPr id="30" name="tx30"/>
             <p:cNvSpPr/>
             <p:nvPr/>
           </p:nvSpPr>
           <p:spPr>
             <a:xfrm>
-              <a:off x="692708" y="3028808"/>
+              <a:off x="762297" y="2462242"/>
               <a:ext cx="62179" cy="80101"/>
             </a:xfrm>
             <a:prstGeom prst="rect">
@@ -4766,13 +4801,13 @@
         </p:sp>
         <p:sp>
           <p:nvSpPr>
-            <p:cNvPr id="30" name="tx30"/>
+            <p:cNvPr id="31" name="tx31"/>
             <p:cNvSpPr/>
             <p:nvPr/>
           </p:nvSpPr>
           <p:spPr>
             <a:xfrm>
-              <a:off x="692708" y="2199345"/>
+              <a:off x="762297" y="2162908"/>
               <a:ext cx="62179" cy="80101"/>
             </a:xfrm>
             <a:prstGeom prst="rect">
@@ -4812,13 +4847,13 @@
         </p:sp>
         <p:sp>
           <p:nvSpPr>
-            <p:cNvPr id="31" name="tx31"/>
+            <p:cNvPr id="32" name="tx32"/>
             <p:cNvSpPr/>
             <p:nvPr/>
           </p:nvSpPr>
           <p:spPr>
             <a:xfrm>
-              <a:off x="2478335" y="5785772"/>
+              <a:off x="2516846" y="3522791"/>
               <a:ext cx="161574" cy="80101"/>
             </a:xfrm>
             <a:prstGeom prst="rect">
@@ -4858,13 +4893,13 @@
         </p:sp>
         <p:sp>
           <p:nvSpPr>
-            <p:cNvPr id="32" name="tx32"/>
+            <p:cNvPr id="33" name="tx33"/>
             <p:cNvSpPr/>
             <p:nvPr/>
           </p:nvSpPr>
           <p:spPr>
             <a:xfrm>
-              <a:off x="4582608" y="5785772"/>
+              <a:off x="4584458" y="3522791"/>
               <a:ext cx="62179" cy="80101"/>
             </a:xfrm>
             <a:prstGeom prst="rect">
@@ -4904,13 +4939,13 @@
         </p:sp>
         <p:sp>
           <p:nvSpPr>
-            <p:cNvPr id="33" name="tx33"/>
+            <p:cNvPr id="34" name="tx34"/>
             <p:cNvSpPr/>
             <p:nvPr/>
           </p:nvSpPr>
           <p:spPr>
             <a:xfrm>
-              <a:off x="6606094" y="5785772"/>
+              <a:off x="6571282" y="3522791"/>
               <a:ext cx="124358" cy="80101"/>
             </a:xfrm>
             <a:prstGeom prst="rect">
@@ -4950,13 +4985,13 @@
         </p:sp>
         <p:sp>
           <p:nvSpPr>
-            <p:cNvPr id="34" name="tx34"/>
+            <p:cNvPr id="35" name="tx35"/>
             <p:cNvSpPr/>
             <p:nvPr/>
           </p:nvSpPr>
           <p:spPr>
             <a:xfrm>
-              <a:off x="2928340" y="5925448"/>
+              <a:off x="2928340" y="3662467"/>
               <a:ext cx="3578047" cy="100218"/>
             </a:xfrm>
             <a:prstGeom prst="rect">
@@ -4996,13 +5031,13 @@
         </p:sp>
         <p:sp>
           <p:nvSpPr>
-            <p:cNvPr id="35" name="tx35"/>
+            <p:cNvPr id="36" name="tx36"/>
             <p:cNvSpPr/>
             <p:nvPr/>
           </p:nvSpPr>
           <p:spPr>
             <a:xfrm rot="-5400000">
-              <a:off x="68446" y="3848213"/>
+              <a:off x="138035" y="2751517"/>
               <a:ext cx="1016904" cy="100218"/>
             </a:xfrm>
             <a:prstGeom prst="rect">
@@ -5042,13 +5077,13 @@
         </p:sp>
         <p:sp>
           <p:nvSpPr>
-            <p:cNvPr id="36" name="tx36"/>
+            <p:cNvPr id="37" name="tx37"/>
             <p:cNvSpPr/>
             <p:nvPr/>
           </p:nvSpPr>
           <p:spPr>
             <a:xfrm>
-              <a:off x="817517" y="1896563"/>
+              <a:off x="887106" y="1966152"/>
               <a:ext cx="6321612" cy="82021"/>
             </a:xfrm>
             <a:prstGeom prst="rect">
@@ -5088,13 +5123,3674 @@
         </p:sp>
         <p:sp>
           <p:nvSpPr>
-            <p:cNvPr id="37" name="tx37"/>
+            <p:cNvPr id="38" name="tx38"/>
             <p:cNvSpPr/>
             <p:nvPr/>
           </p:nvSpPr>
           <p:spPr>
             <a:xfrm>
-              <a:off x="817517" y="1669789"/>
+              <a:off x="887106" y="1739378"/>
+              <a:ext cx="4458797" cy="120152"/>
+            </a:xfrm>
+            <a:prstGeom prst="rect">
+              <a:avLst/>
+            </a:prstGeom>
+            <a:noFill/>
+          </p:spPr>
+          <p:txBody>
+            <a:bodyPr lIns="0" rIns="0" tIns="0" bIns="0" anchorCtr="1" anchor="ctr" wrap="none"/>
+            <a:lstStyle/>
+            <a:p>
+              <a:pPr algn="l" marL="0" marR="0" indent="0">
+                <a:lnSpc>
+                  <a:spcPts val="1320"/>
+                </a:lnSpc>
+                <a:spcBef>
+                  <a:spcPts val="0"/>
+                </a:spcBef>
+                <a:spcAft>
+                  <a:spcPts val="0"/>
+                </a:spcAft>
+              </a:pPr>
+              <a:r>
+                <a:rPr sz="1320">
+                  <a:solidFill>
+                    <a:srgbClr val="000000">
+                      <a:alpha val="100000"/>
+                    </a:srgbClr>
+                  </a:solidFill>
+                  <a:latin typeface="Helvetica"/>
+                  <a:cs typeface="Helvetica"/>
+                </a:rPr>
+                <a:t>Failure to Thrive/Fatigue/Dehydration (Carboplatin AUC ≥ 3)</a:t>
+              </a:r>
+            </a:p>
+          </p:txBody>
+        </p:sp>
+        <p:sp>
+          <p:nvSpPr>
+            <p:cNvPr id="39" name="pl39"/>
+            <p:cNvSpPr/>
+            <p:nvPr/>
+          </p:nvSpPr>
+          <p:spPr>
+            <a:xfrm>
+              <a:off x="887106" y="5444019"/>
+              <a:ext cx="7660515" cy="0"/>
+            </a:xfrm>
+            <a:custGeom>
+              <a:avLst/>
+              <a:pathLst>
+                <a:path w="7660515" h="0">
+                  <a:moveTo>
+                    <a:pt x="0" y="0"/>
+                  </a:moveTo>
+                  <a:lnTo>
+                    <a:pt x="7660515" y="0"/>
+                  </a:lnTo>
+                  <a:lnTo>
+                    <a:pt x="7660515" y="0"/>
+                  </a:lnTo>
+                </a:path>
+              </a:pathLst>
+            </a:custGeom>
+            <a:ln w="6775" cap="flat">
+              <a:solidFill>
+                <a:srgbClr val="EBEBEB">
+                  <a:alpha val="100000"/>
+                </a:srgbClr>
+              </a:solidFill>
+              <a:prstDash val="solid"/>
+              <a:round/>
+            </a:ln>
+          </p:spPr>
+          <p:txBody>
+            <a:bodyPr/>
+            <a:lstStyle/>
+            <a:p/>
+          </p:txBody>
+        </p:sp>
+        <p:sp>
+          <p:nvSpPr>
+            <p:cNvPr id="40" name="pl40"/>
+            <p:cNvSpPr/>
+            <p:nvPr/>
+          </p:nvSpPr>
+          <p:spPr>
+            <a:xfrm>
+              <a:off x="887106" y="5144686"/>
+              <a:ext cx="7660515" cy="0"/>
+            </a:xfrm>
+            <a:custGeom>
+              <a:avLst/>
+              <a:pathLst>
+                <a:path w="7660515" h="0">
+                  <a:moveTo>
+                    <a:pt x="0" y="0"/>
+                  </a:moveTo>
+                  <a:lnTo>
+                    <a:pt x="7660515" y="0"/>
+                  </a:lnTo>
+                  <a:lnTo>
+                    <a:pt x="7660515" y="0"/>
+                  </a:lnTo>
+                </a:path>
+              </a:pathLst>
+            </a:custGeom>
+            <a:ln w="6775" cap="flat">
+              <a:solidFill>
+                <a:srgbClr val="EBEBEB">
+                  <a:alpha val="100000"/>
+                </a:srgbClr>
+              </a:solidFill>
+              <a:prstDash val="solid"/>
+              <a:round/>
+            </a:ln>
+          </p:spPr>
+          <p:txBody>
+            <a:bodyPr/>
+            <a:lstStyle/>
+            <a:p/>
+          </p:txBody>
+        </p:sp>
+        <p:sp>
+          <p:nvSpPr>
+            <p:cNvPr id="41" name="pl41"/>
+            <p:cNvSpPr/>
+            <p:nvPr/>
+          </p:nvSpPr>
+          <p:spPr>
+            <a:xfrm>
+              <a:off x="887106" y="4845352"/>
+              <a:ext cx="7660515" cy="0"/>
+            </a:xfrm>
+            <a:custGeom>
+              <a:avLst/>
+              <a:pathLst>
+                <a:path w="7660515" h="0">
+                  <a:moveTo>
+                    <a:pt x="0" y="0"/>
+                  </a:moveTo>
+                  <a:lnTo>
+                    <a:pt x="7660515" y="0"/>
+                  </a:lnTo>
+                  <a:lnTo>
+                    <a:pt x="7660515" y="0"/>
+                  </a:lnTo>
+                </a:path>
+              </a:pathLst>
+            </a:custGeom>
+            <a:ln w="6775" cap="flat">
+              <a:solidFill>
+                <a:srgbClr val="EBEBEB">
+                  <a:alpha val="100000"/>
+                </a:srgbClr>
+              </a:solidFill>
+              <a:prstDash val="solid"/>
+              <a:round/>
+            </a:ln>
+          </p:spPr>
+          <p:txBody>
+            <a:bodyPr/>
+            <a:lstStyle/>
+            <a:p/>
+          </p:txBody>
+        </p:sp>
+        <p:sp>
+          <p:nvSpPr>
+            <p:cNvPr id="42" name="pl42"/>
+            <p:cNvSpPr/>
+            <p:nvPr/>
+          </p:nvSpPr>
+          <p:spPr>
+            <a:xfrm>
+              <a:off x="887106" y="4546018"/>
+              <a:ext cx="7660515" cy="0"/>
+            </a:xfrm>
+            <a:custGeom>
+              <a:avLst/>
+              <a:pathLst>
+                <a:path w="7660515" h="0">
+                  <a:moveTo>
+                    <a:pt x="0" y="0"/>
+                  </a:moveTo>
+                  <a:lnTo>
+                    <a:pt x="7660515" y="0"/>
+                  </a:lnTo>
+                  <a:lnTo>
+                    <a:pt x="7660515" y="0"/>
+                  </a:lnTo>
+                </a:path>
+              </a:pathLst>
+            </a:custGeom>
+            <a:ln w="6775" cap="flat">
+              <a:solidFill>
+                <a:srgbClr val="EBEBEB">
+                  <a:alpha val="100000"/>
+                </a:srgbClr>
+              </a:solidFill>
+              <a:prstDash val="solid"/>
+              <a:round/>
+            </a:ln>
+          </p:spPr>
+          <p:txBody>
+            <a:bodyPr/>
+            <a:lstStyle/>
+            <a:p/>
+          </p:txBody>
+        </p:sp>
+        <p:sp>
+          <p:nvSpPr>
+            <p:cNvPr id="43" name="pl43"/>
+            <p:cNvSpPr/>
+            <p:nvPr/>
+          </p:nvSpPr>
+          <p:spPr>
+            <a:xfrm>
+              <a:off x="983303" y="4336484"/>
+              <a:ext cx="0" cy="1317069"/>
+            </a:xfrm>
+            <a:custGeom>
+              <a:avLst/>
+              <a:pathLst>
+                <a:path w="0" h="1317069">
+                  <a:moveTo>
+                    <a:pt x="0" y="1317069"/>
+                  </a:moveTo>
+                  <a:lnTo>
+                    <a:pt x="0" y="0"/>
+                  </a:lnTo>
+                  <a:lnTo>
+                    <a:pt x="0" y="0"/>
+                  </a:lnTo>
+                </a:path>
+              </a:pathLst>
+            </a:custGeom>
+            <a:ln w="6775" cap="flat">
+              <a:solidFill>
+                <a:srgbClr val="EBEBEB">
+                  <a:alpha val="100000"/>
+                </a:srgbClr>
+              </a:solidFill>
+              <a:prstDash val="solid"/>
+              <a:round/>
+            </a:ln>
+          </p:spPr>
+          <p:txBody>
+            <a:bodyPr/>
+            <a:lstStyle/>
+            <a:p/>
+          </p:txBody>
+        </p:sp>
+        <p:sp>
+          <p:nvSpPr>
+            <p:cNvPr id="44" name="pl44"/>
+            <p:cNvSpPr/>
+            <p:nvPr/>
+          </p:nvSpPr>
+          <p:spPr>
+            <a:xfrm>
+              <a:off x="1790468" y="4336484"/>
+              <a:ext cx="0" cy="1317069"/>
+            </a:xfrm>
+            <a:custGeom>
+              <a:avLst/>
+              <a:pathLst>
+                <a:path w="0" h="1317069">
+                  <a:moveTo>
+                    <a:pt x="0" y="1317069"/>
+                  </a:moveTo>
+                  <a:lnTo>
+                    <a:pt x="0" y="0"/>
+                  </a:lnTo>
+                  <a:lnTo>
+                    <a:pt x="0" y="0"/>
+                  </a:lnTo>
+                </a:path>
+              </a:pathLst>
+            </a:custGeom>
+            <a:ln w="6775" cap="flat">
+              <a:solidFill>
+                <a:srgbClr val="EBEBEB">
+                  <a:alpha val="100000"/>
+                </a:srgbClr>
+              </a:solidFill>
+              <a:prstDash val="solid"/>
+              <a:round/>
+            </a:ln>
+          </p:spPr>
+          <p:txBody>
+            <a:bodyPr/>
+            <a:lstStyle/>
+            <a:p/>
+          </p:txBody>
+        </p:sp>
+        <p:sp>
+          <p:nvSpPr>
+            <p:cNvPr id="45" name="pl45"/>
+            <p:cNvSpPr/>
+            <p:nvPr/>
+          </p:nvSpPr>
+          <p:spPr>
+            <a:xfrm>
+              <a:off x="2597634" y="4336484"/>
+              <a:ext cx="0" cy="1317069"/>
+            </a:xfrm>
+            <a:custGeom>
+              <a:avLst/>
+              <a:pathLst>
+                <a:path w="0" h="1317069">
+                  <a:moveTo>
+                    <a:pt x="0" y="1317069"/>
+                  </a:moveTo>
+                  <a:lnTo>
+                    <a:pt x="0" y="0"/>
+                  </a:lnTo>
+                  <a:lnTo>
+                    <a:pt x="0" y="0"/>
+                  </a:lnTo>
+                </a:path>
+              </a:pathLst>
+            </a:custGeom>
+            <a:ln w="6775" cap="flat">
+              <a:solidFill>
+                <a:srgbClr val="EBEBEB">
+                  <a:alpha val="100000"/>
+                </a:srgbClr>
+              </a:solidFill>
+              <a:prstDash val="solid"/>
+              <a:round/>
+            </a:ln>
+          </p:spPr>
+          <p:txBody>
+            <a:bodyPr/>
+            <a:lstStyle/>
+            <a:p/>
+          </p:txBody>
+        </p:sp>
+        <p:sp>
+          <p:nvSpPr>
+            <p:cNvPr id="46" name="pl46"/>
+            <p:cNvSpPr/>
+            <p:nvPr/>
+          </p:nvSpPr>
+          <p:spPr>
+            <a:xfrm>
+              <a:off x="3404799" y="4336484"/>
+              <a:ext cx="0" cy="1317069"/>
+            </a:xfrm>
+            <a:custGeom>
+              <a:avLst/>
+              <a:pathLst>
+                <a:path w="0" h="1317069">
+                  <a:moveTo>
+                    <a:pt x="0" y="1317069"/>
+                  </a:moveTo>
+                  <a:lnTo>
+                    <a:pt x="0" y="0"/>
+                  </a:lnTo>
+                  <a:lnTo>
+                    <a:pt x="0" y="0"/>
+                  </a:lnTo>
+                </a:path>
+              </a:pathLst>
+            </a:custGeom>
+            <a:ln w="6775" cap="flat">
+              <a:solidFill>
+                <a:srgbClr val="EBEBEB">
+                  <a:alpha val="100000"/>
+                </a:srgbClr>
+              </a:solidFill>
+              <a:prstDash val="solid"/>
+              <a:round/>
+            </a:ln>
+          </p:spPr>
+          <p:txBody>
+            <a:bodyPr/>
+            <a:lstStyle/>
+            <a:p/>
+          </p:txBody>
+        </p:sp>
+        <p:sp>
+          <p:nvSpPr>
+            <p:cNvPr id="47" name="pl47"/>
+            <p:cNvSpPr/>
+            <p:nvPr/>
+          </p:nvSpPr>
+          <p:spPr>
+            <a:xfrm>
+              <a:off x="4211965" y="4336484"/>
+              <a:ext cx="0" cy="1317069"/>
+            </a:xfrm>
+            <a:custGeom>
+              <a:avLst/>
+              <a:pathLst>
+                <a:path w="0" h="1317069">
+                  <a:moveTo>
+                    <a:pt x="0" y="1317069"/>
+                  </a:moveTo>
+                  <a:lnTo>
+                    <a:pt x="0" y="0"/>
+                  </a:lnTo>
+                  <a:lnTo>
+                    <a:pt x="0" y="0"/>
+                  </a:lnTo>
+                </a:path>
+              </a:pathLst>
+            </a:custGeom>
+            <a:ln w="6775" cap="flat">
+              <a:solidFill>
+                <a:srgbClr val="EBEBEB">
+                  <a:alpha val="100000"/>
+                </a:srgbClr>
+              </a:solidFill>
+              <a:prstDash val="solid"/>
+              <a:round/>
+            </a:ln>
+          </p:spPr>
+          <p:txBody>
+            <a:bodyPr/>
+            <a:lstStyle/>
+            <a:p/>
+          </p:txBody>
+        </p:sp>
+        <p:sp>
+          <p:nvSpPr>
+            <p:cNvPr id="48" name="pl48"/>
+            <p:cNvSpPr/>
+            <p:nvPr/>
+          </p:nvSpPr>
+          <p:spPr>
+            <a:xfrm>
+              <a:off x="5019130" y="4336484"/>
+              <a:ext cx="0" cy="1317069"/>
+            </a:xfrm>
+            <a:custGeom>
+              <a:avLst/>
+              <a:pathLst>
+                <a:path w="0" h="1317069">
+                  <a:moveTo>
+                    <a:pt x="0" y="1317069"/>
+                  </a:moveTo>
+                  <a:lnTo>
+                    <a:pt x="0" y="0"/>
+                  </a:lnTo>
+                  <a:lnTo>
+                    <a:pt x="0" y="0"/>
+                  </a:lnTo>
+                </a:path>
+              </a:pathLst>
+            </a:custGeom>
+            <a:ln w="6775" cap="flat">
+              <a:solidFill>
+                <a:srgbClr val="EBEBEB">
+                  <a:alpha val="100000"/>
+                </a:srgbClr>
+              </a:solidFill>
+              <a:prstDash val="solid"/>
+              <a:round/>
+            </a:ln>
+          </p:spPr>
+          <p:txBody>
+            <a:bodyPr/>
+            <a:lstStyle/>
+            <a:p/>
+          </p:txBody>
+        </p:sp>
+        <p:sp>
+          <p:nvSpPr>
+            <p:cNvPr id="49" name="pl49"/>
+            <p:cNvSpPr/>
+            <p:nvPr/>
+          </p:nvSpPr>
+          <p:spPr>
+            <a:xfrm>
+              <a:off x="5826296" y="4336484"/>
+              <a:ext cx="0" cy="1317069"/>
+            </a:xfrm>
+            <a:custGeom>
+              <a:avLst/>
+              <a:pathLst>
+                <a:path w="0" h="1317069">
+                  <a:moveTo>
+                    <a:pt x="0" y="1317069"/>
+                  </a:moveTo>
+                  <a:lnTo>
+                    <a:pt x="0" y="0"/>
+                  </a:lnTo>
+                  <a:lnTo>
+                    <a:pt x="0" y="0"/>
+                  </a:lnTo>
+                </a:path>
+              </a:pathLst>
+            </a:custGeom>
+            <a:ln w="6775" cap="flat">
+              <a:solidFill>
+                <a:srgbClr val="EBEBEB">
+                  <a:alpha val="100000"/>
+                </a:srgbClr>
+              </a:solidFill>
+              <a:prstDash val="solid"/>
+              <a:round/>
+            </a:ln>
+          </p:spPr>
+          <p:txBody>
+            <a:bodyPr/>
+            <a:lstStyle/>
+            <a:p/>
+          </p:txBody>
+        </p:sp>
+        <p:sp>
+          <p:nvSpPr>
+            <p:cNvPr id="50" name="pl50"/>
+            <p:cNvSpPr/>
+            <p:nvPr/>
+          </p:nvSpPr>
+          <p:spPr>
+            <a:xfrm>
+              <a:off x="6633461" y="4336484"/>
+              <a:ext cx="0" cy="1317069"/>
+            </a:xfrm>
+            <a:custGeom>
+              <a:avLst/>
+              <a:pathLst>
+                <a:path w="0" h="1317069">
+                  <a:moveTo>
+                    <a:pt x="0" y="1317069"/>
+                  </a:moveTo>
+                  <a:lnTo>
+                    <a:pt x="0" y="0"/>
+                  </a:lnTo>
+                  <a:lnTo>
+                    <a:pt x="0" y="0"/>
+                  </a:lnTo>
+                </a:path>
+              </a:pathLst>
+            </a:custGeom>
+            <a:ln w="6775" cap="flat">
+              <a:solidFill>
+                <a:srgbClr val="EBEBEB">
+                  <a:alpha val="100000"/>
+                </a:srgbClr>
+              </a:solidFill>
+              <a:prstDash val="solid"/>
+              <a:round/>
+            </a:ln>
+          </p:spPr>
+          <p:txBody>
+            <a:bodyPr/>
+            <a:lstStyle/>
+            <a:p/>
+          </p:txBody>
+        </p:sp>
+        <p:sp>
+          <p:nvSpPr>
+            <p:cNvPr id="51" name="pl51"/>
+            <p:cNvSpPr/>
+            <p:nvPr/>
+          </p:nvSpPr>
+          <p:spPr>
+            <a:xfrm>
+              <a:off x="7440627" y="4336484"/>
+              <a:ext cx="0" cy="1317069"/>
+            </a:xfrm>
+            <a:custGeom>
+              <a:avLst/>
+              <a:pathLst>
+                <a:path w="0" h="1317069">
+                  <a:moveTo>
+                    <a:pt x="0" y="1317069"/>
+                  </a:moveTo>
+                  <a:lnTo>
+                    <a:pt x="0" y="0"/>
+                  </a:lnTo>
+                  <a:lnTo>
+                    <a:pt x="0" y="0"/>
+                  </a:lnTo>
+                </a:path>
+              </a:pathLst>
+            </a:custGeom>
+            <a:ln w="6775" cap="flat">
+              <a:solidFill>
+                <a:srgbClr val="EBEBEB">
+                  <a:alpha val="100000"/>
+                </a:srgbClr>
+              </a:solidFill>
+              <a:prstDash val="solid"/>
+              <a:round/>
+            </a:ln>
+          </p:spPr>
+          <p:txBody>
+            <a:bodyPr/>
+            <a:lstStyle/>
+            <a:p/>
+          </p:txBody>
+        </p:sp>
+        <p:sp>
+          <p:nvSpPr>
+            <p:cNvPr id="52" name="pl52"/>
+            <p:cNvSpPr/>
+            <p:nvPr/>
+          </p:nvSpPr>
+          <p:spPr>
+            <a:xfrm>
+              <a:off x="8247792" y="4336484"/>
+              <a:ext cx="0" cy="1317069"/>
+            </a:xfrm>
+            <a:custGeom>
+              <a:avLst/>
+              <a:pathLst>
+                <a:path w="0" h="1317069">
+                  <a:moveTo>
+                    <a:pt x="0" y="1317069"/>
+                  </a:moveTo>
+                  <a:lnTo>
+                    <a:pt x="0" y="0"/>
+                  </a:lnTo>
+                  <a:lnTo>
+                    <a:pt x="0" y="0"/>
+                  </a:lnTo>
+                </a:path>
+              </a:pathLst>
+            </a:custGeom>
+            <a:ln w="6775" cap="flat">
+              <a:solidFill>
+                <a:srgbClr val="EBEBEB">
+                  <a:alpha val="100000"/>
+                </a:srgbClr>
+              </a:solidFill>
+              <a:prstDash val="solid"/>
+              <a:round/>
+            </a:ln>
+          </p:spPr>
+          <p:txBody>
+            <a:bodyPr/>
+            <a:lstStyle/>
+            <a:p/>
+          </p:txBody>
+        </p:sp>
+        <p:sp>
+          <p:nvSpPr>
+            <p:cNvPr id="53" name="pl53"/>
+            <p:cNvSpPr/>
+            <p:nvPr/>
+          </p:nvSpPr>
+          <p:spPr>
+            <a:xfrm>
+              <a:off x="887106" y="5593686"/>
+              <a:ext cx="7660515" cy="0"/>
+            </a:xfrm>
+            <a:custGeom>
+              <a:avLst/>
+              <a:pathLst>
+                <a:path w="7660515" h="0">
+                  <a:moveTo>
+                    <a:pt x="0" y="0"/>
+                  </a:moveTo>
+                  <a:lnTo>
+                    <a:pt x="7660515" y="0"/>
+                  </a:lnTo>
+                  <a:lnTo>
+                    <a:pt x="7660515" y="0"/>
+                  </a:lnTo>
+                </a:path>
+              </a:pathLst>
+            </a:custGeom>
+            <a:ln w="13550" cap="flat">
+              <a:solidFill>
+                <a:srgbClr val="EBEBEB">
+                  <a:alpha val="100000"/>
+                </a:srgbClr>
+              </a:solidFill>
+              <a:prstDash val="solid"/>
+              <a:round/>
+            </a:ln>
+          </p:spPr>
+          <p:txBody>
+            <a:bodyPr/>
+            <a:lstStyle/>
+            <a:p/>
+          </p:txBody>
+        </p:sp>
+        <p:sp>
+          <p:nvSpPr>
+            <p:cNvPr id="54" name="pl54"/>
+            <p:cNvSpPr/>
+            <p:nvPr/>
+          </p:nvSpPr>
+          <p:spPr>
+            <a:xfrm>
+              <a:off x="887106" y="5294352"/>
+              <a:ext cx="7660515" cy="0"/>
+            </a:xfrm>
+            <a:custGeom>
+              <a:avLst/>
+              <a:pathLst>
+                <a:path w="7660515" h="0">
+                  <a:moveTo>
+                    <a:pt x="0" y="0"/>
+                  </a:moveTo>
+                  <a:lnTo>
+                    <a:pt x="7660515" y="0"/>
+                  </a:lnTo>
+                  <a:lnTo>
+                    <a:pt x="7660515" y="0"/>
+                  </a:lnTo>
+                </a:path>
+              </a:pathLst>
+            </a:custGeom>
+            <a:ln w="13550" cap="flat">
+              <a:solidFill>
+                <a:srgbClr val="EBEBEB">
+                  <a:alpha val="100000"/>
+                </a:srgbClr>
+              </a:solidFill>
+              <a:prstDash val="solid"/>
+              <a:round/>
+            </a:ln>
+          </p:spPr>
+          <p:txBody>
+            <a:bodyPr/>
+            <a:lstStyle/>
+            <a:p/>
+          </p:txBody>
+        </p:sp>
+        <p:sp>
+          <p:nvSpPr>
+            <p:cNvPr id="55" name="pl55"/>
+            <p:cNvSpPr/>
+            <p:nvPr/>
+          </p:nvSpPr>
+          <p:spPr>
+            <a:xfrm>
+              <a:off x="887106" y="4995019"/>
+              <a:ext cx="7660515" cy="0"/>
+            </a:xfrm>
+            <a:custGeom>
+              <a:avLst/>
+              <a:pathLst>
+                <a:path w="7660515" h="0">
+                  <a:moveTo>
+                    <a:pt x="0" y="0"/>
+                  </a:moveTo>
+                  <a:lnTo>
+                    <a:pt x="7660515" y="0"/>
+                  </a:lnTo>
+                  <a:lnTo>
+                    <a:pt x="7660515" y="0"/>
+                  </a:lnTo>
+                </a:path>
+              </a:pathLst>
+            </a:custGeom>
+            <a:ln w="13550" cap="flat">
+              <a:solidFill>
+                <a:srgbClr val="EBEBEB">
+                  <a:alpha val="100000"/>
+                </a:srgbClr>
+              </a:solidFill>
+              <a:prstDash val="solid"/>
+              <a:round/>
+            </a:ln>
+          </p:spPr>
+          <p:txBody>
+            <a:bodyPr/>
+            <a:lstStyle/>
+            <a:p/>
+          </p:txBody>
+        </p:sp>
+        <p:sp>
+          <p:nvSpPr>
+            <p:cNvPr id="56" name="pl56"/>
+            <p:cNvSpPr/>
+            <p:nvPr/>
+          </p:nvSpPr>
+          <p:spPr>
+            <a:xfrm>
+              <a:off x="887106" y="4695685"/>
+              <a:ext cx="7660515" cy="0"/>
+            </a:xfrm>
+            <a:custGeom>
+              <a:avLst/>
+              <a:pathLst>
+                <a:path w="7660515" h="0">
+                  <a:moveTo>
+                    <a:pt x="0" y="0"/>
+                  </a:moveTo>
+                  <a:lnTo>
+                    <a:pt x="7660515" y="0"/>
+                  </a:lnTo>
+                  <a:lnTo>
+                    <a:pt x="7660515" y="0"/>
+                  </a:lnTo>
+                </a:path>
+              </a:pathLst>
+            </a:custGeom>
+            <a:ln w="13550" cap="flat">
+              <a:solidFill>
+                <a:srgbClr val="EBEBEB">
+                  <a:alpha val="100000"/>
+                </a:srgbClr>
+              </a:solidFill>
+              <a:prstDash val="solid"/>
+              <a:round/>
+            </a:ln>
+          </p:spPr>
+          <p:txBody>
+            <a:bodyPr/>
+            <a:lstStyle/>
+            <a:p/>
+          </p:txBody>
+        </p:sp>
+        <p:sp>
+          <p:nvSpPr>
+            <p:cNvPr id="57" name="pl57"/>
+            <p:cNvSpPr/>
+            <p:nvPr/>
+          </p:nvSpPr>
+          <p:spPr>
+            <a:xfrm>
+              <a:off x="887106" y="4396351"/>
+              <a:ext cx="7660515" cy="0"/>
+            </a:xfrm>
+            <a:custGeom>
+              <a:avLst/>
+              <a:pathLst>
+                <a:path w="7660515" h="0">
+                  <a:moveTo>
+                    <a:pt x="0" y="0"/>
+                  </a:moveTo>
+                  <a:lnTo>
+                    <a:pt x="7660515" y="0"/>
+                  </a:lnTo>
+                  <a:lnTo>
+                    <a:pt x="7660515" y="0"/>
+                  </a:lnTo>
+                </a:path>
+              </a:pathLst>
+            </a:custGeom>
+            <a:ln w="13550" cap="flat">
+              <a:solidFill>
+                <a:srgbClr val="EBEBEB">
+                  <a:alpha val="100000"/>
+                </a:srgbClr>
+              </a:solidFill>
+              <a:prstDash val="solid"/>
+              <a:round/>
+            </a:ln>
+          </p:spPr>
+          <p:txBody>
+            <a:bodyPr/>
+            <a:lstStyle/>
+            <a:p/>
+          </p:txBody>
+        </p:sp>
+        <p:sp>
+          <p:nvSpPr>
+            <p:cNvPr id="58" name="pl58"/>
+            <p:cNvSpPr/>
+            <p:nvPr/>
+          </p:nvSpPr>
+          <p:spPr>
+            <a:xfrm>
+              <a:off x="1386885" y="4336484"/>
+              <a:ext cx="0" cy="1317069"/>
+            </a:xfrm>
+            <a:custGeom>
+              <a:avLst/>
+              <a:pathLst>
+                <a:path w="0" h="1317069">
+                  <a:moveTo>
+                    <a:pt x="0" y="1317069"/>
+                  </a:moveTo>
+                  <a:lnTo>
+                    <a:pt x="0" y="0"/>
+                  </a:lnTo>
+                  <a:lnTo>
+                    <a:pt x="0" y="0"/>
+                  </a:lnTo>
+                </a:path>
+              </a:pathLst>
+            </a:custGeom>
+            <a:ln w="13550" cap="flat">
+              <a:solidFill>
+                <a:srgbClr val="EBEBEB">
+                  <a:alpha val="100000"/>
+                </a:srgbClr>
+              </a:solidFill>
+              <a:prstDash val="solid"/>
+              <a:round/>
+            </a:ln>
+          </p:spPr>
+          <p:txBody>
+            <a:bodyPr/>
+            <a:lstStyle/>
+            <a:p/>
+          </p:txBody>
+        </p:sp>
+        <p:sp>
+          <p:nvSpPr>
+            <p:cNvPr id="59" name="pl59"/>
+            <p:cNvSpPr/>
+            <p:nvPr/>
+          </p:nvSpPr>
+          <p:spPr>
+            <a:xfrm>
+              <a:off x="2194051" y="4336484"/>
+              <a:ext cx="0" cy="1317069"/>
+            </a:xfrm>
+            <a:custGeom>
+              <a:avLst/>
+              <a:pathLst>
+                <a:path w="0" h="1317069">
+                  <a:moveTo>
+                    <a:pt x="0" y="1317069"/>
+                  </a:moveTo>
+                  <a:lnTo>
+                    <a:pt x="0" y="0"/>
+                  </a:lnTo>
+                  <a:lnTo>
+                    <a:pt x="0" y="0"/>
+                  </a:lnTo>
+                </a:path>
+              </a:pathLst>
+            </a:custGeom>
+            <a:ln w="13550" cap="flat">
+              <a:solidFill>
+                <a:srgbClr val="EBEBEB">
+                  <a:alpha val="100000"/>
+                </a:srgbClr>
+              </a:solidFill>
+              <a:prstDash val="solid"/>
+              <a:round/>
+            </a:ln>
+          </p:spPr>
+          <p:txBody>
+            <a:bodyPr/>
+            <a:lstStyle/>
+            <a:p/>
+          </p:txBody>
+        </p:sp>
+        <p:sp>
+          <p:nvSpPr>
+            <p:cNvPr id="60" name="pl60"/>
+            <p:cNvSpPr/>
+            <p:nvPr/>
+          </p:nvSpPr>
+          <p:spPr>
+            <a:xfrm>
+              <a:off x="3001216" y="4336484"/>
+              <a:ext cx="0" cy="1317069"/>
+            </a:xfrm>
+            <a:custGeom>
+              <a:avLst/>
+              <a:pathLst>
+                <a:path w="0" h="1317069">
+                  <a:moveTo>
+                    <a:pt x="0" y="1317069"/>
+                  </a:moveTo>
+                  <a:lnTo>
+                    <a:pt x="0" y="0"/>
+                  </a:lnTo>
+                  <a:lnTo>
+                    <a:pt x="0" y="0"/>
+                  </a:lnTo>
+                </a:path>
+              </a:pathLst>
+            </a:custGeom>
+            <a:ln w="13550" cap="flat">
+              <a:solidFill>
+                <a:srgbClr val="EBEBEB">
+                  <a:alpha val="100000"/>
+                </a:srgbClr>
+              </a:solidFill>
+              <a:prstDash val="solid"/>
+              <a:round/>
+            </a:ln>
+          </p:spPr>
+          <p:txBody>
+            <a:bodyPr/>
+            <a:lstStyle/>
+            <a:p/>
+          </p:txBody>
+        </p:sp>
+        <p:sp>
+          <p:nvSpPr>
+            <p:cNvPr id="61" name="pl61"/>
+            <p:cNvSpPr/>
+            <p:nvPr/>
+          </p:nvSpPr>
+          <p:spPr>
+            <a:xfrm>
+              <a:off x="3808382" y="4336484"/>
+              <a:ext cx="0" cy="1317069"/>
+            </a:xfrm>
+            <a:custGeom>
+              <a:avLst/>
+              <a:pathLst>
+                <a:path w="0" h="1317069">
+                  <a:moveTo>
+                    <a:pt x="0" y="1317069"/>
+                  </a:moveTo>
+                  <a:lnTo>
+                    <a:pt x="0" y="0"/>
+                  </a:lnTo>
+                  <a:lnTo>
+                    <a:pt x="0" y="0"/>
+                  </a:lnTo>
+                </a:path>
+              </a:pathLst>
+            </a:custGeom>
+            <a:ln w="13550" cap="flat">
+              <a:solidFill>
+                <a:srgbClr val="EBEBEB">
+                  <a:alpha val="100000"/>
+                </a:srgbClr>
+              </a:solidFill>
+              <a:prstDash val="solid"/>
+              <a:round/>
+            </a:ln>
+          </p:spPr>
+          <p:txBody>
+            <a:bodyPr/>
+            <a:lstStyle/>
+            <a:p/>
+          </p:txBody>
+        </p:sp>
+        <p:sp>
+          <p:nvSpPr>
+            <p:cNvPr id="62" name="pl62"/>
+            <p:cNvSpPr/>
+            <p:nvPr/>
+          </p:nvSpPr>
+          <p:spPr>
+            <a:xfrm>
+              <a:off x="4615547" y="4336484"/>
+              <a:ext cx="0" cy="1317069"/>
+            </a:xfrm>
+            <a:custGeom>
+              <a:avLst/>
+              <a:pathLst>
+                <a:path w="0" h="1317069">
+                  <a:moveTo>
+                    <a:pt x="0" y="1317069"/>
+                  </a:moveTo>
+                  <a:lnTo>
+                    <a:pt x="0" y="0"/>
+                  </a:lnTo>
+                  <a:lnTo>
+                    <a:pt x="0" y="0"/>
+                  </a:lnTo>
+                </a:path>
+              </a:pathLst>
+            </a:custGeom>
+            <a:ln w="13550" cap="flat">
+              <a:solidFill>
+                <a:srgbClr val="EBEBEB">
+                  <a:alpha val="100000"/>
+                </a:srgbClr>
+              </a:solidFill>
+              <a:prstDash val="solid"/>
+              <a:round/>
+            </a:ln>
+          </p:spPr>
+          <p:txBody>
+            <a:bodyPr/>
+            <a:lstStyle/>
+            <a:p/>
+          </p:txBody>
+        </p:sp>
+        <p:sp>
+          <p:nvSpPr>
+            <p:cNvPr id="63" name="pl63"/>
+            <p:cNvSpPr/>
+            <p:nvPr/>
+          </p:nvSpPr>
+          <p:spPr>
+            <a:xfrm>
+              <a:off x="5422713" y="4336484"/>
+              <a:ext cx="0" cy="1317069"/>
+            </a:xfrm>
+            <a:custGeom>
+              <a:avLst/>
+              <a:pathLst>
+                <a:path w="0" h="1317069">
+                  <a:moveTo>
+                    <a:pt x="0" y="1317069"/>
+                  </a:moveTo>
+                  <a:lnTo>
+                    <a:pt x="0" y="0"/>
+                  </a:lnTo>
+                  <a:lnTo>
+                    <a:pt x="0" y="0"/>
+                  </a:lnTo>
+                </a:path>
+              </a:pathLst>
+            </a:custGeom>
+            <a:ln w="13550" cap="flat">
+              <a:solidFill>
+                <a:srgbClr val="EBEBEB">
+                  <a:alpha val="100000"/>
+                </a:srgbClr>
+              </a:solidFill>
+              <a:prstDash val="solid"/>
+              <a:round/>
+            </a:ln>
+          </p:spPr>
+          <p:txBody>
+            <a:bodyPr/>
+            <a:lstStyle/>
+            <a:p/>
+          </p:txBody>
+        </p:sp>
+        <p:sp>
+          <p:nvSpPr>
+            <p:cNvPr id="64" name="pl64"/>
+            <p:cNvSpPr/>
+            <p:nvPr/>
+          </p:nvSpPr>
+          <p:spPr>
+            <a:xfrm>
+              <a:off x="6229878" y="4336484"/>
+              <a:ext cx="0" cy="1317069"/>
+            </a:xfrm>
+            <a:custGeom>
+              <a:avLst/>
+              <a:pathLst>
+                <a:path w="0" h="1317069">
+                  <a:moveTo>
+                    <a:pt x="0" y="1317069"/>
+                  </a:moveTo>
+                  <a:lnTo>
+                    <a:pt x="0" y="0"/>
+                  </a:lnTo>
+                  <a:lnTo>
+                    <a:pt x="0" y="0"/>
+                  </a:lnTo>
+                </a:path>
+              </a:pathLst>
+            </a:custGeom>
+            <a:ln w="13550" cap="flat">
+              <a:solidFill>
+                <a:srgbClr val="EBEBEB">
+                  <a:alpha val="100000"/>
+                </a:srgbClr>
+              </a:solidFill>
+              <a:prstDash val="solid"/>
+              <a:round/>
+            </a:ln>
+          </p:spPr>
+          <p:txBody>
+            <a:bodyPr/>
+            <a:lstStyle/>
+            <a:p/>
+          </p:txBody>
+        </p:sp>
+        <p:sp>
+          <p:nvSpPr>
+            <p:cNvPr id="65" name="pl65"/>
+            <p:cNvSpPr/>
+            <p:nvPr/>
+          </p:nvSpPr>
+          <p:spPr>
+            <a:xfrm>
+              <a:off x="7037044" y="4336484"/>
+              <a:ext cx="0" cy="1317069"/>
+            </a:xfrm>
+            <a:custGeom>
+              <a:avLst/>
+              <a:pathLst>
+                <a:path w="0" h="1317069">
+                  <a:moveTo>
+                    <a:pt x="0" y="1317069"/>
+                  </a:moveTo>
+                  <a:lnTo>
+                    <a:pt x="0" y="0"/>
+                  </a:lnTo>
+                  <a:lnTo>
+                    <a:pt x="0" y="0"/>
+                  </a:lnTo>
+                </a:path>
+              </a:pathLst>
+            </a:custGeom>
+            <a:ln w="13550" cap="flat">
+              <a:solidFill>
+                <a:srgbClr val="EBEBEB">
+                  <a:alpha val="100000"/>
+                </a:srgbClr>
+              </a:solidFill>
+              <a:prstDash val="solid"/>
+              <a:round/>
+            </a:ln>
+          </p:spPr>
+          <p:txBody>
+            <a:bodyPr/>
+            <a:lstStyle/>
+            <a:p/>
+          </p:txBody>
+        </p:sp>
+        <p:sp>
+          <p:nvSpPr>
+            <p:cNvPr id="66" name="pl66"/>
+            <p:cNvSpPr/>
+            <p:nvPr/>
+          </p:nvSpPr>
+          <p:spPr>
+            <a:xfrm>
+              <a:off x="7844209" y="4336484"/>
+              <a:ext cx="0" cy="1317069"/>
+            </a:xfrm>
+            <a:custGeom>
+              <a:avLst/>
+              <a:pathLst>
+                <a:path w="0" h="1317069">
+                  <a:moveTo>
+                    <a:pt x="0" y="1317069"/>
+                  </a:moveTo>
+                  <a:lnTo>
+                    <a:pt x="0" y="0"/>
+                  </a:lnTo>
+                  <a:lnTo>
+                    <a:pt x="0" y="0"/>
+                  </a:lnTo>
+                </a:path>
+              </a:pathLst>
+            </a:custGeom>
+            <a:ln w="13550" cap="flat">
+              <a:solidFill>
+                <a:srgbClr val="EBEBEB">
+                  <a:alpha val="100000"/>
+                </a:srgbClr>
+              </a:solidFill>
+              <a:prstDash val="solid"/>
+              <a:round/>
+            </a:ln>
+          </p:spPr>
+          <p:txBody>
+            <a:bodyPr/>
+            <a:lstStyle/>
+            <a:p/>
+          </p:txBody>
+        </p:sp>
+        <p:sp>
+          <p:nvSpPr>
+            <p:cNvPr id="67" name="pg67"/>
+            <p:cNvSpPr/>
+            <p:nvPr/>
+          </p:nvSpPr>
+          <p:spPr>
+            <a:xfrm>
+              <a:off x="1235312" y="4336484"/>
+              <a:ext cx="6964104" cy="1226340"/>
+            </a:xfrm>
+            <a:custGeom>
+              <a:avLst/>
+              <a:pathLst>
+                <a:path w="6964104" h="1226340">
+                  <a:moveTo>
+                    <a:pt x="884070" y="0"/>
+                  </a:moveTo>
+                  <a:lnTo>
+                    <a:pt x="914478" y="23371"/>
+                  </a:lnTo>
+                  <a:lnTo>
+                    <a:pt x="984822" y="75169"/>
+                  </a:lnTo>
+                  <a:lnTo>
+                    <a:pt x="1055167" y="124792"/>
+                  </a:lnTo>
+                  <a:lnTo>
+                    <a:pt x="1125511" y="172332"/>
+                  </a:lnTo>
+                  <a:lnTo>
+                    <a:pt x="1195856" y="217876"/>
+                  </a:lnTo>
+                  <a:lnTo>
+                    <a:pt x="1266200" y="261508"/>
+                  </a:lnTo>
+                  <a:lnTo>
+                    <a:pt x="1336545" y="303309"/>
+                  </a:lnTo>
+                  <a:lnTo>
+                    <a:pt x="1406889" y="343354"/>
+                  </a:lnTo>
+                  <a:lnTo>
+                    <a:pt x="1477234" y="381719"/>
+                  </a:lnTo>
+                  <a:lnTo>
+                    <a:pt x="1547578" y="418473"/>
+                  </a:lnTo>
+                  <a:lnTo>
+                    <a:pt x="1617923" y="453684"/>
+                  </a:lnTo>
+                  <a:lnTo>
+                    <a:pt x="1688267" y="487416"/>
+                  </a:lnTo>
+                  <a:lnTo>
+                    <a:pt x="1758612" y="519733"/>
+                  </a:lnTo>
+                  <a:lnTo>
+                    <a:pt x="1828956" y="550693"/>
+                  </a:lnTo>
+                  <a:lnTo>
+                    <a:pt x="1899301" y="580353"/>
+                  </a:lnTo>
+                  <a:lnTo>
+                    <a:pt x="1969645" y="608768"/>
+                  </a:lnTo>
+                  <a:lnTo>
+                    <a:pt x="2039990" y="635990"/>
+                  </a:lnTo>
+                  <a:lnTo>
+                    <a:pt x="2110334" y="662069"/>
+                  </a:lnTo>
+                  <a:lnTo>
+                    <a:pt x="2180679" y="687053"/>
+                  </a:lnTo>
+                  <a:lnTo>
+                    <a:pt x="2251023" y="710989"/>
+                  </a:lnTo>
+                  <a:lnTo>
+                    <a:pt x="2321368" y="733920"/>
+                  </a:lnTo>
+                  <a:lnTo>
+                    <a:pt x="2391712" y="755888"/>
+                  </a:lnTo>
+                  <a:lnTo>
+                    <a:pt x="2462057" y="776933"/>
+                  </a:lnTo>
+                  <a:lnTo>
+                    <a:pt x="2532401" y="797096"/>
+                  </a:lnTo>
+                  <a:lnTo>
+                    <a:pt x="2602746" y="816411"/>
+                  </a:lnTo>
+                  <a:lnTo>
+                    <a:pt x="2673090" y="834916"/>
+                  </a:lnTo>
+                  <a:lnTo>
+                    <a:pt x="2743435" y="852644"/>
+                  </a:lnTo>
+                  <a:lnTo>
+                    <a:pt x="2813779" y="869628"/>
+                  </a:lnTo>
+                  <a:lnTo>
+                    <a:pt x="2884124" y="885899"/>
+                  </a:lnTo>
+                  <a:lnTo>
+                    <a:pt x="2954468" y="901487"/>
+                  </a:lnTo>
+                  <a:lnTo>
+                    <a:pt x="3024813" y="916420"/>
+                  </a:lnTo>
+                  <a:lnTo>
+                    <a:pt x="3095157" y="930727"/>
+                  </a:lnTo>
+                  <a:lnTo>
+                    <a:pt x="3165502" y="944432"/>
+                  </a:lnTo>
+                  <a:lnTo>
+                    <a:pt x="3235846" y="957563"/>
+                  </a:lnTo>
+                  <a:lnTo>
+                    <a:pt x="3306191" y="958383"/>
+                  </a:lnTo>
+                  <a:lnTo>
+                    <a:pt x="3376535" y="958910"/>
+                  </a:lnTo>
+                  <a:lnTo>
+                    <a:pt x="3446880" y="959436"/>
+                  </a:lnTo>
+                  <a:lnTo>
+                    <a:pt x="3517224" y="959962"/>
+                  </a:lnTo>
+                  <a:lnTo>
+                    <a:pt x="3587569" y="960486"/>
+                  </a:lnTo>
+                  <a:lnTo>
+                    <a:pt x="3657913" y="961009"/>
+                  </a:lnTo>
+                  <a:lnTo>
+                    <a:pt x="3728257" y="961532"/>
+                  </a:lnTo>
+                  <a:lnTo>
+                    <a:pt x="3798602" y="962053"/>
+                  </a:lnTo>
+                  <a:lnTo>
+                    <a:pt x="3868946" y="962574"/>
+                  </a:lnTo>
+                  <a:lnTo>
+                    <a:pt x="3939291" y="963093"/>
+                  </a:lnTo>
+                  <a:lnTo>
+                    <a:pt x="4009635" y="963612"/>
+                  </a:lnTo>
+                  <a:lnTo>
+                    <a:pt x="4079980" y="964130"/>
+                  </a:lnTo>
+                  <a:lnTo>
+                    <a:pt x="4150324" y="964647"/>
+                  </a:lnTo>
+                  <a:lnTo>
+                    <a:pt x="4220669" y="965163"/>
+                  </a:lnTo>
+                  <a:lnTo>
+                    <a:pt x="4291013" y="965678"/>
+                  </a:lnTo>
+                  <a:lnTo>
+                    <a:pt x="4361358" y="966192"/>
+                  </a:lnTo>
+                  <a:lnTo>
+                    <a:pt x="4431702" y="966705"/>
+                  </a:lnTo>
+                  <a:lnTo>
+                    <a:pt x="4502047" y="967217"/>
+                  </a:lnTo>
+                  <a:lnTo>
+                    <a:pt x="4572391" y="967729"/>
+                  </a:lnTo>
+                  <a:lnTo>
+                    <a:pt x="4642736" y="968239"/>
+                  </a:lnTo>
+                  <a:lnTo>
+                    <a:pt x="4713080" y="968749"/>
+                  </a:lnTo>
+                  <a:lnTo>
+                    <a:pt x="4783425" y="969258"/>
+                  </a:lnTo>
+                  <a:lnTo>
+                    <a:pt x="4853769" y="969766"/>
+                  </a:lnTo>
+                  <a:lnTo>
+                    <a:pt x="4924114" y="970273"/>
+                  </a:lnTo>
+                  <a:lnTo>
+                    <a:pt x="4994458" y="970779"/>
+                  </a:lnTo>
+                  <a:lnTo>
+                    <a:pt x="5064803" y="971284"/>
+                  </a:lnTo>
+                  <a:lnTo>
+                    <a:pt x="5135147" y="971788"/>
+                  </a:lnTo>
+                  <a:lnTo>
+                    <a:pt x="5205492" y="972292"/>
+                  </a:lnTo>
+                  <a:lnTo>
+                    <a:pt x="5275836" y="972794"/>
+                  </a:lnTo>
+                  <a:lnTo>
+                    <a:pt x="5346181" y="973296"/>
+                  </a:lnTo>
+                  <a:lnTo>
+                    <a:pt x="5416525" y="973796"/>
+                  </a:lnTo>
+                  <a:lnTo>
+                    <a:pt x="5486870" y="974296"/>
+                  </a:lnTo>
+                  <a:lnTo>
+                    <a:pt x="5557214" y="974795"/>
+                  </a:lnTo>
+                  <a:lnTo>
+                    <a:pt x="5627559" y="975293"/>
+                  </a:lnTo>
+                  <a:lnTo>
+                    <a:pt x="5697903" y="975790"/>
+                  </a:lnTo>
+                  <a:lnTo>
+                    <a:pt x="5768248" y="976287"/>
+                  </a:lnTo>
+                  <a:lnTo>
+                    <a:pt x="5838592" y="976782"/>
+                  </a:lnTo>
+                  <a:lnTo>
+                    <a:pt x="5908937" y="977277"/>
+                  </a:lnTo>
+                  <a:lnTo>
+                    <a:pt x="5979281" y="977770"/>
+                  </a:lnTo>
+                  <a:lnTo>
+                    <a:pt x="6049626" y="978263"/>
+                  </a:lnTo>
+                  <a:lnTo>
+                    <a:pt x="6119970" y="978755"/>
+                  </a:lnTo>
+                  <a:lnTo>
+                    <a:pt x="6190315" y="979246"/>
+                  </a:lnTo>
+                  <a:lnTo>
+                    <a:pt x="6260659" y="979737"/>
+                  </a:lnTo>
+                  <a:lnTo>
+                    <a:pt x="6331004" y="980226"/>
+                  </a:lnTo>
+                  <a:lnTo>
+                    <a:pt x="6401348" y="980714"/>
+                  </a:lnTo>
+                  <a:lnTo>
+                    <a:pt x="6471693" y="981202"/>
+                  </a:lnTo>
+                  <a:lnTo>
+                    <a:pt x="6542037" y="981689"/>
+                  </a:lnTo>
+                  <a:lnTo>
+                    <a:pt x="6612382" y="982175"/>
+                  </a:lnTo>
+                  <a:lnTo>
+                    <a:pt x="6682726" y="982660"/>
+                  </a:lnTo>
+                  <a:lnTo>
+                    <a:pt x="6753071" y="983144"/>
+                  </a:lnTo>
+                  <a:lnTo>
+                    <a:pt x="6823415" y="983627"/>
+                  </a:lnTo>
+                  <a:lnTo>
+                    <a:pt x="6893760" y="984110"/>
+                  </a:lnTo>
+                  <a:lnTo>
+                    <a:pt x="6964104" y="984592"/>
+                  </a:lnTo>
+                  <a:lnTo>
+                    <a:pt x="6964104" y="1226340"/>
+                  </a:lnTo>
+                  <a:lnTo>
+                    <a:pt x="6893760" y="1224988"/>
+                  </a:lnTo>
+                  <a:lnTo>
+                    <a:pt x="6823415" y="1223576"/>
+                  </a:lnTo>
+                  <a:lnTo>
+                    <a:pt x="6753071" y="1222102"/>
+                  </a:lnTo>
+                  <a:lnTo>
+                    <a:pt x="6682726" y="1220564"/>
+                  </a:lnTo>
+                  <a:lnTo>
+                    <a:pt x="6612382" y="1218959"/>
+                  </a:lnTo>
+                  <a:lnTo>
+                    <a:pt x="6542037" y="1217283"/>
+                  </a:lnTo>
+                  <a:lnTo>
+                    <a:pt x="6471693" y="1215534"/>
+                  </a:lnTo>
+                  <a:lnTo>
+                    <a:pt x="6401348" y="1213708"/>
+                  </a:lnTo>
+                  <a:lnTo>
+                    <a:pt x="6331004" y="1211802"/>
+                  </a:lnTo>
+                  <a:lnTo>
+                    <a:pt x="6260659" y="1209812"/>
+                  </a:lnTo>
+                  <a:lnTo>
+                    <a:pt x="6190315" y="1207736"/>
+                  </a:lnTo>
+                  <a:lnTo>
+                    <a:pt x="6119970" y="1205568"/>
+                  </a:lnTo>
+                  <a:lnTo>
+                    <a:pt x="6049626" y="1203305"/>
+                  </a:lnTo>
+                  <a:lnTo>
+                    <a:pt x="5979281" y="1200944"/>
+                  </a:lnTo>
+                  <a:lnTo>
+                    <a:pt x="5908937" y="1198478"/>
+                  </a:lnTo>
+                  <a:lnTo>
+                    <a:pt x="5838592" y="1195905"/>
+                  </a:lnTo>
+                  <a:lnTo>
+                    <a:pt x="5768248" y="1193219"/>
+                  </a:lnTo>
+                  <a:lnTo>
+                    <a:pt x="5697903" y="1190415"/>
+                  </a:lnTo>
+                  <a:lnTo>
+                    <a:pt x="5627559" y="1187489"/>
+                  </a:lnTo>
+                  <a:lnTo>
+                    <a:pt x="5557214" y="1184434"/>
+                  </a:lnTo>
+                  <a:lnTo>
+                    <a:pt x="5486870" y="1181245"/>
+                  </a:lnTo>
+                  <a:lnTo>
+                    <a:pt x="5416525" y="1177916"/>
+                  </a:lnTo>
+                  <a:lnTo>
+                    <a:pt x="5346181" y="1174442"/>
+                  </a:lnTo>
+                  <a:lnTo>
+                    <a:pt x="5275836" y="1170815"/>
+                  </a:lnTo>
+                  <a:lnTo>
+                    <a:pt x="5205492" y="1167030"/>
+                  </a:lnTo>
+                  <a:lnTo>
+                    <a:pt x="5135147" y="1163079"/>
+                  </a:lnTo>
+                  <a:lnTo>
+                    <a:pt x="5064803" y="1158954"/>
+                  </a:lnTo>
+                  <a:lnTo>
+                    <a:pt x="4994458" y="1154649"/>
+                  </a:lnTo>
+                  <a:lnTo>
+                    <a:pt x="4924114" y="1150155"/>
+                  </a:lnTo>
+                  <a:lnTo>
+                    <a:pt x="4853769" y="1145464"/>
+                  </a:lnTo>
+                  <a:lnTo>
+                    <a:pt x="4783425" y="1140567"/>
+                  </a:lnTo>
+                  <a:lnTo>
+                    <a:pt x="4713080" y="1135456"/>
+                  </a:lnTo>
+                  <a:lnTo>
+                    <a:pt x="4642736" y="1130121"/>
+                  </a:lnTo>
+                  <a:lnTo>
+                    <a:pt x="4572391" y="1124553"/>
+                  </a:lnTo>
+                  <a:lnTo>
+                    <a:pt x="4502047" y="1118740"/>
+                  </a:lnTo>
+                  <a:lnTo>
+                    <a:pt x="4431702" y="1112672"/>
+                  </a:lnTo>
+                  <a:lnTo>
+                    <a:pt x="4361358" y="1106339"/>
+                  </a:lnTo>
+                  <a:lnTo>
+                    <a:pt x="4291013" y="1099728"/>
+                  </a:lnTo>
+                  <a:lnTo>
+                    <a:pt x="4220669" y="1092827"/>
+                  </a:lnTo>
+                  <a:lnTo>
+                    <a:pt x="4150324" y="1085624"/>
+                  </a:lnTo>
+                  <a:lnTo>
+                    <a:pt x="4079980" y="1078106"/>
+                  </a:lnTo>
+                  <a:lnTo>
+                    <a:pt x="4009635" y="1070257"/>
+                  </a:lnTo>
+                  <a:lnTo>
+                    <a:pt x="3939291" y="1062065"/>
+                  </a:lnTo>
+                  <a:lnTo>
+                    <a:pt x="3868946" y="1053514"/>
+                  </a:lnTo>
+                  <a:lnTo>
+                    <a:pt x="3798602" y="1044588"/>
+                  </a:lnTo>
+                  <a:lnTo>
+                    <a:pt x="3728257" y="1035272"/>
+                  </a:lnTo>
+                  <a:lnTo>
+                    <a:pt x="3657913" y="1025546"/>
+                  </a:lnTo>
+                  <a:lnTo>
+                    <a:pt x="3587569" y="1015395"/>
+                  </a:lnTo>
+                  <a:lnTo>
+                    <a:pt x="3517224" y="1004799"/>
+                  </a:lnTo>
+                  <a:lnTo>
+                    <a:pt x="3446880" y="993738"/>
+                  </a:lnTo>
+                  <a:lnTo>
+                    <a:pt x="3376535" y="982193"/>
+                  </a:lnTo>
+                  <a:lnTo>
+                    <a:pt x="3306191" y="970142"/>
+                  </a:lnTo>
+                  <a:lnTo>
+                    <a:pt x="3235846" y="957855"/>
+                  </a:lnTo>
+                  <a:lnTo>
+                    <a:pt x="3165502" y="957326"/>
+                  </a:lnTo>
+                  <a:lnTo>
+                    <a:pt x="3095157" y="956797"/>
+                  </a:lnTo>
+                  <a:lnTo>
+                    <a:pt x="3024813" y="956266"/>
+                  </a:lnTo>
+                  <a:lnTo>
+                    <a:pt x="2954468" y="955734"/>
+                  </a:lnTo>
+                  <a:lnTo>
+                    <a:pt x="2884124" y="955202"/>
+                  </a:lnTo>
+                  <a:lnTo>
+                    <a:pt x="2813779" y="954668"/>
+                  </a:lnTo>
+                  <a:lnTo>
+                    <a:pt x="2743435" y="954133"/>
+                  </a:lnTo>
+                  <a:lnTo>
+                    <a:pt x="2673090" y="953598"/>
+                  </a:lnTo>
+                  <a:lnTo>
+                    <a:pt x="2602746" y="953062"/>
+                  </a:lnTo>
+                  <a:lnTo>
+                    <a:pt x="2532401" y="952524"/>
+                  </a:lnTo>
+                  <a:lnTo>
+                    <a:pt x="2462057" y="951986"/>
+                  </a:lnTo>
+                  <a:lnTo>
+                    <a:pt x="2391712" y="951447"/>
+                  </a:lnTo>
+                  <a:lnTo>
+                    <a:pt x="2321368" y="950906"/>
+                  </a:lnTo>
+                  <a:lnTo>
+                    <a:pt x="2251023" y="950365"/>
+                  </a:lnTo>
+                  <a:lnTo>
+                    <a:pt x="2180679" y="949823"/>
+                  </a:lnTo>
+                  <a:lnTo>
+                    <a:pt x="2110334" y="949280"/>
+                  </a:lnTo>
+                  <a:lnTo>
+                    <a:pt x="2039990" y="948736"/>
+                  </a:lnTo>
+                  <a:lnTo>
+                    <a:pt x="1969645" y="948191"/>
+                  </a:lnTo>
+                  <a:lnTo>
+                    <a:pt x="1899301" y="947645"/>
+                  </a:lnTo>
+                  <a:lnTo>
+                    <a:pt x="1828956" y="947098"/>
+                  </a:lnTo>
+                  <a:lnTo>
+                    <a:pt x="1758612" y="946550"/>
+                  </a:lnTo>
+                  <a:lnTo>
+                    <a:pt x="1688267" y="946001"/>
+                  </a:lnTo>
+                  <a:lnTo>
+                    <a:pt x="1617923" y="945452"/>
+                  </a:lnTo>
+                  <a:lnTo>
+                    <a:pt x="1547578" y="944901"/>
+                  </a:lnTo>
+                  <a:lnTo>
+                    <a:pt x="1477234" y="944349"/>
+                  </a:lnTo>
+                  <a:lnTo>
+                    <a:pt x="1406889" y="943796"/>
+                  </a:lnTo>
+                  <a:lnTo>
+                    <a:pt x="1336545" y="943242"/>
+                  </a:lnTo>
+                  <a:lnTo>
+                    <a:pt x="1266200" y="942688"/>
+                  </a:lnTo>
+                  <a:lnTo>
+                    <a:pt x="1195856" y="942132"/>
+                  </a:lnTo>
+                  <a:lnTo>
+                    <a:pt x="1125511" y="941575"/>
+                  </a:lnTo>
+                  <a:lnTo>
+                    <a:pt x="1055167" y="941018"/>
+                  </a:lnTo>
+                  <a:lnTo>
+                    <a:pt x="984822" y="940459"/>
+                  </a:lnTo>
+                  <a:lnTo>
+                    <a:pt x="914478" y="939899"/>
+                  </a:lnTo>
+                  <a:lnTo>
+                    <a:pt x="844133" y="939339"/>
+                  </a:lnTo>
+                  <a:lnTo>
+                    <a:pt x="773789" y="938777"/>
+                  </a:lnTo>
+                  <a:lnTo>
+                    <a:pt x="703444" y="938215"/>
+                  </a:lnTo>
+                  <a:lnTo>
+                    <a:pt x="633100" y="937651"/>
+                  </a:lnTo>
+                  <a:lnTo>
+                    <a:pt x="562755" y="937086"/>
+                  </a:lnTo>
+                  <a:lnTo>
+                    <a:pt x="492411" y="936521"/>
+                  </a:lnTo>
+                  <a:lnTo>
+                    <a:pt x="422066" y="935954"/>
+                  </a:lnTo>
+                  <a:lnTo>
+                    <a:pt x="351722" y="935387"/>
+                  </a:lnTo>
+                  <a:lnTo>
+                    <a:pt x="281377" y="934818"/>
+                  </a:lnTo>
+                  <a:lnTo>
+                    <a:pt x="211033" y="934249"/>
+                  </a:lnTo>
+                  <a:lnTo>
+                    <a:pt x="140688" y="933678"/>
+                  </a:lnTo>
+                  <a:lnTo>
+                    <a:pt x="70344" y="933106"/>
+                  </a:lnTo>
+                  <a:lnTo>
+                    <a:pt x="0" y="932534"/>
+                  </a:lnTo>
+                  <a:close/>
+                </a:path>
+              </a:pathLst>
+            </a:custGeom>
+            <a:solidFill>
+              <a:srgbClr val="FF8C00">
+                <a:alpha val="20000"/>
+              </a:srgbClr>
+            </a:solidFill>
+          </p:spPr>
+          <p:txBody>
+            <a:bodyPr/>
+            <a:lstStyle/>
+            <a:p/>
+          </p:txBody>
+        </p:sp>
+        <p:sp>
+          <p:nvSpPr>
+            <p:cNvPr id="68" name="pl68"/>
+            <p:cNvSpPr/>
+            <p:nvPr/>
+          </p:nvSpPr>
+          <p:spPr>
+            <a:xfrm>
+              <a:off x="2119382" y="4336484"/>
+              <a:ext cx="6080034" cy="984592"/>
+            </a:xfrm>
+            <a:custGeom>
+              <a:avLst/>
+              <a:pathLst>
+                <a:path w="6080034" h="984592">
+                  <a:moveTo>
+                    <a:pt x="0" y="0"/>
+                  </a:moveTo>
+                  <a:lnTo>
+                    <a:pt x="30407" y="23371"/>
+                  </a:lnTo>
+                  <a:lnTo>
+                    <a:pt x="100752" y="75169"/>
+                  </a:lnTo>
+                  <a:lnTo>
+                    <a:pt x="171096" y="124792"/>
+                  </a:lnTo>
+                  <a:lnTo>
+                    <a:pt x="241441" y="172332"/>
+                  </a:lnTo>
+                  <a:lnTo>
+                    <a:pt x="311785" y="217876"/>
+                  </a:lnTo>
+                  <a:lnTo>
+                    <a:pt x="382130" y="261508"/>
+                  </a:lnTo>
+                  <a:lnTo>
+                    <a:pt x="452474" y="303309"/>
+                  </a:lnTo>
+                  <a:lnTo>
+                    <a:pt x="522819" y="343354"/>
+                  </a:lnTo>
+                  <a:lnTo>
+                    <a:pt x="593163" y="381719"/>
+                  </a:lnTo>
+                  <a:lnTo>
+                    <a:pt x="663508" y="418473"/>
+                  </a:lnTo>
+                  <a:lnTo>
+                    <a:pt x="733852" y="453684"/>
+                  </a:lnTo>
+                  <a:lnTo>
+                    <a:pt x="804197" y="487416"/>
+                  </a:lnTo>
+                  <a:lnTo>
+                    <a:pt x="874541" y="519733"/>
+                  </a:lnTo>
+                  <a:lnTo>
+                    <a:pt x="944886" y="550693"/>
+                  </a:lnTo>
+                  <a:lnTo>
+                    <a:pt x="1015230" y="580353"/>
+                  </a:lnTo>
+                  <a:lnTo>
+                    <a:pt x="1085575" y="608768"/>
+                  </a:lnTo>
+                  <a:lnTo>
+                    <a:pt x="1155919" y="635990"/>
+                  </a:lnTo>
+                  <a:lnTo>
+                    <a:pt x="1226264" y="662069"/>
+                  </a:lnTo>
+                  <a:lnTo>
+                    <a:pt x="1296608" y="687053"/>
+                  </a:lnTo>
+                  <a:lnTo>
+                    <a:pt x="1366953" y="710989"/>
+                  </a:lnTo>
+                  <a:lnTo>
+                    <a:pt x="1437297" y="733920"/>
+                  </a:lnTo>
+                  <a:lnTo>
+                    <a:pt x="1507642" y="755888"/>
+                  </a:lnTo>
+                  <a:lnTo>
+                    <a:pt x="1577986" y="776933"/>
+                  </a:lnTo>
+                  <a:lnTo>
+                    <a:pt x="1648331" y="797096"/>
+                  </a:lnTo>
+                  <a:lnTo>
+                    <a:pt x="1718675" y="816411"/>
+                  </a:lnTo>
+                  <a:lnTo>
+                    <a:pt x="1789020" y="834916"/>
+                  </a:lnTo>
+                  <a:lnTo>
+                    <a:pt x="1859364" y="852644"/>
+                  </a:lnTo>
+                  <a:lnTo>
+                    <a:pt x="1929709" y="869628"/>
+                  </a:lnTo>
+                  <a:lnTo>
+                    <a:pt x="2000053" y="885899"/>
+                  </a:lnTo>
+                  <a:lnTo>
+                    <a:pt x="2070398" y="901487"/>
+                  </a:lnTo>
+                  <a:lnTo>
+                    <a:pt x="2140742" y="916420"/>
+                  </a:lnTo>
+                  <a:lnTo>
+                    <a:pt x="2211087" y="930727"/>
+                  </a:lnTo>
+                  <a:lnTo>
+                    <a:pt x="2281431" y="944432"/>
+                  </a:lnTo>
+                  <a:lnTo>
+                    <a:pt x="2351776" y="957563"/>
+                  </a:lnTo>
+                  <a:lnTo>
+                    <a:pt x="2422120" y="958383"/>
+                  </a:lnTo>
+                  <a:lnTo>
+                    <a:pt x="2492465" y="958910"/>
+                  </a:lnTo>
+                  <a:lnTo>
+                    <a:pt x="2562809" y="959436"/>
+                  </a:lnTo>
+                  <a:lnTo>
+                    <a:pt x="2633154" y="959962"/>
+                  </a:lnTo>
+                  <a:lnTo>
+                    <a:pt x="2703498" y="960486"/>
+                  </a:lnTo>
+                  <a:lnTo>
+                    <a:pt x="2773843" y="961009"/>
+                  </a:lnTo>
+                  <a:lnTo>
+                    <a:pt x="2844187" y="961532"/>
+                  </a:lnTo>
+                  <a:lnTo>
+                    <a:pt x="2914532" y="962053"/>
+                  </a:lnTo>
+                  <a:lnTo>
+                    <a:pt x="2984876" y="962574"/>
+                  </a:lnTo>
+                  <a:lnTo>
+                    <a:pt x="3055220" y="963093"/>
+                  </a:lnTo>
+                  <a:lnTo>
+                    <a:pt x="3125565" y="963612"/>
+                  </a:lnTo>
+                  <a:lnTo>
+                    <a:pt x="3195909" y="964130"/>
+                  </a:lnTo>
+                  <a:lnTo>
+                    <a:pt x="3266254" y="964647"/>
+                  </a:lnTo>
+                  <a:lnTo>
+                    <a:pt x="3336598" y="965163"/>
+                  </a:lnTo>
+                  <a:lnTo>
+                    <a:pt x="3406943" y="965678"/>
+                  </a:lnTo>
+                  <a:lnTo>
+                    <a:pt x="3477287" y="966192"/>
+                  </a:lnTo>
+                  <a:lnTo>
+                    <a:pt x="3547632" y="966705"/>
+                  </a:lnTo>
+                  <a:lnTo>
+                    <a:pt x="3617976" y="967217"/>
+                  </a:lnTo>
+                  <a:lnTo>
+                    <a:pt x="3688321" y="967729"/>
+                  </a:lnTo>
+                  <a:lnTo>
+                    <a:pt x="3758665" y="968239"/>
+                  </a:lnTo>
+                  <a:lnTo>
+                    <a:pt x="3829010" y="968749"/>
+                  </a:lnTo>
+                  <a:lnTo>
+                    <a:pt x="3899354" y="969258"/>
+                  </a:lnTo>
+                  <a:lnTo>
+                    <a:pt x="3969699" y="969766"/>
+                  </a:lnTo>
+                  <a:lnTo>
+                    <a:pt x="4040043" y="970273"/>
+                  </a:lnTo>
+                  <a:lnTo>
+                    <a:pt x="4110388" y="970779"/>
+                  </a:lnTo>
+                  <a:lnTo>
+                    <a:pt x="4180732" y="971284"/>
+                  </a:lnTo>
+                  <a:lnTo>
+                    <a:pt x="4251077" y="971788"/>
+                  </a:lnTo>
+                  <a:lnTo>
+                    <a:pt x="4321421" y="972292"/>
+                  </a:lnTo>
+                  <a:lnTo>
+                    <a:pt x="4391766" y="972794"/>
+                  </a:lnTo>
+                  <a:lnTo>
+                    <a:pt x="4462110" y="973296"/>
+                  </a:lnTo>
+                  <a:lnTo>
+                    <a:pt x="4532455" y="973796"/>
+                  </a:lnTo>
+                  <a:lnTo>
+                    <a:pt x="4602799" y="974296"/>
+                  </a:lnTo>
+                  <a:lnTo>
+                    <a:pt x="4673144" y="974795"/>
+                  </a:lnTo>
+                  <a:lnTo>
+                    <a:pt x="4743488" y="975293"/>
+                  </a:lnTo>
+                  <a:lnTo>
+                    <a:pt x="4813833" y="975790"/>
+                  </a:lnTo>
+                  <a:lnTo>
+                    <a:pt x="4884177" y="976287"/>
+                  </a:lnTo>
+                  <a:lnTo>
+                    <a:pt x="4954522" y="976782"/>
+                  </a:lnTo>
+                  <a:lnTo>
+                    <a:pt x="5024866" y="977277"/>
+                  </a:lnTo>
+                  <a:lnTo>
+                    <a:pt x="5095211" y="977770"/>
+                  </a:lnTo>
+                  <a:lnTo>
+                    <a:pt x="5165555" y="978263"/>
+                  </a:lnTo>
+                  <a:lnTo>
+                    <a:pt x="5235900" y="978755"/>
+                  </a:lnTo>
+                  <a:lnTo>
+                    <a:pt x="5306244" y="979246"/>
+                  </a:lnTo>
+                  <a:lnTo>
+                    <a:pt x="5376589" y="979737"/>
+                  </a:lnTo>
+                  <a:lnTo>
+                    <a:pt x="5446933" y="980226"/>
+                  </a:lnTo>
+                  <a:lnTo>
+                    <a:pt x="5517278" y="980714"/>
+                  </a:lnTo>
+                  <a:lnTo>
+                    <a:pt x="5587622" y="981202"/>
+                  </a:lnTo>
+                  <a:lnTo>
+                    <a:pt x="5657967" y="981689"/>
+                  </a:lnTo>
+                  <a:lnTo>
+                    <a:pt x="5728311" y="982175"/>
+                  </a:lnTo>
+                  <a:lnTo>
+                    <a:pt x="5798656" y="982660"/>
+                  </a:lnTo>
+                  <a:lnTo>
+                    <a:pt x="5869000" y="983144"/>
+                  </a:lnTo>
+                  <a:lnTo>
+                    <a:pt x="5939345" y="983627"/>
+                  </a:lnTo>
+                  <a:lnTo>
+                    <a:pt x="6009689" y="984110"/>
+                  </a:lnTo>
+                  <a:lnTo>
+                    <a:pt x="6080034" y="984592"/>
+                  </a:lnTo>
+                </a:path>
+              </a:pathLst>
+            </a:custGeom>
+          </p:spPr>
+          <p:txBody>
+            <a:bodyPr/>
+            <a:lstStyle/>
+            <a:p/>
+          </p:txBody>
+        </p:sp>
+        <p:sp>
+          <p:nvSpPr>
+            <p:cNvPr id="69" name="pl69"/>
+            <p:cNvSpPr/>
+            <p:nvPr/>
+          </p:nvSpPr>
+          <p:spPr>
+            <a:xfrm>
+              <a:off x="1235312" y="5269018"/>
+              <a:ext cx="6964104" cy="293806"/>
+            </a:xfrm>
+            <a:custGeom>
+              <a:avLst/>
+              <a:pathLst>
+                <a:path w="6964104" h="293806">
+                  <a:moveTo>
+                    <a:pt x="6964104" y="293806"/>
+                  </a:moveTo>
+                  <a:lnTo>
+                    <a:pt x="6893760" y="292453"/>
+                  </a:lnTo>
+                  <a:lnTo>
+                    <a:pt x="6823415" y="291042"/>
+                  </a:lnTo>
+                  <a:lnTo>
+                    <a:pt x="6753071" y="289568"/>
+                  </a:lnTo>
+                  <a:lnTo>
+                    <a:pt x="6682726" y="288030"/>
+                  </a:lnTo>
+                  <a:lnTo>
+                    <a:pt x="6612382" y="286425"/>
+                  </a:lnTo>
+                  <a:lnTo>
+                    <a:pt x="6542037" y="284749"/>
+                  </a:lnTo>
+                  <a:lnTo>
+                    <a:pt x="6471693" y="283000"/>
+                  </a:lnTo>
+                  <a:lnTo>
+                    <a:pt x="6401348" y="281174"/>
+                  </a:lnTo>
+                  <a:lnTo>
+                    <a:pt x="6331004" y="279268"/>
+                  </a:lnTo>
+                  <a:lnTo>
+                    <a:pt x="6260659" y="277278"/>
+                  </a:lnTo>
+                  <a:lnTo>
+                    <a:pt x="6190315" y="275202"/>
+                  </a:lnTo>
+                  <a:lnTo>
+                    <a:pt x="6119970" y="273034"/>
+                  </a:lnTo>
+                  <a:lnTo>
+                    <a:pt x="6049626" y="270771"/>
+                  </a:lnTo>
+                  <a:lnTo>
+                    <a:pt x="5979281" y="268409"/>
+                  </a:lnTo>
+                  <a:lnTo>
+                    <a:pt x="5908937" y="265944"/>
+                  </a:lnTo>
+                  <a:lnTo>
+                    <a:pt x="5838592" y="263371"/>
+                  </a:lnTo>
+                  <a:lnTo>
+                    <a:pt x="5768248" y="260685"/>
+                  </a:lnTo>
+                  <a:lnTo>
+                    <a:pt x="5697903" y="257881"/>
+                  </a:lnTo>
+                  <a:lnTo>
+                    <a:pt x="5627559" y="254954"/>
+                  </a:lnTo>
+                  <a:lnTo>
+                    <a:pt x="5557214" y="251899"/>
+                  </a:lnTo>
+                  <a:lnTo>
+                    <a:pt x="5486870" y="248711"/>
+                  </a:lnTo>
+                  <a:lnTo>
+                    <a:pt x="5416525" y="245382"/>
+                  </a:lnTo>
+                  <a:lnTo>
+                    <a:pt x="5346181" y="241908"/>
+                  </a:lnTo>
+                  <a:lnTo>
+                    <a:pt x="5275836" y="238281"/>
+                  </a:lnTo>
+                  <a:lnTo>
+                    <a:pt x="5205492" y="234496"/>
+                  </a:lnTo>
+                  <a:lnTo>
+                    <a:pt x="5135147" y="230544"/>
+                  </a:lnTo>
+                  <a:lnTo>
+                    <a:pt x="5064803" y="226420"/>
+                  </a:lnTo>
+                  <a:lnTo>
+                    <a:pt x="4994458" y="222114"/>
+                  </a:lnTo>
+                  <a:lnTo>
+                    <a:pt x="4924114" y="217621"/>
+                  </a:lnTo>
+                  <a:lnTo>
+                    <a:pt x="4853769" y="212930"/>
+                  </a:lnTo>
+                  <a:lnTo>
+                    <a:pt x="4783425" y="208033"/>
+                  </a:lnTo>
+                  <a:lnTo>
+                    <a:pt x="4713080" y="202922"/>
+                  </a:lnTo>
+                  <a:lnTo>
+                    <a:pt x="4642736" y="197587"/>
+                  </a:lnTo>
+                  <a:lnTo>
+                    <a:pt x="4572391" y="192018"/>
+                  </a:lnTo>
+                  <a:lnTo>
+                    <a:pt x="4502047" y="186206"/>
+                  </a:lnTo>
+                  <a:lnTo>
+                    <a:pt x="4431702" y="180138"/>
+                  </a:lnTo>
+                  <a:lnTo>
+                    <a:pt x="4361358" y="173805"/>
+                  </a:lnTo>
+                  <a:lnTo>
+                    <a:pt x="4291013" y="167194"/>
+                  </a:lnTo>
+                  <a:lnTo>
+                    <a:pt x="4220669" y="160293"/>
+                  </a:lnTo>
+                  <a:lnTo>
+                    <a:pt x="4150324" y="153090"/>
+                  </a:lnTo>
+                  <a:lnTo>
+                    <a:pt x="4079980" y="145571"/>
+                  </a:lnTo>
+                  <a:lnTo>
+                    <a:pt x="4009635" y="137723"/>
+                  </a:lnTo>
+                  <a:lnTo>
+                    <a:pt x="3939291" y="129531"/>
+                  </a:lnTo>
+                  <a:lnTo>
+                    <a:pt x="3868946" y="120980"/>
+                  </a:lnTo>
+                  <a:lnTo>
+                    <a:pt x="3798602" y="112054"/>
+                  </a:lnTo>
+                  <a:lnTo>
+                    <a:pt x="3728257" y="102737"/>
+                  </a:lnTo>
+                  <a:lnTo>
+                    <a:pt x="3657913" y="93012"/>
+                  </a:lnTo>
+                  <a:lnTo>
+                    <a:pt x="3587569" y="82861"/>
+                  </a:lnTo>
+                  <a:lnTo>
+                    <a:pt x="3517224" y="72265"/>
+                  </a:lnTo>
+                  <a:lnTo>
+                    <a:pt x="3446880" y="61204"/>
+                  </a:lnTo>
+                  <a:lnTo>
+                    <a:pt x="3376535" y="49659"/>
+                  </a:lnTo>
+                  <a:lnTo>
+                    <a:pt x="3306191" y="37608"/>
+                  </a:lnTo>
+                  <a:lnTo>
+                    <a:pt x="3235846" y="25321"/>
+                  </a:lnTo>
+                  <a:lnTo>
+                    <a:pt x="3165502" y="24792"/>
+                  </a:lnTo>
+                  <a:lnTo>
+                    <a:pt x="3095157" y="24262"/>
+                  </a:lnTo>
+                  <a:lnTo>
+                    <a:pt x="3024813" y="23732"/>
+                  </a:lnTo>
+                  <a:lnTo>
+                    <a:pt x="2954468" y="23200"/>
+                  </a:lnTo>
+                  <a:lnTo>
+                    <a:pt x="2884124" y="22667"/>
+                  </a:lnTo>
+                  <a:lnTo>
+                    <a:pt x="2813779" y="22134"/>
+                  </a:lnTo>
+                  <a:lnTo>
+                    <a:pt x="2743435" y="21599"/>
+                  </a:lnTo>
+                  <a:lnTo>
+                    <a:pt x="2673090" y="21064"/>
+                  </a:lnTo>
+                  <a:lnTo>
+                    <a:pt x="2602746" y="20527"/>
+                  </a:lnTo>
+                  <a:lnTo>
+                    <a:pt x="2532401" y="19990"/>
+                  </a:lnTo>
+                  <a:lnTo>
+                    <a:pt x="2462057" y="19452"/>
+                  </a:lnTo>
+                  <a:lnTo>
+                    <a:pt x="2391712" y="18912"/>
+                  </a:lnTo>
+                  <a:lnTo>
+                    <a:pt x="2321368" y="18372"/>
+                  </a:lnTo>
+                  <a:lnTo>
+                    <a:pt x="2251023" y="17831"/>
+                  </a:lnTo>
+                  <a:lnTo>
+                    <a:pt x="2180679" y="17289"/>
+                  </a:lnTo>
+                  <a:lnTo>
+                    <a:pt x="2110334" y="16746"/>
+                  </a:lnTo>
+                  <a:lnTo>
+                    <a:pt x="2039990" y="16202"/>
+                  </a:lnTo>
+                  <a:lnTo>
+                    <a:pt x="1969645" y="15657"/>
+                  </a:lnTo>
+                  <a:lnTo>
+                    <a:pt x="1899301" y="15111"/>
+                  </a:lnTo>
+                  <a:lnTo>
+                    <a:pt x="1828956" y="14564"/>
+                  </a:lnTo>
+                  <a:lnTo>
+                    <a:pt x="1758612" y="14016"/>
+                  </a:lnTo>
+                  <a:lnTo>
+                    <a:pt x="1688267" y="13467"/>
+                  </a:lnTo>
+                  <a:lnTo>
+                    <a:pt x="1617923" y="12917"/>
+                  </a:lnTo>
+                  <a:lnTo>
+                    <a:pt x="1547578" y="12367"/>
+                  </a:lnTo>
+                  <a:lnTo>
+                    <a:pt x="1477234" y="11815"/>
+                  </a:lnTo>
+                  <a:lnTo>
+                    <a:pt x="1406889" y="11262"/>
+                  </a:lnTo>
+                  <a:lnTo>
+                    <a:pt x="1336545" y="10708"/>
+                  </a:lnTo>
+                  <a:lnTo>
+                    <a:pt x="1266200" y="10154"/>
+                  </a:lnTo>
+                  <a:lnTo>
+                    <a:pt x="1195856" y="9598"/>
+                  </a:lnTo>
+                  <a:lnTo>
+                    <a:pt x="1125511" y="9041"/>
+                  </a:lnTo>
+                  <a:lnTo>
+                    <a:pt x="1055167" y="8484"/>
+                  </a:lnTo>
+                  <a:lnTo>
+                    <a:pt x="984822" y="7925"/>
+                  </a:lnTo>
+                  <a:lnTo>
+                    <a:pt x="914478" y="7365"/>
+                  </a:lnTo>
+                  <a:lnTo>
+                    <a:pt x="844133" y="6805"/>
+                  </a:lnTo>
+                  <a:lnTo>
+                    <a:pt x="773789" y="6243"/>
+                  </a:lnTo>
+                  <a:lnTo>
+                    <a:pt x="703444" y="5680"/>
+                  </a:lnTo>
+                  <a:lnTo>
+                    <a:pt x="633100" y="5117"/>
+                  </a:lnTo>
+                  <a:lnTo>
+                    <a:pt x="562755" y="4552"/>
+                  </a:lnTo>
+                  <a:lnTo>
+                    <a:pt x="492411" y="3987"/>
+                  </a:lnTo>
+                  <a:lnTo>
+                    <a:pt x="422066" y="3420"/>
+                  </a:lnTo>
+                  <a:lnTo>
+                    <a:pt x="351722" y="2853"/>
+                  </a:lnTo>
+                  <a:lnTo>
+                    <a:pt x="281377" y="2284"/>
+                  </a:lnTo>
+                  <a:lnTo>
+                    <a:pt x="211033" y="1714"/>
+                  </a:lnTo>
+                  <a:lnTo>
+                    <a:pt x="140688" y="1144"/>
+                  </a:lnTo>
+                  <a:lnTo>
+                    <a:pt x="70344" y="572"/>
+                  </a:lnTo>
+                  <a:lnTo>
+                    <a:pt x="0" y="0"/>
+                  </a:lnTo>
+                </a:path>
+              </a:pathLst>
+            </a:custGeom>
+          </p:spPr>
+          <p:txBody>
+            <a:bodyPr/>
+            <a:lstStyle/>
+            <a:p/>
+          </p:txBody>
+        </p:sp>
+        <p:sp>
+          <p:nvSpPr>
+            <p:cNvPr id="70" name="pl70"/>
+            <p:cNvSpPr/>
+            <p:nvPr/>
+          </p:nvSpPr>
+          <p:spPr>
+            <a:xfrm>
+              <a:off x="1235312" y="4757282"/>
+              <a:ext cx="6964104" cy="744680"/>
+            </a:xfrm>
+            <a:custGeom>
+              <a:avLst/>
+              <a:pathLst>
+                <a:path w="6964104" h="744680">
+                  <a:moveTo>
+                    <a:pt x="0" y="0"/>
+                  </a:moveTo>
+                  <a:lnTo>
+                    <a:pt x="70344" y="18467"/>
+                  </a:lnTo>
+                  <a:lnTo>
+                    <a:pt x="140688" y="36526"/>
+                  </a:lnTo>
+                  <a:lnTo>
+                    <a:pt x="211033" y="54187"/>
+                  </a:lnTo>
+                  <a:lnTo>
+                    <a:pt x="281377" y="71457"/>
+                  </a:lnTo>
+                  <a:lnTo>
+                    <a:pt x="351722" y="88347"/>
+                  </a:lnTo>
+                  <a:lnTo>
+                    <a:pt x="422066" y="104863"/>
+                  </a:lnTo>
+                  <a:lnTo>
+                    <a:pt x="492411" y="121015"/>
+                  </a:lnTo>
+                  <a:lnTo>
+                    <a:pt x="562755" y="136810"/>
+                  </a:lnTo>
+                  <a:lnTo>
+                    <a:pt x="633100" y="152257"/>
+                  </a:lnTo>
+                  <a:lnTo>
+                    <a:pt x="703444" y="167362"/>
+                  </a:lnTo>
+                  <a:lnTo>
+                    <a:pt x="773789" y="182134"/>
+                  </a:lnTo>
+                  <a:lnTo>
+                    <a:pt x="844133" y="196580"/>
+                  </a:lnTo>
+                  <a:lnTo>
+                    <a:pt x="914478" y="210707"/>
+                  </a:lnTo>
+                  <a:lnTo>
+                    <a:pt x="984822" y="224522"/>
+                  </a:lnTo>
+                  <a:lnTo>
+                    <a:pt x="1055167" y="238031"/>
+                  </a:lnTo>
+                  <a:lnTo>
+                    <a:pt x="1125511" y="251243"/>
+                  </a:lnTo>
+                  <a:lnTo>
+                    <a:pt x="1195856" y="264163"/>
+                  </a:lnTo>
+                  <a:lnTo>
+                    <a:pt x="1266200" y="276797"/>
+                  </a:lnTo>
+                  <a:lnTo>
+                    <a:pt x="1336545" y="289153"/>
+                  </a:lnTo>
+                  <a:lnTo>
+                    <a:pt x="1406889" y="301236"/>
+                  </a:lnTo>
+                  <a:lnTo>
+                    <a:pt x="1477234" y="313052"/>
+                  </a:lnTo>
+                  <a:lnTo>
+                    <a:pt x="1547578" y="324607"/>
+                  </a:lnTo>
+                  <a:lnTo>
+                    <a:pt x="1617923" y="335907"/>
+                  </a:lnTo>
+                  <a:lnTo>
+                    <a:pt x="1688267" y="346958"/>
+                  </a:lnTo>
+                  <a:lnTo>
+                    <a:pt x="1758612" y="357764"/>
+                  </a:lnTo>
+                  <a:lnTo>
+                    <a:pt x="1828956" y="368332"/>
+                  </a:lnTo>
+                  <a:lnTo>
+                    <a:pt x="1899301" y="378667"/>
+                  </a:lnTo>
+                  <a:lnTo>
+                    <a:pt x="1969645" y="388773"/>
+                  </a:lnTo>
+                  <a:lnTo>
+                    <a:pt x="2039990" y="398657"/>
+                  </a:lnTo>
+                  <a:lnTo>
+                    <a:pt x="2110334" y="408322"/>
+                  </a:lnTo>
+                  <a:lnTo>
+                    <a:pt x="2180679" y="417774"/>
+                  </a:lnTo>
+                  <a:lnTo>
+                    <a:pt x="2251023" y="427017"/>
+                  </a:lnTo>
+                  <a:lnTo>
+                    <a:pt x="2321368" y="436056"/>
+                  </a:lnTo>
+                  <a:lnTo>
+                    <a:pt x="2391712" y="444895"/>
+                  </a:lnTo>
+                  <a:lnTo>
+                    <a:pt x="2462057" y="453539"/>
+                  </a:lnTo>
+                  <a:lnTo>
+                    <a:pt x="2532401" y="461992"/>
+                  </a:lnTo>
+                  <a:lnTo>
+                    <a:pt x="2602746" y="470259"/>
+                  </a:lnTo>
+                  <a:lnTo>
+                    <a:pt x="2673090" y="478343"/>
+                  </a:lnTo>
+                  <a:lnTo>
+                    <a:pt x="2743435" y="486249"/>
+                  </a:lnTo>
+                  <a:lnTo>
+                    <a:pt x="2813779" y="493980"/>
+                  </a:lnTo>
+                  <a:lnTo>
+                    <a:pt x="2884124" y="501541"/>
+                  </a:lnTo>
+                  <a:lnTo>
+                    <a:pt x="2954468" y="508934"/>
+                  </a:lnTo>
+                  <a:lnTo>
+                    <a:pt x="3024813" y="516164"/>
+                  </a:lnTo>
+                  <a:lnTo>
+                    <a:pt x="3095157" y="523235"/>
+                  </a:lnTo>
+                  <a:lnTo>
+                    <a:pt x="3165502" y="530150"/>
+                  </a:lnTo>
+                  <a:lnTo>
+                    <a:pt x="3235846" y="536911"/>
+                  </a:lnTo>
+                  <a:lnTo>
+                    <a:pt x="3306191" y="543524"/>
+                  </a:lnTo>
+                  <a:lnTo>
+                    <a:pt x="3376535" y="549991"/>
+                  </a:lnTo>
+                  <a:lnTo>
+                    <a:pt x="3446880" y="556314"/>
+                  </a:lnTo>
+                  <a:lnTo>
+                    <a:pt x="3517224" y="562498"/>
+                  </a:lnTo>
+                  <a:lnTo>
+                    <a:pt x="3587569" y="568546"/>
+                  </a:lnTo>
+                  <a:lnTo>
+                    <a:pt x="3657913" y="574460"/>
+                  </a:lnTo>
+                  <a:lnTo>
+                    <a:pt x="3728257" y="580244"/>
+                  </a:lnTo>
+                  <a:lnTo>
+                    <a:pt x="3798602" y="585899"/>
+                  </a:lnTo>
+                  <a:lnTo>
+                    <a:pt x="3868946" y="591430"/>
+                  </a:lnTo>
+                  <a:lnTo>
+                    <a:pt x="3939291" y="596839"/>
+                  </a:lnTo>
+                  <a:lnTo>
+                    <a:pt x="4009635" y="602129"/>
+                  </a:lnTo>
+                  <a:lnTo>
+                    <a:pt x="4079980" y="607301"/>
+                  </a:lnTo>
+                  <a:lnTo>
+                    <a:pt x="4150324" y="612360"/>
+                  </a:lnTo>
+                  <a:lnTo>
+                    <a:pt x="4220669" y="617306"/>
+                  </a:lnTo>
+                  <a:lnTo>
+                    <a:pt x="4291013" y="622144"/>
+                  </a:lnTo>
+                  <a:lnTo>
+                    <a:pt x="4361358" y="626875"/>
+                  </a:lnTo>
+                  <a:lnTo>
+                    <a:pt x="4431702" y="631501"/>
+                  </a:lnTo>
+                  <a:lnTo>
+                    <a:pt x="4502047" y="636025"/>
+                  </a:lnTo>
+                  <a:lnTo>
+                    <a:pt x="4572391" y="640449"/>
+                  </a:lnTo>
+                  <a:lnTo>
+                    <a:pt x="4642736" y="644776"/>
+                  </a:lnTo>
+                  <a:lnTo>
+                    <a:pt x="4713080" y="649007"/>
+                  </a:lnTo>
+                  <a:lnTo>
+                    <a:pt x="4783425" y="653144"/>
+                  </a:lnTo>
+                  <a:lnTo>
+                    <a:pt x="4853769" y="657190"/>
+                  </a:lnTo>
+                  <a:lnTo>
+                    <a:pt x="4924114" y="661147"/>
+                  </a:lnTo>
+                  <a:lnTo>
+                    <a:pt x="4994458" y="665017"/>
+                  </a:lnTo>
+                  <a:lnTo>
+                    <a:pt x="5064803" y="668801"/>
+                  </a:lnTo>
+                  <a:lnTo>
+                    <a:pt x="5135147" y="672501"/>
+                  </a:lnTo>
+                  <a:lnTo>
+                    <a:pt x="5205492" y="676120"/>
+                  </a:lnTo>
+                  <a:lnTo>
+                    <a:pt x="5275836" y="679659"/>
+                  </a:lnTo>
+                  <a:lnTo>
+                    <a:pt x="5346181" y="683120"/>
+                  </a:lnTo>
+                  <a:lnTo>
+                    <a:pt x="5416525" y="686504"/>
+                  </a:lnTo>
+                  <a:lnTo>
+                    <a:pt x="5486870" y="689814"/>
+                  </a:lnTo>
+                  <a:lnTo>
+                    <a:pt x="5557214" y="693051"/>
+                  </a:lnTo>
+                  <a:lnTo>
+                    <a:pt x="5627559" y="696216"/>
+                  </a:lnTo>
+                  <a:lnTo>
+                    <a:pt x="5697903" y="699311"/>
+                  </a:lnTo>
+                  <a:lnTo>
+                    <a:pt x="5768248" y="702338"/>
+                  </a:lnTo>
+                  <a:lnTo>
+                    <a:pt x="5838592" y="705298"/>
+                  </a:lnTo>
+                  <a:lnTo>
+                    <a:pt x="5908937" y="708193"/>
+                  </a:lnTo>
+                  <a:lnTo>
+                    <a:pt x="5979281" y="711024"/>
+                  </a:lnTo>
+                  <a:lnTo>
+                    <a:pt x="6049626" y="713792"/>
+                  </a:lnTo>
+                  <a:lnTo>
+                    <a:pt x="6119970" y="716499"/>
+                  </a:lnTo>
+                  <a:lnTo>
+                    <a:pt x="6190315" y="719146"/>
+                  </a:lnTo>
+                  <a:lnTo>
+                    <a:pt x="6260659" y="721735"/>
+                  </a:lnTo>
+                  <a:lnTo>
+                    <a:pt x="6331004" y="724267"/>
+                  </a:lnTo>
+                  <a:lnTo>
+                    <a:pt x="6401348" y="726743"/>
+                  </a:lnTo>
+                  <a:lnTo>
+                    <a:pt x="6471693" y="729164"/>
+                  </a:lnTo>
+                  <a:lnTo>
+                    <a:pt x="6542037" y="731532"/>
+                  </a:lnTo>
+                  <a:lnTo>
+                    <a:pt x="6612382" y="733848"/>
+                  </a:lnTo>
+                  <a:lnTo>
+                    <a:pt x="6682726" y="736112"/>
+                  </a:lnTo>
+                  <a:lnTo>
+                    <a:pt x="6753071" y="738326"/>
+                  </a:lnTo>
+                  <a:lnTo>
+                    <a:pt x="6823415" y="740492"/>
+                  </a:lnTo>
+                  <a:lnTo>
+                    <a:pt x="6893760" y="742609"/>
+                  </a:lnTo>
+                  <a:lnTo>
+                    <a:pt x="6964104" y="744680"/>
+                  </a:lnTo>
+                </a:path>
+              </a:pathLst>
+            </a:custGeom>
+            <a:ln w="27101" cap="flat">
+              <a:solidFill>
+                <a:srgbClr val="FF8C00">
+                  <a:alpha val="100000"/>
+                </a:srgbClr>
+              </a:solidFill>
+              <a:prstDash val="solid"/>
+              <a:round/>
+            </a:ln>
+          </p:spPr>
+          <p:txBody>
+            <a:bodyPr/>
+            <a:lstStyle/>
+            <a:p/>
+          </p:txBody>
+        </p:sp>
+        <p:sp>
+          <p:nvSpPr>
+            <p:cNvPr id="71" name="pl71"/>
+            <p:cNvSpPr/>
+            <p:nvPr/>
+          </p:nvSpPr>
+          <p:spPr>
+            <a:xfrm>
+              <a:off x="887106" y="5294352"/>
+              <a:ext cx="7660515" cy="0"/>
+            </a:xfrm>
+            <a:custGeom>
+              <a:avLst/>
+              <a:pathLst>
+                <a:path w="7660515" h="0">
+                  <a:moveTo>
+                    <a:pt x="0" y="0"/>
+                  </a:moveTo>
+                  <a:lnTo>
+                    <a:pt x="7660515" y="0"/>
+                  </a:lnTo>
+                  <a:lnTo>
+                    <a:pt x="7660515" y="0"/>
+                  </a:lnTo>
+                </a:path>
+              </a:pathLst>
+            </a:custGeom>
+            <a:ln w="13550" cap="flat">
+              <a:solidFill>
+                <a:srgbClr val="7F7F7F">
+                  <a:alpha val="100000"/>
+                </a:srgbClr>
+              </a:solidFill>
+              <a:prstDash val="dash"/>
+              <a:round/>
+            </a:ln>
+          </p:spPr>
+          <p:txBody>
+            <a:bodyPr/>
+            <a:lstStyle/>
+            <a:p/>
+          </p:txBody>
+        </p:sp>
+        <p:sp>
+          <p:nvSpPr>
+            <p:cNvPr id="72" name="pl72"/>
+            <p:cNvSpPr/>
+            <p:nvPr/>
+          </p:nvSpPr>
+          <p:spPr>
+            <a:xfrm>
+              <a:off x="4472829" y="4336484"/>
+              <a:ext cx="0" cy="1317069"/>
+            </a:xfrm>
+            <a:custGeom>
+              <a:avLst/>
+              <a:pathLst>
+                <a:path w="0" h="1317069">
+                  <a:moveTo>
+                    <a:pt x="0" y="1317069"/>
+                  </a:moveTo>
+                  <a:lnTo>
+                    <a:pt x="0" y="0"/>
+                  </a:lnTo>
+                  <a:lnTo>
+                    <a:pt x="0" y="0"/>
+                  </a:lnTo>
+                </a:path>
+              </a:pathLst>
+            </a:custGeom>
+            <a:ln w="13550" cap="flat">
+              <a:solidFill>
+                <a:srgbClr val="666666">
+                  <a:alpha val="100000"/>
+                </a:srgbClr>
+              </a:solidFill>
+              <a:prstDash val="dot"/>
+              <a:round/>
+            </a:ln>
+          </p:spPr>
+          <p:txBody>
+            <a:bodyPr/>
+            <a:lstStyle/>
+            <a:p/>
+          </p:txBody>
+        </p:sp>
+        <p:sp>
+          <p:nvSpPr>
+            <p:cNvPr id="73" name="tx73"/>
+            <p:cNvSpPr/>
+            <p:nvPr/>
+          </p:nvSpPr>
+          <p:spPr>
+            <a:xfrm>
+              <a:off x="762297" y="5553636"/>
+              <a:ext cx="62179" cy="80101"/>
+            </a:xfrm>
+            <a:prstGeom prst="rect">
+              <a:avLst/>
+            </a:prstGeom>
+            <a:noFill/>
+          </p:spPr>
+          <p:txBody>
+            <a:bodyPr lIns="0" rIns="0" tIns="0" bIns="0" anchorCtr="1" anchor="ctr" wrap="none"/>
+            <a:lstStyle/>
+            <a:p>
+              <a:pPr algn="l" marL="0" marR="0" indent="0">
+                <a:lnSpc>
+                  <a:spcPts val="880"/>
+                </a:lnSpc>
+                <a:spcBef>
+                  <a:spcPts val="0"/>
+                </a:spcBef>
+                <a:spcAft>
+                  <a:spcPts val="0"/>
+                </a:spcAft>
+              </a:pPr>
+              <a:r>
+                <a:rPr sz="880">
+                  <a:solidFill>
+                    <a:srgbClr val="4D4D4D">
+                      <a:alpha val="100000"/>
+                    </a:srgbClr>
+                  </a:solidFill>
+                  <a:latin typeface="Helvetica"/>
+                  <a:cs typeface="Helvetica"/>
+                </a:rPr>
+                <a:t>0</a:t>
+              </a:r>
+            </a:p>
+          </p:txBody>
+        </p:sp>
+        <p:sp>
+          <p:nvSpPr>
+            <p:cNvPr id="74" name="tx74"/>
+            <p:cNvSpPr/>
+            <p:nvPr/>
+          </p:nvSpPr>
+          <p:spPr>
+            <a:xfrm>
+              <a:off x="762297" y="5254302"/>
+              <a:ext cx="62179" cy="80101"/>
+            </a:xfrm>
+            <a:prstGeom prst="rect">
+              <a:avLst/>
+            </a:prstGeom>
+            <a:noFill/>
+          </p:spPr>
+          <p:txBody>
+            <a:bodyPr lIns="0" rIns="0" tIns="0" bIns="0" anchorCtr="1" anchor="ctr" wrap="none"/>
+            <a:lstStyle/>
+            <a:p>
+              <a:pPr algn="l" marL="0" marR="0" indent="0">
+                <a:lnSpc>
+                  <a:spcPts val="880"/>
+                </a:lnSpc>
+                <a:spcBef>
+                  <a:spcPts val="0"/>
+                </a:spcBef>
+                <a:spcAft>
+                  <a:spcPts val="0"/>
+                </a:spcAft>
+              </a:pPr>
+              <a:r>
+                <a:rPr sz="880">
+                  <a:solidFill>
+                    <a:srgbClr val="4D4D4D">
+                      <a:alpha val="100000"/>
+                    </a:srgbClr>
+                  </a:solidFill>
+                  <a:latin typeface="Helvetica"/>
+                  <a:cs typeface="Helvetica"/>
+                </a:rPr>
+                <a:t>1</a:t>
+              </a:r>
+            </a:p>
+          </p:txBody>
+        </p:sp>
+        <p:sp>
+          <p:nvSpPr>
+            <p:cNvPr id="75" name="tx75"/>
+            <p:cNvSpPr/>
+            <p:nvPr/>
+          </p:nvSpPr>
+          <p:spPr>
+            <a:xfrm>
+              <a:off x="762297" y="4954968"/>
+              <a:ext cx="62179" cy="80101"/>
+            </a:xfrm>
+            <a:prstGeom prst="rect">
+              <a:avLst/>
+            </a:prstGeom>
+            <a:noFill/>
+          </p:spPr>
+          <p:txBody>
+            <a:bodyPr lIns="0" rIns="0" tIns="0" bIns="0" anchorCtr="1" anchor="ctr" wrap="none"/>
+            <a:lstStyle/>
+            <a:p>
+              <a:pPr algn="l" marL="0" marR="0" indent="0">
+                <a:lnSpc>
+                  <a:spcPts val="880"/>
+                </a:lnSpc>
+                <a:spcBef>
+                  <a:spcPts val="0"/>
+                </a:spcBef>
+                <a:spcAft>
+                  <a:spcPts val="0"/>
+                </a:spcAft>
+              </a:pPr>
+              <a:r>
+                <a:rPr sz="880">
+                  <a:solidFill>
+                    <a:srgbClr val="4D4D4D">
+                      <a:alpha val="100000"/>
+                    </a:srgbClr>
+                  </a:solidFill>
+                  <a:latin typeface="Helvetica"/>
+                  <a:cs typeface="Helvetica"/>
+                </a:rPr>
+                <a:t>2</a:t>
+              </a:r>
+            </a:p>
+          </p:txBody>
+        </p:sp>
+        <p:sp>
+          <p:nvSpPr>
+            <p:cNvPr id="76" name="tx76"/>
+            <p:cNvSpPr/>
+            <p:nvPr/>
+          </p:nvSpPr>
+          <p:spPr>
+            <a:xfrm>
+              <a:off x="762297" y="4655634"/>
+              <a:ext cx="62179" cy="80101"/>
+            </a:xfrm>
+            <a:prstGeom prst="rect">
+              <a:avLst/>
+            </a:prstGeom>
+            <a:noFill/>
+          </p:spPr>
+          <p:txBody>
+            <a:bodyPr lIns="0" rIns="0" tIns="0" bIns="0" anchorCtr="1" anchor="ctr" wrap="none"/>
+            <a:lstStyle/>
+            <a:p>
+              <a:pPr algn="l" marL="0" marR="0" indent="0">
+                <a:lnSpc>
+                  <a:spcPts val="880"/>
+                </a:lnSpc>
+                <a:spcBef>
+                  <a:spcPts val="0"/>
+                </a:spcBef>
+                <a:spcAft>
+                  <a:spcPts val="0"/>
+                </a:spcAft>
+              </a:pPr>
+              <a:r>
+                <a:rPr sz="880">
+                  <a:solidFill>
+                    <a:srgbClr val="4D4D4D">
+                      <a:alpha val="100000"/>
+                    </a:srgbClr>
+                  </a:solidFill>
+                  <a:latin typeface="Helvetica"/>
+                  <a:cs typeface="Helvetica"/>
+                </a:rPr>
+                <a:t>3</a:t>
+              </a:r>
+            </a:p>
+          </p:txBody>
+        </p:sp>
+        <p:sp>
+          <p:nvSpPr>
+            <p:cNvPr id="77" name="tx77"/>
+            <p:cNvSpPr/>
+            <p:nvPr/>
+          </p:nvSpPr>
+          <p:spPr>
+            <a:xfrm>
+              <a:off x="762297" y="4356300"/>
+              <a:ext cx="62179" cy="80101"/>
+            </a:xfrm>
+            <a:prstGeom prst="rect">
+              <a:avLst/>
+            </a:prstGeom>
+            <a:noFill/>
+          </p:spPr>
+          <p:txBody>
+            <a:bodyPr lIns="0" rIns="0" tIns="0" bIns="0" anchorCtr="1" anchor="ctr" wrap="none"/>
+            <a:lstStyle/>
+            <a:p>
+              <a:pPr algn="l" marL="0" marR="0" indent="0">
+                <a:lnSpc>
+                  <a:spcPts val="880"/>
+                </a:lnSpc>
+                <a:spcBef>
+                  <a:spcPts val="0"/>
+                </a:spcBef>
+                <a:spcAft>
+                  <a:spcPts val="0"/>
+                </a:spcAft>
+              </a:pPr>
+              <a:r>
+                <a:rPr sz="880">
+                  <a:solidFill>
+                    <a:srgbClr val="4D4D4D">
+                      <a:alpha val="100000"/>
+                    </a:srgbClr>
+                  </a:solidFill>
+                  <a:latin typeface="Helvetica"/>
+                  <a:cs typeface="Helvetica"/>
+                </a:rPr>
+                <a:t>4</a:t>
+              </a:r>
+            </a:p>
+          </p:txBody>
+        </p:sp>
+        <p:sp>
+          <p:nvSpPr>
+            <p:cNvPr id="78" name="tx78"/>
+            <p:cNvSpPr/>
+            <p:nvPr/>
+          </p:nvSpPr>
+          <p:spPr>
+            <a:xfrm>
+              <a:off x="1306098" y="5716183"/>
+              <a:ext cx="161574" cy="80101"/>
+            </a:xfrm>
+            <a:prstGeom prst="rect">
+              <a:avLst/>
+            </a:prstGeom>
+            <a:noFill/>
+          </p:spPr>
+          <p:txBody>
+            <a:bodyPr lIns="0" rIns="0" tIns="0" bIns="0" anchorCtr="1" anchor="ctr" wrap="none"/>
+            <a:lstStyle/>
+            <a:p>
+              <a:pPr algn="l" marL="0" marR="0" indent="0">
+                <a:lnSpc>
+                  <a:spcPts val="880"/>
+                </a:lnSpc>
+                <a:spcBef>
+                  <a:spcPts val="0"/>
+                </a:spcBef>
+                <a:spcAft>
+                  <a:spcPts val="0"/>
+                </a:spcAft>
+              </a:pPr>
+              <a:r>
+                <a:rPr sz="880">
+                  <a:solidFill>
+                    <a:srgbClr val="4D4D4D">
+                      <a:alpha val="100000"/>
+                    </a:srgbClr>
+                  </a:solidFill>
+                  <a:latin typeface="Helvetica"/>
+                  <a:cs typeface="Helvetica"/>
+                </a:rPr>
+                <a:t>-40</a:t>
+              </a:r>
+            </a:p>
+          </p:txBody>
+        </p:sp>
+        <p:sp>
+          <p:nvSpPr>
+            <p:cNvPr id="79" name="tx79"/>
+            <p:cNvSpPr/>
+            <p:nvPr/>
+          </p:nvSpPr>
+          <p:spPr>
+            <a:xfrm>
+              <a:off x="2113264" y="5716183"/>
+              <a:ext cx="161574" cy="80101"/>
+            </a:xfrm>
+            <a:prstGeom prst="rect">
+              <a:avLst/>
+            </a:prstGeom>
+            <a:noFill/>
+          </p:spPr>
+          <p:txBody>
+            <a:bodyPr lIns="0" rIns="0" tIns="0" bIns="0" anchorCtr="1" anchor="ctr" wrap="none"/>
+            <a:lstStyle/>
+            <a:p>
+              <a:pPr algn="l" marL="0" marR="0" indent="0">
+                <a:lnSpc>
+                  <a:spcPts val="880"/>
+                </a:lnSpc>
+                <a:spcBef>
+                  <a:spcPts val="0"/>
+                </a:spcBef>
+                <a:spcAft>
+                  <a:spcPts val="0"/>
+                </a:spcAft>
+              </a:pPr>
+              <a:r>
+                <a:rPr sz="880">
+                  <a:solidFill>
+                    <a:srgbClr val="4D4D4D">
+                      <a:alpha val="100000"/>
+                    </a:srgbClr>
+                  </a:solidFill>
+                  <a:latin typeface="Helvetica"/>
+                  <a:cs typeface="Helvetica"/>
+                </a:rPr>
+                <a:t>-30</a:t>
+              </a:r>
+            </a:p>
+          </p:txBody>
+        </p:sp>
+        <p:sp>
+          <p:nvSpPr>
+            <p:cNvPr id="80" name="tx80"/>
+            <p:cNvSpPr/>
+            <p:nvPr/>
+          </p:nvSpPr>
+          <p:spPr>
+            <a:xfrm>
+              <a:off x="2920429" y="5716183"/>
+              <a:ext cx="161574" cy="80101"/>
+            </a:xfrm>
+            <a:prstGeom prst="rect">
+              <a:avLst/>
+            </a:prstGeom>
+            <a:noFill/>
+          </p:spPr>
+          <p:txBody>
+            <a:bodyPr lIns="0" rIns="0" tIns="0" bIns="0" anchorCtr="1" anchor="ctr" wrap="none"/>
+            <a:lstStyle/>
+            <a:p>
+              <a:pPr algn="l" marL="0" marR="0" indent="0">
+                <a:lnSpc>
+                  <a:spcPts val="880"/>
+                </a:lnSpc>
+                <a:spcBef>
+                  <a:spcPts val="0"/>
+                </a:spcBef>
+                <a:spcAft>
+                  <a:spcPts val="0"/>
+                </a:spcAft>
+              </a:pPr>
+              <a:r>
+                <a:rPr sz="880">
+                  <a:solidFill>
+                    <a:srgbClr val="4D4D4D">
+                      <a:alpha val="100000"/>
+                    </a:srgbClr>
+                  </a:solidFill>
+                  <a:latin typeface="Helvetica"/>
+                  <a:cs typeface="Helvetica"/>
+                </a:rPr>
+                <a:t>-20</a:t>
+              </a:r>
+            </a:p>
+          </p:txBody>
+        </p:sp>
+        <p:sp>
+          <p:nvSpPr>
+            <p:cNvPr id="81" name="tx81"/>
+            <p:cNvSpPr/>
+            <p:nvPr/>
+          </p:nvSpPr>
+          <p:spPr>
+            <a:xfrm>
+              <a:off x="3727595" y="5716183"/>
+              <a:ext cx="161574" cy="80101"/>
+            </a:xfrm>
+            <a:prstGeom prst="rect">
+              <a:avLst/>
+            </a:prstGeom>
+            <a:noFill/>
+          </p:spPr>
+          <p:txBody>
+            <a:bodyPr lIns="0" rIns="0" tIns="0" bIns="0" anchorCtr="1" anchor="ctr" wrap="none"/>
+            <a:lstStyle/>
+            <a:p>
+              <a:pPr algn="l" marL="0" marR="0" indent="0">
+                <a:lnSpc>
+                  <a:spcPts val="880"/>
+                </a:lnSpc>
+                <a:spcBef>
+                  <a:spcPts val="0"/>
+                </a:spcBef>
+                <a:spcAft>
+                  <a:spcPts val="0"/>
+                </a:spcAft>
+              </a:pPr>
+              <a:r>
+                <a:rPr sz="880">
+                  <a:solidFill>
+                    <a:srgbClr val="4D4D4D">
+                      <a:alpha val="100000"/>
+                    </a:srgbClr>
+                  </a:solidFill>
+                  <a:latin typeface="Helvetica"/>
+                  <a:cs typeface="Helvetica"/>
+                </a:rPr>
+                <a:t>-10</a:t>
+              </a:r>
+            </a:p>
+          </p:txBody>
+        </p:sp>
+        <p:sp>
+          <p:nvSpPr>
+            <p:cNvPr id="82" name="tx82"/>
+            <p:cNvSpPr/>
+            <p:nvPr/>
+          </p:nvSpPr>
+          <p:spPr>
+            <a:xfrm>
+              <a:off x="4584458" y="5716183"/>
+              <a:ext cx="62179" cy="80101"/>
+            </a:xfrm>
+            <a:prstGeom prst="rect">
+              <a:avLst/>
+            </a:prstGeom>
+            <a:noFill/>
+          </p:spPr>
+          <p:txBody>
+            <a:bodyPr lIns="0" rIns="0" tIns="0" bIns="0" anchorCtr="1" anchor="ctr" wrap="none"/>
+            <a:lstStyle/>
+            <a:p>
+              <a:pPr algn="l" marL="0" marR="0" indent="0">
+                <a:lnSpc>
+                  <a:spcPts val="880"/>
+                </a:lnSpc>
+                <a:spcBef>
+                  <a:spcPts val="0"/>
+                </a:spcBef>
+                <a:spcAft>
+                  <a:spcPts val="0"/>
+                </a:spcAft>
+              </a:pPr>
+              <a:r>
+                <a:rPr sz="880">
+                  <a:solidFill>
+                    <a:srgbClr val="4D4D4D">
+                      <a:alpha val="100000"/>
+                    </a:srgbClr>
+                  </a:solidFill>
+                  <a:latin typeface="Helvetica"/>
+                  <a:cs typeface="Helvetica"/>
+                </a:rPr>
+                <a:t>0</a:t>
+              </a:r>
+            </a:p>
+          </p:txBody>
+        </p:sp>
+        <p:sp>
+          <p:nvSpPr>
+            <p:cNvPr id="83" name="tx83"/>
+            <p:cNvSpPr/>
+            <p:nvPr/>
+          </p:nvSpPr>
+          <p:spPr>
+            <a:xfrm>
+              <a:off x="5360534" y="5716183"/>
+              <a:ext cx="124358" cy="80101"/>
+            </a:xfrm>
+            <a:prstGeom prst="rect">
+              <a:avLst/>
+            </a:prstGeom>
+            <a:noFill/>
+          </p:spPr>
+          <p:txBody>
+            <a:bodyPr lIns="0" rIns="0" tIns="0" bIns="0" anchorCtr="1" anchor="ctr" wrap="none"/>
+            <a:lstStyle/>
+            <a:p>
+              <a:pPr algn="l" marL="0" marR="0" indent="0">
+                <a:lnSpc>
+                  <a:spcPts val="880"/>
+                </a:lnSpc>
+                <a:spcBef>
+                  <a:spcPts val="0"/>
+                </a:spcBef>
+                <a:spcAft>
+                  <a:spcPts val="0"/>
+                </a:spcAft>
+              </a:pPr>
+              <a:r>
+                <a:rPr sz="880">
+                  <a:solidFill>
+                    <a:srgbClr val="4D4D4D">
+                      <a:alpha val="100000"/>
+                    </a:srgbClr>
+                  </a:solidFill>
+                  <a:latin typeface="Helvetica"/>
+                  <a:cs typeface="Helvetica"/>
+                </a:rPr>
+                <a:t>10</a:t>
+              </a:r>
+            </a:p>
+          </p:txBody>
+        </p:sp>
+        <p:sp>
+          <p:nvSpPr>
+            <p:cNvPr id="84" name="tx84"/>
+            <p:cNvSpPr/>
+            <p:nvPr/>
+          </p:nvSpPr>
+          <p:spPr>
+            <a:xfrm>
+              <a:off x="6167699" y="5716183"/>
+              <a:ext cx="124358" cy="80101"/>
+            </a:xfrm>
+            <a:prstGeom prst="rect">
+              <a:avLst/>
+            </a:prstGeom>
+            <a:noFill/>
+          </p:spPr>
+          <p:txBody>
+            <a:bodyPr lIns="0" rIns="0" tIns="0" bIns="0" anchorCtr="1" anchor="ctr" wrap="none"/>
+            <a:lstStyle/>
+            <a:p>
+              <a:pPr algn="l" marL="0" marR="0" indent="0">
+                <a:lnSpc>
+                  <a:spcPts val="880"/>
+                </a:lnSpc>
+                <a:spcBef>
+                  <a:spcPts val="0"/>
+                </a:spcBef>
+                <a:spcAft>
+                  <a:spcPts val="0"/>
+                </a:spcAft>
+              </a:pPr>
+              <a:r>
+                <a:rPr sz="880">
+                  <a:solidFill>
+                    <a:srgbClr val="4D4D4D">
+                      <a:alpha val="100000"/>
+                    </a:srgbClr>
+                  </a:solidFill>
+                  <a:latin typeface="Helvetica"/>
+                  <a:cs typeface="Helvetica"/>
+                </a:rPr>
+                <a:t>20</a:t>
+              </a:r>
+            </a:p>
+          </p:txBody>
+        </p:sp>
+        <p:sp>
+          <p:nvSpPr>
+            <p:cNvPr id="85" name="tx85"/>
+            <p:cNvSpPr/>
+            <p:nvPr/>
+          </p:nvSpPr>
+          <p:spPr>
+            <a:xfrm>
+              <a:off x="6974865" y="5716183"/>
+              <a:ext cx="124358" cy="80101"/>
+            </a:xfrm>
+            <a:prstGeom prst="rect">
+              <a:avLst/>
+            </a:prstGeom>
+            <a:noFill/>
+          </p:spPr>
+          <p:txBody>
+            <a:bodyPr lIns="0" rIns="0" tIns="0" bIns="0" anchorCtr="1" anchor="ctr" wrap="none"/>
+            <a:lstStyle/>
+            <a:p>
+              <a:pPr algn="l" marL="0" marR="0" indent="0">
+                <a:lnSpc>
+                  <a:spcPts val="880"/>
+                </a:lnSpc>
+                <a:spcBef>
+                  <a:spcPts val="0"/>
+                </a:spcBef>
+                <a:spcAft>
+                  <a:spcPts val="0"/>
+                </a:spcAft>
+              </a:pPr>
+              <a:r>
+                <a:rPr sz="880">
+                  <a:solidFill>
+                    <a:srgbClr val="4D4D4D">
+                      <a:alpha val="100000"/>
+                    </a:srgbClr>
+                  </a:solidFill>
+                  <a:latin typeface="Helvetica"/>
+                  <a:cs typeface="Helvetica"/>
+                </a:rPr>
+                <a:t>30</a:t>
+              </a:r>
+            </a:p>
+          </p:txBody>
+        </p:sp>
+        <p:sp>
+          <p:nvSpPr>
+            <p:cNvPr id="86" name="tx86"/>
+            <p:cNvSpPr/>
+            <p:nvPr/>
+          </p:nvSpPr>
+          <p:spPr>
+            <a:xfrm>
+              <a:off x="7782030" y="5716183"/>
+              <a:ext cx="124358" cy="80101"/>
+            </a:xfrm>
+            <a:prstGeom prst="rect">
+              <a:avLst/>
+            </a:prstGeom>
+            <a:noFill/>
+          </p:spPr>
+          <p:txBody>
+            <a:bodyPr lIns="0" rIns="0" tIns="0" bIns="0" anchorCtr="1" anchor="ctr" wrap="none"/>
+            <a:lstStyle/>
+            <a:p>
+              <a:pPr algn="l" marL="0" marR="0" indent="0">
+                <a:lnSpc>
+                  <a:spcPts val="880"/>
+                </a:lnSpc>
+                <a:spcBef>
+                  <a:spcPts val="0"/>
+                </a:spcBef>
+                <a:spcAft>
+                  <a:spcPts val="0"/>
+                </a:spcAft>
+              </a:pPr>
+              <a:r>
+                <a:rPr sz="880">
+                  <a:solidFill>
+                    <a:srgbClr val="4D4D4D">
+                      <a:alpha val="100000"/>
+                    </a:srgbClr>
+                  </a:solidFill>
+                  <a:latin typeface="Helvetica"/>
+                  <a:cs typeface="Helvetica"/>
+                </a:rPr>
+                <a:t>40</a:t>
+              </a:r>
+            </a:p>
+          </p:txBody>
+        </p:sp>
+        <p:sp>
+          <p:nvSpPr>
+            <p:cNvPr id="87" name="tx87"/>
+            <p:cNvSpPr/>
+            <p:nvPr/>
+          </p:nvSpPr>
+          <p:spPr>
+            <a:xfrm>
+              <a:off x="2928340" y="5855859"/>
+              <a:ext cx="3578047" cy="100218"/>
+            </a:xfrm>
+            <a:prstGeom prst="rect">
+              <a:avLst/>
+            </a:prstGeom>
+            <a:noFill/>
+          </p:spPr>
+          <p:txBody>
+            <a:bodyPr lIns="0" rIns="0" tIns="0" bIns="0" anchorCtr="1" anchor="ctr" wrap="none"/>
+            <a:lstStyle/>
+            <a:p>
+              <a:pPr algn="l" marL="0" marR="0" indent="0">
+                <a:lnSpc>
+                  <a:spcPts val="1100"/>
+                </a:lnSpc>
+                <a:spcBef>
+                  <a:spcPts val="0"/>
+                </a:spcBef>
+                <a:spcAft>
+                  <a:spcPts val="0"/>
+                </a:spcAft>
+              </a:pPr>
+              <a:r>
+                <a:rPr sz="1100">
+                  <a:solidFill>
+                    <a:srgbClr val="000000">
+                      <a:alpha val="100000"/>
+                    </a:srgbClr>
+                  </a:solidFill>
+                  <a:latin typeface="Helvetica"/>
+                  <a:cs typeface="Helvetica"/>
+                </a:rPr>
+                <a:t>eGFR difference (%): 100 × (CKD-EPI Cr-Cys − CG) / CG</a:t>
+              </a:r>
+            </a:p>
+          </p:txBody>
+        </p:sp>
+        <p:sp>
+          <p:nvSpPr>
+            <p:cNvPr id="88" name="tx88"/>
+            <p:cNvSpPr/>
+            <p:nvPr/>
+          </p:nvSpPr>
+          <p:spPr>
+            <a:xfrm rot="-5400000">
+              <a:off x="138035" y="4944909"/>
+              <a:ext cx="1016904" cy="100218"/>
+            </a:xfrm>
+            <a:prstGeom prst="rect">
+              <a:avLst/>
+            </a:prstGeom>
+            <a:noFill/>
+          </p:spPr>
+          <p:txBody>
+            <a:bodyPr lIns="0" rIns="0" tIns="0" bIns="0" anchorCtr="1" anchor="ctr" wrap="none"/>
+            <a:lstStyle/>
+            <a:p>
+              <a:pPr algn="l" marL="0" marR="0" indent="0">
+                <a:lnSpc>
+                  <a:spcPts val="1100"/>
+                </a:lnSpc>
+                <a:spcBef>
+                  <a:spcPts val="0"/>
+                </a:spcBef>
+                <a:spcAft>
+                  <a:spcPts val="0"/>
+                </a:spcAft>
+              </a:pPr>
+              <a:r>
+                <a:rPr sz="1100">
+                  <a:solidFill>
+                    <a:srgbClr val="000000">
+                      <a:alpha val="100000"/>
+                    </a:srgbClr>
+                  </a:solidFill>
+                  <a:latin typeface="Helvetica"/>
+                  <a:cs typeface="Helvetica"/>
+                </a:rPr>
+                <a:t>subHR (95% CI)</a:t>
+              </a:r>
+            </a:p>
+          </p:txBody>
+        </p:sp>
+        <p:sp>
+          <p:nvSpPr>
+            <p:cNvPr id="89" name="tx89"/>
+            <p:cNvSpPr/>
+            <p:nvPr/>
+          </p:nvSpPr>
+          <p:spPr>
+            <a:xfrm>
+              <a:off x="887106" y="4159544"/>
+              <a:ext cx="6321612" cy="82021"/>
+            </a:xfrm>
+            <a:prstGeom prst="rect">
+              <a:avLst/>
+            </a:prstGeom>
+            <a:noFill/>
+          </p:spPr>
+          <p:txBody>
+            <a:bodyPr lIns="0" rIns="0" tIns="0" bIns="0" anchorCtr="1" anchor="ctr" wrap="none"/>
+            <a:lstStyle/>
+            <a:p>
+              <a:pPr algn="l" marL="0" marR="0" indent="0">
+                <a:lnSpc>
+                  <a:spcPts val="900"/>
+                </a:lnSpc>
+                <a:spcBef>
+                  <a:spcPts val="0"/>
+                </a:spcBef>
+                <a:spcAft>
+                  <a:spcPts val="0"/>
+                </a:spcAft>
+              </a:pPr>
+              <a:r>
+                <a:rPr sz="900">
+                  <a:solidFill>
+                    <a:srgbClr val="404040">
+                      <a:alpha val="100000"/>
+                    </a:srgbClr>
+                  </a:solidFill>
+                  <a:latin typeface="Helvetica"/>
+                  <a:cs typeface="Helvetica"/>
+                </a:rPr>
+                <a:t>subHR per 10 % decline: 1.29 (1.02-1.64), p = 0.033  |  per IQR decline (Δ = 29.5 %): 2.13 (1.06-4.28)  |  IQR: [-15.6, 13.9] %</a:t>
+              </a:r>
+            </a:p>
+          </p:txBody>
+        </p:sp>
+        <p:sp>
+          <p:nvSpPr>
+            <p:cNvPr id="90" name="tx90"/>
+            <p:cNvSpPr/>
+            <p:nvPr/>
+          </p:nvSpPr>
+          <p:spPr>
+            <a:xfrm>
+              <a:off x="887106" y="3932770"/>
               <a:ext cx="4458797" cy="120152"/>
             </a:xfrm>
             <a:prstGeom prst="rect">
